--- a/material/[SeSAC_YDP_6] 04_5_Javascript_표준객체,DOM.pptx
+++ b/material/[SeSAC_YDP_6] 04_5_Javascript_표준객체,DOM.pptx
@@ -248,7 +248,7 @@
           <a:p>
             <a:fld id="{2EF3F159-7250-4DD4-91C2-13B35D56E1AF}" type="datetimeFigureOut">
               <a:rPr lang="ko-KR" altLang="en-US" smtClean="0"/>
-              <a:t>2024-05-14</a:t>
+              <a:t>2024-05-31</a:t>
             </a:fld>
             <a:endParaRPr lang="ko-KR" altLang="en-US"/>
           </a:p>
@@ -653,15 +653,7 @@
             </a:r>
             <a:r>
               <a:rPr lang="ko-KR" altLang="en-US" dirty="0"/>
-              <a:t> </a:t>
-            </a:r>
-            <a:r>
-              <a:rPr lang="ko-KR" altLang="en-US" dirty="0" err="1"/>
-              <a:t>이횽하면</a:t>
-            </a:r>
-            <a:r>
-              <a:rPr lang="ko-KR" altLang="en-US" dirty="0"/>
-              <a:t> 됩니다</a:t>
+              <a:t> 이용하면 됩니다</a:t>
             </a:r>
             <a:r>
               <a:rPr lang="en-US" altLang="ko-KR" dirty="0"/>
@@ -753,7 +745,7 @@
           <a:p>
             <a:r>
               <a:rPr lang="ko-KR" altLang="en-US" dirty="0"/>
-              <a:t>객체 </a:t>
+              <a:t>배열 </a:t>
             </a:r>
             <a:r>
               <a:rPr lang="ko-KR" altLang="en-US" dirty="0" err="1"/>
@@ -765,6 +757,44 @@
             </a:r>
             <a:r>
               <a:rPr lang="en-US" altLang="ko-KR" dirty="0"/>
+              <a:t>([])</a:t>
+            </a:r>
+          </a:p>
+          <a:p>
+            <a:endParaRPr lang="en-US" altLang="ko-KR" dirty="0"/>
+          </a:p>
+          <a:p>
+            <a:pPr marL="0" marR="0" lvl="0" indent="0" algn="l" defTabSz="914400" rtl="0" eaLnBrk="1" fontAlgn="auto" latinLnBrk="1" hangingPunct="1">
+              <a:lnSpc>
+                <a:spcPct val="100000"/>
+              </a:lnSpc>
+              <a:spcBef>
+                <a:spcPts val="0"/>
+              </a:spcBef>
+              <a:spcAft>
+                <a:spcPts val="0"/>
+              </a:spcAft>
+              <a:buClrTx/>
+              <a:buSzTx/>
+              <a:buFontTx/>
+              <a:buNone/>
+              <a:tabLst/>
+              <a:defRPr/>
+            </a:pPr>
+            <a:r>
+              <a:rPr lang="ko-KR" altLang="en-US" dirty="0"/>
+              <a:t>객체 </a:t>
+            </a:r>
+            <a:r>
+              <a:rPr lang="ko-KR" altLang="en-US" dirty="0" err="1"/>
+              <a:t>리터럴</a:t>
+            </a:r>
+            <a:r>
+              <a:rPr lang="ko-KR" altLang="en-US" dirty="0"/>
+              <a:t> </a:t>
+            </a:r>
+            <a:r>
+              <a:rPr lang="en-US" altLang="ko-KR" dirty="0"/>
               <a:t>= {} </a:t>
             </a:r>
             <a:r>
@@ -774,26 +804,43 @@
             <a:endParaRPr lang="en-US" altLang="ko-KR" dirty="0"/>
           </a:p>
           <a:p>
+            <a:pPr marL="0" marR="0" lvl="0" indent="0" algn="l" defTabSz="914400" rtl="0" eaLnBrk="1" fontAlgn="auto" latinLnBrk="1" hangingPunct="1">
+              <a:lnSpc>
+                <a:spcPct val="100000"/>
+              </a:lnSpc>
+              <a:spcBef>
+                <a:spcPts val="0"/>
+              </a:spcBef>
+              <a:spcAft>
+                <a:spcPts val="0"/>
+              </a:spcAft>
+              <a:buClrTx/>
+              <a:buSzTx/>
+              <a:buFontTx/>
+              <a:buNone/>
+              <a:tabLst/>
+              <a:defRPr/>
+            </a:pPr>
             <a:endParaRPr lang="en-US" altLang="ko-KR" dirty="0"/>
           </a:p>
           <a:p>
-            <a:r>
-              <a:rPr lang="ko-KR" altLang="en-US" dirty="0" err="1"/>
-              <a:t>딕셔너리는</a:t>
-            </a:r>
-            <a:r>
-              <a:rPr lang="ko-KR" altLang="en-US" dirty="0"/>
-              <a:t> 키와 값의 쌍으로 이루어진 데이터 구조를 의미</a:t>
-            </a:r>
-            <a:r>
-              <a:rPr lang="en-US" altLang="ko-KR" dirty="0"/>
-              <a:t>.</a:t>
-            </a:r>
-          </a:p>
-          <a:p>
-            <a:endParaRPr lang="en-US" altLang="ko-KR" dirty="0"/>
-          </a:p>
-          <a:p>
+            <a:pPr marL="0" marR="0" lvl="0" indent="0" algn="l" defTabSz="914400" rtl="0" eaLnBrk="1" fontAlgn="auto" latinLnBrk="1" hangingPunct="1">
+              <a:lnSpc>
+                <a:spcPct val="100000"/>
+              </a:lnSpc>
+              <a:spcBef>
+                <a:spcPts val="0"/>
+              </a:spcBef>
+              <a:spcAft>
+                <a:spcPts val="0"/>
+              </a:spcAft>
+              <a:buClrTx/>
+              <a:buSzTx/>
+              <a:buFontTx/>
+              <a:buNone/>
+              <a:tabLst/>
+              <a:defRPr/>
+            </a:pPr>
             <a:r>
               <a:rPr lang="ko-KR" altLang="en-US" dirty="0" err="1"/>
               <a:t>리터럴은</a:t>
@@ -814,6 +861,388 @@
                 <a:latin typeface="Söhne"/>
               </a:rPr>
               <a:t>소스 코드에서 값을 생성하는 표기법</a:t>
+            </a:r>
+            <a:endParaRPr lang="en-US" altLang="ko-KR" b="0" i="0" dirty="0">
+              <a:solidFill>
+                <a:srgbClr val="0D0D0D"/>
+              </a:solidFill>
+              <a:effectLst/>
+              <a:highlight>
+                <a:srgbClr val="FFFFFF"/>
+              </a:highlight>
+              <a:latin typeface="Söhne"/>
+            </a:endParaRPr>
+          </a:p>
+          <a:p>
+            <a:endParaRPr lang="en-US" altLang="ko-KR" dirty="0"/>
+          </a:p>
+          <a:p>
+            <a:endParaRPr lang="en-US" altLang="ko-KR" b="0" i="0" dirty="0">
+              <a:solidFill>
+                <a:srgbClr val="0D0D0D"/>
+              </a:solidFill>
+              <a:effectLst/>
+              <a:highlight>
+                <a:srgbClr val="FFFFFF"/>
+              </a:highlight>
+              <a:latin typeface="Söhne"/>
+            </a:endParaRPr>
+          </a:p>
+          <a:p>
+            <a:pPr marL="0" marR="0" lvl="0" indent="0" algn="l" defTabSz="914400" rtl="0" eaLnBrk="1" fontAlgn="auto" latinLnBrk="1" hangingPunct="1">
+              <a:lnSpc>
+                <a:spcPct val="100000"/>
+              </a:lnSpc>
+              <a:spcBef>
+                <a:spcPts val="0"/>
+              </a:spcBef>
+              <a:spcAft>
+                <a:spcPts val="0"/>
+              </a:spcAft>
+              <a:buClrTx/>
+              <a:buSzTx/>
+              <a:buFontTx/>
+              <a:buNone/>
+              <a:tabLst/>
+              <a:defRPr/>
+            </a:pPr>
+            <a:r>
+              <a:rPr lang="ko-KR" altLang="en-US" b="0" dirty="0">
+                <a:solidFill>
+                  <a:srgbClr val="6A9955"/>
+                </a:solidFill>
+                <a:effectLst/>
+                <a:highlight>
+                  <a:srgbClr val="1F1F1F"/>
+                </a:highlight>
+                <a:latin typeface="Consolas" panose="020B0609020204030204" pitchFamily="49" charset="0"/>
+              </a:rPr>
+              <a:t>템플릿 </a:t>
+            </a:r>
+            <a:r>
+              <a:rPr lang="ko-KR" altLang="en-US" b="0" dirty="0" err="1">
+                <a:solidFill>
+                  <a:srgbClr val="6A9955"/>
+                </a:solidFill>
+                <a:effectLst/>
+                <a:highlight>
+                  <a:srgbClr val="1F1F1F"/>
+                </a:highlight>
+                <a:latin typeface="Consolas" panose="020B0609020204030204" pitchFamily="49" charset="0"/>
+              </a:rPr>
+              <a:t>리터럴</a:t>
+            </a:r>
+            <a:r>
+              <a:rPr lang="ko-KR" altLang="en-US" b="0" dirty="0">
+                <a:solidFill>
+                  <a:srgbClr val="6A9955"/>
+                </a:solidFill>
+                <a:effectLst/>
+                <a:highlight>
+                  <a:srgbClr val="1F1F1F"/>
+                </a:highlight>
+                <a:latin typeface="Consolas" panose="020B0609020204030204" pitchFamily="49" charset="0"/>
+              </a:rPr>
+              <a:t> </a:t>
+            </a:r>
+            <a:r>
+              <a:rPr lang="en-US" altLang="ko-KR" b="0" dirty="0">
+                <a:solidFill>
+                  <a:srgbClr val="6A9955"/>
+                </a:solidFill>
+                <a:effectLst/>
+                <a:highlight>
+                  <a:srgbClr val="1F1F1F"/>
+                </a:highlight>
+                <a:latin typeface="Consolas" panose="020B0609020204030204" pitchFamily="49" charset="0"/>
+              </a:rPr>
+              <a:t>(= </a:t>
+            </a:r>
+            <a:r>
+              <a:rPr lang="ko-KR" altLang="en-US" b="0" dirty="0">
+                <a:solidFill>
+                  <a:srgbClr val="6A9955"/>
+                </a:solidFill>
+                <a:effectLst/>
+                <a:highlight>
+                  <a:srgbClr val="1F1F1F"/>
+                </a:highlight>
+                <a:latin typeface="Consolas" panose="020B0609020204030204" pitchFamily="49" charset="0"/>
+              </a:rPr>
+              <a:t>문자를 표현하는 새로운 문법</a:t>
+            </a:r>
+            <a:r>
+              <a:rPr lang="en-US" altLang="ko-KR" b="0" dirty="0">
+                <a:solidFill>
+                  <a:srgbClr val="6A9955"/>
+                </a:solidFill>
+                <a:effectLst/>
+                <a:highlight>
+                  <a:srgbClr val="1F1F1F"/>
+                </a:highlight>
+                <a:latin typeface="Consolas" panose="020B0609020204030204" pitchFamily="49" charset="0"/>
+              </a:rPr>
+              <a:t>) </a:t>
+            </a:r>
+            <a:endParaRPr lang="ko-KR" altLang="en-US" b="0" dirty="0">
+              <a:solidFill>
+                <a:srgbClr val="CCCCCC"/>
+              </a:solidFill>
+              <a:effectLst/>
+              <a:highlight>
+                <a:srgbClr val="1F1F1F"/>
+              </a:highlight>
+              <a:latin typeface="Consolas" panose="020B0609020204030204" pitchFamily="49" charset="0"/>
+            </a:endParaRPr>
+          </a:p>
+          <a:p>
+            <a:endParaRPr lang="en-US" altLang="ko-KR" dirty="0"/>
+          </a:p>
+          <a:p>
+            <a:r>
+              <a:rPr lang="ko-KR" altLang="en-US" dirty="0" err="1"/>
+              <a:t>딕셔너리는</a:t>
+            </a:r>
+            <a:r>
+              <a:rPr lang="ko-KR" altLang="en-US" dirty="0"/>
+              <a:t> 키와 값의 쌍으로 이루어진 데이터 구조를 의미</a:t>
+            </a:r>
+            <a:r>
+              <a:rPr lang="en-US" altLang="ko-KR" dirty="0"/>
+              <a:t>. </a:t>
+            </a:r>
+            <a:r>
+              <a:rPr lang="ko-KR" altLang="en-US" dirty="0"/>
+              <a:t>객체를 </a:t>
+            </a:r>
+            <a:r>
+              <a:rPr lang="ko-KR" altLang="en-US" dirty="0" err="1"/>
+              <a:t>딕셔너리라고도</a:t>
+            </a:r>
+            <a:r>
+              <a:rPr lang="ko-KR" altLang="en-US" dirty="0"/>
+              <a:t> 한다</a:t>
+            </a:r>
+            <a:r>
+              <a:rPr lang="en-US" altLang="ko-KR" dirty="0"/>
+              <a:t>~ </a:t>
+            </a:r>
+            <a:r>
+              <a:rPr lang="ko-KR" altLang="en-US" dirty="0"/>
+              <a:t>정도</a:t>
+            </a:r>
+            <a:endParaRPr lang="en-US" altLang="ko-KR" dirty="0"/>
+          </a:p>
+          <a:p>
+            <a:r>
+              <a:rPr lang="en-US" altLang="ko-KR" b="0" i="0" dirty="0">
+                <a:solidFill>
+                  <a:srgbClr val="0D0D0D"/>
+                </a:solidFill>
+                <a:effectLst/>
+                <a:highlight>
+                  <a:srgbClr val="FFFFFF"/>
+                </a:highlight>
+                <a:latin typeface="ui-sans-serif"/>
+              </a:rPr>
+              <a:t>JavaScript</a:t>
+            </a:r>
+            <a:r>
+              <a:rPr lang="ko-KR" altLang="en-US" b="0" i="0" dirty="0">
+                <a:solidFill>
+                  <a:srgbClr val="0D0D0D"/>
+                </a:solidFill>
+                <a:effectLst/>
+                <a:highlight>
+                  <a:srgbClr val="FFFFFF"/>
+                </a:highlight>
+                <a:latin typeface="ui-sans-serif"/>
+              </a:rPr>
+              <a:t>의 객체</a:t>
+            </a:r>
+            <a:r>
+              <a:rPr lang="en-US" altLang="ko-KR" b="0" i="0" dirty="0">
+                <a:solidFill>
+                  <a:srgbClr val="0D0D0D"/>
+                </a:solidFill>
+                <a:effectLst/>
+                <a:highlight>
+                  <a:srgbClr val="FFFFFF"/>
+                </a:highlight>
+                <a:latin typeface="ui-sans-serif"/>
+              </a:rPr>
+              <a:t>(Object)</a:t>
+            </a:r>
+            <a:r>
+              <a:rPr lang="ko-KR" altLang="en-US" b="0" i="0" dirty="0">
+                <a:solidFill>
+                  <a:srgbClr val="0D0D0D"/>
+                </a:solidFill>
+                <a:effectLst/>
+                <a:highlight>
+                  <a:srgbClr val="FFFFFF"/>
+                </a:highlight>
+                <a:latin typeface="ui-sans-serif"/>
+              </a:rPr>
+              <a:t>는 키</a:t>
+            </a:r>
+            <a:r>
+              <a:rPr lang="en-US" altLang="ko-KR" b="0" i="0" dirty="0">
+                <a:solidFill>
+                  <a:srgbClr val="0D0D0D"/>
+                </a:solidFill>
+                <a:effectLst/>
+                <a:highlight>
+                  <a:srgbClr val="FFFFFF"/>
+                </a:highlight>
+                <a:latin typeface="ui-sans-serif"/>
+              </a:rPr>
+              <a:t>(key)</a:t>
+            </a:r>
+            <a:r>
+              <a:rPr lang="ko-KR" altLang="en-US" b="0" i="0" dirty="0">
+                <a:solidFill>
+                  <a:srgbClr val="0D0D0D"/>
+                </a:solidFill>
+                <a:effectLst/>
+                <a:highlight>
+                  <a:srgbClr val="FFFFFF"/>
+                </a:highlight>
+                <a:latin typeface="ui-sans-serif"/>
+              </a:rPr>
+              <a:t>와 값</a:t>
+            </a:r>
+            <a:r>
+              <a:rPr lang="en-US" altLang="ko-KR" b="0" i="0" dirty="0">
+                <a:solidFill>
+                  <a:srgbClr val="0D0D0D"/>
+                </a:solidFill>
+                <a:effectLst/>
+                <a:highlight>
+                  <a:srgbClr val="FFFFFF"/>
+                </a:highlight>
+                <a:latin typeface="ui-sans-serif"/>
+              </a:rPr>
+              <a:t>(value)</a:t>
+            </a:r>
+            <a:r>
+              <a:rPr lang="ko-KR" altLang="en-US" b="0" i="0" dirty="0">
+                <a:solidFill>
+                  <a:srgbClr val="0D0D0D"/>
+                </a:solidFill>
+                <a:effectLst/>
+                <a:highlight>
+                  <a:srgbClr val="FFFFFF"/>
+                </a:highlight>
+                <a:latin typeface="ui-sans-serif"/>
+              </a:rPr>
+              <a:t>의 쌍으로 이루어진 컬렉션</a:t>
+            </a:r>
+            <a:r>
+              <a:rPr lang="en-US" altLang="ko-KR" b="0" i="0" dirty="0">
+                <a:solidFill>
+                  <a:srgbClr val="0D0D0D"/>
+                </a:solidFill>
+                <a:effectLst/>
+                <a:highlight>
+                  <a:srgbClr val="FFFFFF"/>
+                </a:highlight>
+                <a:latin typeface="ui-sans-serif"/>
+              </a:rPr>
+              <a:t>. </a:t>
+            </a:r>
+            <a:r>
+              <a:rPr lang="ko-KR" altLang="en-US" b="0" i="0" dirty="0">
+                <a:solidFill>
+                  <a:srgbClr val="0D0D0D"/>
+                </a:solidFill>
+                <a:effectLst/>
+                <a:highlight>
+                  <a:srgbClr val="FFFFFF"/>
+                </a:highlight>
+                <a:latin typeface="ui-sans-serif"/>
+              </a:rPr>
+              <a:t>유연한 자료구조</a:t>
+            </a:r>
+            <a:endParaRPr lang="en-US" altLang="ko-KR" b="0" i="0" dirty="0">
+              <a:solidFill>
+                <a:srgbClr val="0D0D0D"/>
+              </a:solidFill>
+              <a:effectLst/>
+              <a:highlight>
+                <a:srgbClr val="FFFFFF"/>
+              </a:highlight>
+              <a:latin typeface="ui-sans-serif"/>
+            </a:endParaRPr>
+          </a:p>
+          <a:p>
+            <a:endParaRPr lang="en-US" altLang="ko-KR" dirty="0"/>
+          </a:p>
+          <a:p>
+            <a:r>
+              <a:rPr lang="ko-KR" altLang="en-US" b="0" i="0" dirty="0" err="1">
+                <a:solidFill>
+                  <a:srgbClr val="0D0D0D"/>
+                </a:solidFill>
+                <a:effectLst/>
+                <a:highlight>
+                  <a:srgbClr val="FFFFFF"/>
+                </a:highlight>
+                <a:latin typeface="ui-sans-serif"/>
+              </a:rPr>
+              <a:t>파이썬의</a:t>
+            </a:r>
+            <a:r>
+              <a:rPr lang="ko-KR" altLang="en-US" b="0" i="0" dirty="0">
+                <a:solidFill>
+                  <a:srgbClr val="0D0D0D"/>
+                </a:solidFill>
+                <a:effectLst/>
+                <a:highlight>
+                  <a:srgbClr val="FFFFFF"/>
+                </a:highlight>
+                <a:latin typeface="ui-sans-serif"/>
+              </a:rPr>
+              <a:t> </a:t>
+            </a:r>
+            <a:r>
+              <a:rPr lang="ko-KR" altLang="en-US" b="0" i="0" dirty="0" err="1">
+                <a:solidFill>
+                  <a:srgbClr val="0D0D0D"/>
+                </a:solidFill>
+                <a:effectLst/>
+                <a:highlight>
+                  <a:srgbClr val="FFFFFF"/>
+                </a:highlight>
+                <a:latin typeface="ui-sans-serif"/>
+              </a:rPr>
+              <a:t>딕셔너리와</a:t>
+            </a:r>
+            <a:r>
+              <a:rPr lang="ko-KR" altLang="en-US" b="0" i="0" dirty="0">
+                <a:solidFill>
+                  <a:srgbClr val="0D0D0D"/>
+                </a:solidFill>
+                <a:effectLst/>
+                <a:highlight>
+                  <a:srgbClr val="FFFFFF"/>
+                </a:highlight>
+                <a:latin typeface="ui-sans-serif"/>
+              </a:rPr>
+              <a:t> 유사한 역할을 합니다</a:t>
+            </a:r>
+            <a:r>
+              <a:rPr lang="en-US" altLang="ko-KR" b="0" i="0" dirty="0">
+                <a:solidFill>
+                  <a:srgbClr val="0D0D0D"/>
+                </a:solidFill>
+                <a:effectLst/>
+                <a:highlight>
+                  <a:srgbClr val="FFFFFF"/>
+                </a:highlight>
+                <a:latin typeface="ui-sans-serif"/>
+              </a:rPr>
+              <a:t>.</a:t>
             </a:r>
             <a:endParaRPr lang="en-US" altLang="ko-KR" dirty="0"/>
           </a:p>
@@ -7106,6 +7535,132 @@
               <a:rPr lang="ko-KR" altLang="en-US" dirty="0"/>
               <a:t>메서드는 객체에 제한되어 있는 함수를 의미</a:t>
             </a:r>
+            <a:endParaRPr lang="en-US" altLang="ko-KR" dirty="0"/>
+          </a:p>
+          <a:p>
+            <a:endParaRPr lang="en-US" altLang="ko-KR" dirty="0"/>
+          </a:p>
+          <a:p>
+            <a:endParaRPr lang="en-US" altLang="ko-KR" dirty="0"/>
+          </a:p>
+          <a:p>
+            <a:r>
+              <a:rPr lang="ko-KR" altLang="en-US" dirty="0">
+                <a:solidFill>
+                  <a:schemeClr val="accent1"/>
+                </a:solidFill>
+              </a:rPr>
+              <a:t>프로퍼티</a:t>
+            </a:r>
+            <a:r>
+              <a:rPr lang="en-US" altLang="ko-KR" dirty="0">
+                <a:solidFill>
+                  <a:schemeClr val="accent1"/>
+                </a:solidFill>
+              </a:rPr>
+              <a:t>(property)</a:t>
+            </a:r>
+            <a:r>
+              <a:rPr lang="en-US" altLang="ko-KR" dirty="0"/>
+              <a:t>: </a:t>
+            </a:r>
+            <a:r>
+              <a:rPr lang="ko-KR" altLang="en-US" dirty="0"/>
+              <a:t>속성</a:t>
+            </a:r>
+            <a:endParaRPr lang="en-US" altLang="ko-KR" dirty="0"/>
+          </a:p>
+          <a:p>
+            <a:endParaRPr lang="ko-KR" altLang="en-US" sz="1200" b="0" kern="1200" dirty="0">
+              <a:solidFill>
+                <a:schemeClr val="tx1"/>
+              </a:solidFill>
+              <a:effectLst/>
+              <a:cs typeface="+mn-cs"/>
+            </a:endParaRPr>
+          </a:p>
+          <a:p>
+            <a:pPr marL="0" marR="0" indent="0" algn="l" defTabSz="914400" rtl="0" eaLnBrk="1" fontAlgn="auto" latinLnBrk="1" hangingPunct="1">
+              <a:lnSpc>
+                <a:spcPct val="100000"/>
+              </a:lnSpc>
+              <a:spcBef>
+                <a:spcPts val="0"/>
+              </a:spcBef>
+              <a:spcAft>
+                <a:spcPts val="0"/>
+              </a:spcAft>
+              <a:buClrTx/>
+              <a:buSzTx/>
+              <a:buFontTx/>
+              <a:buNone/>
+              <a:tabLst/>
+              <a:defRPr/>
+            </a:pPr>
+            <a:r>
+              <a:rPr lang="ko-KR" altLang="en-US" sz="1200" dirty="0"/>
+              <a:t>속성 </a:t>
+            </a:r>
+            <a:r>
+              <a:rPr lang="en-US" altLang="ko-KR" sz="1200" dirty="0"/>
+              <a:t>: </a:t>
+            </a:r>
+            <a:r>
+              <a:rPr lang="ko-KR" altLang="en-US" sz="1200" dirty="0"/>
+              <a:t>객체의 상태나 데이터를 나타냄 </a:t>
+            </a:r>
+            <a:r>
+              <a:rPr lang="en-US" altLang="ko-KR" sz="1200" dirty="0"/>
+              <a:t>/ </a:t>
+            </a:r>
+            <a:r>
+              <a:rPr lang="ko-KR" altLang="en-US" sz="1200" dirty="0"/>
+              <a:t>객체의 특징이나 특성 정의</a:t>
+            </a:r>
+            <a:endParaRPr lang="en-US" altLang="ko-KR" sz="1200" dirty="0"/>
+          </a:p>
+          <a:p>
+            <a:pPr marL="0" marR="0" indent="0" algn="l" defTabSz="914400" rtl="0" eaLnBrk="1" fontAlgn="auto" latinLnBrk="1" hangingPunct="1">
+              <a:lnSpc>
+                <a:spcPct val="100000"/>
+              </a:lnSpc>
+              <a:spcBef>
+                <a:spcPts val="0"/>
+              </a:spcBef>
+              <a:spcAft>
+                <a:spcPts val="0"/>
+              </a:spcAft>
+              <a:buClrTx/>
+              <a:buSzTx/>
+              <a:buFontTx/>
+              <a:buNone/>
+              <a:tabLst/>
+              <a:defRPr/>
+            </a:pPr>
+            <a:r>
+              <a:rPr lang="ko-KR" altLang="en-US" sz="1200" dirty="0"/>
+              <a:t>메서드 </a:t>
+            </a:r>
+            <a:r>
+              <a:rPr lang="en-US" altLang="ko-KR" sz="1200" dirty="0"/>
+              <a:t>: </a:t>
+            </a:r>
+            <a:r>
+              <a:rPr lang="ko-KR" altLang="en-US" sz="1200" dirty="0"/>
+              <a:t>객체가 수행하는 동작을 정의</a:t>
+            </a:r>
+            <a:r>
+              <a:rPr lang="en-US" altLang="ko-KR" sz="1200" dirty="0"/>
+              <a:t> / </a:t>
+            </a:r>
+            <a:r>
+              <a:rPr lang="ko-KR" altLang="en-US" sz="1200" dirty="0"/>
+              <a:t>객체의 속성을 변경하거나 특정 작업 수행</a:t>
+            </a:r>
+            <a:endParaRPr lang="en-US" altLang="ko-KR" sz="1200" dirty="0"/>
+          </a:p>
+          <a:p>
+            <a:endParaRPr lang="ko-KR" altLang="en-US" dirty="0"/>
           </a:p>
         </p:txBody>
       </p:sp>

--- a/material/[SeSAC_YDP_6] 04_5_Javascript_표준객체,DOM.pptx
+++ b/material/[SeSAC_YDP_6] 04_5_Javascript_표준객체,DOM.pptx
@@ -248,7 +248,7 @@
           <a:p>
             <a:fld id="{2EF3F159-7250-4DD4-91C2-13B35D56E1AF}" type="datetimeFigureOut">
               <a:rPr lang="ko-KR" altLang="en-US" smtClean="0"/>
-              <a:t>2024-05-31</a:t>
+              <a:t>2024-06-03</a:t>
             </a:fld>
             <a:endParaRPr lang="ko-KR" altLang="en-US"/>
           </a:p>
@@ -8330,7 +8330,7 @@
           <a:p>
             <a:fld id="{0E19CB95-6D28-40F1-9DA3-1BAC5D4B5B4F}" type="datetime6">
               <a:rPr lang="ko-KR" altLang="en-US" smtClean="0"/>
-              <a:t>2024년 5월</a:t>
+              <a:t>2024년 6월</a:t>
             </a:fld>
             <a:endParaRPr lang="ko-KR" altLang="en-US"/>
           </a:p>
@@ -8460,7 +8460,7 @@
           <p:nvPr userDrawn="1"/>
         </p:nvPicPr>
         <p:blipFill>
-          <a:blip r:embed="rId2">
+          <a:blip r:embed="rId2" cstate="hqprint">
             <a:alphaModFix amt="20000"/>
             <a:extLst>
               <a:ext uri="{28A0092B-C50C-407E-A947-70E740481C1C}">
@@ -8710,7 +8710,7 @@
           <a:p>
             <a:fld id="{C4A39A32-5728-48B8-9F9C-437D214CCAF1}" type="datetime6">
               <a:rPr lang="ko-KR" altLang="en-US" smtClean="0"/>
-              <a:t>2024년 5월</a:t>
+              <a:t>2024년 6월</a:t>
             </a:fld>
             <a:endParaRPr lang="ko-KR" altLang="en-US"/>
           </a:p>
@@ -8912,7 +8912,7 @@
           <a:p>
             <a:fld id="{3BECC8BA-EBCB-4BF9-8E87-970CE0138376}" type="datetime6">
               <a:rPr lang="ko-KR" altLang="en-US" smtClean="0"/>
-              <a:t>2024년 5월</a:t>
+              <a:t>2024년 6월</a:t>
             </a:fld>
             <a:endParaRPr lang="ko-KR" altLang="en-US"/>
           </a:p>
@@ -9120,7 +9120,7 @@
           <a:p>
             <a:fld id="{7869FA6E-4699-4AC6-B2CB-4E60A58ED7A8}" type="datetime6">
               <a:rPr lang="ko-KR" altLang="en-US" smtClean="0"/>
-              <a:t>2024년 5월</a:t>
+              <a:t>2024년 6월</a:t>
             </a:fld>
             <a:endParaRPr lang="ko-KR" altLang="en-US"/>
           </a:p>
@@ -9233,7 +9233,7 @@
           <a:p>
             <a:fld id="{0E19CB95-6D28-40F1-9DA3-1BAC5D4B5B4F}" type="datetime6">
               <a:rPr lang="ko-KR" altLang="en-US" smtClean="0"/>
-              <a:t>2024년 5월</a:t>
+              <a:t>2024년 6월</a:t>
             </a:fld>
             <a:endParaRPr lang="ko-KR" altLang="en-US"/>
           </a:p>
@@ -9495,7 +9495,7 @@
           <a:p>
             <a:fld id="{3C9CE3CE-253F-4F9D-BA15-C226C8D8501E}" type="datetime6">
               <a:rPr lang="ko-KR" altLang="en-US" smtClean="0"/>
-              <a:t>2024년 5월</a:t>
+              <a:t>2024년 6월</a:t>
             </a:fld>
             <a:endParaRPr lang="ko-KR" altLang="en-US"/>
           </a:p>
@@ -9812,7 +9812,7 @@
           <a:p>
             <a:fld id="{BE5A7087-D460-46DD-B430-F8D9B9677D08}" type="datetime6">
               <a:rPr lang="ko-KR" altLang="en-US" smtClean="0"/>
-              <a:t>2024년 5월</a:t>
+              <a:t>2024년 6월</a:t>
             </a:fld>
             <a:endParaRPr lang="ko-KR" altLang="en-US"/>
           </a:p>
@@ -10081,7 +10081,7 @@
           <a:p>
             <a:fld id="{0581BA25-D675-4234-A003-8449BDEEF18E}" type="datetime6">
               <a:rPr lang="ko-KR" altLang="en-US" smtClean="0"/>
-              <a:t>2024년 5월</a:t>
+              <a:t>2024년 6월</a:t>
             </a:fld>
             <a:endParaRPr lang="ko-KR" altLang="en-US"/>
           </a:p>
@@ -10497,7 +10497,7 @@
           <a:p>
             <a:fld id="{26155C29-A87F-46F0-A24C-6C9F0A4BF6AA}" type="datetime6">
               <a:rPr lang="ko-KR" altLang="en-US" smtClean="0"/>
-              <a:t>2024년 5월</a:t>
+              <a:t>2024년 6월</a:t>
             </a:fld>
             <a:endParaRPr lang="ko-KR" altLang="en-US"/>
           </a:p>
@@ -10642,7 +10642,7 @@
           <a:p>
             <a:fld id="{DD2EDD62-8757-43DB-BAE0-460422B548EA}" type="datetime6">
               <a:rPr lang="ko-KR" altLang="en-US" smtClean="0"/>
-              <a:t>2024년 5월</a:t>
+              <a:t>2024년 6월</a:t>
             </a:fld>
             <a:endParaRPr lang="ko-KR" altLang="en-US"/>
           </a:p>
@@ -10755,7 +10755,7 @@
           <a:p>
             <a:fld id="{DC6A871B-4800-495F-AC75-93D44C7DEBA5}" type="datetime6">
               <a:rPr lang="ko-KR" altLang="en-US" smtClean="0"/>
-              <a:t>2024년 5월</a:t>
+              <a:t>2024년 6월</a:t>
             </a:fld>
             <a:endParaRPr lang="ko-KR" altLang="en-US"/>
           </a:p>
@@ -11066,7 +11066,7 @@
           <a:p>
             <a:fld id="{59605888-30A6-49BB-95E2-DEAE4E5B09E9}" type="datetime6">
               <a:rPr lang="ko-KR" altLang="en-US" smtClean="0"/>
-              <a:t>2024년 5월</a:t>
+              <a:t>2024년 6월</a:t>
             </a:fld>
             <a:endParaRPr lang="ko-KR" altLang="en-US"/>
           </a:p>
@@ -11307,7 +11307,7 @@
           <a:p>
             <a:fld id="{8691C14A-5735-4A8B-B68B-DEC1DC2A3813}" type="datetime6">
               <a:rPr lang="ko-KR" altLang="en-US" smtClean="0"/>
-              <a:t>2024년 5월</a:t>
+              <a:t>2024년 6월</a:t>
             </a:fld>
             <a:endParaRPr lang="ko-KR" altLang="en-US"/>
           </a:p>
@@ -11472,7 +11472,7 @@
           <p:nvPr userDrawn="1"/>
         </p:nvPicPr>
         <p:blipFill>
-          <a:blip r:embed="rId14">
+          <a:blip r:embed="rId14" cstate="hqprint">
             <a:extLst>
               <a:ext uri="{28A0092B-C50C-407E-A947-70E740481C1C}">
                 <a14:useLocalDpi xmlns:a14="http://schemas.microsoft.com/office/drawing/2010/main" val="0"/>
@@ -11886,7 +11886,7 @@
           <a:p>
             <a:fld id="{2932940B-EF53-4BFE-830C-F24863DE5E50}" type="datetime6">
               <a:rPr lang="ko-KR" altLang="en-US" smtClean="0"/>
-              <a:t>2024년 5월</a:t>
+              <a:t>2024년 6월</a:t>
             </a:fld>
             <a:endParaRPr lang="ko-KR" altLang="en-US" dirty="0"/>
           </a:p>
@@ -12038,7 +12038,7 @@
           <a:p>
             <a:fld id="{AD455FBF-1980-4364-9E8B-5E28EBE09C05}" type="datetime6">
               <a:rPr lang="ko-KR" altLang="en-US" smtClean="0"/>
-              <a:t>2024년 5월</a:t>
+              <a:t>2024년 6월</a:t>
             </a:fld>
             <a:endParaRPr lang="ko-KR" altLang="en-US"/>
           </a:p>
@@ -12410,7 +12410,7 @@
           <a:p>
             <a:fld id="{5E4B845D-2417-4568-8665-C368068EE0D6}" type="datetime6">
               <a:rPr lang="ko-KR" altLang="en-US" smtClean="0"/>
-              <a:t>2024년 5월</a:t>
+              <a:t>2024년 6월</a:t>
             </a:fld>
             <a:endParaRPr lang="ko-KR" altLang="en-US"/>
           </a:p>
@@ -12606,7 +12606,7 @@
           <a:p>
             <a:fld id="{9D0404D9-6A52-4A99-9101-80BD6AA53C94}" type="datetime6">
               <a:rPr lang="ko-KR" altLang="en-US" smtClean="0"/>
-              <a:t>2024년 5월</a:t>
+              <a:t>2024년 6월</a:t>
             </a:fld>
             <a:endParaRPr lang="ko-KR" altLang="en-US"/>
           </a:p>
@@ -12729,7 +12729,7 @@
           <a:p>
             <a:fld id="{0E19CB95-6D28-40F1-9DA3-1BAC5D4B5B4F}" type="datetime6">
               <a:rPr lang="ko-KR" altLang="en-US" smtClean="0"/>
-              <a:t>2024년 5월</a:t>
+              <a:t>2024년 6월</a:t>
             </a:fld>
             <a:endParaRPr lang="ko-KR" altLang="en-US"/>
           </a:p>
@@ -13028,7 +13028,7 @@
             <a:fld id="{6545E013-D6A7-47C7-842F-053F23C80D44}" type="datetime6">
               <a:rPr lang="ko-KR" altLang="en-US" smtClean="0"/>
               <a:pPr/>
-              <a:t>2024년 5월</a:t>
+              <a:t>2024년 6월</a:t>
             </a:fld>
             <a:endParaRPr lang="ko-KR" altLang="en-US"/>
           </a:p>
@@ -13299,7 +13299,7 @@
             <a:fld id="{6545E013-D6A7-47C7-842F-053F23C80D44}" type="datetime6">
               <a:rPr lang="ko-KR" altLang="en-US" smtClean="0"/>
               <a:pPr/>
-              <a:t>2024년 5월</a:t>
+              <a:t>2024년 6월</a:t>
             </a:fld>
             <a:endParaRPr lang="ko-KR" altLang="en-US"/>
           </a:p>
@@ -13668,7 +13668,7 @@
           <a:p>
             <a:fld id="{294555BB-40C1-49F2-814A-FC989E48DA17}" type="datetime6">
               <a:rPr lang="ko-KR" altLang="en-US" smtClean="0"/>
-              <a:t>2024년 5월</a:t>
+              <a:t>2024년 6월</a:t>
             </a:fld>
             <a:endParaRPr lang="ko-KR" altLang="en-US"/>
           </a:p>
@@ -13861,7 +13861,7 @@
           <a:p>
             <a:fld id="{D2E2A22E-3498-4C32-970F-84BAFA956A09}" type="datetime6">
               <a:rPr lang="ko-KR" altLang="en-US" smtClean="0"/>
-              <a:t>2024년 5월</a:t>
+              <a:t>2024년 6월</a:t>
             </a:fld>
             <a:endParaRPr lang="ko-KR" altLang="en-US"/>
           </a:p>
@@ -14223,7 +14223,7 @@
             <a:fld id="{6545E013-D6A7-47C7-842F-053F23C80D44}" type="datetime6">
               <a:rPr lang="ko-KR" altLang="en-US" smtClean="0"/>
               <a:pPr/>
-              <a:t>2024년 5월</a:t>
+              <a:t>2024년 6월</a:t>
             </a:fld>
             <a:endParaRPr lang="ko-KR" altLang="en-US"/>
           </a:p>
@@ -14570,7 +14570,7 @@
           <a:p>
             <a:fld id="{0E19CB95-6D28-40F1-9DA3-1BAC5D4B5B4F}" type="datetime6">
               <a:rPr lang="ko-KR" altLang="en-US" smtClean="0"/>
-              <a:t>2024년 5월</a:t>
+              <a:t>2024년 6월</a:t>
             </a:fld>
             <a:endParaRPr lang="ko-KR" altLang="en-US"/>
           </a:p>
@@ -14675,7 +14675,7 @@
           <a:p>
             <a:fld id="{4D8BB8F7-56EA-4444-8715-36E88B2971AE}" type="datetime6">
               <a:rPr lang="ko-KR" altLang="en-US" smtClean="0"/>
-              <a:t>2024년 5월</a:t>
+              <a:t>2024년 6월</a:t>
             </a:fld>
             <a:endParaRPr lang="ko-KR" altLang="en-US"/>
           </a:p>
@@ -14911,7 +14911,7 @@
             <a:fld id="{6545E013-D6A7-47C7-842F-053F23C80D44}" type="datetime6">
               <a:rPr lang="ko-KR" altLang="en-US" smtClean="0"/>
               <a:pPr/>
-              <a:t>2024년 5월</a:t>
+              <a:t>2024년 6월</a:t>
             </a:fld>
             <a:endParaRPr lang="ko-KR" altLang="en-US"/>
           </a:p>
@@ -15069,6 +15069,10 @@
               <a:rPr lang="ko-KR" altLang="en-US" sz="2400" dirty="0"/>
               <a:t>주어진 데이터를 시각적인 형태로 변환하는 과정</a:t>
             </a:r>
+            <a:r>
+              <a:rPr lang="en-US" altLang="ko-KR" sz="2400" dirty="0"/>
+              <a:t/>
+            </a:r>
             <a:br>
               <a:rPr lang="en-US" altLang="ko-KR" sz="2400" dirty="0"/>
             </a:br>
@@ -15190,6 +15194,10 @@
             <a:r>
               <a:rPr lang="ko-KR" altLang="en-US" sz="2400" dirty="0"/>
               <a:t>웹 페이지 리소스를 해석하고 표시하는 역할</a:t>
+            </a:r>
+            <a:r>
+              <a:rPr lang="en-US" altLang="ko-KR" sz="2400" dirty="0"/>
+              <a:t/>
             </a:r>
             <a:br>
               <a:rPr lang="en-US" altLang="ko-KR" sz="2400" dirty="0"/>
@@ -15359,7 +15367,7 @@
             <a:fld id="{6545E013-D6A7-47C7-842F-053F23C80D44}" type="datetime6">
               <a:rPr lang="ko-KR" altLang="en-US" smtClean="0"/>
               <a:pPr/>
-              <a:t>2024년 5월</a:t>
+              <a:t>2024년 6월</a:t>
             </a:fld>
             <a:endParaRPr lang="ko-KR" altLang="en-US"/>
           </a:p>
@@ -15711,7 +15719,7 @@
             <a:fld id="{6545E013-D6A7-47C7-842F-053F23C80D44}" type="datetime6">
               <a:rPr lang="ko-KR" altLang="en-US" smtClean="0"/>
               <a:pPr/>
-              <a:t>2024년 5월</a:t>
+              <a:t>2024년 6월</a:t>
             </a:fld>
             <a:endParaRPr lang="ko-KR" altLang="en-US"/>
           </a:p>
@@ -15863,7 +15871,7 @@
           <a:p>
             <a:fld id="{3CC1F80D-3619-47B0-B506-C15A2DD33094}" type="datetime6">
               <a:rPr lang="ko-KR" altLang="en-US" smtClean="0"/>
-              <a:t>2024년 5월</a:t>
+              <a:t>2024년 6월</a:t>
             </a:fld>
             <a:endParaRPr lang="ko-KR" altLang="en-US"/>
           </a:p>
@@ -16210,7 +16218,7 @@
           <a:p>
             <a:fld id="{185AB4C8-8E0F-4E71-95F4-BC1A3913D5AA}" type="datetime6">
               <a:rPr lang="ko-KR" altLang="en-US" smtClean="0"/>
-              <a:t>2024년 5월</a:t>
+              <a:t>2024년 6월</a:t>
             </a:fld>
             <a:endParaRPr lang="ko-KR" altLang="en-US"/>
           </a:p>
@@ -16557,7 +16565,7 @@
           <a:p>
             <a:fld id="{0E19CB95-6D28-40F1-9DA3-1BAC5D4B5B4F}" type="datetime6">
               <a:rPr lang="ko-KR" altLang="en-US" smtClean="0"/>
-              <a:t>2024년 5월</a:t>
+              <a:t>2024년 6월</a:t>
             </a:fld>
             <a:endParaRPr lang="ko-KR" altLang="en-US"/>
           </a:p>
@@ -16821,7 +16829,7 @@
             <a:fld id="{6545E013-D6A7-47C7-842F-053F23C80D44}" type="datetime6">
               <a:rPr lang="ko-KR" altLang="en-US" smtClean="0"/>
               <a:pPr/>
-              <a:t>2024년 5월</a:t>
+              <a:t>2024년 6월</a:t>
             </a:fld>
             <a:endParaRPr lang="ko-KR" altLang="en-US"/>
           </a:p>
@@ -17038,7 +17046,7 @@
           <a:p>
             <a:fld id="{1041DC4A-5795-4B01-9D97-4D581D89A2E2}" type="datetime6">
               <a:rPr lang="ko-KR" altLang="en-US" smtClean="0"/>
-              <a:t>2024년 5월</a:t>
+              <a:t>2024년 6월</a:t>
             </a:fld>
             <a:endParaRPr lang="ko-KR" altLang="en-US"/>
           </a:p>
@@ -17152,7 +17160,7 @@
           <a:p>
             <a:fld id="{0E19CB95-6D28-40F1-9DA3-1BAC5D4B5B4F}" type="datetime6">
               <a:rPr lang="ko-KR" altLang="en-US" smtClean="0"/>
-              <a:t>2024년 5월</a:t>
+              <a:t>2024년 6월</a:t>
             </a:fld>
             <a:endParaRPr lang="ko-KR" altLang="en-US"/>
           </a:p>
@@ -17411,7 +17419,7 @@
         </p:spPr>
         <p:txBody>
           <a:bodyPr>
-            <a:normAutofit lnSpcReduction="10000"/>
+            <a:normAutofit fontScale="92500"/>
           </a:bodyPr>
           <a:lstStyle/>
           <a:p>
@@ -17797,7 +17805,7 @@
             <a:fld id="{6545E013-D6A7-47C7-842F-053F23C80D44}" type="datetime6">
               <a:rPr lang="ko-KR" altLang="en-US" smtClean="0"/>
               <a:pPr/>
-              <a:t>2024년 5월</a:t>
+              <a:t>2024년 6월</a:t>
             </a:fld>
             <a:endParaRPr lang="ko-KR" altLang="en-US"/>
           </a:p>
@@ -17911,7 +17919,7 @@
           <a:p>
             <a:fld id="{0E19CB95-6D28-40F1-9DA3-1BAC5D4B5B4F}" type="datetime6">
               <a:rPr lang="ko-KR" altLang="en-US" smtClean="0"/>
-              <a:t>2024년 5월</a:t>
+              <a:t>2024년 6월</a:t>
             </a:fld>
             <a:endParaRPr lang="ko-KR" altLang="en-US"/>
           </a:p>
@@ -18917,6 +18925,16 @@
             </a:r>
           </a:p>
           <a:p>
+            <a:r>
+              <a:rPr lang="en-US" altLang="ko-KR" b="0" dirty="0">
+                <a:solidFill>
+                  <a:srgbClr val="D4D4D4"/>
+                </a:solidFill>
+                <a:effectLst/>
+                <a:latin typeface="Consolas" panose="020B0609020204030204" pitchFamily="49" charset="0"/>
+              </a:rPr>
+              <a:t/>
+            </a:r>
             <a:br>
               <a:rPr lang="en-US" altLang="ko-KR" b="0" dirty="0">
                 <a:solidFill>
@@ -18988,6 +19006,16 @@
             </a:r>
           </a:p>
           <a:p>
+            <a:r>
+              <a:rPr lang="en-US" altLang="ko-KR" b="0" dirty="0">
+                <a:solidFill>
+                  <a:srgbClr val="D4D4D4"/>
+                </a:solidFill>
+                <a:effectLst/>
+                <a:latin typeface="Consolas" panose="020B0609020204030204" pitchFamily="49" charset="0"/>
+              </a:rPr>
+              <a:t/>
+            </a:r>
             <a:br>
               <a:rPr lang="en-US" altLang="ko-KR" b="0" dirty="0">
                 <a:solidFill>
@@ -20644,7 +20672,7 @@
         </p:spPr>
         <p:txBody>
           <a:bodyPr>
-            <a:normAutofit lnSpcReduction="10000"/>
+            <a:normAutofit fontScale="92500" lnSpcReduction="10000"/>
           </a:bodyPr>
           <a:lstStyle/>
           <a:p>
@@ -20965,7 +20993,7 @@
             <a:fld id="{6545E013-D6A7-47C7-842F-053F23C80D44}" type="datetime6">
               <a:rPr lang="ko-KR" altLang="en-US" smtClean="0"/>
               <a:pPr/>
-              <a:t>2024년 5월</a:t>
+              <a:t>2024년 6월</a:t>
             </a:fld>
             <a:endParaRPr lang="ko-KR" altLang="en-US"/>
           </a:p>
@@ -21381,7 +21409,7 @@
         </p:spPr>
         <p:txBody>
           <a:bodyPr vert="horz" lIns="91440" tIns="45720" rIns="91440" bIns="45720" rtlCol="0" anchor="ctr">
-            <a:normAutofit fontScale="92500"/>
+            <a:normAutofit fontScale="85000" lnSpcReduction="10000"/>
           </a:bodyPr>
           <a:lstStyle>
             <a:lvl1pPr algn="l" defTabSz="914400" rtl="0" eaLnBrk="1" latinLnBrk="1" hangingPunct="1">
@@ -23438,7 +23466,7 @@
             <a:fld id="{6545E013-D6A7-47C7-842F-053F23C80D44}" type="datetime6">
               <a:rPr lang="ko-KR" altLang="en-US" smtClean="0"/>
               <a:pPr/>
-              <a:t>2024년 5월</a:t>
+              <a:t>2024년 6월</a:t>
             </a:fld>
             <a:endParaRPr lang="ko-KR" altLang="en-US"/>
           </a:p>
@@ -24096,7 +24124,7 @@
           <a:p>
             <a:fld id="{0E19CD00-0CDA-45A7-A8BD-749BE07CE984}" type="datetime6">
               <a:rPr lang="ko-KR" altLang="en-US" smtClean="0"/>
-              <a:t>2024년 5월</a:t>
+              <a:t>2024년 6월</a:t>
             </a:fld>
             <a:endParaRPr lang="ko-KR" altLang="en-US"/>
           </a:p>
@@ -24912,7 +24940,7 @@
             <a:fld id="{6545E013-D6A7-47C7-842F-053F23C80D44}" type="datetime6">
               <a:rPr lang="ko-KR" altLang="en-US" smtClean="0"/>
               <a:pPr/>
-              <a:t>2024년 5월</a:t>
+              <a:t>2024년 6월</a:t>
             </a:fld>
             <a:endParaRPr lang="ko-KR" altLang="en-US" dirty="0"/>
           </a:p>
@@ -25037,22 +25065,16 @@
               <a:t>  </a:t>
             </a:r>
             <a:r>
-              <a:rPr lang="ko-KR" altLang="en-US" sz="5400" dirty="0">
+              <a:rPr lang="ko-KR" altLang="en-US" sz="5400" smtClean="0">
                 <a:solidFill>
                   <a:srgbClr val="FF0000"/>
                 </a:solidFill>
                 <a:effectLst/>
               </a:rPr>
-              <a:t>차이점</a:t>
-            </a:r>
-            <a:r>
-              <a:rPr lang="ko-KR" altLang="en-US" sz="5400" dirty="0">
-                <a:effectLst/>
-              </a:rPr>
-              <a:t>은</a:t>
-            </a:r>
-            <a:r>
-              <a:rPr lang="en-US" altLang="ko-KR" sz="5400" dirty="0">
+              <a:t>차이</a:t>
+            </a:r>
+            <a:r>
+              <a:rPr lang="en-US" altLang="ko-KR" sz="5400" smtClean="0">
                 <a:effectLst/>
               </a:rPr>
               <a:t>?</a:t>
@@ -25694,7 +25716,7 @@
             <a:fld id="{6545E013-D6A7-47C7-842F-053F23C80D44}" type="datetime6">
               <a:rPr lang="ko-KR" altLang="en-US" smtClean="0"/>
               <a:pPr/>
-              <a:t>2024년 5월</a:t>
+              <a:t>2024년 6월</a:t>
             </a:fld>
             <a:endParaRPr lang="ko-KR" altLang="en-US" dirty="0"/>
           </a:p>
@@ -25820,25 +25842,19 @@
             </a:r>
             <a:r>
               <a:rPr lang="en-US" altLang="ko-KR" sz="5400" dirty="0"/>
-              <a:t>  </a:t>
-            </a:r>
-            <a:r>
-              <a:rPr lang="ko-KR" altLang="en-US" sz="5400" dirty="0">
+              <a:t> </a:t>
+            </a:r>
+            <a:r>
+              <a:rPr lang="ko-KR" altLang="en-US" sz="5400" dirty="0" smtClean="0">
                 <a:solidFill>
                   <a:srgbClr val="FF0000"/>
                 </a:solidFill>
                 <a:effectLst/>
               </a:rPr>
-              <a:t>차이점</a:t>
-            </a:r>
-            <a:r>
-              <a:rPr lang="ko-KR" altLang="en-US" sz="5400" dirty="0">
-                <a:effectLst/>
-              </a:rPr>
-              <a:t>은</a:t>
-            </a:r>
-            <a:r>
-              <a:rPr lang="en-US" altLang="ko-KR" sz="5400" dirty="0">
+              <a:t>차이</a:t>
+            </a:r>
+            <a:r>
+              <a:rPr lang="en-US" altLang="ko-KR" sz="5400" dirty="0" smtClean="0">
                 <a:effectLst/>
               </a:rPr>
               <a:t>?</a:t>
@@ -26095,7 +26111,7 @@
           <a:p>
             <a:fld id="{58C994F4-268E-4B47-97B8-5DBF3FCF6BBF}" type="datetime6">
               <a:rPr lang="ko-KR" altLang="en-US" smtClean="0"/>
-              <a:t>2024년 5월</a:t>
+              <a:t>2024년 6월</a:t>
             </a:fld>
             <a:endParaRPr lang="ko-KR" altLang="en-US"/>
           </a:p>
@@ -26333,7 +26349,7 @@
         </p:spPr>
         <p:txBody>
           <a:bodyPr>
-            <a:normAutofit/>
+            <a:normAutofit lnSpcReduction="10000"/>
           </a:bodyPr>
           <a:lstStyle/>
           <a:p>
@@ -26469,7 +26485,7 @@
           <a:p>
             <a:fld id="{BB9625C5-EB1E-432B-A1EC-7DC8377B728C}" type="datetime6">
               <a:rPr lang="ko-KR" altLang="en-US" smtClean="0"/>
-              <a:t>2024년 5월</a:t>
+              <a:t>2024년 6월</a:t>
             </a:fld>
             <a:endParaRPr lang="ko-KR" altLang="en-US"/>
           </a:p>
@@ -26625,7 +26641,7 @@
           <a:p>
             <a:fld id="{0E19CB95-6D28-40F1-9DA3-1BAC5D4B5B4F}" type="datetime6">
               <a:rPr lang="ko-KR" altLang="en-US" smtClean="0"/>
-              <a:t>2024년 5월</a:t>
+              <a:t>2024년 6월</a:t>
             </a:fld>
             <a:endParaRPr lang="ko-KR" altLang="en-US"/>
           </a:p>
@@ -26677,6 +26693,10 @@
             <a:r>
               <a:rPr lang="ko-KR" altLang="en-US" sz="7200" dirty="0"/>
               <a:t>이벤트 </a:t>
+            </a:r>
+            <a:r>
+              <a:rPr lang="en-US" altLang="ko-KR" sz="7200" dirty="0"/>
+              <a:t/>
             </a:r>
             <a:br>
               <a:rPr lang="en-US" altLang="ko-KR" sz="7200" dirty="0"/>
@@ -27165,6 +27185,16 @@
             </a:r>
           </a:p>
           <a:p>
+            <a:r>
+              <a:rPr lang="en-US" altLang="ko-KR" b="0" dirty="0">
+                <a:solidFill>
+                  <a:srgbClr val="D4D4D4"/>
+                </a:solidFill>
+                <a:effectLst/>
+                <a:latin typeface="Consolas" panose="020B0609020204030204" pitchFamily="49" charset="0"/>
+              </a:rPr>
+              <a:t/>
+            </a:r>
             <a:br>
               <a:rPr lang="en-US" altLang="ko-KR" b="0" dirty="0">
                 <a:solidFill>
@@ -27236,6 +27266,16 @@
             </a:r>
           </a:p>
           <a:p>
+            <a:r>
+              <a:rPr lang="en-US" altLang="ko-KR" b="0" dirty="0">
+                <a:solidFill>
+                  <a:srgbClr val="D4D4D4"/>
+                </a:solidFill>
+                <a:effectLst/>
+                <a:latin typeface="Consolas" panose="020B0609020204030204" pitchFamily="49" charset="0"/>
+              </a:rPr>
+              <a:t/>
+            </a:r>
             <a:br>
               <a:rPr lang="en-US" altLang="ko-KR" b="0" dirty="0">
                 <a:solidFill>
@@ -28192,7 +28232,7 @@
         </p:spPr>
         <p:txBody>
           <a:bodyPr vert="horz" lIns="91440" tIns="45720" rIns="91440" bIns="45720" rtlCol="0">
-            <a:normAutofit fontScale="77500" lnSpcReduction="20000"/>
+            <a:normAutofit fontScale="70000" lnSpcReduction="20000"/>
           </a:bodyPr>
           <a:lstStyle>
             <a:lvl1pPr marL="228600" indent="-228600" algn="l" defTabSz="914400" rtl="0" eaLnBrk="1" latinLnBrk="1" hangingPunct="1">
@@ -28870,7 +28910,7 @@
           <a:p>
             <a:fld id="{08BBA0DC-E9D2-429C-946B-770A90481327}" type="datetime6">
               <a:rPr lang="ko-KR" altLang="en-US" smtClean="0"/>
-              <a:t>2024년 5월</a:t>
+              <a:t>2024년 6월</a:t>
             </a:fld>
             <a:endParaRPr lang="ko-KR" altLang="en-US"/>
           </a:p>
@@ -29273,7 +29313,7 @@
           <a:p>
             <a:fld id="{08BBA0DC-E9D2-429C-946B-770A90481327}" type="datetime6">
               <a:rPr lang="ko-KR" altLang="en-US" smtClean="0"/>
-              <a:t>2024년 5월</a:t>
+              <a:t>2024년 6월</a:t>
             </a:fld>
             <a:endParaRPr lang="ko-KR" altLang="en-US"/>
           </a:p>
@@ -29434,7 +29474,7 @@
           <a:p>
             <a:fld id="{994F3061-A8C0-47A7-B70C-8C6BAF46AF2C}" type="datetime6">
               <a:rPr lang="ko-KR" altLang="en-US" smtClean="0"/>
-              <a:t>2024년 5월</a:t>
+              <a:t>2024년 6월</a:t>
             </a:fld>
             <a:endParaRPr lang="ko-KR" altLang="en-US"/>
           </a:p>
@@ -29963,7 +30003,7 @@
           <a:p>
             <a:fld id="{528A7B7B-B510-4FB4-806A-F48FB70E79E6}" type="datetime6">
               <a:rPr lang="ko-KR" altLang="en-US" smtClean="0"/>
-              <a:t>2024년 5월</a:t>
+              <a:t>2024년 6월</a:t>
             </a:fld>
             <a:endParaRPr lang="ko-KR" altLang="en-US"/>
           </a:p>
@@ -30598,7 +30638,7 @@
           <a:p>
             <a:fld id="{271A29E6-51E5-434F-8BAA-E4A5A5BCFF40}" type="datetime6">
               <a:rPr lang="ko-KR" altLang="en-US" smtClean="0"/>
-              <a:t>2024년 5월</a:t>
+              <a:t>2024년 6월</a:t>
             </a:fld>
             <a:endParaRPr lang="ko-KR" altLang="en-US"/>
           </a:p>

--- a/material/[SeSAC_YDP_6] 04_5_Javascript_표준객체,DOM.pptx
+++ b/material/[SeSAC_YDP_6] 04_5_Javascript_표준객체,DOM.pptx
@@ -7542,36 +7542,12 @@
           <a:lstStyle/>
           <a:p>
             <a:r>
-              <a:rPr lang="ko-KR" altLang="en-US" sz="1200" dirty="0" err="1">
-                <a:highlight>
-                  <a:srgbClr val="FFFF00"/>
-                </a:highlight>
-              </a:rPr>
-              <a:t>변수선언</a:t>
-            </a:r>
-            <a:r>
               <a:rPr lang="ko-KR" altLang="en-US" sz="1200" dirty="0">
                 <a:highlight>
                   <a:srgbClr val="FFFF00"/>
                 </a:highlight>
               </a:rPr>
-              <a:t> 안하고 </a:t>
-            </a:r>
-            <a:r>
-              <a:rPr lang="ko-KR" altLang="en-US" sz="1200" dirty="0" err="1">
-                <a:highlight>
-                  <a:srgbClr val="FFFF00"/>
-                </a:highlight>
-              </a:rPr>
-              <a:t>메소드</a:t>
-            </a:r>
-            <a:r>
-              <a:rPr lang="ko-KR" altLang="en-US" sz="1200" dirty="0">
-                <a:highlight>
-                  <a:srgbClr val="FFFF00"/>
-                </a:highlight>
-              </a:rPr>
-              <a:t> </a:t>
+              <a:t>변수 선언 안하고 메소드 </a:t>
             </a:r>
             <a:r>
               <a:rPr lang="ko-KR" altLang="en-US" sz="1200" dirty="0" err="1">
@@ -15455,10 +15431,9 @@
               <a:t>. </a:t>
             </a:r>
             <a:r>
-              <a:rPr lang="ko-KR" altLang="en-US" dirty="0" smtClean="0"/>
+              <a:rPr lang="ko-KR" altLang="en-US" dirty="0"/>
               <a:t>주말과 평일</a:t>
             </a:r>
-            <a:endParaRPr lang="ko-KR" altLang="en-US" dirty="0"/>
           </a:p>
         </p:txBody>
       </p:sp>
@@ -15732,15 +15707,6 @@
               </a:rPr>
               <a:t>강의 클릭</a:t>
             </a:r>
-            <a:r>
-              <a:rPr lang="en-US" altLang="ko-KR" dirty="0">
-                <a:solidFill>
-                  <a:srgbClr val="212529"/>
-                </a:solidFill>
-                <a:latin typeface="+mn-ea"/>
-              </a:rPr>
-              <a:t/>
-            </a:r>
             <a:br>
               <a:rPr lang="en-US" altLang="ko-KR" dirty="0">
                 <a:solidFill>
@@ -15768,7 +15734,7 @@
               <a:t>➡ </a:t>
             </a:r>
             <a:r>
-              <a:rPr lang="en-US" altLang="ko-KR" sz="2800" b="1" dirty="0" smtClean="0">
+              <a:rPr lang="en-US" altLang="ko-KR" sz="2800" b="1" dirty="0">
                 <a:solidFill>
                   <a:srgbClr val="212529"/>
                 </a:solidFill>
@@ -15777,7 +15743,7 @@
               <a:t>[</a:t>
             </a:r>
             <a:r>
-              <a:rPr lang="ko-KR" altLang="en-US" sz="2800" b="1" dirty="0" smtClean="0">
+              <a:rPr lang="ko-KR" altLang="en-US" sz="2800" b="1" dirty="0">
                 <a:solidFill>
                   <a:srgbClr val="212529"/>
                 </a:solidFill>
@@ -15786,7 +15752,7 @@
               <a:t>내장 </a:t>
             </a:r>
             <a:r>
-              <a:rPr lang="ko-KR" altLang="en-US" sz="2800" b="1" dirty="0" err="1" smtClean="0">
+              <a:rPr lang="ko-KR" altLang="en-US" sz="2800" b="1" dirty="0" err="1">
                 <a:solidFill>
                   <a:srgbClr val="212529"/>
                 </a:solidFill>
@@ -15795,7 +15761,7 @@
               <a:t>메소드와</a:t>
             </a:r>
             <a:r>
-              <a:rPr lang="ko-KR" altLang="en-US" sz="2800" b="1" dirty="0" smtClean="0">
+              <a:rPr lang="ko-KR" altLang="en-US" sz="2800" b="1" dirty="0">
                 <a:solidFill>
                   <a:srgbClr val="212529"/>
                 </a:solidFill>
@@ -15804,7 +15770,7 @@
               <a:t> 내장 객체 실습</a:t>
             </a:r>
             <a:r>
-              <a:rPr lang="en-US" altLang="ko-KR" sz="2800" b="1" dirty="0" smtClean="0">
+              <a:rPr lang="en-US" altLang="ko-KR" sz="2800" b="1" dirty="0">
                 <a:solidFill>
                   <a:srgbClr val="212529"/>
                 </a:solidFill>
@@ -15813,7 +15779,7 @@
               <a:t>]</a:t>
             </a:r>
             <a:r>
-              <a:rPr lang="en-US" altLang="ko-KR" sz="2800" dirty="0" smtClean="0">
+              <a:rPr lang="en-US" altLang="ko-KR" sz="2800" dirty="0">
                 <a:solidFill>
                   <a:srgbClr val="212529"/>
                 </a:solidFill>
@@ -15849,7 +15815,7 @@
               <a:t>➡ </a:t>
             </a:r>
             <a:r>
-              <a:rPr lang="en-US" altLang="ko-KR" sz="2800" b="1" dirty="0" smtClean="0">
+              <a:rPr lang="en-US" altLang="ko-KR" sz="2800" b="1" dirty="0">
                 <a:solidFill>
                   <a:schemeClr val="accent1"/>
                 </a:solidFill>
@@ -15858,7 +15824,7 @@
               <a:t>[</a:t>
             </a:r>
             <a:r>
-              <a:rPr lang="ko-KR" altLang="en-US" sz="2800" b="1" dirty="0" smtClean="0">
+              <a:rPr lang="ko-KR" altLang="en-US" sz="2800" b="1" dirty="0">
                 <a:solidFill>
                   <a:schemeClr val="accent1"/>
                 </a:solidFill>
@@ -15867,7 +15833,7 @@
               <a:t>내장 객체 </a:t>
             </a:r>
             <a:r>
-              <a:rPr lang="ko-KR" altLang="en-US" sz="2800" b="1" dirty="0" err="1" smtClean="0">
+              <a:rPr lang="ko-KR" altLang="en-US" sz="2800" b="1" dirty="0" err="1">
                 <a:solidFill>
                   <a:schemeClr val="accent1"/>
                 </a:solidFill>
@@ -15876,7 +15842,7 @@
               <a:t>실습문제</a:t>
             </a:r>
             <a:r>
-              <a:rPr lang="en-US" altLang="ko-KR" sz="2800" b="1" dirty="0" smtClean="0">
+              <a:rPr lang="en-US" altLang="ko-KR" sz="2800" b="1" dirty="0">
                 <a:solidFill>
                   <a:schemeClr val="accent1"/>
                 </a:solidFill>
@@ -15885,7 +15851,7 @@
               <a:t>1. </a:t>
             </a:r>
             <a:r>
-              <a:rPr lang="ko-KR" altLang="en-US" sz="2800" b="1" dirty="0" smtClean="0">
+              <a:rPr lang="ko-KR" altLang="en-US" sz="2800" b="1" dirty="0">
                 <a:solidFill>
                   <a:schemeClr val="accent1"/>
                 </a:solidFill>
@@ -15894,7 +15860,7 @@
               <a:t>주말과 평일</a:t>
             </a:r>
             <a:r>
-              <a:rPr lang="en-US" altLang="ko-KR" sz="2800" b="1" dirty="0" smtClean="0">
+              <a:rPr lang="en-US" altLang="ko-KR" sz="2800" b="1" dirty="0">
                 <a:solidFill>
                   <a:schemeClr val="accent1"/>
                 </a:solidFill>
@@ -15903,7 +15869,7 @@
               <a:t> ]</a:t>
             </a:r>
             <a:r>
-              <a:rPr lang="en-US" altLang="ko-KR" sz="2800" dirty="0" smtClean="0">
+              <a:rPr lang="en-US" altLang="ko-KR" sz="2800" dirty="0">
                 <a:solidFill>
                   <a:schemeClr val="accent1"/>
                 </a:solidFill>
@@ -15912,22 +15878,13 @@
               <a:t> </a:t>
             </a:r>
             <a:r>
-              <a:rPr lang="ko-KR" altLang="en-US" sz="2800" dirty="0" smtClean="0">
+              <a:rPr lang="ko-KR" altLang="en-US" sz="2800" dirty="0">
                 <a:solidFill>
                   <a:srgbClr val="212529"/>
                 </a:solidFill>
                 <a:latin typeface="+mn-ea"/>
               </a:rPr>
-              <a:t> </a:t>
-            </a:r>
-            <a:r>
-              <a:rPr lang="ko-KR" altLang="en-US" sz="2800" dirty="0">
-                <a:solidFill>
-                  <a:srgbClr val="212529"/>
-                </a:solidFill>
-                <a:latin typeface="+mn-ea"/>
-              </a:rPr>
-              <a:t>진행</a:t>
+              <a:t> 진행</a:t>
             </a:r>
           </a:p>
         </p:txBody>
@@ -16234,14 +16191,13 @@
               <a:t>. </a:t>
             </a:r>
             <a:r>
-              <a:rPr lang="ko-KR" altLang="en-US" dirty="0" err="1" smtClean="0"/>
+              <a:rPr lang="ko-KR" altLang="en-US" dirty="0" err="1"/>
               <a:t>난수</a:t>
             </a:r>
             <a:r>
-              <a:rPr lang="ko-KR" altLang="en-US" dirty="0" smtClean="0"/>
+              <a:rPr lang="ko-KR" altLang="en-US" dirty="0"/>
               <a:t> 생성</a:t>
             </a:r>
-            <a:endParaRPr lang="ko-KR" altLang="en-US" dirty="0"/>
           </a:p>
         </p:txBody>
       </p:sp>
@@ -16515,15 +16471,6 @@
               </a:rPr>
               <a:t>강의 클릭</a:t>
             </a:r>
-            <a:r>
-              <a:rPr lang="en-US" altLang="ko-KR" dirty="0">
-                <a:solidFill>
-                  <a:srgbClr val="212529"/>
-                </a:solidFill>
-                <a:latin typeface="+mn-ea"/>
-              </a:rPr>
-              <a:t/>
-            </a:r>
             <a:br>
               <a:rPr lang="en-US" altLang="ko-KR" dirty="0">
                 <a:solidFill>
@@ -16551,7 +16498,7 @@
               <a:t>➡ </a:t>
             </a:r>
             <a:r>
-              <a:rPr lang="en-US" altLang="ko-KR" sz="2800" b="1" dirty="0" smtClean="0">
+              <a:rPr lang="en-US" altLang="ko-KR" sz="2800" b="1" dirty="0">
                 <a:solidFill>
                   <a:srgbClr val="212529"/>
                 </a:solidFill>
@@ -16560,7 +16507,7 @@
               <a:t>[</a:t>
             </a:r>
             <a:r>
-              <a:rPr lang="ko-KR" altLang="en-US" sz="2800" b="1" dirty="0" smtClean="0">
+              <a:rPr lang="ko-KR" altLang="en-US" sz="2800" b="1" dirty="0">
                 <a:solidFill>
                   <a:srgbClr val="212529"/>
                 </a:solidFill>
@@ -16569,7 +16516,7 @@
               <a:t>내장 </a:t>
             </a:r>
             <a:r>
-              <a:rPr lang="ko-KR" altLang="en-US" sz="2800" b="1" dirty="0" err="1" smtClean="0">
+              <a:rPr lang="ko-KR" altLang="en-US" sz="2800" b="1" dirty="0" err="1">
                 <a:solidFill>
                   <a:srgbClr val="212529"/>
                 </a:solidFill>
@@ -16578,7 +16525,7 @@
               <a:t>메소드와</a:t>
             </a:r>
             <a:r>
-              <a:rPr lang="ko-KR" altLang="en-US" sz="2800" b="1" dirty="0" smtClean="0">
+              <a:rPr lang="ko-KR" altLang="en-US" sz="2800" b="1" dirty="0">
                 <a:solidFill>
                   <a:srgbClr val="212529"/>
                 </a:solidFill>
@@ -16587,7 +16534,7 @@
               <a:t> 내장 객체 실습</a:t>
             </a:r>
             <a:r>
-              <a:rPr lang="en-US" altLang="ko-KR" sz="2800" b="1" dirty="0" smtClean="0">
+              <a:rPr lang="en-US" altLang="ko-KR" sz="2800" b="1" dirty="0">
                 <a:solidFill>
                   <a:srgbClr val="212529"/>
                 </a:solidFill>
@@ -16596,7 +16543,7 @@
               <a:t>]</a:t>
             </a:r>
             <a:r>
-              <a:rPr lang="en-US" altLang="ko-KR" sz="2800" dirty="0" smtClean="0">
+              <a:rPr lang="en-US" altLang="ko-KR" sz="2800" dirty="0">
                 <a:solidFill>
                   <a:srgbClr val="212529"/>
                 </a:solidFill>
@@ -16632,7 +16579,7 @@
               <a:t>➡ </a:t>
             </a:r>
             <a:r>
-              <a:rPr lang="en-US" altLang="ko-KR" sz="2800" b="1" dirty="0" smtClean="0">
+              <a:rPr lang="en-US" altLang="ko-KR" sz="2800" b="1" dirty="0">
                 <a:solidFill>
                   <a:schemeClr val="accent1"/>
                 </a:solidFill>
@@ -16641,7 +16588,7 @@
               <a:t>[</a:t>
             </a:r>
             <a:r>
-              <a:rPr lang="ko-KR" altLang="en-US" sz="2800" b="1" dirty="0" smtClean="0">
+              <a:rPr lang="ko-KR" altLang="en-US" sz="2800" b="1" dirty="0">
                 <a:solidFill>
                   <a:schemeClr val="accent1"/>
                 </a:solidFill>
@@ -16650,7 +16597,7 @@
               <a:t>내장 객체 </a:t>
             </a:r>
             <a:r>
-              <a:rPr lang="ko-KR" altLang="en-US" sz="2800" b="1" dirty="0" err="1" smtClean="0">
+              <a:rPr lang="ko-KR" altLang="en-US" sz="2800" b="1" dirty="0" err="1">
                 <a:solidFill>
                   <a:schemeClr val="accent1"/>
                 </a:solidFill>
@@ -16659,7 +16606,7 @@
               <a:t>실습문제</a:t>
             </a:r>
             <a:r>
-              <a:rPr lang="en-US" altLang="ko-KR" sz="2800" b="1" dirty="0" smtClean="0">
+              <a:rPr lang="en-US" altLang="ko-KR" sz="2800" b="1" dirty="0">
                 <a:solidFill>
                   <a:schemeClr val="accent1"/>
                 </a:solidFill>
@@ -16668,7 +16615,7 @@
               <a:t>2. </a:t>
             </a:r>
             <a:r>
-              <a:rPr lang="ko-KR" altLang="en-US" sz="2800" b="1" dirty="0" err="1" smtClean="0">
+              <a:rPr lang="ko-KR" altLang="en-US" sz="2800" b="1" dirty="0" err="1">
                 <a:solidFill>
                   <a:schemeClr val="accent1"/>
                 </a:solidFill>
@@ -16677,7 +16624,7 @@
               <a:t>난수</a:t>
             </a:r>
             <a:r>
-              <a:rPr lang="ko-KR" altLang="en-US" sz="2800" b="1" dirty="0" smtClean="0">
+              <a:rPr lang="ko-KR" altLang="en-US" sz="2800" b="1" dirty="0">
                 <a:solidFill>
                   <a:schemeClr val="accent1"/>
                 </a:solidFill>
@@ -16686,7 +16633,7 @@
               <a:t> 생성</a:t>
             </a:r>
             <a:r>
-              <a:rPr lang="en-US" altLang="ko-KR" sz="2800" b="1" dirty="0" smtClean="0">
+              <a:rPr lang="en-US" altLang="ko-KR" sz="2800" b="1" dirty="0">
                 <a:solidFill>
                   <a:schemeClr val="accent1"/>
                 </a:solidFill>
@@ -16695,7 +16642,7 @@
               <a:t>]</a:t>
             </a:r>
             <a:r>
-              <a:rPr lang="en-US" altLang="ko-KR" sz="2800" dirty="0" smtClean="0">
+              <a:rPr lang="en-US" altLang="ko-KR" sz="2800" dirty="0">
                 <a:solidFill>
                   <a:schemeClr val="accent1"/>
                 </a:solidFill>
@@ -16704,22 +16651,13 @@
               <a:t> </a:t>
             </a:r>
             <a:r>
-              <a:rPr lang="ko-KR" altLang="en-US" sz="2800" dirty="0" smtClean="0">
+              <a:rPr lang="ko-KR" altLang="en-US" sz="2800" dirty="0">
                 <a:solidFill>
                   <a:srgbClr val="212529"/>
                 </a:solidFill>
                 <a:latin typeface="+mn-ea"/>
               </a:rPr>
-              <a:t> </a:t>
-            </a:r>
-            <a:r>
-              <a:rPr lang="ko-KR" altLang="en-US" sz="2800" dirty="0">
-                <a:solidFill>
-                  <a:srgbClr val="212529"/>
-                </a:solidFill>
-                <a:latin typeface="+mn-ea"/>
-              </a:rPr>
-              <a:t>진행</a:t>
+              <a:t> 진행</a:t>
             </a:r>
           </a:p>
         </p:txBody>
@@ -17135,10 +17073,6 @@
               <a:rPr lang="ko-KR" altLang="en-US" sz="2400" dirty="0"/>
               <a:t>주어진 데이터를 시각적인 형태로 변환하는 과정</a:t>
             </a:r>
-            <a:r>
-              <a:rPr lang="en-US" altLang="ko-KR" sz="2400" dirty="0"/>
-              <a:t/>
-            </a:r>
             <a:br>
               <a:rPr lang="en-US" altLang="ko-KR" sz="2400" dirty="0"/>
             </a:br>
@@ -17260,10 +17194,6 @@
             <a:r>
               <a:rPr lang="ko-KR" altLang="en-US" sz="2400" dirty="0"/>
               <a:t>웹 페이지 리소스를 해석하고 표시하는 역할</a:t>
-            </a:r>
-            <a:r>
-              <a:rPr lang="en-US" altLang="ko-KR" sz="2400" dirty="0"/>
-              <a:t/>
             </a:r>
             <a:br>
               <a:rPr lang="en-US" altLang="ko-KR" sz="2400" dirty="0"/>
@@ -20991,7 +20921,7 @@
             </a:r>
           </a:p>
           <a:p>
-            <a:r>
+            <a:br>
               <a:rPr lang="en-US" altLang="ko-KR" b="0" dirty="0">
                 <a:solidFill>
                   <a:srgbClr val="D4D4D4"/>
@@ -20999,89 +20929,69 @@
                 <a:effectLst/>
                 <a:latin typeface="Consolas" panose="020B0609020204030204" pitchFamily="49" charset="0"/>
               </a:rPr>
-              <a:t/>
-            </a:r>
-            <a:br>
+            </a:br>
+            <a:r>
               <a:rPr lang="en-US" altLang="ko-KR" b="0" dirty="0">
                 <a:solidFill>
-                  <a:srgbClr val="D4D4D4"/>
+                  <a:srgbClr val="9CDCFE"/>
                 </a:solidFill>
                 <a:effectLst/>
                 <a:latin typeface="Consolas" panose="020B0609020204030204" pitchFamily="49" charset="0"/>
               </a:rPr>
-            </a:br>
+              <a:t>console</a:t>
+            </a:r>
             <a:r>
               <a:rPr lang="en-US" altLang="ko-KR" b="0" dirty="0">
                 <a:solidFill>
-                  <a:srgbClr val="9CDCFE"/>
+                  <a:srgbClr val="D4D4D4"/>
                 </a:solidFill>
                 <a:effectLst/>
                 <a:latin typeface="Consolas" panose="020B0609020204030204" pitchFamily="49" charset="0"/>
               </a:rPr>
-              <a:t>console</a:t>
+              <a:t>.</a:t>
             </a:r>
             <a:r>
               <a:rPr lang="en-US" altLang="ko-KR" b="0" dirty="0">
                 <a:solidFill>
-                  <a:srgbClr val="D4D4D4"/>
+                  <a:srgbClr val="DCDCAA"/>
                 </a:solidFill>
                 <a:effectLst/>
                 <a:latin typeface="Consolas" panose="020B0609020204030204" pitchFamily="49" charset="0"/>
               </a:rPr>
-              <a:t>.</a:t>
+              <a:t>log</a:t>
             </a:r>
             <a:r>
               <a:rPr lang="en-US" altLang="ko-KR" b="0" dirty="0">
                 <a:solidFill>
-                  <a:srgbClr val="DCDCAA"/>
+                  <a:srgbClr val="D4D4D4"/>
                 </a:solidFill>
                 <a:effectLst/>
                 <a:latin typeface="Consolas" panose="020B0609020204030204" pitchFamily="49" charset="0"/>
               </a:rPr>
-              <a:t>log</a:t>
-            </a:r>
-            <a:r>
-              <a:rPr lang="en-US" altLang="ko-KR" b="0" dirty="0">
-                <a:solidFill>
-                  <a:srgbClr val="D4D4D4"/>
+              <a:t>(</a:t>
+            </a:r>
+            <a:r>
+              <a:rPr lang="en-US" altLang="ko-KR" b="0" dirty="0" err="1">
+                <a:solidFill>
+                  <a:srgbClr val="9CDCFE"/>
                 </a:solidFill>
                 <a:effectLst/>
                 <a:latin typeface="Consolas" panose="020B0609020204030204" pitchFamily="49" charset="0"/>
               </a:rPr>
-              <a:t>(</a:t>
-            </a:r>
-            <a:r>
-              <a:rPr lang="en-US" altLang="ko-KR" b="0" dirty="0" err="1">
-                <a:solidFill>
-                  <a:srgbClr val="9CDCFE"/>
+              <a:t>boxEl</a:t>
+            </a:r>
+            <a:r>
+              <a:rPr lang="en-US" altLang="ko-KR" b="0" dirty="0">
+                <a:solidFill>
+                  <a:srgbClr val="D4D4D4"/>
                 </a:solidFill>
                 <a:effectLst/>
                 <a:latin typeface="Consolas" panose="020B0609020204030204" pitchFamily="49" charset="0"/>
               </a:rPr>
-              <a:t>boxEl</a:t>
-            </a:r>
-            <a:r>
-              <a:rPr lang="en-US" altLang="ko-KR" b="0" dirty="0">
-                <a:solidFill>
-                  <a:srgbClr val="D4D4D4"/>
-                </a:solidFill>
-                <a:effectLst/>
-                <a:latin typeface="Consolas" panose="020B0609020204030204" pitchFamily="49" charset="0"/>
-              </a:rPr>
               <a:t>);</a:t>
             </a:r>
           </a:p>
           <a:p>
-            <a:r>
-              <a:rPr lang="en-US" altLang="ko-KR" b="0" dirty="0">
-                <a:solidFill>
-                  <a:srgbClr val="D4D4D4"/>
-                </a:solidFill>
-                <a:effectLst/>
-                <a:latin typeface="Consolas" panose="020B0609020204030204" pitchFamily="49" charset="0"/>
-              </a:rPr>
-              <a:t/>
-            </a:r>
             <a:br>
               <a:rPr lang="en-US" altLang="ko-KR" b="0" dirty="0">
                 <a:solidFill>
@@ -25588,25 +25498,16 @@
                   <a:srgbClr val="6EC173"/>
                 </a:solidFill>
               </a:rPr>
-              <a:t>. </a:t>
-            </a:r>
-            <a:r>
-              <a:rPr lang="en-US" altLang="ko-KR" dirty="0">
-                <a:solidFill>
-                  <a:srgbClr val="6EC173"/>
-                </a:solidFill>
-              </a:rPr>
-              <a:t> </a:t>
-            </a:r>
-            <a:r>
-              <a:rPr lang="en-US" altLang="ko-KR" dirty="0" smtClean="0"/>
+              <a:t>.  </a:t>
+            </a:r>
+            <a:r>
+              <a:rPr lang="en-US" altLang="ko-KR" dirty="0"/>
               <a:t>Html </a:t>
             </a:r>
             <a:r>
-              <a:rPr lang="ko-KR" altLang="en-US" dirty="0" smtClean="0"/>
+              <a:rPr lang="ko-KR" altLang="en-US" dirty="0"/>
               <a:t>내용 변경하기</a:t>
             </a:r>
-            <a:endParaRPr lang="ko-KR" altLang="en-US" dirty="0"/>
           </a:p>
         </p:txBody>
       </p:sp>
@@ -25880,15 +25781,6 @@
               </a:rPr>
               <a:t>강의 클릭</a:t>
             </a:r>
-            <a:r>
-              <a:rPr lang="en-US" altLang="ko-KR" dirty="0">
-                <a:solidFill>
-                  <a:srgbClr val="212529"/>
-                </a:solidFill>
-                <a:latin typeface="+mn-ea"/>
-              </a:rPr>
-              <a:t/>
-            </a:r>
             <a:br>
               <a:rPr lang="en-US" altLang="ko-KR" dirty="0">
                 <a:solidFill>
@@ -25916,7 +25808,7 @@
               <a:t>➡ </a:t>
             </a:r>
             <a:r>
-              <a:rPr lang="en-US" altLang="ko-KR" sz="2800" b="1" dirty="0" smtClean="0">
+              <a:rPr lang="en-US" altLang="ko-KR" sz="2800" b="1" dirty="0">
                 <a:solidFill>
                   <a:srgbClr val="212529"/>
                 </a:solidFill>
@@ -25925,7 +25817,7 @@
               <a:t>[</a:t>
             </a:r>
             <a:r>
-              <a:rPr lang="en-US" altLang="ko-KR" sz="2800" b="1" dirty="0" err="1" smtClean="0">
+              <a:rPr lang="en-US" altLang="ko-KR" sz="2800" b="1" dirty="0" err="1">
                 <a:solidFill>
                   <a:srgbClr val="212529"/>
                 </a:solidFill>
@@ -25934,7 +25826,7 @@
               <a:t>Javascript</a:t>
             </a:r>
             <a:r>
-              <a:rPr lang="en-US" altLang="ko-KR" sz="2800" b="1" dirty="0" smtClean="0">
+              <a:rPr lang="en-US" altLang="ko-KR" sz="2800" b="1" dirty="0">
                 <a:solidFill>
                   <a:srgbClr val="212529"/>
                 </a:solidFill>
@@ -25943,7 +25835,7 @@
               <a:t> DOM </a:t>
             </a:r>
             <a:r>
-              <a:rPr lang="ko-KR" altLang="en-US" sz="2800" b="1" dirty="0" smtClean="0">
+              <a:rPr lang="ko-KR" altLang="en-US" sz="2800" b="1" dirty="0">
                 <a:solidFill>
                   <a:srgbClr val="212529"/>
                 </a:solidFill>
@@ -25952,7 +25844,7 @@
               <a:t>실습</a:t>
             </a:r>
             <a:r>
-              <a:rPr lang="en-US" altLang="ko-KR" sz="2800" b="1" dirty="0" smtClean="0">
+              <a:rPr lang="en-US" altLang="ko-KR" sz="2800" b="1" dirty="0">
                 <a:solidFill>
                   <a:srgbClr val="212529"/>
                 </a:solidFill>
@@ -25961,7 +25853,7 @@
               <a:t>(1)]</a:t>
             </a:r>
             <a:r>
-              <a:rPr lang="en-US" altLang="ko-KR" sz="2800" dirty="0" smtClean="0">
+              <a:rPr lang="en-US" altLang="ko-KR" sz="2800" dirty="0">
                 <a:solidFill>
                   <a:srgbClr val="212529"/>
                 </a:solidFill>
@@ -25997,7 +25889,7 @@
               <a:t>➡ </a:t>
             </a:r>
             <a:r>
-              <a:rPr lang="en-US" altLang="ko-KR" sz="2800" b="1" dirty="0" smtClean="0">
+              <a:rPr lang="en-US" altLang="ko-KR" sz="2800" b="1" dirty="0">
                 <a:solidFill>
                   <a:schemeClr val="accent1"/>
                 </a:solidFill>
@@ -26006,7 +25898,7 @@
               <a:t>[</a:t>
             </a:r>
             <a:r>
-              <a:rPr lang="ko-KR" altLang="en-US" sz="2800" b="1" dirty="0" err="1" smtClean="0">
+              <a:rPr lang="ko-KR" altLang="en-US" sz="2800" b="1" dirty="0" err="1">
                 <a:solidFill>
                   <a:schemeClr val="accent1"/>
                 </a:solidFill>
@@ -26015,67 +25907,49 @@
               <a:t>실습문제</a:t>
             </a:r>
             <a:r>
-              <a:rPr lang="en-US" altLang="ko-KR" sz="2800" b="1" dirty="0" smtClean="0">
+              <a:rPr lang="en-US" altLang="ko-KR" sz="2800" b="1" dirty="0">
                 <a:solidFill>
                   <a:schemeClr val="accent1"/>
                 </a:solidFill>
                 <a:latin typeface="+mn-ea"/>
               </a:rPr>
-              <a:t>1. </a:t>
-            </a:r>
-            <a:r>
-              <a:rPr lang="en-US" altLang="ko-KR" sz="2800" b="1" dirty="0" smtClean="0">
+              <a:t>1. html </a:t>
+            </a:r>
+            <a:r>
+              <a:rPr lang="ko-KR" altLang="en-US" sz="2800" b="1" dirty="0">
                 <a:solidFill>
                   <a:schemeClr val="accent1"/>
                 </a:solidFill>
                 <a:latin typeface="+mn-ea"/>
               </a:rPr>
-              <a:t>html </a:t>
-            </a:r>
-            <a:r>
-              <a:rPr lang="ko-KR" altLang="en-US" sz="2800" b="1" dirty="0" smtClean="0">
+              <a:t>내용 변경하기</a:t>
+            </a:r>
+            <a:r>
+              <a:rPr lang="en-US" altLang="ko-KR" sz="2800" b="1" dirty="0">
                 <a:solidFill>
                   <a:schemeClr val="accent1"/>
                 </a:solidFill>
                 <a:latin typeface="+mn-ea"/>
               </a:rPr>
-              <a:t>내용 변경하기</a:t>
-            </a:r>
-            <a:r>
-              <a:rPr lang="en-US" altLang="ko-KR" sz="2800" b="1" dirty="0" smtClean="0">
+              <a:t>]</a:t>
+            </a:r>
+            <a:r>
+              <a:rPr lang="en-US" altLang="ko-KR" sz="2800" dirty="0">
                 <a:solidFill>
                   <a:schemeClr val="accent1"/>
                 </a:solidFill>
                 <a:latin typeface="+mn-ea"/>
               </a:rPr>
-              <a:t>]</a:t>
-            </a:r>
-            <a:r>
-              <a:rPr lang="en-US" altLang="ko-KR" sz="2800" dirty="0" smtClean="0">
-                <a:solidFill>
-                  <a:schemeClr val="accent1"/>
+              <a:t> </a:t>
+            </a:r>
+            <a:r>
+              <a:rPr lang="ko-KR" altLang="en-US" sz="2800" dirty="0">
+                <a:solidFill>
+                  <a:srgbClr val="212529"/>
                 </a:solidFill>
                 <a:latin typeface="+mn-ea"/>
               </a:rPr>
-              <a:t> </a:t>
-            </a:r>
-            <a:r>
-              <a:rPr lang="ko-KR" altLang="en-US" sz="2800" dirty="0" smtClean="0">
-                <a:solidFill>
-                  <a:srgbClr val="212529"/>
-                </a:solidFill>
-                <a:latin typeface="+mn-ea"/>
-              </a:rPr>
-              <a:t> </a:t>
-            </a:r>
-            <a:r>
-              <a:rPr lang="ko-KR" altLang="en-US" sz="2800" dirty="0">
-                <a:solidFill>
-                  <a:srgbClr val="212529"/>
-                </a:solidFill>
-                <a:latin typeface="+mn-ea"/>
-              </a:rPr>
-              <a:t>진행</a:t>
+              <a:t> 진행</a:t>
             </a:r>
           </a:p>
         </p:txBody>
@@ -26244,33 +26118,24 @@
                   <a:srgbClr val="6EC173"/>
                 </a:solidFill>
               </a:rPr>
-              <a:t>. </a:t>
-            </a:r>
-            <a:r>
-              <a:rPr lang="en-US" altLang="ko-KR" dirty="0">
-                <a:solidFill>
-                  <a:srgbClr val="6EC173"/>
-                </a:solidFill>
-              </a:rPr>
+              <a:t>.  </a:t>
+            </a:r>
+            <a:r>
+              <a:rPr lang="en-US" altLang="ko-KR" dirty="0"/>
               <a:t> </a:t>
             </a:r>
             <a:r>
-              <a:rPr lang="en-US" altLang="ko-KR" dirty="0" smtClean="0"/>
+              <a:rPr lang="en-US" altLang="ko-KR" dirty="0" err="1"/>
+              <a:t>TodoList</a:t>
+            </a:r>
+            <a:r>
+              <a:rPr lang="en-US" altLang="ko-KR" dirty="0"/>
               <a:t> </a:t>
             </a:r>
             <a:r>
-              <a:rPr lang="en-US" altLang="ko-KR" dirty="0" err="1" smtClean="0"/>
-              <a:t>TodoList</a:t>
-            </a:r>
-            <a:r>
-              <a:rPr lang="en-US" altLang="ko-KR" dirty="0" smtClean="0"/>
-              <a:t> </a:t>
-            </a:r>
-            <a:r>
-              <a:rPr lang="ko-KR" altLang="en-US" dirty="0" smtClean="0"/>
+              <a:rPr lang="ko-KR" altLang="en-US" dirty="0"/>
               <a:t>변경하기</a:t>
             </a:r>
-            <a:endParaRPr lang="ko-KR" altLang="en-US" dirty="0"/>
           </a:p>
         </p:txBody>
       </p:sp>
@@ -26544,15 +26409,6 @@
               </a:rPr>
               <a:t>강의 클릭</a:t>
             </a:r>
-            <a:r>
-              <a:rPr lang="en-US" altLang="ko-KR" dirty="0">
-                <a:solidFill>
-                  <a:srgbClr val="212529"/>
-                </a:solidFill>
-                <a:latin typeface="+mn-ea"/>
-              </a:rPr>
-              <a:t/>
-            </a:r>
             <a:br>
               <a:rPr lang="en-US" altLang="ko-KR" dirty="0">
                 <a:solidFill>
@@ -26580,7 +26436,7 @@
               <a:t>➡ </a:t>
             </a:r>
             <a:r>
-              <a:rPr lang="en-US" altLang="ko-KR" sz="2800" b="1" dirty="0" smtClean="0">
+              <a:rPr lang="en-US" altLang="ko-KR" sz="2800" b="1" dirty="0">
                 <a:solidFill>
                   <a:srgbClr val="212529"/>
                 </a:solidFill>
@@ -26589,7 +26445,7 @@
               <a:t>[</a:t>
             </a:r>
             <a:r>
-              <a:rPr lang="en-US" altLang="ko-KR" sz="2800" b="1" dirty="0" err="1" smtClean="0">
+              <a:rPr lang="en-US" altLang="ko-KR" sz="2800" b="1" dirty="0" err="1">
                 <a:solidFill>
                   <a:srgbClr val="212529"/>
                 </a:solidFill>
@@ -26598,7 +26454,7 @@
               <a:t>Javascript</a:t>
             </a:r>
             <a:r>
-              <a:rPr lang="en-US" altLang="ko-KR" sz="2800" b="1" dirty="0" smtClean="0">
+              <a:rPr lang="en-US" altLang="ko-KR" sz="2800" b="1" dirty="0">
                 <a:solidFill>
                   <a:srgbClr val="212529"/>
                 </a:solidFill>
@@ -26607,7 +26463,7 @@
               <a:t> DOM </a:t>
             </a:r>
             <a:r>
-              <a:rPr lang="ko-KR" altLang="en-US" sz="2800" b="1" dirty="0" smtClean="0">
+              <a:rPr lang="ko-KR" altLang="en-US" sz="2800" b="1" dirty="0">
                 <a:solidFill>
                   <a:srgbClr val="212529"/>
                 </a:solidFill>
@@ -26616,7 +26472,7 @@
               <a:t>실습</a:t>
             </a:r>
             <a:r>
-              <a:rPr lang="en-US" altLang="ko-KR" sz="2800" b="1" dirty="0" smtClean="0">
+              <a:rPr lang="en-US" altLang="ko-KR" sz="2800" b="1" dirty="0">
                 <a:solidFill>
                   <a:srgbClr val="212529"/>
                 </a:solidFill>
@@ -26625,7 +26481,7 @@
               <a:t>(1)]</a:t>
             </a:r>
             <a:r>
-              <a:rPr lang="en-US" altLang="ko-KR" sz="2800" dirty="0" smtClean="0">
+              <a:rPr lang="en-US" altLang="ko-KR" sz="2800" dirty="0">
                 <a:solidFill>
                   <a:srgbClr val="212529"/>
                 </a:solidFill>
@@ -26661,7 +26517,7 @@
               <a:t>➡ </a:t>
             </a:r>
             <a:r>
-              <a:rPr lang="en-US" altLang="ko-KR" sz="2800" b="1" dirty="0" smtClean="0">
+              <a:rPr lang="en-US" altLang="ko-KR" sz="2800" b="1" dirty="0">
                 <a:solidFill>
                   <a:schemeClr val="accent1"/>
                 </a:solidFill>
@@ -26670,7 +26526,7 @@
               <a:t>[</a:t>
             </a:r>
             <a:r>
-              <a:rPr lang="ko-KR" altLang="en-US" sz="2800" b="1" dirty="0" err="1" smtClean="0">
+              <a:rPr lang="ko-KR" altLang="en-US" sz="2800" b="1" dirty="0" err="1">
                 <a:solidFill>
                   <a:schemeClr val="accent1"/>
                 </a:solidFill>
@@ -26679,7 +26535,7 @@
               <a:t>실습문제</a:t>
             </a:r>
             <a:r>
-              <a:rPr lang="en-US" altLang="ko-KR" sz="2800" b="1" dirty="0" smtClean="0">
+              <a:rPr lang="en-US" altLang="ko-KR" sz="2800" b="1" dirty="0">
                 <a:solidFill>
                   <a:schemeClr val="accent1"/>
                 </a:solidFill>
@@ -26688,7 +26544,7 @@
               <a:t>2. </a:t>
             </a:r>
             <a:r>
-              <a:rPr lang="en-US" altLang="ko-KR" sz="2800" b="1" dirty="0" err="1" smtClean="0">
+              <a:rPr lang="en-US" altLang="ko-KR" sz="2800" b="1" dirty="0" err="1">
                 <a:solidFill>
                   <a:schemeClr val="accent1"/>
                 </a:solidFill>
@@ -26697,7 +26553,7 @@
               <a:t>TodoList</a:t>
             </a:r>
             <a:r>
-              <a:rPr lang="en-US" altLang="ko-KR" sz="2800" b="1" dirty="0" smtClean="0">
+              <a:rPr lang="en-US" altLang="ko-KR" sz="2800" b="1" dirty="0">
                 <a:solidFill>
                   <a:schemeClr val="accent1"/>
                 </a:solidFill>
@@ -26706,7 +26562,7 @@
               <a:t> </a:t>
             </a:r>
             <a:r>
-              <a:rPr lang="ko-KR" altLang="en-US" sz="2800" b="1" dirty="0" smtClean="0">
+              <a:rPr lang="ko-KR" altLang="en-US" sz="2800" b="1" dirty="0">
                 <a:solidFill>
                   <a:schemeClr val="accent1"/>
                 </a:solidFill>
@@ -26715,7 +26571,7 @@
               <a:t>변경하기</a:t>
             </a:r>
             <a:r>
-              <a:rPr lang="en-US" altLang="ko-KR" sz="2800" b="1" dirty="0" smtClean="0">
+              <a:rPr lang="en-US" altLang="ko-KR" sz="2800" b="1" dirty="0">
                 <a:solidFill>
                   <a:schemeClr val="accent1"/>
                 </a:solidFill>
@@ -26724,7 +26580,7 @@
               <a:t>]</a:t>
             </a:r>
             <a:r>
-              <a:rPr lang="en-US" altLang="ko-KR" sz="2800" dirty="0" smtClean="0">
+              <a:rPr lang="en-US" altLang="ko-KR" sz="2800" dirty="0">
                 <a:solidFill>
                   <a:schemeClr val="accent1"/>
                 </a:solidFill>
@@ -26733,22 +26589,13 @@
               <a:t> </a:t>
             </a:r>
             <a:r>
-              <a:rPr lang="ko-KR" altLang="en-US" sz="2800" dirty="0" smtClean="0">
+              <a:rPr lang="ko-KR" altLang="en-US" sz="2800" dirty="0">
                 <a:solidFill>
                   <a:srgbClr val="212529"/>
                 </a:solidFill>
                 <a:latin typeface="+mn-ea"/>
               </a:rPr>
-              <a:t> </a:t>
-            </a:r>
-            <a:r>
-              <a:rPr lang="ko-KR" altLang="en-US" sz="2800" dirty="0">
-                <a:solidFill>
-                  <a:srgbClr val="212529"/>
-                </a:solidFill>
-                <a:latin typeface="+mn-ea"/>
-              </a:rPr>
-              <a:t>진행</a:t>
+              <a:t> 진행</a:t>
             </a:r>
           </a:p>
         </p:txBody>
@@ -28460,7 +28307,7 @@
               <a:t>  </a:t>
             </a:r>
             <a:r>
-              <a:rPr lang="ko-KR" altLang="en-US" sz="5400" smtClean="0">
+              <a:rPr lang="ko-KR" altLang="en-US" sz="5400">
                 <a:solidFill>
                   <a:srgbClr val="FF0000"/>
                 </a:solidFill>
@@ -28469,7 +28316,7 @@
               <a:t>차이</a:t>
             </a:r>
             <a:r>
-              <a:rPr lang="en-US" altLang="ko-KR" sz="5400" smtClean="0">
+              <a:rPr lang="en-US" altLang="ko-KR" sz="5400">
                 <a:effectLst/>
               </a:rPr>
               <a:t>?</a:t>
@@ -29240,7 +29087,7 @@
               <a:t> </a:t>
             </a:r>
             <a:r>
-              <a:rPr lang="ko-KR" altLang="en-US" sz="5400" dirty="0" smtClean="0">
+              <a:rPr lang="ko-KR" altLang="en-US" sz="5400" dirty="0">
                 <a:solidFill>
                   <a:srgbClr val="FF0000"/>
                 </a:solidFill>
@@ -29249,7 +29096,7 @@
               <a:t>차이</a:t>
             </a:r>
             <a:r>
-              <a:rPr lang="en-US" altLang="ko-KR" sz="5400" dirty="0" smtClean="0">
+              <a:rPr lang="en-US" altLang="ko-KR" sz="5400" dirty="0">
                 <a:effectLst/>
               </a:rPr>
               <a:t>?</a:t>
@@ -30449,26 +30296,18 @@
                   <a:srgbClr val="6EC173"/>
                 </a:solidFill>
               </a:rPr>
-              <a:t>. </a:t>
-            </a:r>
-            <a:r>
-              <a:rPr lang="en-US" altLang="ko-KR" dirty="0">
-                <a:solidFill>
-                  <a:srgbClr val="6EC173"/>
-                </a:solidFill>
-              </a:rPr>
+              <a:t>.  </a:t>
+            </a:r>
+            <a:r>
+              <a:rPr lang="en-US" altLang="ko-KR" dirty="0"/>
               <a:t> </a:t>
             </a:r>
             <a:r>
-              <a:rPr lang="en-US" altLang="ko-KR" dirty="0" smtClean="0"/>
-              <a:t> </a:t>
-            </a:r>
-            <a:r>
-              <a:rPr lang="ko-KR" altLang="en-US" dirty="0" smtClean="0"/>
+              <a:rPr lang="ko-KR" altLang="en-US" dirty="0"/>
               <a:t>아이스크림 베스트</a:t>
             </a:r>
             <a:r>
-              <a:rPr lang="en-US" altLang="ko-KR" dirty="0" smtClean="0"/>
+              <a:rPr lang="en-US" altLang="ko-KR" dirty="0"/>
               <a:t>9</a:t>
             </a:r>
             <a:endParaRPr lang="ko-KR" altLang="en-US" dirty="0"/>
@@ -30745,15 +30584,6 @@
               </a:rPr>
               <a:t>강의 클릭</a:t>
             </a:r>
-            <a:r>
-              <a:rPr lang="en-US" altLang="ko-KR" dirty="0">
-                <a:solidFill>
-                  <a:srgbClr val="212529"/>
-                </a:solidFill>
-                <a:latin typeface="+mn-ea"/>
-              </a:rPr>
-              <a:t/>
-            </a:r>
             <a:br>
               <a:rPr lang="en-US" altLang="ko-KR" dirty="0">
                 <a:solidFill>
@@ -30781,7 +30611,7 @@
               <a:t>➡ </a:t>
             </a:r>
             <a:r>
-              <a:rPr lang="en-US" altLang="ko-KR" sz="2800" b="1" dirty="0" smtClean="0">
+              <a:rPr lang="en-US" altLang="ko-KR" sz="2800" b="1" dirty="0">
                 <a:solidFill>
                   <a:srgbClr val="212529"/>
                 </a:solidFill>
@@ -30790,7 +30620,7 @@
               <a:t>[</a:t>
             </a:r>
             <a:r>
-              <a:rPr lang="en-US" altLang="ko-KR" sz="2800" b="1" dirty="0" err="1" smtClean="0">
+              <a:rPr lang="en-US" altLang="ko-KR" sz="2800" b="1" dirty="0" err="1">
                 <a:solidFill>
                   <a:srgbClr val="212529"/>
                 </a:solidFill>
@@ -30799,7 +30629,7 @@
               <a:t>Javascript</a:t>
             </a:r>
             <a:r>
-              <a:rPr lang="en-US" altLang="ko-KR" sz="2800" b="1" dirty="0" smtClean="0">
+              <a:rPr lang="en-US" altLang="ko-KR" sz="2800" b="1" dirty="0">
                 <a:solidFill>
                   <a:srgbClr val="212529"/>
                 </a:solidFill>
@@ -30808,7 +30638,7 @@
               <a:t> DOM </a:t>
             </a:r>
             <a:r>
-              <a:rPr lang="ko-KR" altLang="en-US" sz="2800" b="1" dirty="0" smtClean="0">
+              <a:rPr lang="ko-KR" altLang="en-US" sz="2800" b="1" dirty="0">
                 <a:solidFill>
                   <a:srgbClr val="212529"/>
                 </a:solidFill>
@@ -30817,7 +30647,7 @@
               <a:t>실습</a:t>
             </a:r>
             <a:r>
-              <a:rPr lang="en-US" altLang="ko-KR" sz="2800" b="1" dirty="0" smtClean="0">
+              <a:rPr lang="en-US" altLang="ko-KR" sz="2800" b="1" dirty="0">
                 <a:solidFill>
                   <a:srgbClr val="212529"/>
                 </a:solidFill>
@@ -30826,7 +30656,7 @@
               <a:t>(1)]</a:t>
             </a:r>
             <a:r>
-              <a:rPr lang="en-US" altLang="ko-KR" sz="2800" dirty="0" smtClean="0">
+              <a:rPr lang="en-US" altLang="ko-KR" sz="2800" dirty="0">
                 <a:solidFill>
                   <a:srgbClr val="212529"/>
                 </a:solidFill>
@@ -30862,7 +30692,7 @@
               <a:t>➡ </a:t>
             </a:r>
             <a:r>
-              <a:rPr lang="en-US" altLang="ko-KR" sz="2800" b="1" dirty="0" smtClean="0">
+              <a:rPr lang="en-US" altLang="ko-KR" sz="2800" b="1" dirty="0">
                 <a:solidFill>
                   <a:schemeClr val="accent1"/>
                 </a:solidFill>
@@ -30871,7 +30701,7 @@
               <a:t>[</a:t>
             </a:r>
             <a:r>
-              <a:rPr lang="ko-KR" altLang="en-US" sz="2800" b="1" dirty="0" err="1" smtClean="0">
+              <a:rPr lang="ko-KR" altLang="en-US" sz="2800" b="1" dirty="0" err="1">
                 <a:solidFill>
                   <a:schemeClr val="accent1"/>
                 </a:solidFill>
@@ -30886,70 +30716,43 @@
                 </a:solidFill>
                 <a:latin typeface="+mn-ea"/>
               </a:rPr>
-              <a:t>3</a:t>
-            </a:r>
-            <a:r>
-              <a:rPr lang="en-US" altLang="ko-KR" sz="2800" b="1" dirty="0" smtClean="0">
+              <a:t>3. </a:t>
+            </a:r>
+            <a:r>
+              <a:rPr lang="ko-KR" altLang="en-US" sz="2800" b="1" dirty="0">
                 <a:solidFill>
                   <a:schemeClr val="accent1"/>
                 </a:solidFill>
                 <a:latin typeface="+mn-ea"/>
               </a:rPr>
-              <a:t>. </a:t>
-            </a:r>
-            <a:r>
-              <a:rPr lang="ko-KR" altLang="en-US" sz="2800" b="1" dirty="0" smtClean="0">
+              <a:t>아이스크림 베스트</a:t>
+            </a:r>
+            <a:r>
+              <a:rPr lang="en-US" altLang="ko-KR" sz="2800" b="1" dirty="0">
                 <a:solidFill>
                   <a:schemeClr val="accent1"/>
                 </a:solidFill>
                 <a:latin typeface="+mn-ea"/>
               </a:rPr>
-              <a:t>아이스크림 베스트</a:t>
-            </a:r>
-            <a:r>
-              <a:rPr lang="en-US" altLang="ko-KR" sz="2800" b="1" dirty="0">
+              <a:t>9]</a:t>
+            </a:r>
+            <a:r>
+              <a:rPr lang="en-US" altLang="ko-KR" sz="2800" dirty="0">
                 <a:solidFill>
                   <a:schemeClr val="accent1"/>
                 </a:solidFill>
                 <a:latin typeface="+mn-ea"/>
               </a:rPr>
-              <a:t>9</a:t>
-            </a:r>
-            <a:r>
-              <a:rPr lang="en-US" altLang="ko-KR" sz="2800" b="1" dirty="0" smtClean="0">
-                <a:solidFill>
-                  <a:schemeClr val="accent1"/>
+              <a:t> </a:t>
+            </a:r>
+            <a:r>
+              <a:rPr lang="ko-KR" altLang="en-US" sz="2800" dirty="0">
+                <a:solidFill>
+                  <a:srgbClr val="212529"/>
                 </a:solidFill>
                 <a:latin typeface="+mn-ea"/>
               </a:rPr>
-              <a:t>]</a:t>
-            </a:r>
-            <a:r>
-              <a:rPr lang="en-US" altLang="ko-KR" sz="2800" dirty="0" smtClean="0">
-                <a:solidFill>
-                  <a:schemeClr val="accent1"/>
-                </a:solidFill>
-                <a:latin typeface="+mn-ea"/>
-              </a:rPr>
-              <a:t> </a:t>
-            </a:r>
-            <a:r>
-              <a:rPr lang="ko-KR" altLang="en-US" sz="2800" dirty="0" smtClean="0">
-                <a:solidFill>
-                  <a:srgbClr val="212529"/>
-                </a:solidFill>
-                <a:latin typeface="+mn-ea"/>
-              </a:rPr>
-              <a:t> </a:t>
-            </a:r>
-            <a:r>
-              <a:rPr lang="ko-KR" altLang="en-US" sz="2800" dirty="0">
-                <a:solidFill>
-                  <a:srgbClr val="212529"/>
-                </a:solidFill>
-                <a:latin typeface="+mn-ea"/>
-              </a:rPr>
-              <a:t>진행</a:t>
+              <a:t> 진행</a:t>
             </a:r>
           </a:p>
         </p:txBody>
@@ -31054,10 +30857,6 @@
               <a:rPr lang="ko-KR" altLang="en-US" sz="7200" dirty="0"/>
               <a:t>이벤트 </a:t>
             </a:r>
-            <a:r>
-              <a:rPr lang="en-US" altLang="ko-KR" sz="7200" dirty="0"/>
-              <a:t/>
-            </a:r>
             <a:br>
               <a:rPr lang="en-US" altLang="ko-KR" sz="7200" dirty="0"/>
             </a:br>
@@ -31545,7 +31344,7 @@
             </a:r>
           </a:p>
           <a:p>
-            <a:r>
+            <a:br>
               <a:rPr lang="en-US" altLang="ko-KR" b="0" dirty="0">
                 <a:solidFill>
                   <a:srgbClr val="D4D4D4"/>
@@ -31553,89 +31352,69 @@
                 <a:effectLst/>
                 <a:latin typeface="Consolas" panose="020B0609020204030204" pitchFamily="49" charset="0"/>
               </a:rPr>
-              <a:t/>
-            </a:r>
-            <a:br>
+            </a:br>
+            <a:r>
               <a:rPr lang="en-US" altLang="ko-KR" b="0" dirty="0">
                 <a:solidFill>
-                  <a:srgbClr val="D4D4D4"/>
+                  <a:srgbClr val="9CDCFE"/>
                 </a:solidFill>
                 <a:effectLst/>
                 <a:latin typeface="Consolas" panose="020B0609020204030204" pitchFamily="49" charset="0"/>
               </a:rPr>
-            </a:br>
+              <a:t>console</a:t>
+            </a:r>
             <a:r>
               <a:rPr lang="en-US" altLang="ko-KR" b="0" dirty="0">
                 <a:solidFill>
-                  <a:srgbClr val="9CDCFE"/>
+                  <a:srgbClr val="D4D4D4"/>
                 </a:solidFill>
                 <a:effectLst/>
                 <a:latin typeface="Consolas" panose="020B0609020204030204" pitchFamily="49" charset="0"/>
               </a:rPr>
-              <a:t>console</a:t>
+              <a:t>.</a:t>
             </a:r>
             <a:r>
               <a:rPr lang="en-US" altLang="ko-KR" b="0" dirty="0">
                 <a:solidFill>
-                  <a:srgbClr val="D4D4D4"/>
+                  <a:srgbClr val="DCDCAA"/>
                 </a:solidFill>
                 <a:effectLst/>
                 <a:latin typeface="Consolas" panose="020B0609020204030204" pitchFamily="49" charset="0"/>
               </a:rPr>
-              <a:t>.</a:t>
+              <a:t>log</a:t>
             </a:r>
             <a:r>
               <a:rPr lang="en-US" altLang="ko-KR" b="0" dirty="0">
                 <a:solidFill>
-                  <a:srgbClr val="DCDCAA"/>
+                  <a:srgbClr val="D4D4D4"/>
                 </a:solidFill>
                 <a:effectLst/>
                 <a:latin typeface="Consolas" panose="020B0609020204030204" pitchFamily="49" charset="0"/>
               </a:rPr>
-              <a:t>log</a:t>
-            </a:r>
-            <a:r>
-              <a:rPr lang="en-US" altLang="ko-KR" b="0" dirty="0">
-                <a:solidFill>
-                  <a:srgbClr val="D4D4D4"/>
+              <a:t>(</a:t>
+            </a:r>
+            <a:r>
+              <a:rPr lang="en-US" altLang="ko-KR" b="0" dirty="0" err="1">
+                <a:solidFill>
+                  <a:srgbClr val="9CDCFE"/>
                 </a:solidFill>
                 <a:effectLst/>
                 <a:latin typeface="Consolas" panose="020B0609020204030204" pitchFamily="49" charset="0"/>
               </a:rPr>
-              <a:t>(</a:t>
-            </a:r>
-            <a:r>
-              <a:rPr lang="en-US" altLang="ko-KR" b="0" dirty="0" err="1">
-                <a:solidFill>
-                  <a:srgbClr val="9CDCFE"/>
+              <a:t>boxEl</a:t>
+            </a:r>
+            <a:r>
+              <a:rPr lang="en-US" altLang="ko-KR" b="0" dirty="0">
+                <a:solidFill>
+                  <a:srgbClr val="D4D4D4"/>
                 </a:solidFill>
                 <a:effectLst/>
                 <a:latin typeface="Consolas" panose="020B0609020204030204" pitchFamily="49" charset="0"/>
               </a:rPr>
-              <a:t>boxEl</a:t>
-            </a:r>
-            <a:r>
-              <a:rPr lang="en-US" altLang="ko-KR" b="0" dirty="0">
-                <a:solidFill>
-                  <a:srgbClr val="D4D4D4"/>
-                </a:solidFill>
-                <a:effectLst/>
-                <a:latin typeface="Consolas" panose="020B0609020204030204" pitchFamily="49" charset="0"/>
-              </a:rPr>
               <a:t>);</a:t>
             </a:r>
           </a:p>
           <a:p>
-            <a:r>
-              <a:rPr lang="en-US" altLang="ko-KR" b="0" dirty="0">
-                <a:solidFill>
-                  <a:srgbClr val="D4D4D4"/>
-                </a:solidFill>
-                <a:effectLst/>
-                <a:latin typeface="Consolas" panose="020B0609020204030204" pitchFamily="49" charset="0"/>
-              </a:rPr>
-              <a:t/>
-            </a:r>
             <a:br>
               <a:rPr lang="en-US" altLang="ko-KR" b="0" dirty="0">
                 <a:solidFill>
@@ -33205,25 +32984,16 @@
                   <a:srgbClr val="6EC173"/>
                 </a:solidFill>
               </a:rPr>
-              <a:t>. </a:t>
-            </a:r>
-            <a:r>
-              <a:rPr lang="en-US" altLang="ko-KR" dirty="0">
-                <a:solidFill>
-                  <a:srgbClr val="6EC173"/>
-                </a:solidFill>
-              </a:rPr>
+              <a:t>.  </a:t>
+            </a:r>
+            <a:r>
+              <a:rPr lang="en-US" altLang="ko-KR" dirty="0"/>
               <a:t> </a:t>
             </a:r>
             <a:r>
-              <a:rPr lang="en-US" altLang="ko-KR" dirty="0" smtClean="0"/>
-              <a:t> </a:t>
-            </a:r>
-            <a:r>
-              <a:rPr lang="ko-KR" altLang="en-US" dirty="0" smtClean="0"/>
+              <a:rPr lang="ko-KR" altLang="en-US" dirty="0"/>
               <a:t>이벤트 다루기</a:t>
             </a:r>
-            <a:endParaRPr lang="ko-KR" altLang="en-US" dirty="0"/>
           </a:p>
         </p:txBody>
       </p:sp>
@@ -33497,15 +33267,6 @@
               </a:rPr>
               <a:t>강의 클릭</a:t>
             </a:r>
-            <a:r>
-              <a:rPr lang="en-US" altLang="ko-KR" dirty="0">
-                <a:solidFill>
-                  <a:srgbClr val="212529"/>
-                </a:solidFill>
-                <a:latin typeface="+mn-ea"/>
-              </a:rPr>
-              <a:t/>
-            </a:r>
             <a:br>
               <a:rPr lang="en-US" altLang="ko-KR" dirty="0">
                 <a:solidFill>
@@ -33533,7 +33294,7 @@
               <a:t>➡ </a:t>
             </a:r>
             <a:r>
-              <a:rPr lang="en-US" altLang="ko-KR" sz="2800" b="1" dirty="0" smtClean="0">
+              <a:rPr lang="en-US" altLang="ko-KR" sz="2800" b="1" dirty="0">
                 <a:solidFill>
                   <a:srgbClr val="212529"/>
                 </a:solidFill>
@@ -33542,7 +33303,7 @@
               <a:t>[</a:t>
             </a:r>
             <a:r>
-              <a:rPr lang="en-US" altLang="ko-KR" sz="2800" b="1" dirty="0" err="1" smtClean="0">
+              <a:rPr lang="en-US" altLang="ko-KR" sz="2800" b="1" dirty="0" err="1">
                 <a:solidFill>
                   <a:srgbClr val="212529"/>
                 </a:solidFill>
@@ -33551,7 +33312,7 @@
               <a:t>Javascript</a:t>
             </a:r>
             <a:r>
-              <a:rPr lang="en-US" altLang="ko-KR" sz="2800" b="1" dirty="0" smtClean="0">
+              <a:rPr lang="en-US" altLang="ko-KR" sz="2800" b="1" dirty="0">
                 <a:solidFill>
                   <a:srgbClr val="212529"/>
                 </a:solidFill>
@@ -33560,7 +33321,7 @@
               <a:t> DOM </a:t>
             </a:r>
             <a:r>
-              <a:rPr lang="ko-KR" altLang="en-US" sz="2800" b="1" dirty="0" smtClean="0">
+              <a:rPr lang="ko-KR" altLang="en-US" sz="2800" b="1" dirty="0">
                 <a:solidFill>
                   <a:srgbClr val="212529"/>
                 </a:solidFill>
@@ -33569,7 +33330,7 @@
               <a:t>실습</a:t>
             </a:r>
             <a:r>
-              <a:rPr lang="en-US" altLang="ko-KR" sz="2800" b="1" dirty="0" smtClean="0">
+              <a:rPr lang="en-US" altLang="ko-KR" sz="2800" b="1" dirty="0">
                 <a:solidFill>
                   <a:srgbClr val="212529"/>
                 </a:solidFill>
@@ -33578,7 +33339,7 @@
               <a:t>(2)]</a:t>
             </a:r>
             <a:r>
-              <a:rPr lang="en-US" altLang="ko-KR" sz="2800" dirty="0" smtClean="0">
+              <a:rPr lang="en-US" altLang="ko-KR" sz="2800" dirty="0">
                 <a:solidFill>
                   <a:srgbClr val="212529"/>
                 </a:solidFill>
@@ -33614,7 +33375,7 @@
               <a:t>➡ </a:t>
             </a:r>
             <a:r>
-              <a:rPr lang="en-US" altLang="ko-KR" sz="2800" b="1" dirty="0" smtClean="0">
+              <a:rPr lang="en-US" altLang="ko-KR" sz="2800" b="1" dirty="0">
                 <a:solidFill>
                   <a:schemeClr val="accent1"/>
                 </a:solidFill>
@@ -33623,7 +33384,7 @@
               <a:t>[</a:t>
             </a:r>
             <a:r>
-              <a:rPr lang="ko-KR" altLang="en-US" sz="2800" b="1" dirty="0" err="1" smtClean="0">
+              <a:rPr lang="ko-KR" altLang="en-US" sz="2800" b="1" dirty="0" err="1">
                 <a:solidFill>
                   <a:schemeClr val="accent1"/>
                 </a:solidFill>
@@ -33632,7 +33393,7 @@
               <a:t>실습문제</a:t>
             </a:r>
             <a:r>
-              <a:rPr lang="en-US" altLang="ko-KR" sz="2800" b="1" dirty="0" smtClean="0">
+              <a:rPr lang="en-US" altLang="ko-KR" sz="2800" b="1" dirty="0">
                 <a:solidFill>
                   <a:schemeClr val="accent1"/>
                 </a:solidFill>
@@ -33641,7 +33402,7 @@
               <a:t>1. </a:t>
             </a:r>
             <a:r>
-              <a:rPr lang="ko-KR" altLang="en-US" sz="2800" b="1" dirty="0" smtClean="0">
+              <a:rPr lang="ko-KR" altLang="en-US" sz="2800" b="1" dirty="0">
                 <a:solidFill>
                   <a:schemeClr val="accent1"/>
                 </a:solidFill>
@@ -33650,7 +33411,7 @@
               <a:t>랜덤 색상 </a:t>
             </a:r>
             <a:r>
-              <a:rPr lang="ko-KR" altLang="en-US" sz="2800" b="1" dirty="0" err="1" smtClean="0">
+              <a:rPr lang="ko-KR" altLang="en-US" sz="2800" b="1" dirty="0" err="1">
                 <a:solidFill>
                   <a:schemeClr val="accent1"/>
                 </a:solidFill>
@@ -33659,7 +33420,7 @@
               <a:t>생성기</a:t>
             </a:r>
             <a:r>
-              <a:rPr lang="en-US" altLang="ko-KR" sz="2800" b="1" dirty="0" smtClean="0">
+              <a:rPr lang="en-US" altLang="ko-KR" sz="2800" b="1" dirty="0">
                 <a:solidFill>
                   <a:schemeClr val="accent1"/>
                 </a:solidFill>
@@ -33668,7 +33429,7 @@
               <a:t>]</a:t>
             </a:r>
             <a:r>
-              <a:rPr lang="en-US" altLang="ko-KR" sz="2800" dirty="0" smtClean="0">
+              <a:rPr lang="en-US" altLang="ko-KR" sz="2800" dirty="0">
                 <a:solidFill>
                   <a:schemeClr val="accent1"/>
                 </a:solidFill>
@@ -33677,22 +33438,13 @@
               <a:t> </a:t>
             </a:r>
             <a:r>
-              <a:rPr lang="ko-KR" altLang="en-US" sz="2800" dirty="0" smtClean="0">
+              <a:rPr lang="ko-KR" altLang="en-US" sz="2800" dirty="0">
                 <a:solidFill>
                   <a:srgbClr val="212529"/>
                 </a:solidFill>
                 <a:latin typeface="+mn-ea"/>
               </a:rPr>
-              <a:t> </a:t>
-            </a:r>
-            <a:r>
-              <a:rPr lang="ko-KR" altLang="en-US" sz="2800" dirty="0">
-                <a:solidFill>
-                  <a:srgbClr val="212529"/>
-                </a:solidFill>
-                <a:latin typeface="+mn-ea"/>
-              </a:rPr>
-              <a:t>진행</a:t>
+              <a:t> 진행</a:t>
             </a:r>
           </a:p>
         </p:txBody>
@@ -33861,26 +33613,18 @@
                   <a:srgbClr val="6EC173"/>
                 </a:solidFill>
               </a:rPr>
-              <a:t>. </a:t>
-            </a:r>
-            <a:r>
-              <a:rPr lang="en-US" altLang="ko-KR" dirty="0">
-                <a:solidFill>
-                  <a:srgbClr val="6EC173"/>
-                </a:solidFill>
-              </a:rPr>
+              <a:t>.  </a:t>
+            </a:r>
+            <a:r>
+              <a:rPr lang="en-US" altLang="ko-KR" dirty="0"/>
               <a:t> </a:t>
             </a:r>
             <a:r>
-              <a:rPr lang="en-US" altLang="ko-KR" dirty="0" smtClean="0"/>
-              <a:t> </a:t>
-            </a:r>
-            <a:r>
-              <a:rPr lang="ko-KR" altLang="en-US" dirty="0" smtClean="0"/>
+              <a:rPr lang="ko-KR" altLang="en-US" dirty="0"/>
               <a:t>이벤트 다루기</a:t>
             </a:r>
             <a:r>
-              <a:rPr lang="en-US" altLang="ko-KR" dirty="0" smtClean="0"/>
+              <a:rPr lang="en-US" altLang="ko-KR" dirty="0"/>
               <a:t>(2)</a:t>
             </a:r>
             <a:endParaRPr lang="ko-KR" altLang="en-US" dirty="0"/>
@@ -34157,15 +33901,6 @@
               </a:rPr>
               <a:t>강의 클릭</a:t>
             </a:r>
-            <a:r>
-              <a:rPr lang="en-US" altLang="ko-KR" dirty="0">
-                <a:solidFill>
-                  <a:srgbClr val="212529"/>
-                </a:solidFill>
-                <a:latin typeface="+mn-ea"/>
-              </a:rPr>
-              <a:t/>
-            </a:r>
             <a:br>
               <a:rPr lang="en-US" altLang="ko-KR" dirty="0">
                 <a:solidFill>
@@ -34193,7 +33928,7 @@
               <a:t>➡ </a:t>
             </a:r>
             <a:r>
-              <a:rPr lang="en-US" altLang="ko-KR" sz="2800" b="1" dirty="0" smtClean="0">
+              <a:rPr lang="en-US" altLang="ko-KR" sz="2800" b="1" dirty="0">
                 <a:solidFill>
                   <a:srgbClr val="212529"/>
                 </a:solidFill>
@@ -34202,7 +33937,7 @@
               <a:t>[</a:t>
             </a:r>
             <a:r>
-              <a:rPr lang="en-US" altLang="ko-KR" sz="2800" b="1" dirty="0" err="1" smtClean="0">
+              <a:rPr lang="en-US" altLang="ko-KR" sz="2800" b="1" dirty="0" err="1">
                 <a:solidFill>
                   <a:srgbClr val="212529"/>
                 </a:solidFill>
@@ -34211,7 +33946,7 @@
               <a:t>Javascript</a:t>
             </a:r>
             <a:r>
-              <a:rPr lang="en-US" altLang="ko-KR" sz="2800" b="1" dirty="0" smtClean="0">
+              <a:rPr lang="en-US" altLang="ko-KR" sz="2800" b="1" dirty="0">
                 <a:solidFill>
                   <a:srgbClr val="212529"/>
                 </a:solidFill>
@@ -34220,7 +33955,7 @@
               <a:t> DOM </a:t>
             </a:r>
             <a:r>
-              <a:rPr lang="ko-KR" altLang="en-US" sz="2800" b="1" dirty="0" smtClean="0">
+              <a:rPr lang="ko-KR" altLang="en-US" sz="2800" b="1" dirty="0">
                 <a:solidFill>
                   <a:srgbClr val="212529"/>
                 </a:solidFill>
@@ -34229,7 +33964,7 @@
               <a:t>실습</a:t>
             </a:r>
             <a:r>
-              <a:rPr lang="en-US" altLang="ko-KR" sz="2800" b="1" dirty="0" smtClean="0">
+              <a:rPr lang="en-US" altLang="ko-KR" sz="2800" b="1" dirty="0">
                 <a:solidFill>
                   <a:srgbClr val="212529"/>
                 </a:solidFill>
@@ -34238,7 +33973,7 @@
               <a:t>(2)]</a:t>
             </a:r>
             <a:r>
-              <a:rPr lang="en-US" altLang="ko-KR" sz="2800" dirty="0" smtClean="0">
+              <a:rPr lang="en-US" altLang="ko-KR" sz="2800" dirty="0">
                 <a:solidFill>
                   <a:srgbClr val="212529"/>
                 </a:solidFill>
@@ -34274,7 +34009,7 @@
               <a:t>➡ </a:t>
             </a:r>
             <a:r>
-              <a:rPr lang="en-US" altLang="ko-KR" sz="2800" b="1" dirty="0" smtClean="0">
+              <a:rPr lang="en-US" altLang="ko-KR" sz="2800" b="1" dirty="0">
                 <a:solidFill>
                   <a:schemeClr val="accent1"/>
                 </a:solidFill>
@@ -34283,7 +34018,7 @@
               <a:t>[</a:t>
             </a:r>
             <a:r>
-              <a:rPr lang="ko-KR" altLang="en-US" sz="2800" b="1" dirty="0" err="1" smtClean="0">
+              <a:rPr lang="ko-KR" altLang="en-US" sz="2800" b="1" dirty="0" err="1">
                 <a:solidFill>
                   <a:schemeClr val="accent1"/>
                 </a:solidFill>
@@ -34292,67 +34027,49 @@
               <a:t>실습문제</a:t>
             </a:r>
             <a:r>
-              <a:rPr lang="en-US" altLang="ko-KR" sz="2800" b="1" dirty="0" smtClean="0">
+              <a:rPr lang="en-US" altLang="ko-KR" sz="2800" b="1" dirty="0">
                 <a:solidFill>
                   <a:schemeClr val="accent1"/>
                 </a:solidFill>
                 <a:latin typeface="+mn-ea"/>
               </a:rPr>
-              <a:t>2</a:t>
-            </a:r>
-            <a:r>
-              <a:rPr lang="en-US" altLang="ko-KR" sz="2800" b="1" dirty="0" smtClean="0">
+              <a:t>2. </a:t>
+            </a:r>
+            <a:r>
+              <a:rPr lang="ko-KR" altLang="en-US" sz="2800" b="1" dirty="0">
                 <a:solidFill>
                   <a:schemeClr val="accent1"/>
                 </a:solidFill>
                 <a:latin typeface="+mn-ea"/>
               </a:rPr>
-              <a:t>. </a:t>
-            </a:r>
-            <a:r>
-              <a:rPr lang="ko-KR" altLang="en-US" sz="2800" b="1" dirty="0" smtClean="0">
+              <a:t>댓글 등록하기</a:t>
+            </a:r>
+            <a:r>
+              <a:rPr lang="en-US" altLang="ko-KR" sz="2800" b="1" dirty="0">
                 <a:solidFill>
                   <a:schemeClr val="accent1"/>
                 </a:solidFill>
                 <a:latin typeface="+mn-ea"/>
               </a:rPr>
-              <a:t>댓글 등록하기</a:t>
-            </a:r>
-            <a:r>
-              <a:rPr lang="en-US" altLang="ko-KR" sz="2800" b="1" dirty="0" smtClean="0">
+              <a:t>]</a:t>
+            </a:r>
+            <a:r>
+              <a:rPr lang="en-US" altLang="ko-KR" sz="2800" dirty="0">
                 <a:solidFill>
                   <a:schemeClr val="accent1"/>
                 </a:solidFill>
                 <a:latin typeface="+mn-ea"/>
               </a:rPr>
-              <a:t>]</a:t>
-            </a:r>
-            <a:r>
-              <a:rPr lang="en-US" altLang="ko-KR" sz="2800" dirty="0" smtClean="0">
-                <a:solidFill>
-                  <a:schemeClr val="accent1"/>
+              <a:t> </a:t>
+            </a:r>
+            <a:r>
+              <a:rPr lang="ko-KR" altLang="en-US" sz="2800" dirty="0">
+                <a:solidFill>
+                  <a:srgbClr val="212529"/>
                 </a:solidFill>
                 <a:latin typeface="+mn-ea"/>
               </a:rPr>
-              <a:t> </a:t>
-            </a:r>
-            <a:r>
-              <a:rPr lang="ko-KR" altLang="en-US" sz="2800" dirty="0" smtClean="0">
-                <a:solidFill>
-                  <a:srgbClr val="212529"/>
-                </a:solidFill>
-                <a:latin typeface="+mn-ea"/>
-              </a:rPr>
-              <a:t> </a:t>
-            </a:r>
-            <a:r>
-              <a:rPr lang="ko-KR" altLang="en-US" sz="2800" dirty="0">
-                <a:solidFill>
-                  <a:srgbClr val="212529"/>
-                </a:solidFill>
-                <a:latin typeface="+mn-ea"/>
-              </a:rPr>
-              <a:t>진행</a:t>
+              <a:t> 진행</a:t>
             </a:r>
           </a:p>
         </p:txBody>
@@ -34521,26 +34238,18 @@
                   <a:srgbClr val="6EC173"/>
                 </a:solidFill>
               </a:rPr>
-              <a:t>. </a:t>
-            </a:r>
-            <a:r>
-              <a:rPr lang="en-US" altLang="ko-KR" dirty="0">
-                <a:solidFill>
-                  <a:srgbClr val="6EC173"/>
-                </a:solidFill>
-              </a:rPr>
+              <a:t>.  </a:t>
+            </a:r>
+            <a:r>
+              <a:rPr lang="en-US" altLang="ko-KR" dirty="0"/>
               <a:t> </a:t>
             </a:r>
             <a:r>
-              <a:rPr lang="en-US" altLang="ko-KR" dirty="0" smtClean="0"/>
-              <a:t> </a:t>
-            </a:r>
-            <a:r>
-              <a:rPr lang="ko-KR" altLang="en-US" dirty="0" smtClean="0"/>
+              <a:rPr lang="ko-KR" altLang="en-US" dirty="0"/>
               <a:t>이벤트 다루기</a:t>
             </a:r>
             <a:r>
-              <a:rPr lang="en-US" altLang="ko-KR" dirty="0" smtClean="0"/>
+              <a:rPr lang="en-US" altLang="ko-KR" dirty="0"/>
               <a:t>(3)</a:t>
             </a:r>
             <a:endParaRPr lang="ko-KR" altLang="en-US" dirty="0"/>
@@ -34817,15 +34526,6 @@
               </a:rPr>
               <a:t>강의 클릭</a:t>
             </a:r>
-            <a:r>
-              <a:rPr lang="en-US" altLang="ko-KR" dirty="0">
-                <a:solidFill>
-                  <a:srgbClr val="212529"/>
-                </a:solidFill>
-                <a:latin typeface="+mn-ea"/>
-              </a:rPr>
-              <a:t/>
-            </a:r>
             <a:br>
               <a:rPr lang="en-US" altLang="ko-KR" dirty="0">
                 <a:solidFill>
@@ -34853,7 +34553,7 @@
               <a:t>➡ </a:t>
             </a:r>
             <a:r>
-              <a:rPr lang="en-US" altLang="ko-KR" sz="2800" b="1" dirty="0" smtClean="0">
+              <a:rPr lang="en-US" altLang="ko-KR" sz="2800" b="1" dirty="0">
                 <a:solidFill>
                   <a:srgbClr val="212529"/>
                 </a:solidFill>
@@ -34862,7 +34562,7 @@
               <a:t>[</a:t>
             </a:r>
             <a:r>
-              <a:rPr lang="en-US" altLang="ko-KR" sz="2800" b="1" dirty="0" err="1" smtClean="0">
+              <a:rPr lang="en-US" altLang="ko-KR" sz="2800" b="1" dirty="0" err="1">
                 <a:solidFill>
                   <a:srgbClr val="212529"/>
                 </a:solidFill>
@@ -34871,7 +34571,7 @@
               <a:t>Javascript</a:t>
             </a:r>
             <a:r>
-              <a:rPr lang="en-US" altLang="ko-KR" sz="2800" b="1" dirty="0" smtClean="0">
+              <a:rPr lang="en-US" altLang="ko-KR" sz="2800" b="1" dirty="0">
                 <a:solidFill>
                   <a:srgbClr val="212529"/>
                 </a:solidFill>
@@ -34880,7 +34580,7 @@
               <a:t> DOM </a:t>
             </a:r>
             <a:r>
-              <a:rPr lang="ko-KR" altLang="en-US" sz="2800" b="1" dirty="0" smtClean="0">
+              <a:rPr lang="ko-KR" altLang="en-US" sz="2800" b="1" dirty="0">
                 <a:solidFill>
                   <a:srgbClr val="212529"/>
                 </a:solidFill>
@@ -34889,7 +34589,7 @@
               <a:t>실습</a:t>
             </a:r>
             <a:r>
-              <a:rPr lang="en-US" altLang="ko-KR" sz="2800" b="1" dirty="0" smtClean="0">
+              <a:rPr lang="en-US" altLang="ko-KR" sz="2800" b="1" dirty="0">
                 <a:solidFill>
                   <a:srgbClr val="212529"/>
                 </a:solidFill>
@@ -34898,7 +34598,7 @@
               <a:t>(2)]</a:t>
             </a:r>
             <a:r>
-              <a:rPr lang="en-US" altLang="ko-KR" sz="2800" dirty="0" smtClean="0">
+              <a:rPr lang="en-US" altLang="ko-KR" sz="2800" dirty="0">
                 <a:solidFill>
                   <a:srgbClr val="212529"/>
                 </a:solidFill>
@@ -34934,7 +34634,7 @@
               <a:t>➡ </a:t>
             </a:r>
             <a:r>
-              <a:rPr lang="en-US" altLang="ko-KR" sz="2800" b="1" dirty="0" smtClean="0">
+              <a:rPr lang="en-US" altLang="ko-KR" sz="2800" b="1" dirty="0">
                 <a:solidFill>
                   <a:schemeClr val="accent1"/>
                 </a:solidFill>
@@ -34943,7 +34643,7 @@
               <a:t>[</a:t>
             </a:r>
             <a:r>
-              <a:rPr lang="ko-KR" altLang="en-US" sz="2800" b="1" dirty="0" err="1" smtClean="0">
+              <a:rPr lang="ko-KR" altLang="en-US" sz="2800" b="1" dirty="0" err="1">
                 <a:solidFill>
                   <a:schemeClr val="accent1"/>
                 </a:solidFill>
@@ -34958,61 +34658,43 @@
                 </a:solidFill>
                 <a:latin typeface="+mn-ea"/>
               </a:rPr>
-              <a:t>3</a:t>
-            </a:r>
-            <a:r>
-              <a:rPr lang="en-US" altLang="ko-KR" sz="2800" b="1" dirty="0" smtClean="0">
+              <a:t>3. </a:t>
+            </a:r>
+            <a:r>
+              <a:rPr lang="ko-KR" altLang="en-US" sz="2800" b="1" dirty="0">
                 <a:solidFill>
                   <a:schemeClr val="accent1"/>
                 </a:solidFill>
                 <a:latin typeface="+mn-ea"/>
               </a:rPr>
-              <a:t>. </a:t>
-            </a:r>
-            <a:r>
-              <a:rPr lang="ko-KR" altLang="en-US" sz="2800" b="1" dirty="0" smtClean="0">
+              <a:t>계산기 만들기</a:t>
+            </a:r>
+            <a:r>
+              <a:rPr lang="en-US" altLang="ko-KR" sz="2800" b="1" dirty="0">
                 <a:solidFill>
                   <a:schemeClr val="accent1"/>
                 </a:solidFill>
                 <a:latin typeface="+mn-ea"/>
               </a:rPr>
-              <a:t>계산기 만들기</a:t>
-            </a:r>
-            <a:r>
-              <a:rPr lang="en-US" altLang="ko-KR" sz="2800" b="1" dirty="0" smtClean="0">
+              <a:t>]</a:t>
+            </a:r>
+            <a:r>
+              <a:rPr lang="en-US" altLang="ko-KR" sz="2800" dirty="0">
                 <a:solidFill>
                   <a:schemeClr val="accent1"/>
                 </a:solidFill>
                 <a:latin typeface="+mn-ea"/>
               </a:rPr>
-              <a:t>]</a:t>
-            </a:r>
-            <a:r>
-              <a:rPr lang="en-US" altLang="ko-KR" sz="2800" dirty="0" smtClean="0">
-                <a:solidFill>
-                  <a:schemeClr val="accent1"/>
+              <a:t> </a:t>
+            </a:r>
+            <a:r>
+              <a:rPr lang="ko-KR" altLang="en-US" sz="2800" dirty="0">
+                <a:solidFill>
+                  <a:srgbClr val="212529"/>
                 </a:solidFill>
                 <a:latin typeface="+mn-ea"/>
               </a:rPr>
-              <a:t> </a:t>
-            </a:r>
-            <a:r>
-              <a:rPr lang="ko-KR" altLang="en-US" sz="2800" dirty="0" smtClean="0">
-                <a:solidFill>
-                  <a:srgbClr val="212529"/>
-                </a:solidFill>
-                <a:latin typeface="+mn-ea"/>
-              </a:rPr>
-              <a:t> </a:t>
-            </a:r>
-            <a:r>
-              <a:rPr lang="ko-KR" altLang="en-US" sz="2800" dirty="0">
-                <a:solidFill>
-                  <a:srgbClr val="212529"/>
-                </a:solidFill>
-                <a:latin typeface="+mn-ea"/>
-              </a:rPr>
-              <a:t>진행</a:t>
+              <a:t> 진행</a:t>
             </a:r>
           </a:p>
         </p:txBody>
@@ -35181,26 +34863,18 @@
                   <a:srgbClr val="6EC173"/>
                 </a:solidFill>
               </a:rPr>
-              <a:t>. </a:t>
-            </a:r>
-            <a:r>
-              <a:rPr lang="en-US" altLang="ko-KR" dirty="0">
-                <a:solidFill>
-                  <a:srgbClr val="6EC173"/>
-                </a:solidFill>
-              </a:rPr>
+              <a:t>.  </a:t>
+            </a:r>
+            <a:r>
+              <a:rPr lang="en-US" altLang="ko-KR" dirty="0"/>
               <a:t> </a:t>
             </a:r>
             <a:r>
-              <a:rPr lang="en-US" altLang="ko-KR" dirty="0" smtClean="0"/>
-              <a:t> </a:t>
-            </a:r>
-            <a:r>
-              <a:rPr lang="ko-KR" altLang="en-US" dirty="0" smtClean="0"/>
+              <a:rPr lang="ko-KR" altLang="en-US" dirty="0"/>
               <a:t>이벤트 다루기</a:t>
             </a:r>
             <a:r>
-              <a:rPr lang="en-US" altLang="ko-KR" dirty="0" smtClean="0"/>
+              <a:rPr lang="en-US" altLang="ko-KR" dirty="0"/>
               <a:t>(4)</a:t>
             </a:r>
             <a:endParaRPr lang="ko-KR" altLang="en-US" dirty="0"/>
@@ -35477,15 +35151,6 @@
               </a:rPr>
               <a:t>강의 클릭</a:t>
             </a:r>
-            <a:r>
-              <a:rPr lang="en-US" altLang="ko-KR" dirty="0">
-                <a:solidFill>
-                  <a:srgbClr val="212529"/>
-                </a:solidFill>
-                <a:latin typeface="+mn-ea"/>
-              </a:rPr>
-              <a:t/>
-            </a:r>
             <a:br>
               <a:rPr lang="en-US" altLang="ko-KR" dirty="0">
                 <a:solidFill>
@@ -35513,7 +35178,7 @@
               <a:t>➡ </a:t>
             </a:r>
             <a:r>
-              <a:rPr lang="en-US" altLang="ko-KR" sz="2800" b="1" dirty="0" smtClean="0">
+              <a:rPr lang="en-US" altLang="ko-KR" sz="2800" b="1" dirty="0">
                 <a:solidFill>
                   <a:srgbClr val="212529"/>
                 </a:solidFill>
@@ -35522,7 +35187,7 @@
               <a:t>[</a:t>
             </a:r>
             <a:r>
-              <a:rPr lang="en-US" altLang="ko-KR" sz="2800" b="1" dirty="0" err="1" smtClean="0">
+              <a:rPr lang="en-US" altLang="ko-KR" sz="2800" b="1" dirty="0" err="1">
                 <a:solidFill>
                   <a:srgbClr val="212529"/>
                 </a:solidFill>
@@ -35531,7 +35196,7 @@
               <a:t>Javascript</a:t>
             </a:r>
             <a:r>
-              <a:rPr lang="en-US" altLang="ko-KR" sz="2800" b="1" dirty="0" smtClean="0">
+              <a:rPr lang="en-US" altLang="ko-KR" sz="2800" b="1" dirty="0">
                 <a:solidFill>
                   <a:srgbClr val="212529"/>
                 </a:solidFill>
@@ -35540,7 +35205,7 @@
               <a:t> DOM </a:t>
             </a:r>
             <a:r>
-              <a:rPr lang="ko-KR" altLang="en-US" sz="2800" b="1" dirty="0" smtClean="0">
+              <a:rPr lang="ko-KR" altLang="en-US" sz="2800" b="1" dirty="0">
                 <a:solidFill>
                   <a:srgbClr val="212529"/>
                 </a:solidFill>
@@ -35549,7 +35214,7 @@
               <a:t>실습</a:t>
             </a:r>
             <a:r>
-              <a:rPr lang="en-US" altLang="ko-KR" sz="2800" b="1" dirty="0" smtClean="0">
+              <a:rPr lang="en-US" altLang="ko-KR" sz="2800" b="1" dirty="0">
                 <a:solidFill>
                   <a:srgbClr val="212529"/>
                 </a:solidFill>
@@ -35558,7 +35223,7 @@
               <a:t>(2)]</a:t>
             </a:r>
             <a:r>
-              <a:rPr lang="en-US" altLang="ko-KR" sz="2800" dirty="0" smtClean="0">
+              <a:rPr lang="en-US" altLang="ko-KR" sz="2800" dirty="0">
                 <a:solidFill>
                   <a:srgbClr val="212529"/>
                 </a:solidFill>
@@ -35594,7 +35259,7 @@
               <a:t>➡ </a:t>
             </a:r>
             <a:r>
-              <a:rPr lang="en-US" altLang="ko-KR" sz="2800" b="1" dirty="0" smtClean="0">
+              <a:rPr lang="en-US" altLang="ko-KR" sz="2800" b="1" dirty="0">
                 <a:solidFill>
                   <a:schemeClr val="accent1"/>
                 </a:solidFill>
@@ -35603,7 +35268,7 @@
               <a:t>[</a:t>
             </a:r>
             <a:r>
-              <a:rPr lang="ko-KR" altLang="en-US" sz="2800" b="1" dirty="0" err="1" smtClean="0">
+              <a:rPr lang="ko-KR" altLang="en-US" sz="2800" b="1" dirty="0" err="1">
                 <a:solidFill>
                   <a:schemeClr val="accent1"/>
                 </a:solidFill>
@@ -35618,61 +35283,43 @@
                 </a:solidFill>
                 <a:latin typeface="+mn-ea"/>
               </a:rPr>
-              <a:t>4</a:t>
-            </a:r>
-            <a:r>
-              <a:rPr lang="en-US" altLang="ko-KR" sz="2800" b="1" dirty="0" smtClean="0">
+              <a:t>4. </a:t>
+            </a:r>
+            <a:r>
+              <a:rPr lang="ko-KR" altLang="en-US" sz="2800" b="1" dirty="0">
                 <a:solidFill>
                   <a:schemeClr val="accent1"/>
                 </a:solidFill>
                 <a:latin typeface="+mn-ea"/>
               </a:rPr>
-              <a:t>. </a:t>
-            </a:r>
-            <a:r>
-              <a:rPr lang="ko-KR" altLang="en-US" sz="2800" b="1" dirty="0" smtClean="0">
+              <a:t>방명록 등록하기</a:t>
+            </a:r>
+            <a:r>
+              <a:rPr lang="en-US" altLang="ko-KR" sz="2800" b="1" dirty="0">
                 <a:solidFill>
                   <a:schemeClr val="accent1"/>
                 </a:solidFill>
                 <a:latin typeface="+mn-ea"/>
               </a:rPr>
-              <a:t>방명록 등록하기</a:t>
-            </a:r>
-            <a:r>
-              <a:rPr lang="en-US" altLang="ko-KR" sz="2800" b="1" dirty="0" smtClean="0">
+              <a:t>]</a:t>
+            </a:r>
+            <a:r>
+              <a:rPr lang="en-US" altLang="ko-KR" sz="2800" dirty="0">
                 <a:solidFill>
                   <a:schemeClr val="accent1"/>
                 </a:solidFill>
                 <a:latin typeface="+mn-ea"/>
               </a:rPr>
-              <a:t>]</a:t>
-            </a:r>
-            <a:r>
-              <a:rPr lang="en-US" altLang="ko-KR" sz="2800" dirty="0" smtClean="0">
-                <a:solidFill>
-                  <a:schemeClr val="accent1"/>
+              <a:t> </a:t>
+            </a:r>
+            <a:r>
+              <a:rPr lang="ko-KR" altLang="en-US" sz="2800" dirty="0">
+                <a:solidFill>
+                  <a:srgbClr val="212529"/>
                 </a:solidFill>
                 <a:latin typeface="+mn-ea"/>
               </a:rPr>
-              <a:t> </a:t>
-            </a:r>
-            <a:r>
-              <a:rPr lang="ko-KR" altLang="en-US" sz="2800" dirty="0" smtClean="0">
-                <a:solidFill>
-                  <a:srgbClr val="212529"/>
-                </a:solidFill>
-                <a:latin typeface="+mn-ea"/>
-              </a:rPr>
-              <a:t> </a:t>
-            </a:r>
-            <a:r>
-              <a:rPr lang="ko-KR" altLang="en-US" sz="2800" dirty="0">
-                <a:solidFill>
-                  <a:srgbClr val="212529"/>
-                </a:solidFill>
-                <a:latin typeface="+mn-ea"/>
-              </a:rPr>
-              <a:t>진행</a:t>
+              <a:t> 진행</a:t>
             </a:r>
           </a:p>
         </p:txBody>

--- a/material/[SeSAC_YDP_6] 04_5_Javascript_표준객체,DOM.pptx
+++ b/material/[SeSAC_YDP_6] 04_5_Javascript_표준객체,DOM.pptx
@@ -5,7 +5,7 @@
     <p:sldMasterId id="2147483697" r:id="rId1"/>
   </p:sldMasterIdLst>
   <p:notesMasterIdLst>
-    <p:notesMasterId r:id="rId60"/>
+    <p:notesMasterId r:id="rId58"/>
   </p:notesMasterIdLst>
   <p:sldIdLst>
     <p:sldId id="361" r:id="rId2"/>
@@ -55,17 +55,15 @@
     <p:sldId id="359" r:id="rId46"/>
     <p:sldId id="278" r:id="rId47"/>
     <p:sldId id="369" r:id="rId48"/>
-    <p:sldId id="319" r:id="rId49"/>
-    <p:sldId id="350" r:id="rId50"/>
-    <p:sldId id="378" r:id="rId51"/>
-    <p:sldId id="373" r:id="rId52"/>
-    <p:sldId id="280" r:id="rId53"/>
-    <p:sldId id="281" r:id="rId54"/>
-    <p:sldId id="282" r:id="rId55"/>
-    <p:sldId id="379" r:id="rId56"/>
-    <p:sldId id="380" r:id="rId57"/>
-    <p:sldId id="381" r:id="rId58"/>
-    <p:sldId id="382" r:id="rId59"/>
+    <p:sldId id="378" r:id="rId49"/>
+    <p:sldId id="373" r:id="rId50"/>
+    <p:sldId id="280" r:id="rId51"/>
+    <p:sldId id="281" r:id="rId52"/>
+    <p:sldId id="282" r:id="rId53"/>
+    <p:sldId id="379" r:id="rId54"/>
+    <p:sldId id="380" r:id="rId55"/>
+    <p:sldId id="381" r:id="rId56"/>
+    <p:sldId id="382" r:id="rId57"/>
   </p:sldIdLst>
   <p:sldSz cx="12192000" cy="6858000"/>
   <p:notesSz cx="6858000" cy="9144000"/>
@@ -257,7 +255,7 @@
           <a:p>
             <a:fld id="{2EF3F159-7250-4DD4-91C2-13B35D56E1AF}" type="datetimeFigureOut">
               <a:rPr lang="ko-KR" altLang="en-US" smtClean="0"/>
-              <a:t>2024-06-03</a:t>
+              <a:t>2024-06-05</a:t>
             </a:fld>
             <a:endParaRPr lang="ko-KR" altLang="en-US"/>
           </a:p>
@@ -7205,7 +7203,7 @@
           <a:bodyPr/>
           <a:lstStyle/>
           <a:p>
-            <a:endParaRPr lang="ko-KR" altLang="en-US" dirty="0"/>
+            <a:endParaRPr lang="en-US" altLang="ko-KR" dirty="0"/>
           </a:p>
         </p:txBody>
       </p:sp>
@@ -7235,7 +7233,7 @@
     </p:spTree>
     <p:extLst>
       <p:ext uri="{BB962C8B-B14F-4D97-AF65-F5344CB8AC3E}">
-        <p14:creationId xmlns:p14="http://schemas.microsoft.com/office/powerpoint/2010/main" val="2198301594"/>
+        <p14:creationId xmlns:p14="http://schemas.microsoft.com/office/powerpoint/2010/main" val="2274227747"/>
       </p:ext>
     </p:extLst>
   </p:cSld>
@@ -7319,7 +7317,7 @@
     </p:spTree>
     <p:extLst>
       <p:ext uri="{BB962C8B-B14F-4D97-AF65-F5344CB8AC3E}">
-        <p14:creationId xmlns:p14="http://schemas.microsoft.com/office/powerpoint/2010/main" val="3205271396"/>
+        <p14:creationId xmlns:p14="http://schemas.microsoft.com/office/powerpoint/2010/main" val="3931661823"/>
       </p:ext>
     </p:extLst>
   </p:cSld>
@@ -7373,7 +7371,76 @@
           <a:bodyPr/>
           <a:lstStyle/>
           <a:p>
-            <a:endParaRPr lang="en-US" altLang="ko-KR" dirty="0"/>
+            <a:r>
+              <a:rPr lang="ko-KR" altLang="en-US" sz="1200" dirty="0">
+                <a:highlight>
+                  <a:srgbClr val="FFFF00"/>
+                </a:highlight>
+              </a:rPr>
+              <a:t>변수 선언 안하고 메소드 </a:t>
+            </a:r>
+            <a:r>
+              <a:rPr lang="ko-KR" altLang="en-US" sz="1200" dirty="0" err="1">
+                <a:highlight>
+                  <a:srgbClr val="FFFF00"/>
+                </a:highlight>
+              </a:rPr>
+              <a:t>체이닝</a:t>
+            </a:r>
+            <a:r>
+              <a:rPr lang="ko-KR" altLang="en-US" sz="1200" dirty="0">
+                <a:highlight>
+                  <a:srgbClr val="FFFF00"/>
+                </a:highlight>
+              </a:rPr>
+              <a:t> 이용해서 </a:t>
+            </a:r>
+            <a:endParaRPr lang="en-US" altLang="ko-KR" sz="1200" dirty="0">
+              <a:highlight>
+                <a:srgbClr val="FFFF00"/>
+              </a:highlight>
+            </a:endParaRPr>
+          </a:p>
+          <a:p>
+            <a:r>
+              <a:rPr lang="en-US" altLang="ko-KR" sz="1200" dirty="0" err="1">
+                <a:highlight>
+                  <a:srgbClr val="FFFF00"/>
+                </a:highlight>
+              </a:rPr>
+              <a:t>Addeventlinstener</a:t>
+            </a:r>
+            <a:r>
+              <a:rPr lang="en-US" altLang="ko-KR" sz="1200" dirty="0">
+                <a:highlight>
+                  <a:srgbClr val="FFFF00"/>
+                </a:highlight>
+              </a:rPr>
+              <a:t> </a:t>
+            </a:r>
+            <a:r>
+              <a:rPr lang="ko-KR" altLang="en-US" sz="1200" dirty="0">
+                <a:highlight>
+                  <a:srgbClr val="FFFF00"/>
+                </a:highlight>
+              </a:rPr>
+              <a:t>적용하는 방법이지만</a:t>
+            </a:r>
+            <a:endParaRPr lang="en-US" altLang="ko-KR" sz="1200" dirty="0">
+              <a:highlight>
+                <a:srgbClr val="FFFF00"/>
+              </a:highlight>
+            </a:endParaRPr>
+          </a:p>
+          <a:p>
+            <a:r>
+              <a:rPr lang="ko-KR" altLang="en-US" sz="1200" dirty="0">
+                <a:highlight>
+                  <a:srgbClr val="FFFF00"/>
+                </a:highlight>
+              </a:rPr>
+              <a:t>지금은 이렇게 안쓰는게 조아</a:t>
+            </a:r>
           </a:p>
         </p:txBody>
       </p:sp>
@@ -7384,7 +7451,7 @@
             <a:spLocks noGrp="1"/>
           </p:cNvSpPr>
           <p:nvPr>
-            <p:ph type="sldNum" sz="quarter" idx="5"/>
+            <p:ph type="sldNum" sz="quarter" idx="10"/>
           </p:nvPr>
         </p:nvSpPr>
         <p:spPr/>
@@ -7392,7 +7459,7 @@
           <a:bodyPr/>
           <a:lstStyle/>
           <a:p>
-            <a:fld id="{C09E5BFC-1559-42F1-8940-AB342D56BF02}" type="slidenum">
+            <a:fld id="{73366F6E-037C-480B-81D8-78C8D81DF59C}" type="slidenum">
               <a:rPr lang="ko-KR" altLang="en-US" smtClean="0"/>
               <a:t>50</a:t>
             </a:fld>
@@ -7403,7 +7470,7 @@
     </p:spTree>
     <p:extLst>
       <p:ext uri="{BB962C8B-B14F-4D97-AF65-F5344CB8AC3E}">
-        <p14:creationId xmlns:p14="http://schemas.microsoft.com/office/powerpoint/2010/main" val="2274227747"/>
+        <p14:creationId xmlns:p14="http://schemas.microsoft.com/office/powerpoint/2010/main" val="549847176"/>
       </p:ext>
     </p:extLst>
   </p:cSld>
@@ -7487,7 +7554,7 @@
     </p:spTree>
     <p:extLst>
       <p:ext uri="{BB962C8B-B14F-4D97-AF65-F5344CB8AC3E}">
-        <p14:creationId xmlns:p14="http://schemas.microsoft.com/office/powerpoint/2010/main" val="3931661823"/>
+        <p14:creationId xmlns:p14="http://schemas.microsoft.com/office/powerpoint/2010/main" val="1146917176"/>
       </p:ext>
     </p:extLst>
   </p:cSld>
@@ -7541,76 +7608,7 @@
           <a:bodyPr/>
           <a:lstStyle/>
           <a:p>
-            <a:r>
-              <a:rPr lang="ko-KR" altLang="en-US" sz="1200" dirty="0">
-                <a:highlight>
-                  <a:srgbClr val="FFFF00"/>
-                </a:highlight>
-              </a:rPr>
-              <a:t>변수 선언 안하고 메소드 </a:t>
-            </a:r>
-            <a:r>
-              <a:rPr lang="ko-KR" altLang="en-US" sz="1200" dirty="0" err="1">
-                <a:highlight>
-                  <a:srgbClr val="FFFF00"/>
-                </a:highlight>
-              </a:rPr>
-              <a:t>체이닝</a:t>
-            </a:r>
-            <a:r>
-              <a:rPr lang="ko-KR" altLang="en-US" sz="1200" dirty="0">
-                <a:highlight>
-                  <a:srgbClr val="FFFF00"/>
-                </a:highlight>
-              </a:rPr>
-              <a:t> 이용해서 </a:t>
-            </a:r>
-            <a:endParaRPr lang="en-US" altLang="ko-KR" sz="1200" dirty="0">
-              <a:highlight>
-                <a:srgbClr val="FFFF00"/>
-              </a:highlight>
-            </a:endParaRPr>
-          </a:p>
-          <a:p>
-            <a:r>
-              <a:rPr lang="en-US" altLang="ko-KR" sz="1200" dirty="0" err="1">
-                <a:highlight>
-                  <a:srgbClr val="FFFF00"/>
-                </a:highlight>
-              </a:rPr>
-              <a:t>Addeventlinstener</a:t>
-            </a:r>
-            <a:r>
-              <a:rPr lang="en-US" altLang="ko-KR" sz="1200" dirty="0">
-                <a:highlight>
-                  <a:srgbClr val="FFFF00"/>
-                </a:highlight>
-              </a:rPr>
-              <a:t> </a:t>
-            </a:r>
-            <a:r>
-              <a:rPr lang="ko-KR" altLang="en-US" sz="1200" dirty="0">
-                <a:highlight>
-                  <a:srgbClr val="FFFF00"/>
-                </a:highlight>
-              </a:rPr>
-              <a:t>적용하는 방법이지만</a:t>
-            </a:r>
-            <a:endParaRPr lang="en-US" altLang="ko-KR" sz="1200" dirty="0">
-              <a:highlight>
-                <a:srgbClr val="FFFF00"/>
-              </a:highlight>
-            </a:endParaRPr>
-          </a:p>
-          <a:p>
-            <a:r>
-              <a:rPr lang="ko-KR" altLang="en-US" sz="1200" dirty="0">
-                <a:highlight>
-                  <a:srgbClr val="FFFF00"/>
-                </a:highlight>
-              </a:rPr>
-              <a:t>지금은 이렇게 안쓰는게 조아</a:t>
-            </a:r>
+            <a:endParaRPr lang="ko-KR" altLang="en-US" dirty="0"/>
           </a:p>
         </p:txBody>
       </p:sp>
@@ -7621,7 +7619,7 @@
             <a:spLocks noGrp="1"/>
           </p:cNvSpPr>
           <p:nvPr>
-            <p:ph type="sldNum" sz="quarter" idx="10"/>
+            <p:ph type="sldNum" sz="quarter" idx="5"/>
           </p:nvPr>
         </p:nvSpPr>
         <p:spPr/>
@@ -7629,7 +7627,7 @@
           <a:bodyPr/>
           <a:lstStyle/>
           <a:p>
-            <a:fld id="{73366F6E-037C-480B-81D8-78C8D81DF59C}" type="slidenum">
+            <a:fld id="{C09E5BFC-1559-42F1-8940-AB342D56BF02}" type="slidenum">
               <a:rPr lang="ko-KR" altLang="en-US" smtClean="0"/>
               <a:t>52</a:t>
             </a:fld>
@@ -7640,7 +7638,7 @@
     </p:spTree>
     <p:extLst>
       <p:ext uri="{BB962C8B-B14F-4D97-AF65-F5344CB8AC3E}">
-        <p14:creationId xmlns:p14="http://schemas.microsoft.com/office/powerpoint/2010/main" val="549847176"/>
+        <p14:creationId xmlns:p14="http://schemas.microsoft.com/office/powerpoint/2010/main" val="2954035952"/>
       </p:ext>
     </p:extLst>
   </p:cSld>
@@ -7981,7 +7979,7 @@
           <a:bodyPr/>
           <a:lstStyle/>
           <a:p>
-            <a:endParaRPr lang="ko-KR" altLang="en-US" dirty="0"/>
+            <a:endParaRPr lang="en-US" altLang="ko-KR" dirty="0"/>
           </a:p>
         </p:txBody>
       </p:sp>
@@ -8011,7 +8009,7 @@
     </p:spTree>
     <p:extLst>
       <p:ext uri="{BB962C8B-B14F-4D97-AF65-F5344CB8AC3E}">
-        <p14:creationId xmlns:p14="http://schemas.microsoft.com/office/powerpoint/2010/main" val="1146917176"/>
+        <p14:creationId xmlns:p14="http://schemas.microsoft.com/office/powerpoint/2010/main" val="1975158727"/>
       </p:ext>
     </p:extLst>
   </p:cSld>
@@ -8065,7 +8063,7 @@
           <a:bodyPr/>
           <a:lstStyle/>
           <a:p>
-            <a:endParaRPr lang="ko-KR" altLang="en-US" dirty="0"/>
+            <a:endParaRPr lang="en-US" altLang="ko-KR" dirty="0"/>
           </a:p>
         </p:txBody>
       </p:sp>
@@ -8095,7 +8093,7 @@
     </p:spTree>
     <p:extLst>
       <p:ext uri="{BB962C8B-B14F-4D97-AF65-F5344CB8AC3E}">
-        <p14:creationId xmlns:p14="http://schemas.microsoft.com/office/powerpoint/2010/main" val="2954035952"/>
+        <p14:creationId xmlns:p14="http://schemas.microsoft.com/office/powerpoint/2010/main" val="4229100440"/>
       </p:ext>
     </p:extLst>
   </p:cSld>
@@ -8179,7 +8177,7 @@
     </p:spTree>
     <p:extLst>
       <p:ext uri="{BB962C8B-B14F-4D97-AF65-F5344CB8AC3E}">
-        <p14:creationId xmlns:p14="http://schemas.microsoft.com/office/powerpoint/2010/main" val="1975158727"/>
+        <p14:creationId xmlns:p14="http://schemas.microsoft.com/office/powerpoint/2010/main" val="3338602734"/>
       </p:ext>
     </p:extLst>
   </p:cSld>
@@ -8255,174 +8253,6 @@
             <a:fld id="{C09E5BFC-1559-42F1-8940-AB342D56BF02}" type="slidenum">
               <a:rPr lang="ko-KR" altLang="en-US" smtClean="0"/>
               <a:t>56</a:t>
-            </a:fld>
-            <a:endParaRPr lang="ko-KR" altLang="en-US"/>
-          </a:p>
-        </p:txBody>
-      </p:sp>
-    </p:spTree>
-    <p:extLst>
-      <p:ext uri="{BB962C8B-B14F-4D97-AF65-F5344CB8AC3E}">
-        <p14:creationId xmlns:p14="http://schemas.microsoft.com/office/powerpoint/2010/main" val="4229100440"/>
-      </p:ext>
-    </p:extLst>
-  </p:cSld>
-  <p:clrMapOvr>
-    <a:masterClrMapping/>
-  </p:clrMapOvr>
-</p:notes>
-</file>
-
-<file path=ppt/notesSlides/notesSlide54.xml><?xml version="1.0" encoding="utf-8"?>
-<p:notes xmlns:a="http://schemas.openxmlformats.org/drawingml/2006/main" xmlns:r="http://schemas.openxmlformats.org/officeDocument/2006/relationships" xmlns:p="http://schemas.openxmlformats.org/presentationml/2006/main">
-  <p:cSld>
-    <p:spTree>
-      <p:nvGrpSpPr>
-        <p:cNvPr id="1" name=""/>
-        <p:cNvGrpSpPr/>
-        <p:nvPr/>
-      </p:nvGrpSpPr>
-      <p:grpSpPr>
-        <a:xfrm>
-          <a:off x="0" y="0"/>
-          <a:ext cx="0" cy="0"/>
-          <a:chOff x="0" y="0"/>
-          <a:chExt cx="0" cy="0"/>
-        </a:xfrm>
-      </p:grpSpPr>
-      <p:sp>
-        <p:nvSpPr>
-          <p:cNvPr id="2" name="슬라이드 이미지 개체 틀 1"/>
-          <p:cNvSpPr>
-            <a:spLocks noGrp="1" noRot="1" noChangeAspect="1"/>
-          </p:cNvSpPr>
-          <p:nvPr>
-            <p:ph type="sldImg"/>
-          </p:nvPr>
-        </p:nvSpPr>
-        <p:spPr/>
-      </p:sp>
-      <p:sp>
-        <p:nvSpPr>
-          <p:cNvPr id="3" name="슬라이드 노트 개체 틀 2"/>
-          <p:cNvSpPr>
-            <a:spLocks noGrp="1"/>
-          </p:cNvSpPr>
-          <p:nvPr>
-            <p:ph type="body" idx="1"/>
-          </p:nvPr>
-        </p:nvSpPr>
-        <p:spPr/>
-        <p:txBody>
-          <a:bodyPr/>
-          <a:lstStyle/>
-          <a:p>
-            <a:endParaRPr lang="en-US" altLang="ko-KR" dirty="0"/>
-          </a:p>
-        </p:txBody>
-      </p:sp>
-      <p:sp>
-        <p:nvSpPr>
-          <p:cNvPr id="4" name="슬라이드 번호 개체 틀 3"/>
-          <p:cNvSpPr>
-            <a:spLocks noGrp="1"/>
-          </p:cNvSpPr>
-          <p:nvPr>
-            <p:ph type="sldNum" sz="quarter" idx="5"/>
-          </p:nvPr>
-        </p:nvSpPr>
-        <p:spPr/>
-        <p:txBody>
-          <a:bodyPr/>
-          <a:lstStyle/>
-          <a:p>
-            <a:fld id="{C09E5BFC-1559-42F1-8940-AB342D56BF02}" type="slidenum">
-              <a:rPr lang="ko-KR" altLang="en-US" smtClean="0"/>
-              <a:t>57</a:t>
-            </a:fld>
-            <a:endParaRPr lang="ko-KR" altLang="en-US"/>
-          </a:p>
-        </p:txBody>
-      </p:sp>
-    </p:spTree>
-    <p:extLst>
-      <p:ext uri="{BB962C8B-B14F-4D97-AF65-F5344CB8AC3E}">
-        <p14:creationId xmlns:p14="http://schemas.microsoft.com/office/powerpoint/2010/main" val="3338602734"/>
-      </p:ext>
-    </p:extLst>
-  </p:cSld>
-  <p:clrMapOvr>
-    <a:masterClrMapping/>
-  </p:clrMapOvr>
-</p:notes>
-</file>
-
-<file path=ppt/notesSlides/notesSlide55.xml><?xml version="1.0" encoding="utf-8"?>
-<p:notes xmlns:a="http://schemas.openxmlformats.org/drawingml/2006/main" xmlns:r="http://schemas.openxmlformats.org/officeDocument/2006/relationships" xmlns:p="http://schemas.openxmlformats.org/presentationml/2006/main">
-  <p:cSld>
-    <p:spTree>
-      <p:nvGrpSpPr>
-        <p:cNvPr id="1" name=""/>
-        <p:cNvGrpSpPr/>
-        <p:nvPr/>
-      </p:nvGrpSpPr>
-      <p:grpSpPr>
-        <a:xfrm>
-          <a:off x="0" y="0"/>
-          <a:ext cx="0" cy="0"/>
-          <a:chOff x="0" y="0"/>
-          <a:chExt cx="0" cy="0"/>
-        </a:xfrm>
-      </p:grpSpPr>
-      <p:sp>
-        <p:nvSpPr>
-          <p:cNvPr id="2" name="슬라이드 이미지 개체 틀 1"/>
-          <p:cNvSpPr>
-            <a:spLocks noGrp="1" noRot="1" noChangeAspect="1"/>
-          </p:cNvSpPr>
-          <p:nvPr>
-            <p:ph type="sldImg"/>
-          </p:nvPr>
-        </p:nvSpPr>
-        <p:spPr/>
-      </p:sp>
-      <p:sp>
-        <p:nvSpPr>
-          <p:cNvPr id="3" name="슬라이드 노트 개체 틀 2"/>
-          <p:cNvSpPr>
-            <a:spLocks noGrp="1"/>
-          </p:cNvSpPr>
-          <p:nvPr>
-            <p:ph type="body" idx="1"/>
-          </p:nvPr>
-        </p:nvSpPr>
-        <p:spPr/>
-        <p:txBody>
-          <a:bodyPr/>
-          <a:lstStyle/>
-          <a:p>
-            <a:endParaRPr lang="en-US" altLang="ko-KR" dirty="0"/>
-          </a:p>
-        </p:txBody>
-      </p:sp>
-      <p:sp>
-        <p:nvSpPr>
-          <p:cNvPr id="4" name="슬라이드 번호 개체 틀 3"/>
-          <p:cNvSpPr>
-            <a:spLocks noGrp="1"/>
-          </p:cNvSpPr>
-          <p:nvPr>
-            <p:ph type="sldNum" sz="quarter" idx="5"/>
-          </p:nvPr>
-        </p:nvSpPr>
-        <p:spPr/>
-        <p:txBody>
-          <a:bodyPr/>
-          <a:lstStyle/>
-          <a:p>
-            <a:fld id="{C09E5BFC-1559-42F1-8940-AB342D56BF02}" type="slidenum">
-              <a:rPr lang="ko-KR" altLang="en-US" smtClean="0"/>
-              <a:t>58</a:t>
             </a:fld>
             <a:endParaRPr lang="ko-KR" altLang="en-US"/>
           </a:p>
@@ -15358,7 +15188,7 @@
           <a:p>
             <a:fld id="{0F78D9C4-20C1-4B15-A116-16DC77AD9A1E}" type="datetime1">
               <a:rPr lang="ko-KR" altLang="en-US" smtClean="0"/>
-              <a:t>2024-06-03</a:t>
+              <a:t>2024-06-05</a:t>
             </a:fld>
             <a:endParaRPr lang="ko-KR" altLang="en-US"/>
           </a:p>
@@ -16118,7 +15948,7 @@
           <a:p>
             <a:fld id="{0F78D9C4-20C1-4B15-A116-16DC77AD9A1E}" type="datetime1">
               <a:rPr lang="ko-KR" altLang="en-US" smtClean="0"/>
-              <a:t>2024-06-03</a:t>
+              <a:t>2024-06-05</a:t>
             </a:fld>
             <a:endParaRPr lang="ko-KR" altLang="en-US"/>
           </a:p>
@@ -25428,7 +25258,7 @@
           <a:p>
             <a:fld id="{0F78D9C4-20C1-4B15-A116-16DC77AD9A1E}" type="datetime1">
               <a:rPr lang="ko-KR" altLang="en-US" smtClean="0"/>
-              <a:t>2024-06-03</a:t>
+              <a:t>2024-06-05</a:t>
             </a:fld>
             <a:endParaRPr lang="ko-KR" altLang="en-US"/>
           </a:p>
@@ -26048,7 +25878,7 @@
           <a:p>
             <a:fld id="{0F78D9C4-20C1-4B15-A116-16DC77AD9A1E}" type="datetime1">
               <a:rPr lang="ko-KR" altLang="en-US" smtClean="0"/>
-              <a:t>2024-06-03</a:t>
+              <a:t>2024-06-05</a:t>
             </a:fld>
             <a:endParaRPr lang="ko-KR" altLang="en-US"/>
           </a:p>
@@ -29153,8 +28983,8 @@
         </p:nvSpPr>
         <p:spPr>
           <a:xfrm>
-            <a:off x="2589683" y="3756086"/>
-            <a:ext cx="10288475" cy="2558150"/>
+            <a:off x="510988" y="1328391"/>
+            <a:ext cx="11260802" cy="5328442"/>
           </a:xfrm>
         </p:spPr>
         <p:txBody>
@@ -29163,170 +28993,16 @@
           </a:bodyPr>
           <a:lstStyle/>
           <a:p>
+            <a:endParaRPr lang="en-US" altLang="ko-KR" dirty="0"/>
+          </a:p>
+          <a:p>
             <a:pPr marL="0" indent="0">
-              <a:lnSpc>
-                <a:spcPct val="120000"/>
-              </a:lnSpc>
               <a:buNone/>
             </a:pPr>
-            <a:r>
-              <a:rPr lang="ko-KR" altLang="en-US" dirty="0"/>
-              <a:t>힌트 </a:t>
-            </a:r>
-            <a:r>
-              <a:rPr lang="en-US" altLang="ko-KR" dirty="0"/>
-              <a:t>1) id </a:t>
-            </a:r>
-            <a:r>
-              <a:rPr lang="ko-KR" altLang="en-US" dirty="0"/>
-              <a:t>속성이 </a:t>
-            </a:r>
-            <a:r>
-              <a:rPr lang="en-US" altLang="ko-KR" dirty="0"/>
-              <a:t>“value1”</a:t>
-            </a:r>
-            <a:r>
-              <a:rPr lang="ko-KR" altLang="en-US" dirty="0"/>
-              <a:t>인 </a:t>
-            </a:r>
-            <a:r>
-              <a:rPr lang="en-US" altLang="ko-KR" dirty="0"/>
-              <a:t>input </a:t>
-            </a:r>
-            <a:r>
-              <a:rPr lang="ko-KR" altLang="en-US" dirty="0"/>
-              <a:t>값 가져와</a:t>
-            </a:r>
-            <a:r>
-              <a:rPr lang="en-US" altLang="ko-KR" dirty="0"/>
-              <a:t> </a:t>
-            </a:r>
-            <a:r>
-              <a:rPr lang="ko-KR" altLang="en-US" dirty="0"/>
-              <a:t>변수에 넣기</a:t>
-            </a:r>
             <a:endParaRPr lang="en-US" altLang="ko-KR" dirty="0"/>
           </a:p>
           <a:p>
-            <a:pPr marL="0" indent="0">
-              <a:lnSpc>
-                <a:spcPct val="120000"/>
-              </a:lnSpc>
-              <a:buNone/>
-            </a:pPr>
-            <a:r>
-              <a:rPr lang="en-US" altLang="ko-KR" dirty="0"/>
-              <a:t>	</a:t>
-            </a:r>
-            <a:r>
-              <a:rPr lang="ko-KR" altLang="en-US" sz="2400" dirty="0"/>
-              <a:t>변수 </a:t>
-            </a:r>
-            <a:r>
-              <a:rPr lang="en-US" altLang="ko-KR" sz="2400" dirty="0"/>
-              <a:t>= </a:t>
-            </a:r>
-            <a:r>
-              <a:rPr lang="en-US" altLang="ko-KR" sz="2400" dirty="0" err="1"/>
-              <a:t>document.getElementById</a:t>
-            </a:r>
-            <a:r>
-              <a:rPr lang="en-US" altLang="ko-KR" sz="2400" dirty="0"/>
-              <a:t>(“value1”).value;</a:t>
-            </a:r>
-          </a:p>
-          <a:p>
-            <a:pPr marL="0" indent="0">
-              <a:lnSpc>
-                <a:spcPct val="120000"/>
-              </a:lnSpc>
-              <a:buNone/>
-            </a:pPr>
-            <a:r>
-              <a:rPr lang="ko-KR" altLang="en-US" dirty="0"/>
-              <a:t>힌트 </a:t>
-            </a:r>
-            <a:r>
-              <a:rPr lang="en-US" altLang="ko-KR" dirty="0"/>
-              <a:t>2) id </a:t>
-            </a:r>
-            <a:r>
-              <a:rPr lang="ko-KR" altLang="en-US" dirty="0"/>
-              <a:t>속성이 </a:t>
-            </a:r>
-            <a:r>
-              <a:rPr lang="en-US" altLang="ko-KR" dirty="0"/>
-              <a:t>“value1”</a:t>
-            </a:r>
-            <a:r>
-              <a:rPr lang="ko-KR" altLang="en-US" dirty="0"/>
-              <a:t>인 </a:t>
-            </a:r>
-            <a:r>
-              <a:rPr lang="en-US" altLang="ko-KR" dirty="0"/>
-              <a:t>input</a:t>
-            </a:r>
-            <a:r>
-              <a:rPr lang="ko-KR" altLang="en-US" dirty="0"/>
-              <a:t>에 값 넣기</a:t>
-            </a:r>
             <a:endParaRPr lang="en-US" altLang="ko-KR" dirty="0"/>
-          </a:p>
-          <a:p>
-            <a:pPr marL="0" indent="0">
-              <a:lnSpc>
-                <a:spcPct val="120000"/>
-              </a:lnSpc>
-              <a:buNone/>
-            </a:pPr>
-            <a:r>
-              <a:rPr lang="en-US" altLang="ko-KR" dirty="0"/>
-              <a:t>	</a:t>
-            </a:r>
-            <a:r>
-              <a:rPr lang="en-US" altLang="ko-KR" sz="2400" b="0" dirty="0" err="1">
-                <a:effectLst/>
-                <a:latin typeface="+mn-ea"/>
-              </a:rPr>
-              <a:t>document.getElementById</a:t>
-            </a:r>
-            <a:r>
-              <a:rPr lang="en-US" altLang="ko-KR" sz="2400" b="0" dirty="0">
-                <a:effectLst/>
-                <a:latin typeface="+mn-ea"/>
-              </a:rPr>
-              <a:t>(“</a:t>
-            </a:r>
-            <a:r>
-              <a:rPr lang="en-US" altLang="ko-KR" sz="2400" dirty="0">
-                <a:latin typeface="+mn-ea"/>
-              </a:rPr>
-              <a:t>value1</a:t>
-            </a:r>
-            <a:r>
-              <a:rPr lang="en-US" altLang="ko-KR" sz="2400" b="0" dirty="0">
-                <a:effectLst/>
-                <a:latin typeface="+mn-ea"/>
-              </a:rPr>
-              <a:t>").value = </a:t>
-            </a:r>
-            <a:r>
-              <a:rPr lang="ko-KR" altLang="en-US" sz="2400" dirty="0">
-                <a:latin typeface="+mn-ea"/>
-              </a:rPr>
-              <a:t>값</a:t>
-            </a:r>
-            <a:r>
-              <a:rPr lang="en-US" altLang="ko-KR" sz="2400" b="0" dirty="0">
-                <a:effectLst/>
-                <a:latin typeface="+mn-ea"/>
-              </a:rPr>
-              <a:t>;</a:t>
-            </a:r>
-            <a:endParaRPr lang="en-US" altLang="ko-KR" b="0" dirty="0">
-              <a:effectLst/>
-              <a:latin typeface="+mn-ea"/>
-            </a:endParaRPr>
           </a:p>
         </p:txBody>
       </p:sp>
@@ -29351,9 +29027,9 @@
           <a:bodyPr/>
           <a:lstStyle/>
           <a:p>
-            <a:fld id="{58C994F4-268E-4B47-97B8-5DBF3FCF6BBF}" type="datetime6">
+            <a:fld id="{0F78D9C4-20C1-4B15-A116-16DC77AD9A1E}" type="datetime1">
               <a:rPr lang="ko-KR" altLang="en-US" smtClean="0"/>
-              <a:t>2024년 6월</a:t>
+              <a:t>2024-06-05</a:t>
             </a:fld>
             <a:endParaRPr lang="ko-KR" altLang="en-US"/>
           </a:p>
@@ -29412,7 +29088,7 @@
             <a:r>
               <a:rPr lang="ko-KR" altLang="en-US" dirty="0">
                 <a:solidFill>
-                  <a:schemeClr val="accent1"/>
+                  <a:srgbClr val="6EC173"/>
                 </a:solidFill>
               </a:rPr>
               <a:t>실습</a:t>
@@ -29420,127 +29096,474 @@
             <a:r>
               <a:rPr lang="en-US" altLang="ko-KR" dirty="0">
                 <a:solidFill>
-                  <a:schemeClr val="accent1"/>
-                </a:solidFill>
-              </a:rPr>
-              <a:t>. </a:t>
+                  <a:srgbClr val="6EC173"/>
+                </a:solidFill>
+              </a:rPr>
+              <a:t>.  </a:t>
+            </a:r>
+            <a:r>
+              <a:rPr lang="en-US" altLang="ko-KR" dirty="0"/>
+              <a:t> </a:t>
             </a:r>
             <a:r>
               <a:rPr lang="ko-KR" altLang="en-US" dirty="0"/>
-              <a:t>간단 계산기 만들기</a:t>
-            </a:r>
-          </a:p>
-        </p:txBody>
-      </p:sp>
-      <p:pic>
-        <p:nvPicPr>
-          <p:cNvPr id="6" name="그림 5">
+              <a:t>아이스크림 베스트</a:t>
+            </a:r>
+            <a:r>
+              <a:rPr lang="en-US" altLang="ko-KR" dirty="0"/>
+              <a:t>9</a:t>
+            </a:r>
+            <a:endParaRPr lang="ko-KR" altLang="en-US" dirty="0"/>
+          </a:p>
+        </p:txBody>
+      </p:sp>
+      <p:sp>
+        <p:nvSpPr>
+          <p:cNvPr id="6" name="내용 개체 틀 1">
             <a:extLst>
               <a:ext uri="{FF2B5EF4-FFF2-40B4-BE49-F238E27FC236}">
-                <a16:creationId xmlns:a16="http://schemas.microsoft.com/office/drawing/2014/main" id="{09093B82-51F4-97A7-316A-66868CF5CFD4}"/>
+                <a16:creationId xmlns:a16="http://schemas.microsoft.com/office/drawing/2014/main" id="{70C2BA37-BE91-39C4-AC08-0E8A1052E2F7}"/>
               </a:ext>
             </a:extLst>
           </p:cNvPr>
-          <p:cNvPicPr>
-            <a:picLocks noChangeAspect="1"/>
-          </p:cNvPicPr>
+          <p:cNvSpPr txBox="1">
+            <a:spLocks/>
+          </p:cNvSpPr>
           <p:nvPr/>
-        </p:nvPicPr>
-        <p:blipFill rotWithShape="1">
-          <a:blip r:embed="rId3"/>
-          <a:srcRect b="16763"/>
-          <a:stretch/>
-        </p:blipFill>
+        </p:nvSpPr>
         <p:spPr>
           <a:xfrm>
-            <a:off x="584986" y="1191807"/>
-            <a:ext cx="5511014" cy="2564279"/>
+            <a:off x="838200" y="1825625"/>
+            <a:ext cx="10515600" cy="4351338"/>
           </a:xfrm>
           <a:prstGeom prst="rect">
             <a:avLst/>
           </a:prstGeom>
         </p:spPr>
-      </p:pic>
-      <p:sp>
-        <p:nvSpPr>
-          <p:cNvPr id="7" name="화살표: 왼쪽 6">
-            <a:extLst>
-              <a:ext uri="{FF2B5EF4-FFF2-40B4-BE49-F238E27FC236}">
-                <a16:creationId xmlns:a16="http://schemas.microsoft.com/office/drawing/2014/main" id="{0E6C8091-BE65-CFE5-C1FF-AC0096915AC5}"/>
-              </a:ext>
-            </a:extLst>
-          </p:cNvPr>
-          <p:cNvSpPr/>
-          <p:nvPr/>
-        </p:nvSpPr>
-        <p:spPr>
-          <a:xfrm>
-            <a:off x="4298168" y="1441550"/>
-            <a:ext cx="414469" cy="320357"/>
-          </a:xfrm>
-          <a:prstGeom prst="leftArrow">
-            <a:avLst/>
-          </a:prstGeom>
-        </p:spPr>
-        <p:style>
-          <a:lnRef idx="2">
-            <a:schemeClr val="accent1">
-              <a:shade val="50000"/>
-            </a:schemeClr>
-          </a:lnRef>
-          <a:fillRef idx="1">
-            <a:schemeClr val="accent1"/>
-          </a:fillRef>
-          <a:effectRef idx="0">
-            <a:schemeClr val="accent1"/>
-          </a:effectRef>
-          <a:fontRef idx="minor">
-            <a:schemeClr val="lt1"/>
-          </a:fontRef>
-        </p:style>
-        <p:txBody>
-          <a:bodyPr rtlCol="0" anchor="ctr"/>
-          <a:lstStyle/>
-          <a:p>
-            <a:pPr algn="ctr"/>
-            <a:endParaRPr lang="ko-KR" altLang="en-US"/>
-          </a:p>
-        </p:txBody>
-      </p:sp>
-      <p:pic>
-        <p:nvPicPr>
-          <p:cNvPr id="10" name="그림 9">
-            <a:extLst>
-              <a:ext uri="{FF2B5EF4-FFF2-40B4-BE49-F238E27FC236}">
-                <a16:creationId xmlns:a16="http://schemas.microsoft.com/office/drawing/2014/main" id="{C4156985-C1CE-96B0-184D-062EB07FF39C}"/>
-              </a:ext>
-            </a:extLst>
-          </p:cNvPr>
-          <p:cNvPicPr>
-            <a:picLocks noChangeAspect="1"/>
-          </p:cNvPicPr>
-          <p:nvPr/>
-        </p:nvPicPr>
-        <p:blipFill>
-          <a:blip r:embed="rId4"/>
-          <a:stretch>
-            <a:fillRect/>
-          </a:stretch>
-        </p:blipFill>
-        <p:spPr>
-          <a:xfrm>
-            <a:off x="4712637" y="1332243"/>
-            <a:ext cx="7315290" cy="595142"/>
-          </a:xfrm>
-          <a:prstGeom prst="rect">
-            <a:avLst/>
-          </a:prstGeom>
-        </p:spPr>
-      </p:pic>
+        <p:txBody>
+          <a:bodyPr vert="horz" lIns="91440" tIns="45720" rIns="91440" bIns="45720" rtlCol="0">
+            <a:normAutofit/>
+          </a:bodyPr>
+          <a:lstStyle>
+            <a:lvl1pPr marL="228600" indent="-228600" algn="l" defTabSz="914400" rtl="0" eaLnBrk="1" latinLnBrk="1" hangingPunct="1">
+              <a:lnSpc>
+                <a:spcPct val="90000"/>
+              </a:lnSpc>
+              <a:spcBef>
+                <a:spcPts val="1000"/>
+              </a:spcBef>
+              <a:buFont typeface="Arial" panose="020B0604020202020204" pitchFamily="34" charset="0"/>
+              <a:buChar char="•"/>
+              <a:defRPr sz="2800" kern="1200">
+                <a:solidFill>
+                  <a:schemeClr val="tx1"/>
+                </a:solidFill>
+                <a:latin typeface="+mn-lt"/>
+                <a:ea typeface="+mn-ea"/>
+                <a:cs typeface="+mn-cs"/>
+              </a:defRPr>
+            </a:lvl1pPr>
+            <a:lvl2pPr marL="685800" indent="-228600" algn="l" defTabSz="914400" rtl="0" eaLnBrk="1" latinLnBrk="1" hangingPunct="1">
+              <a:lnSpc>
+                <a:spcPct val="90000"/>
+              </a:lnSpc>
+              <a:spcBef>
+                <a:spcPts val="500"/>
+              </a:spcBef>
+              <a:buFont typeface="Arial" panose="020B0604020202020204" pitchFamily="34" charset="0"/>
+              <a:buChar char="•"/>
+              <a:defRPr sz="2400" kern="1200">
+                <a:solidFill>
+                  <a:schemeClr val="tx1"/>
+                </a:solidFill>
+                <a:latin typeface="+mn-lt"/>
+                <a:ea typeface="+mn-ea"/>
+                <a:cs typeface="+mn-cs"/>
+              </a:defRPr>
+            </a:lvl2pPr>
+            <a:lvl3pPr marL="1143000" indent="-228600" algn="l" defTabSz="914400" rtl="0" eaLnBrk="1" latinLnBrk="1" hangingPunct="1">
+              <a:lnSpc>
+                <a:spcPct val="90000"/>
+              </a:lnSpc>
+              <a:spcBef>
+                <a:spcPts val="500"/>
+              </a:spcBef>
+              <a:buFont typeface="Arial" panose="020B0604020202020204" pitchFamily="34" charset="0"/>
+              <a:buChar char="•"/>
+              <a:defRPr sz="2000" kern="1200">
+                <a:solidFill>
+                  <a:schemeClr val="tx1"/>
+                </a:solidFill>
+                <a:latin typeface="+mn-lt"/>
+                <a:ea typeface="+mn-ea"/>
+                <a:cs typeface="+mn-cs"/>
+              </a:defRPr>
+            </a:lvl3pPr>
+            <a:lvl4pPr marL="1600200" indent="-228600" algn="l" defTabSz="914400" rtl="0" eaLnBrk="1" latinLnBrk="1" hangingPunct="1">
+              <a:lnSpc>
+                <a:spcPct val="90000"/>
+              </a:lnSpc>
+              <a:spcBef>
+                <a:spcPts val="500"/>
+              </a:spcBef>
+              <a:buFont typeface="Arial" panose="020B0604020202020204" pitchFamily="34" charset="0"/>
+              <a:buChar char="•"/>
+              <a:defRPr sz="1800" kern="1200">
+                <a:solidFill>
+                  <a:schemeClr val="tx1"/>
+                </a:solidFill>
+                <a:latin typeface="+mn-lt"/>
+                <a:ea typeface="+mn-ea"/>
+                <a:cs typeface="+mn-cs"/>
+              </a:defRPr>
+            </a:lvl4pPr>
+            <a:lvl5pPr marL="2057400" indent="-228600" algn="l" defTabSz="914400" rtl="0" eaLnBrk="1" latinLnBrk="1" hangingPunct="1">
+              <a:lnSpc>
+                <a:spcPct val="90000"/>
+              </a:lnSpc>
+              <a:spcBef>
+                <a:spcPts val="500"/>
+              </a:spcBef>
+              <a:buFont typeface="Arial" panose="020B0604020202020204" pitchFamily="34" charset="0"/>
+              <a:buChar char="•"/>
+              <a:defRPr sz="1800" kern="1200">
+                <a:solidFill>
+                  <a:schemeClr val="tx1"/>
+                </a:solidFill>
+                <a:latin typeface="+mn-lt"/>
+                <a:ea typeface="+mn-ea"/>
+                <a:cs typeface="+mn-cs"/>
+              </a:defRPr>
+            </a:lvl5pPr>
+            <a:lvl6pPr marL="2514600" indent="-228600" algn="l" defTabSz="914400" rtl="0" eaLnBrk="1" latinLnBrk="1" hangingPunct="1">
+              <a:lnSpc>
+                <a:spcPct val="90000"/>
+              </a:lnSpc>
+              <a:spcBef>
+                <a:spcPts val="500"/>
+              </a:spcBef>
+              <a:buFont typeface="Arial" panose="020B0604020202020204" pitchFamily="34" charset="0"/>
+              <a:buChar char="•"/>
+              <a:defRPr sz="1800" kern="1200">
+                <a:solidFill>
+                  <a:schemeClr val="tx1"/>
+                </a:solidFill>
+                <a:latin typeface="+mn-lt"/>
+                <a:ea typeface="+mn-ea"/>
+                <a:cs typeface="+mn-cs"/>
+              </a:defRPr>
+            </a:lvl6pPr>
+            <a:lvl7pPr marL="2971800" indent="-228600" algn="l" defTabSz="914400" rtl="0" eaLnBrk="1" latinLnBrk="1" hangingPunct="1">
+              <a:lnSpc>
+                <a:spcPct val="90000"/>
+              </a:lnSpc>
+              <a:spcBef>
+                <a:spcPts val="500"/>
+              </a:spcBef>
+              <a:buFont typeface="Arial" panose="020B0604020202020204" pitchFamily="34" charset="0"/>
+              <a:buChar char="•"/>
+              <a:defRPr sz="1800" kern="1200">
+                <a:solidFill>
+                  <a:schemeClr val="tx1"/>
+                </a:solidFill>
+                <a:latin typeface="+mn-lt"/>
+                <a:ea typeface="+mn-ea"/>
+                <a:cs typeface="+mn-cs"/>
+              </a:defRPr>
+            </a:lvl7pPr>
+            <a:lvl8pPr marL="3429000" indent="-228600" algn="l" defTabSz="914400" rtl="0" eaLnBrk="1" latinLnBrk="1" hangingPunct="1">
+              <a:lnSpc>
+                <a:spcPct val="90000"/>
+              </a:lnSpc>
+              <a:spcBef>
+                <a:spcPts val="500"/>
+              </a:spcBef>
+              <a:buFont typeface="Arial" panose="020B0604020202020204" pitchFamily="34" charset="0"/>
+              <a:buChar char="•"/>
+              <a:defRPr sz="1800" kern="1200">
+                <a:solidFill>
+                  <a:schemeClr val="tx1"/>
+                </a:solidFill>
+                <a:latin typeface="+mn-lt"/>
+                <a:ea typeface="+mn-ea"/>
+                <a:cs typeface="+mn-cs"/>
+              </a:defRPr>
+            </a:lvl8pPr>
+            <a:lvl9pPr marL="3886200" indent="-228600" algn="l" defTabSz="914400" rtl="0" eaLnBrk="1" latinLnBrk="1" hangingPunct="1">
+              <a:lnSpc>
+                <a:spcPct val="90000"/>
+              </a:lnSpc>
+              <a:spcBef>
+                <a:spcPts val="500"/>
+              </a:spcBef>
+              <a:buFont typeface="Arial" panose="020B0604020202020204" pitchFamily="34" charset="0"/>
+              <a:buChar char="•"/>
+              <a:defRPr sz="1800" kern="1200">
+                <a:solidFill>
+                  <a:schemeClr val="tx1"/>
+                </a:solidFill>
+                <a:latin typeface="+mn-lt"/>
+                <a:ea typeface="+mn-ea"/>
+                <a:cs typeface="+mn-cs"/>
+              </a:defRPr>
+            </a:lvl9pPr>
+          </a:lstStyle>
+          <a:p>
+            <a:pPr marL="457200" lvl="1" indent="0">
+              <a:buFont typeface="Arial" panose="020B0604020202020204" pitchFamily="34" charset="0"/>
+              <a:buNone/>
+            </a:pPr>
+            <a:endParaRPr lang="en-US" altLang="ko-KR" dirty="0">
+              <a:solidFill>
+                <a:srgbClr val="212529"/>
+              </a:solidFill>
+              <a:latin typeface="+mn-ea"/>
+            </a:endParaRPr>
+          </a:p>
+          <a:p>
+            <a:pPr marL="457200" lvl="1" indent="0">
+              <a:buFont typeface="Arial" panose="020B0604020202020204" pitchFamily="34" charset="0"/>
+              <a:buNone/>
+            </a:pPr>
+            <a:endParaRPr lang="en-US" altLang="ko-KR" dirty="0">
+              <a:solidFill>
+                <a:srgbClr val="212529"/>
+              </a:solidFill>
+              <a:latin typeface="+mn-ea"/>
+            </a:endParaRPr>
+          </a:p>
+          <a:p>
+            <a:r>
+              <a:rPr lang="en-US" altLang="ko-KR" b="1" dirty="0">
+                <a:solidFill>
+                  <a:srgbClr val="212529"/>
+                </a:solidFill>
+                <a:latin typeface="+mn-ea"/>
+              </a:rPr>
+              <a:t>[</a:t>
+            </a:r>
+            <a:r>
+              <a:rPr lang="ko-KR" altLang="en-US" b="1" dirty="0" err="1">
+                <a:solidFill>
+                  <a:srgbClr val="212529"/>
+                </a:solidFill>
+                <a:latin typeface="+mn-ea"/>
+              </a:rPr>
+              <a:t>코딩온</a:t>
+            </a:r>
+            <a:r>
+              <a:rPr lang="en-US" altLang="ko-KR" b="1" dirty="0">
+                <a:solidFill>
+                  <a:srgbClr val="212529"/>
+                </a:solidFill>
+                <a:latin typeface="+mn-ea"/>
+              </a:rPr>
+              <a:t>] HTML, CSS, JS </a:t>
+            </a:r>
+            <a:r>
+              <a:rPr lang="ko-KR" altLang="en-US" b="1" dirty="0">
+                <a:solidFill>
+                  <a:srgbClr val="212529"/>
+                </a:solidFill>
+                <a:latin typeface="+mn-ea"/>
+              </a:rPr>
+              <a:t>실습</a:t>
+            </a:r>
+            <a:r>
+              <a:rPr lang="en-US" altLang="ko-KR" b="1" dirty="0">
+                <a:solidFill>
+                  <a:srgbClr val="212529"/>
+                </a:solidFill>
+                <a:latin typeface="+mn-ea"/>
+              </a:rPr>
+              <a:t> </a:t>
+            </a:r>
+            <a:r>
+              <a:rPr lang="ko-KR" altLang="en-US" dirty="0">
+                <a:solidFill>
+                  <a:srgbClr val="212529"/>
+                </a:solidFill>
+                <a:latin typeface="+mn-ea"/>
+              </a:rPr>
+              <a:t>강의 클릭</a:t>
+            </a:r>
+            <a:br>
+              <a:rPr lang="en-US" altLang="ko-KR" dirty="0">
+                <a:solidFill>
+                  <a:srgbClr val="212529"/>
+                </a:solidFill>
+                <a:latin typeface="+mn-ea"/>
+              </a:rPr>
+            </a:br>
+            <a:endParaRPr lang="en-US" altLang="ko-KR" dirty="0">
+              <a:solidFill>
+                <a:srgbClr val="212529"/>
+              </a:solidFill>
+              <a:latin typeface="+mn-ea"/>
+            </a:endParaRPr>
+          </a:p>
+          <a:p>
+            <a:pPr lvl="1"/>
+            <a:r>
+              <a:rPr lang="ko-KR" altLang="en-US" sz="2800" b="1" dirty="0">
+                <a:solidFill>
+                  <a:srgbClr val="212529"/>
+                </a:solidFill>
+                <a:latin typeface="+mn-ea"/>
+              </a:rPr>
+              <a:t>➡ </a:t>
+            </a:r>
+            <a:r>
+              <a:rPr lang="en-US" altLang="ko-KR" sz="2800" b="1" dirty="0">
+                <a:solidFill>
+                  <a:srgbClr val="212529"/>
+                </a:solidFill>
+                <a:latin typeface="+mn-ea"/>
+              </a:rPr>
+              <a:t>[</a:t>
+            </a:r>
+            <a:r>
+              <a:rPr lang="en-US" altLang="ko-KR" sz="2800" b="1" dirty="0" err="1">
+                <a:solidFill>
+                  <a:srgbClr val="212529"/>
+                </a:solidFill>
+                <a:latin typeface="+mn-ea"/>
+              </a:rPr>
+              <a:t>Javascript</a:t>
+            </a:r>
+            <a:r>
+              <a:rPr lang="en-US" altLang="ko-KR" sz="2800" b="1" dirty="0">
+                <a:solidFill>
+                  <a:srgbClr val="212529"/>
+                </a:solidFill>
+                <a:latin typeface="+mn-ea"/>
+              </a:rPr>
+              <a:t> DOM </a:t>
+            </a:r>
+            <a:r>
+              <a:rPr lang="ko-KR" altLang="en-US" sz="2800" b="1" dirty="0">
+                <a:solidFill>
+                  <a:srgbClr val="212529"/>
+                </a:solidFill>
+                <a:latin typeface="+mn-ea"/>
+              </a:rPr>
+              <a:t>실습</a:t>
+            </a:r>
+            <a:r>
+              <a:rPr lang="en-US" altLang="ko-KR" sz="2800" b="1" dirty="0">
+                <a:solidFill>
+                  <a:srgbClr val="212529"/>
+                </a:solidFill>
+                <a:latin typeface="+mn-ea"/>
+              </a:rPr>
+              <a:t>(1)]</a:t>
+            </a:r>
+            <a:r>
+              <a:rPr lang="en-US" altLang="ko-KR" sz="2800" dirty="0">
+                <a:solidFill>
+                  <a:srgbClr val="212529"/>
+                </a:solidFill>
+                <a:latin typeface="+mn-ea"/>
+              </a:rPr>
+              <a:t> </a:t>
+            </a:r>
+            <a:r>
+              <a:rPr lang="ko-KR" altLang="en-US" sz="2800" dirty="0">
+                <a:solidFill>
+                  <a:srgbClr val="212529"/>
+                </a:solidFill>
+                <a:latin typeface="+mn-ea"/>
+              </a:rPr>
+              <a:t>커리큘럼 클릭</a:t>
+            </a:r>
+            <a:endParaRPr lang="en-US" altLang="ko-KR" sz="2800" dirty="0">
+              <a:solidFill>
+                <a:srgbClr val="212529"/>
+              </a:solidFill>
+              <a:latin typeface="+mn-ea"/>
+            </a:endParaRPr>
+          </a:p>
+          <a:p>
+            <a:pPr lvl="1"/>
+            <a:r>
+              <a:rPr lang="ko-KR" altLang="en-US" sz="2800" b="1" dirty="0">
+                <a:solidFill>
+                  <a:srgbClr val="212529"/>
+                </a:solidFill>
+                <a:latin typeface="+mn-ea"/>
+              </a:rPr>
+              <a:t>➡ </a:t>
+            </a:r>
+            <a:r>
+              <a:rPr lang="en-US" altLang="ko-KR" sz="2800" b="1" dirty="0">
+                <a:solidFill>
+                  <a:schemeClr val="accent1"/>
+                </a:solidFill>
+                <a:latin typeface="+mn-ea"/>
+              </a:rPr>
+              <a:t>[</a:t>
+            </a:r>
+            <a:r>
+              <a:rPr lang="ko-KR" altLang="en-US" sz="2800" b="1" dirty="0" err="1">
+                <a:solidFill>
+                  <a:schemeClr val="accent1"/>
+                </a:solidFill>
+                <a:latin typeface="+mn-ea"/>
+              </a:rPr>
+              <a:t>실습문제</a:t>
+            </a:r>
+            <a:r>
+              <a:rPr lang="en-US" altLang="ko-KR" sz="2800" b="1" dirty="0">
+                <a:solidFill>
+                  <a:schemeClr val="accent1"/>
+                </a:solidFill>
+                <a:latin typeface="+mn-ea"/>
+              </a:rPr>
+              <a:t>3. </a:t>
+            </a:r>
+            <a:r>
+              <a:rPr lang="ko-KR" altLang="en-US" sz="2800" b="1" dirty="0">
+                <a:solidFill>
+                  <a:schemeClr val="accent1"/>
+                </a:solidFill>
+                <a:latin typeface="+mn-ea"/>
+              </a:rPr>
+              <a:t>아이스크림 베스트</a:t>
+            </a:r>
+            <a:r>
+              <a:rPr lang="en-US" altLang="ko-KR" sz="2800" b="1" dirty="0">
+                <a:solidFill>
+                  <a:schemeClr val="accent1"/>
+                </a:solidFill>
+                <a:latin typeface="+mn-ea"/>
+              </a:rPr>
+              <a:t>9]</a:t>
+            </a:r>
+            <a:r>
+              <a:rPr lang="en-US" altLang="ko-KR" sz="2800" dirty="0">
+                <a:solidFill>
+                  <a:schemeClr val="accent1"/>
+                </a:solidFill>
+                <a:latin typeface="+mn-ea"/>
+              </a:rPr>
+              <a:t> </a:t>
+            </a:r>
+            <a:r>
+              <a:rPr lang="ko-KR" altLang="en-US" sz="2800" dirty="0">
+                <a:solidFill>
+                  <a:srgbClr val="212529"/>
+                </a:solidFill>
+                <a:latin typeface="+mn-ea"/>
+              </a:rPr>
+              <a:t> 진행</a:t>
+            </a:r>
+          </a:p>
+        </p:txBody>
+      </p:sp>
     </p:spTree>
     <p:extLst>
       <p:ext uri="{BB962C8B-B14F-4D97-AF65-F5344CB8AC3E}">
-        <p14:creationId xmlns:p14="http://schemas.microsoft.com/office/powerpoint/2010/main" val="1811042708"/>
+        <p14:creationId xmlns:p14="http://schemas.microsoft.com/office/powerpoint/2010/main" val="955611044"/>
       </p:ext>
     </p:extLst>
   </p:cSld>
@@ -29569,150 +29592,7 @@
       </p:grpSpPr>
       <p:sp>
         <p:nvSpPr>
-          <p:cNvPr id="13" name="내용 개체 틀 2">
-            <a:extLst>
-              <a:ext uri="{FF2B5EF4-FFF2-40B4-BE49-F238E27FC236}">
-                <a16:creationId xmlns:a16="http://schemas.microsoft.com/office/drawing/2014/main" id="{847FD532-7F61-A001-537F-B970BD821AF3}"/>
-              </a:ext>
-            </a:extLst>
-          </p:cNvPr>
-          <p:cNvSpPr>
-            <a:spLocks noGrp="1"/>
-          </p:cNvSpPr>
-          <p:nvPr>
-            <p:ph idx="1"/>
-          </p:nvPr>
-        </p:nvSpPr>
-        <p:spPr>
-          <a:xfrm>
-            <a:off x="5138737" y="3429000"/>
-            <a:ext cx="6705602" cy="2885236"/>
-          </a:xfrm>
-        </p:spPr>
-        <p:txBody>
-          <a:bodyPr>
-            <a:normAutofit lnSpcReduction="10000"/>
-          </a:bodyPr>
-          <a:lstStyle/>
-          <a:p>
-            <a:pPr marL="0" indent="0">
-              <a:lnSpc>
-                <a:spcPct val="120000"/>
-              </a:lnSpc>
-              <a:buNone/>
-            </a:pPr>
-            <a:r>
-              <a:rPr lang="ko-KR" altLang="en-US" b="0" dirty="0">
-                <a:effectLst/>
-                <a:latin typeface="+mn-ea"/>
-              </a:rPr>
-              <a:t>작성자와 내용을 쓰고 </a:t>
-            </a:r>
-            <a:r>
-              <a:rPr lang="en-US" altLang="ko-KR" b="0" dirty="0">
-                <a:effectLst/>
-                <a:latin typeface="+mn-ea"/>
-              </a:rPr>
-              <a:t>“</a:t>
-            </a:r>
-            <a:r>
-              <a:rPr lang="ko-KR" altLang="en-US" b="0" dirty="0">
-                <a:effectLst/>
-                <a:latin typeface="+mn-ea"/>
-              </a:rPr>
-              <a:t>작성</a:t>
-            </a:r>
-            <a:r>
-              <a:rPr lang="en-US" altLang="ko-KR" b="0" dirty="0">
-                <a:effectLst/>
-                <a:latin typeface="+mn-ea"/>
-              </a:rPr>
-              <a:t>“ </a:t>
-            </a:r>
-            <a:r>
-              <a:rPr lang="ko-KR" altLang="en-US" b="0" dirty="0">
-                <a:effectLst/>
-                <a:latin typeface="+mn-ea"/>
-              </a:rPr>
-              <a:t>을 누르면 아래 </a:t>
-            </a:r>
-            <a:r>
-              <a:rPr lang="en-US" altLang="ko-KR" b="0" dirty="0">
-                <a:effectLst/>
-                <a:latin typeface="+mn-ea"/>
-              </a:rPr>
-              <a:t>table</a:t>
-            </a:r>
-            <a:r>
-              <a:rPr lang="ko-KR" altLang="en-US" b="0" dirty="0">
-                <a:effectLst/>
-                <a:latin typeface="+mn-ea"/>
-              </a:rPr>
-              <a:t> 에 추가</a:t>
-            </a:r>
-            <a:endParaRPr lang="en-US" altLang="ko-KR" b="0" dirty="0">
-              <a:effectLst/>
-              <a:latin typeface="+mn-ea"/>
-            </a:endParaRPr>
-          </a:p>
-          <a:p>
-            <a:pPr marL="0" indent="0">
-              <a:lnSpc>
-                <a:spcPct val="120000"/>
-              </a:lnSpc>
-              <a:buNone/>
-            </a:pPr>
-            <a:endParaRPr lang="en-US" altLang="ko-KR" dirty="0">
-              <a:latin typeface="+mn-ea"/>
-            </a:endParaRPr>
-          </a:p>
-          <a:p>
-            <a:pPr marL="0" indent="0">
-              <a:lnSpc>
-                <a:spcPct val="120000"/>
-              </a:lnSpc>
-              <a:buNone/>
-            </a:pPr>
-            <a:r>
-              <a:rPr lang="ko-KR" altLang="en-US" b="0" dirty="0">
-                <a:effectLst/>
-                <a:latin typeface="+mn-ea"/>
-              </a:rPr>
-              <a:t>이때</a:t>
-            </a:r>
-            <a:r>
-              <a:rPr lang="en-US" altLang="ko-KR" b="0" dirty="0">
-                <a:effectLst/>
-                <a:latin typeface="+mn-ea"/>
-              </a:rPr>
-              <a:t>, </a:t>
-            </a:r>
-            <a:r>
-              <a:rPr lang="ko-KR" altLang="en-US" b="0" dirty="0">
-                <a:effectLst/>
-                <a:latin typeface="+mn-ea"/>
-              </a:rPr>
-              <a:t>작성일은 작성한 시간이 되어야 한다</a:t>
-            </a:r>
-            <a:r>
-              <a:rPr lang="en-US" altLang="ko-KR" b="0" dirty="0">
-                <a:effectLst/>
-                <a:latin typeface="+mn-ea"/>
-              </a:rPr>
-              <a:t>.</a:t>
-            </a:r>
-          </a:p>
-        </p:txBody>
-      </p:sp>
-      <p:sp>
-        <p:nvSpPr>
-          <p:cNvPr id="4" name="날짜 개체 틀 3">
-            <a:extLst>
-              <a:ext uri="{FF2B5EF4-FFF2-40B4-BE49-F238E27FC236}">
-                <a16:creationId xmlns:a16="http://schemas.microsoft.com/office/drawing/2014/main" id="{A695DDE5-0A39-A366-4CFE-A283911999CD}"/>
-              </a:ext>
-            </a:extLst>
-          </p:cNvPr>
+          <p:cNvPr id="2" name="날짜 개체 틀 1"/>
           <p:cNvSpPr>
             <a:spLocks noGrp="1"/>
           </p:cNvSpPr>
@@ -29725,7 +29605,7 @@
           <a:bodyPr/>
           <a:lstStyle/>
           <a:p>
-            <a:fld id="{BB9625C5-EB1E-432B-A1EC-7DC8377B728C}" type="datetime6">
+            <a:fld id="{0E19CB95-6D28-40F1-9DA3-1BAC5D4B5B4F}" type="datetime6">
               <a:rPr lang="ko-KR" altLang="en-US" smtClean="0"/>
               <a:t>2024년 6월</a:t>
             </a:fld>
@@ -29735,13 +29615,7 @@
       </p:sp>
       <p:sp>
         <p:nvSpPr>
-          <p:cNvPr id="5" name="슬라이드 번호 개체 틀 4">
-            <a:extLst>
-              <a:ext uri="{FF2B5EF4-FFF2-40B4-BE49-F238E27FC236}">
-                <a16:creationId xmlns:a16="http://schemas.microsoft.com/office/drawing/2014/main" id="{5E040F43-60A7-C50D-1F5B-F984054F2D7C}"/>
-              </a:ext>
-            </a:extLst>
-          </p:cNvPr>
+          <p:cNvPr id="3" name="슬라이드 번호 개체 틀 2"/>
           <p:cNvSpPr>
             <a:spLocks noGrp="1"/>
           </p:cNvSpPr>
@@ -29764,13 +29638,7 @@
       </p:sp>
       <p:sp>
         <p:nvSpPr>
-          <p:cNvPr id="2" name="제목 1">
-            <a:extLst>
-              <a:ext uri="{FF2B5EF4-FFF2-40B4-BE49-F238E27FC236}">
-                <a16:creationId xmlns:a16="http://schemas.microsoft.com/office/drawing/2014/main" id="{5FAC57F5-99D7-9C46-B6C1-D16224151FE9}"/>
-              </a:ext>
-            </a:extLst>
-          </p:cNvPr>
+          <p:cNvPr id="4" name="제목 3"/>
           <p:cNvSpPr>
             <a:spLocks noGrp="1"/>
           </p:cNvSpPr>
@@ -29778,68 +29646,35 @@
             <p:ph type="title"/>
           </p:nvPr>
         </p:nvSpPr>
-        <p:spPr/>
+        <p:spPr>
+          <a:xfrm>
+            <a:off x="838200" y="2766218"/>
+            <a:ext cx="10515600" cy="1325563"/>
+          </a:xfrm>
+        </p:spPr>
         <p:txBody>
           <a:bodyPr/>
           <a:lstStyle/>
           <a:p>
             <a:r>
-              <a:rPr lang="ko-KR" altLang="en-US" dirty="0">
-                <a:solidFill>
-                  <a:schemeClr val="accent1"/>
-                </a:solidFill>
-              </a:rPr>
-              <a:t>실습</a:t>
-            </a:r>
-            <a:r>
-              <a:rPr lang="en-US" altLang="ko-KR" dirty="0">
-                <a:solidFill>
-                  <a:schemeClr val="accent1"/>
-                </a:solidFill>
-              </a:rPr>
-              <a:t>. </a:t>
-            </a:r>
-            <a:r>
-              <a:rPr lang="ko-KR" altLang="en-US" dirty="0"/>
-              <a:t>방명록 만들기</a:t>
-            </a:r>
-          </a:p>
-        </p:txBody>
-      </p:sp>
-      <p:pic>
-        <p:nvPicPr>
-          <p:cNvPr id="11" name="그림 10">
-            <a:extLst>
-              <a:ext uri="{FF2B5EF4-FFF2-40B4-BE49-F238E27FC236}">
-                <a16:creationId xmlns:a16="http://schemas.microsoft.com/office/drawing/2014/main" id="{D8957CB8-00A6-4AA5-D0B3-4903F1EAEFFF}"/>
-              </a:ext>
-            </a:extLst>
-          </p:cNvPr>
-          <p:cNvPicPr>
-            <a:picLocks noChangeAspect="1"/>
-          </p:cNvPicPr>
-          <p:nvPr/>
-        </p:nvPicPr>
-        <p:blipFill>
-          <a:blip r:embed="rId3"/>
-          <a:stretch>
-            <a:fillRect/>
-          </a:stretch>
-        </p:blipFill>
-        <p:spPr>
-          <a:xfrm>
-            <a:off x="347662" y="1246898"/>
-            <a:ext cx="4791075" cy="3286125"/>
-          </a:xfrm>
-          <a:prstGeom prst="rect">
-            <a:avLst/>
-          </a:prstGeom>
-        </p:spPr>
-      </p:pic>
+              <a:rPr lang="ko-KR" altLang="en-US" sz="7200" dirty="0"/>
+              <a:t>이벤트 </a:t>
+            </a:r>
+            <a:br>
+              <a:rPr lang="en-US" altLang="ko-KR" sz="7200" dirty="0"/>
+            </a:br>
+            <a:r>
+              <a:rPr lang="en-US" altLang="ko-KR" sz="7200" dirty="0" err="1"/>
+              <a:t>addEventListener</a:t>
+            </a:r>
+            <a:endParaRPr lang="ko-KR" altLang="en-US" sz="7200" dirty="0"/>
+          </a:p>
+        </p:txBody>
+      </p:sp>
     </p:spTree>
     <p:extLst>
       <p:ext uri="{BB962C8B-B14F-4D97-AF65-F5344CB8AC3E}">
-        <p14:creationId xmlns:p14="http://schemas.microsoft.com/office/powerpoint/2010/main" val="389476208"/>
+        <p14:creationId xmlns:p14="http://schemas.microsoft.com/office/powerpoint/2010/main" val="3399084010"/>
       </p:ext>
     </p:extLst>
   </p:cSld>
@@ -30164,10 +29999,10 @@
       </p:grpSpPr>
       <p:sp>
         <p:nvSpPr>
-          <p:cNvPr id="13" name="내용 개체 틀 2">
+          <p:cNvPr id="2" name="제목 1">
             <a:extLst>
               <a:ext uri="{FF2B5EF4-FFF2-40B4-BE49-F238E27FC236}">
-                <a16:creationId xmlns:a16="http://schemas.microsoft.com/office/drawing/2014/main" id="{847FD532-7F61-A001-537F-B970BD821AF3}"/>
+                <a16:creationId xmlns:a16="http://schemas.microsoft.com/office/drawing/2014/main" id="{403FE426-FC8B-4845-9EDB-D82F8D6DA06C}"/>
               </a:ext>
             </a:extLst>
           </p:cNvPr>
@@ -30175,151 +30010,84 @@
             <a:spLocks noGrp="1"/>
           </p:cNvSpPr>
           <p:nvPr>
-            <p:ph idx="1"/>
-          </p:nvPr>
-        </p:nvSpPr>
-        <p:spPr>
-          <a:xfrm>
-            <a:off x="510988" y="1328391"/>
-            <a:ext cx="11260802" cy="5328442"/>
-          </a:xfrm>
-        </p:spPr>
-        <p:txBody>
-          <a:bodyPr>
-            <a:normAutofit/>
-          </a:bodyPr>
+            <p:ph type="title"/>
+          </p:nvPr>
+        </p:nvSpPr>
+        <p:spPr/>
+        <p:txBody>
+          <a:bodyPr/>
           <a:lstStyle/>
           <a:p>
-            <a:endParaRPr lang="en-US" altLang="ko-KR" dirty="0"/>
-          </a:p>
-          <a:p>
-            <a:pPr marL="0" indent="0">
-              <a:buNone/>
-            </a:pPr>
-            <a:endParaRPr lang="en-US" altLang="ko-KR" dirty="0"/>
-          </a:p>
-          <a:p>
-            <a:endParaRPr lang="en-US" altLang="ko-KR" dirty="0"/>
-          </a:p>
-        </p:txBody>
-      </p:sp>
-      <p:sp>
-        <p:nvSpPr>
-          <p:cNvPr id="4" name="날짜 개체 틀 3">
+            <a:pPr algn="ctr"/>
+            <a:r>
+              <a:rPr lang="ko-KR" altLang="en-US" dirty="0">
+                <a:solidFill>
+                  <a:srgbClr val="00B050"/>
+                </a:solidFill>
+                <a:ea typeface="Kim jung chul Gothic Bold" panose="020B0803000000000000" pitchFamily="50" charset="-127"/>
+              </a:rPr>
+              <a:t>요소</a:t>
+            </a:r>
+            <a:r>
+              <a:rPr lang="en-US" altLang="ko-KR" dirty="0">
+                <a:solidFill>
+                  <a:srgbClr val="00B050"/>
+                </a:solidFill>
+                <a:ea typeface="Kim jung chul Gothic Bold" panose="020B0803000000000000" pitchFamily="50" charset="-127"/>
+              </a:rPr>
+              <a:t>.</a:t>
+            </a:r>
+            <a:r>
+              <a:rPr lang="en-US" altLang="ko-KR" dirty="0" err="1">
+                <a:solidFill>
+                  <a:srgbClr val="00B050"/>
+                </a:solidFill>
+                <a:ea typeface="Kim jung chul Gothic Bold" panose="020B0803000000000000" pitchFamily="50" charset="-127"/>
+              </a:rPr>
+              <a:t>addEventListener</a:t>
+            </a:r>
+            <a:r>
+              <a:rPr lang="en-US" altLang="ko-KR" dirty="0">
+                <a:ea typeface="Kim jung chul Gothic Bold" panose="020B0803000000000000" pitchFamily="50" charset="-127"/>
+              </a:rPr>
+              <a:t>(</a:t>
+            </a:r>
+            <a:r>
+              <a:rPr lang="ko-KR" altLang="en-US" dirty="0">
+                <a:ea typeface="Kim jung chul Gothic Bold" panose="020B0803000000000000" pitchFamily="50" charset="-127"/>
+              </a:rPr>
+              <a:t>이벤트</a:t>
+            </a:r>
+            <a:r>
+              <a:rPr lang="en-US" altLang="ko-KR" dirty="0">
+                <a:ea typeface="Kim jung chul Gothic Bold" panose="020B0803000000000000" pitchFamily="50" charset="-127"/>
+              </a:rPr>
+              <a:t>, </a:t>
+            </a:r>
+            <a:r>
+              <a:rPr lang="ko-KR" altLang="en-US" dirty="0">
+                <a:ea typeface="Kim jung chul Gothic Bold" panose="020B0803000000000000" pitchFamily="50" charset="-127"/>
+              </a:rPr>
+              <a:t>명령</a:t>
+            </a:r>
+            <a:r>
+              <a:rPr lang="en-US" altLang="ko-KR" dirty="0">
+                <a:ea typeface="Kim jung chul Gothic Bold" panose="020B0803000000000000" pitchFamily="50" charset="-127"/>
+              </a:rPr>
+              <a:t>)</a:t>
+            </a:r>
+            <a:endParaRPr lang="ko-KR" altLang="en-US" dirty="0">
+              <a:ea typeface="Kim jung chul Gothic Bold" panose="020B0803000000000000" pitchFamily="50" charset="-127"/>
+            </a:endParaRPr>
+          </a:p>
+        </p:txBody>
+      </p:sp>
+      <p:sp>
+        <p:nvSpPr>
+          <p:cNvPr id="6" name="내용 개체 틀 2">
             <a:extLst>
               <a:ext uri="{FF2B5EF4-FFF2-40B4-BE49-F238E27FC236}">
-                <a16:creationId xmlns:a16="http://schemas.microsoft.com/office/drawing/2014/main" id="{A695DDE5-0A39-A366-4CFE-A283911999CD}"/>
-              </a:ext>
-            </a:extLst>
-          </p:cNvPr>
-          <p:cNvSpPr>
-            <a:spLocks noGrp="1"/>
-          </p:cNvSpPr>
-          <p:nvPr>
-            <p:ph type="dt" sz="half" idx="10"/>
-          </p:nvPr>
-        </p:nvSpPr>
-        <p:spPr/>
-        <p:txBody>
-          <a:bodyPr/>
-          <a:lstStyle/>
-          <a:p>
-            <a:fld id="{0F78D9C4-20C1-4B15-A116-16DC77AD9A1E}" type="datetime1">
-              <a:rPr lang="ko-KR" altLang="en-US" smtClean="0"/>
-              <a:t>2024-06-03</a:t>
-            </a:fld>
-            <a:endParaRPr lang="ko-KR" altLang="en-US"/>
-          </a:p>
-        </p:txBody>
-      </p:sp>
-      <p:sp>
-        <p:nvSpPr>
-          <p:cNvPr id="5" name="슬라이드 번호 개체 틀 4">
-            <a:extLst>
-              <a:ext uri="{FF2B5EF4-FFF2-40B4-BE49-F238E27FC236}">
-                <a16:creationId xmlns:a16="http://schemas.microsoft.com/office/drawing/2014/main" id="{5E040F43-60A7-C50D-1F5B-F984054F2D7C}"/>
-              </a:ext>
-            </a:extLst>
-          </p:cNvPr>
-          <p:cNvSpPr>
-            <a:spLocks noGrp="1"/>
-          </p:cNvSpPr>
-          <p:nvPr>
-            <p:ph type="sldNum" sz="quarter" idx="12"/>
-          </p:nvPr>
-        </p:nvSpPr>
-        <p:spPr/>
-        <p:txBody>
-          <a:bodyPr/>
-          <a:lstStyle/>
-          <a:p>
-            <a:fld id="{083A2CE0-18CD-4102-B738-4ACFF9E68BA4}" type="slidenum">
-              <a:rPr lang="ko-KR" altLang="en-US" smtClean="0"/>
-              <a:t>50</a:t>
-            </a:fld>
-            <a:endParaRPr lang="ko-KR" altLang="en-US"/>
-          </a:p>
-        </p:txBody>
-      </p:sp>
-      <p:sp>
-        <p:nvSpPr>
-          <p:cNvPr id="2" name="제목 1">
-            <a:extLst>
-              <a:ext uri="{FF2B5EF4-FFF2-40B4-BE49-F238E27FC236}">
-                <a16:creationId xmlns:a16="http://schemas.microsoft.com/office/drawing/2014/main" id="{5FAC57F5-99D7-9C46-B6C1-D16224151FE9}"/>
-              </a:ext>
-            </a:extLst>
-          </p:cNvPr>
-          <p:cNvSpPr>
-            <a:spLocks noGrp="1"/>
-          </p:cNvSpPr>
-          <p:nvPr>
-            <p:ph type="title"/>
-          </p:nvPr>
-        </p:nvSpPr>
-        <p:spPr/>
-        <p:txBody>
-          <a:bodyPr/>
-          <a:lstStyle/>
-          <a:p>
-            <a:r>
-              <a:rPr lang="ko-KR" altLang="en-US" dirty="0">
-                <a:solidFill>
-                  <a:srgbClr val="6EC173"/>
-                </a:solidFill>
-              </a:rPr>
-              <a:t>실습</a:t>
-            </a:r>
-            <a:r>
-              <a:rPr lang="en-US" altLang="ko-KR" dirty="0">
-                <a:solidFill>
-                  <a:srgbClr val="6EC173"/>
-                </a:solidFill>
-              </a:rPr>
-              <a:t>.  </a:t>
-            </a:r>
-            <a:r>
-              <a:rPr lang="en-US" altLang="ko-KR" dirty="0"/>
-              <a:t> </a:t>
-            </a:r>
-            <a:r>
-              <a:rPr lang="ko-KR" altLang="en-US" dirty="0"/>
-              <a:t>아이스크림 베스트</a:t>
-            </a:r>
-            <a:r>
-              <a:rPr lang="en-US" altLang="ko-KR" dirty="0"/>
-              <a:t>9</a:t>
-            </a:r>
-            <a:endParaRPr lang="ko-KR" altLang="en-US" dirty="0"/>
-          </a:p>
-        </p:txBody>
-      </p:sp>
-      <p:sp>
-        <p:nvSpPr>
-          <p:cNvPr id="6" name="내용 개체 틀 1">
-            <a:extLst>
-              <a:ext uri="{FF2B5EF4-FFF2-40B4-BE49-F238E27FC236}">
-                <a16:creationId xmlns:a16="http://schemas.microsoft.com/office/drawing/2014/main" id="{70C2BA37-BE91-39C4-AC08-0E8A1052E2F7}"/>
+                <a16:creationId xmlns:a16="http://schemas.microsoft.com/office/drawing/2014/main" id="{99921601-FACF-7B3E-2F7E-3C6CB9839A59}"/>
               </a:ext>
             </a:extLst>
           </p:cNvPr>
@@ -30330,8 +30098,8 @@
         </p:nvSpPr>
         <p:spPr>
           <a:xfrm>
-            <a:off x="838200" y="1825625"/>
-            <a:ext cx="10515600" cy="4351338"/>
+            <a:off x="523783" y="1328391"/>
+            <a:ext cx="11177300" cy="5232208"/>
           </a:xfrm>
           <a:prstGeom prst="rect">
             <a:avLst/>
@@ -30344,7 +30112,7 @@
           <a:lstStyle>
             <a:lvl1pPr marL="228600" indent="-228600" algn="l" defTabSz="914400" rtl="0" eaLnBrk="1" latinLnBrk="1" hangingPunct="1">
               <a:lnSpc>
-                <a:spcPct val="90000"/>
+                <a:spcPct val="150000"/>
               </a:lnSpc>
               <a:spcBef>
                 <a:spcPts val="1000"/>
@@ -30355,14 +30123,14 @@
                 <a:solidFill>
                   <a:schemeClr val="tx1"/>
                 </a:solidFill>
-                <a:latin typeface="+mn-lt"/>
-                <a:ea typeface="+mn-ea"/>
+                <a:latin typeface="강한공군체 Medium" panose="020B0600000101010101" pitchFamily="50" charset="-127"/>
+                <a:ea typeface="강한공군체 Medium" panose="020B0600000101010101" pitchFamily="50" charset="-127"/>
                 <a:cs typeface="+mn-cs"/>
               </a:defRPr>
             </a:lvl1pPr>
             <a:lvl2pPr marL="685800" indent="-228600" algn="l" defTabSz="914400" rtl="0" eaLnBrk="1" latinLnBrk="1" hangingPunct="1">
               <a:lnSpc>
-                <a:spcPct val="90000"/>
+                <a:spcPct val="150000"/>
               </a:lnSpc>
               <a:spcBef>
                 <a:spcPts val="500"/>
@@ -30373,14 +30141,14 @@
                 <a:solidFill>
                   <a:schemeClr val="tx1"/>
                 </a:solidFill>
-                <a:latin typeface="+mn-lt"/>
-                <a:ea typeface="+mn-ea"/>
+                <a:latin typeface="강한공군체 Medium" panose="020B0600000101010101" pitchFamily="50" charset="-127"/>
+                <a:ea typeface="강한공군체 Medium" panose="020B0600000101010101" pitchFamily="50" charset="-127"/>
                 <a:cs typeface="+mn-cs"/>
               </a:defRPr>
             </a:lvl2pPr>
             <a:lvl3pPr marL="1143000" indent="-228600" algn="l" defTabSz="914400" rtl="0" eaLnBrk="1" latinLnBrk="1" hangingPunct="1">
               <a:lnSpc>
-                <a:spcPct val="90000"/>
+                <a:spcPct val="150000"/>
               </a:lnSpc>
               <a:spcBef>
                 <a:spcPts val="500"/>
@@ -30391,14 +30159,14 @@
                 <a:solidFill>
                   <a:schemeClr val="tx1"/>
                 </a:solidFill>
-                <a:latin typeface="+mn-lt"/>
-                <a:ea typeface="+mn-ea"/>
+                <a:latin typeface="강한공군체 Medium" panose="020B0600000101010101" pitchFamily="50" charset="-127"/>
+                <a:ea typeface="강한공군체 Medium" panose="020B0600000101010101" pitchFamily="50" charset="-127"/>
                 <a:cs typeface="+mn-cs"/>
               </a:defRPr>
             </a:lvl3pPr>
             <a:lvl4pPr marL="1600200" indent="-228600" algn="l" defTabSz="914400" rtl="0" eaLnBrk="1" latinLnBrk="1" hangingPunct="1">
               <a:lnSpc>
-                <a:spcPct val="90000"/>
+                <a:spcPct val="150000"/>
               </a:lnSpc>
               <a:spcBef>
                 <a:spcPts val="500"/>
@@ -30409,14 +30177,14 @@
                 <a:solidFill>
                   <a:schemeClr val="tx1"/>
                 </a:solidFill>
-                <a:latin typeface="+mn-lt"/>
-                <a:ea typeface="+mn-ea"/>
+                <a:latin typeface="강한공군체 Medium" panose="020B0600000101010101" pitchFamily="50" charset="-127"/>
+                <a:ea typeface="강한공군체 Medium" panose="020B0600000101010101" pitchFamily="50" charset="-127"/>
                 <a:cs typeface="+mn-cs"/>
               </a:defRPr>
             </a:lvl4pPr>
             <a:lvl5pPr marL="2057400" indent="-228600" algn="l" defTabSz="914400" rtl="0" eaLnBrk="1" latinLnBrk="1" hangingPunct="1">
               <a:lnSpc>
-                <a:spcPct val="90000"/>
+                <a:spcPct val="150000"/>
               </a:lnSpc>
               <a:spcBef>
                 <a:spcPts val="500"/>
@@ -30427,8 +30195,8 @@
                 <a:solidFill>
                   <a:schemeClr val="tx1"/>
                 </a:solidFill>
-                <a:latin typeface="+mn-lt"/>
-                <a:ea typeface="+mn-ea"/>
+                <a:latin typeface="강한공군체 Medium" panose="020B0600000101010101" pitchFamily="50" charset="-127"/>
+                <a:ea typeface="강한공군체 Medium" panose="020B0600000101010101" pitchFamily="50" charset="-127"/>
                 <a:cs typeface="+mn-cs"/>
               </a:defRPr>
             </a:lvl5pPr>
@@ -30506,253 +30274,618 @@
             </a:lvl9pPr>
           </a:lstStyle>
           <a:p>
-            <a:pPr marL="457200" lvl="1" indent="0">
-              <a:buFont typeface="Arial" panose="020B0604020202020204" pitchFamily="34" charset="0"/>
-              <a:buNone/>
-            </a:pPr>
+            <a:r>
+              <a:rPr lang="ko-KR" altLang="en-US" dirty="0">
+                <a:latin typeface="+mn-lt"/>
+                <a:ea typeface="Kim jung chul Gothic Regular" panose="020B0503000000000000" pitchFamily="34" charset="-127"/>
+              </a:rPr>
+              <a:t>선택 요소에 지정한 이벤트가 발생하면</a:t>
+            </a:r>
+            <a:r>
+              <a:rPr lang="en-US" altLang="ko-KR" dirty="0">
+                <a:latin typeface="+mn-lt"/>
+                <a:ea typeface="Kim jung chul Gothic Regular" panose="020B0503000000000000" pitchFamily="34" charset="-127"/>
+              </a:rPr>
+              <a:t>, </a:t>
+            </a:r>
+            <a:r>
+              <a:rPr lang="ko-KR" altLang="en-US" dirty="0">
+                <a:latin typeface="+mn-lt"/>
+                <a:ea typeface="Kim jung chul Gothic Regular" panose="020B0503000000000000" pitchFamily="34" charset="-127"/>
+              </a:rPr>
+              <a:t>약속 된 명령어를 실행시키는 메소드</a:t>
+            </a:r>
             <a:endParaRPr lang="en-US" altLang="ko-KR" dirty="0">
-              <a:solidFill>
-                <a:srgbClr val="212529"/>
-              </a:solidFill>
-              <a:latin typeface="+mn-ea"/>
+              <a:latin typeface="+mn-lt"/>
+              <a:ea typeface="Kim jung chul Gothic Regular" panose="020B0503000000000000" pitchFamily="34" charset="-127"/>
             </a:endParaRPr>
           </a:p>
           <a:p>
-            <a:pPr marL="457200" lvl="1" indent="0">
-              <a:buFont typeface="Arial" panose="020B0604020202020204" pitchFamily="34" charset="0"/>
-              <a:buNone/>
-            </a:pPr>
             <a:endParaRPr lang="en-US" altLang="ko-KR" dirty="0">
-              <a:solidFill>
-                <a:srgbClr val="212529"/>
-              </a:solidFill>
-              <a:latin typeface="+mn-ea"/>
+              <a:latin typeface="+mn-lt"/>
+              <a:ea typeface="Kim jung chul Gothic Regular" panose="020B0503000000000000" pitchFamily="34" charset="-127"/>
             </a:endParaRPr>
           </a:p>
-          <a:p>
-            <a:r>
-              <a:rPr lang="en-US" altLang="ko-KR" b="1" dirty="0">
-                <a:solidFill>
-                  <a:srgbClr val="212529"/>
-                </a:solidFill>
-                <a:latin typeface="+mn-ea"/>
-              </a:rPr>
-              <a:t>[</a:t>
-            </a:r>
-            <a:r>
-              <a:rPr lang="ko-KR" altLang="en-US" b="1" dirty="0" err="1">
-                <a:solidFill>
-                  <a:srgbClr val="212529"/>
-                </a:solidFill>
-                <a:latin typeface="+mn-ea"/>
-              </a:rPr>
-              <a:t>코딩온</a:t>
-            </a:r>
-            <a:r>
-              <a:rPr lang="en-US" altLang="ko-KR" b="1" dirty="0">
-                <a:solidFill>
-                  <a:srgbClr val="212529"/>
-                </a:solidFill>
-                <a:latin typeface="+mn-ea"/>
-              </a:rPr>
-              <a:t>] HTML, CSS, JS </a:t>
-            </a:r>
-            <a:r>
-              <a:rPr lang="ko-KR" altLang="en-US" b="1" dirty="0">
-                <a:solidFill>
-                  <a:srgbClr val="212529"/>
-                </a:solidFill>
-                <a:latin typeface="+mn-ea"/>
-              </a:rPr>
-              <a:t>실습</a:t>
-            </a:r>
-            <a:r>
-              <a:rPr lang="en-US" altLang="ko-KR" b="1" dirty="0">
-                <a:solidFill>
-                  <a:srgbClr val="212529"/>
-                </a:solidFill>
-                <a:latin typeface="+mn-ea"/>
+        </p:txBody>
+      </p:sp>
+      <p:sp>
+        <p:nvSpPr>
+          <p:cNvPr id="7" name="TextBox 6">
+            <a:extLst>
+              <a:ext uri="{FF2B5EF4-FFF2-40B4-BE49-F238E27FC236}">
+                <a16:creationId xmlns:a16="http://schemas.microsoft.com/office/drawing/2014/main" id="{8B2F8DB1-4A8C-5FD8-B306-66E48E333D7B}"/>
+              </a:ext>
+            </a:extLst>
+          </p:cNvPr>
+          <p:cNvSpPr txBox="1"/>
+          <p:nvPr/>
+        </p:nvSpPr>
+        <p:spPr>
+          <a:xfrm>
+            <a:off x="838200" y="2928832"/>
+            <a:ext cx="6943165" cy="2031325"/>
+          </a:xfrm>
+          <a:prstGeom prst="rect">
+            <a:avLst/>
+          </a:prstGeom>
+          <a:solidFill>
+            <a:schemeClr val="tx1">
+              <a:lumMod val="85000"/>
+              <a:lumOff val="15000"/>
+            </a:schemeClr>
+          </a:solidFill>
+        </p:spPr>
+        <p:txBody>
+          <a:bodyPr wrap="square">
+            <a:spAutoFit/>
+          </a:bodyPr>
+          <a:lstStyle/>
+          <a:p>
+            <a:r>
+              <a:rPr lang="en-US" altLang="ko-KR" b="0" dirty="0">
+                <a:solidFill>
+                  <a:srgbClr val="569CD6"/>
+                </a:solidFill>
+                <a:effectLst/>
+                <a:latin typeface="Consolas" panose="020B0609020204030204" pitchFamily="49" charset="0"/>
+              </a:rPr>
+              <a:t>let</a:t>
+            </a:r>
+            <a:r>
+              <a:rPr lang="en-US" altLang="ko-KR" b="0" dirty="0">
+                <a:solidFill>
+                  <a:srgbClr val="D4D4D4"/>
+                </a:solidFill>
+                <a:effectLst/>
+                <a:latin typeface="Consolas" panose="020B0609020204030204" pitchFamily="49" charset="0"/>
               </a:rPr>
               <a:t> </a:t>
             </a:r>
             <a:r>
-              <a:rPr lang="ko-KR" altLang="en-US" dirty="0">
-                <a:solidFill>
-                  <a:srgbClr val="212529"/>
-                </a:solidFill>
-                <a:latin typeface="+mn-ea"/>
-              </a:rPr>
-              <a:t>강의 클릭</a:t>
-            </a:r>
+              <a:rPr lang="en-US" altLang="ko-KR" b="0" dirty="0" err="1">
+                <a:solidFill>
+                  <a:srgbClr val="9CDCFE"/>
+                </a:solidFill>
+                <a:effectLst/>
+                <a:latin typeface="Consolas" panose="020B0609020204030204" pitchFamily="49" charset="0"/>
+              </a:rPr>
+              <a:t>boxEl</a:t>
+            </a:r>
+            <a:r>
+              <a:rPr lang="en-US" altLang="ko-KR" b="0" dirty="0">
+                <a:solidFill>
+                  <a:srgbClr val="D4D4D4"/>
+                </a:solidFill>
+                <a:effectLst/>
+                <a:latin typeface="Consolas" panose="020B0609020204030204" pitchFamily="49" charset="0"/>
+              </a:rPr>
+              <a:t> = </a:t>
+            </a:r>
+            <a:r>
+              <a:rPr lang="en-US" altLang="ko-KR" b="0" dirty="0" err="1">
+                <a:solidFill>
+                  <a:srgbClr val="9CDCFE"/>
+                </a:solidFill>
+                <a:effectLst/>
+                <a:latin typeface="Consolas" panose="020B0609020204030204" pitchFamily="49" charset="0"/>
+              </a:rPr>
+              <a:t>document</a:t>
+            </a:r>
+            <a:r>
+              <a:rPr lang="en-US" altLang="ko-KR" b="0" dirty="0" err="1">
+                <a:solidFill>
+                  <a:srgbClr val="D4D4D4"/>
+                </a:solidFill>
+                <a:effectLst/>
+                <a:latin typeface="Consolas" panose="020B0609020204030204" pitchFamily="49" charset="0"/>
+              </a:rPr>
+              <a:t>.</a:t>
+            </a:r>
+            <a:r>
+              <a:rPr lang="en-US" altLang="ko-KR" b="0" dirty="0" err="1">
+                <a:solidFill>
+                  <a:srgbClr val="DCDCAA"/>
+                </a:solidFill>
+                <a:effectLst/>
+                <a:latin typeface="Consolas" panose="020B0609020204030204" pitchFamily="49" charset="0"/>
+              </a:rPr>
+              <a:t>querySelector</a:t>
+            </a:r>
+            <a:r>
+              <a:rPr lang="en-US" altLang="ko-KR" b="0" dirty="0">
+                <a:solidFill>
+                  <a:srgbClr val="D4D4D4"/>
+                </a:solidFill>
+                <a:effectLst/>
+                <a:latin typeface="Consolas" panose="020B0609020204030204" pitchFamily="49" charset="0"/>
+              </a:rPr>
+              <a:t>(</a:t>
+            </a:r>
+            <a:r>
+              <a:rPr lang="en-US" altLang="ko-KR" b="0" dirty="0">
+                <a:solidFill>
+                  <a:srgbClr val="CE9178"/>
+                </a:solidFill>
+                <a:effectLst/>
+                <a:latin typeface="Consolas" panose="020B0609020204030204" pitchFamily="49" charset="0"/>
+              </a:rPr>
+              <a:t>".box"</a:t>
+            </a:r>
+            <a:r>
+              <a:rPr lang="en-US" altLang="ko-KR" b="0" dirty="0">
+                <a:solidFill>
+                  <a:srgbClr val="D4D4D4"/>
+                </a:solidFill>
+                <a:effectLst/>
+                <a:latin typeface="Consolas" panose="020B0609020204030204" pitchFamily="49" charset="0"/>
+              </a:rPr>
+              <a:t>);</a:t>
+            </a:r>
+          </a:p>
+          <a:p>
             <a:br>
-              <a:rPr lang="en-US" altLang="ko-KR" dirty="0">
-                <a:solidFill>
-                  <a:srgbClr val="212529"/>
-                </a:solidFill>
-                <a:latin typeface="+mn-ea"/>
+              <a:rPr lang="en-US" altLang="ko-KR" b="0" dirty="0">
+                <a:solidFill>
+                  <a:srgbClr val="D4D4D4"/>
+                </a:solidFill>
+                <a:effectLst/>
+                <a:latin typeface="Consolas" panose="020B0609020204030204" pitchFamily="49" charset="0"/>
               </a:rPr>
             </a:br>
-            <a:endParaRPr lang="en-US" altLang="ko-KR" dirty="0">
-              <a:solidFill>
-                <a:srgbClr val="212529"/>
-              </a:solidFill>
-              <a:latin typeface="+mn-ea"/>
-            </a:endParaRPr>
-          </a:p>
-          <a:p>
-            <a:pPr lvl="1"/>
-            <a:r>
-              <a:rPr lang="ko-KR" altLang="en-US" sz="2800" b="1" dirty="0">
-                <a:solidFill>
-                  <a:srgbClr val="212529"/>
-                </a:solidFill>
-                <a:latin typeface="+mn-ea"/>
-              </a:rPr>
-              <a:t>➡ </a:t>
-            </a:r>
-            <a:r>
-              <a:rPr lang="en-US" altLang="ko-KR" sz="2800" b="1" dirty="0">
-                <a:solidFill>
-                  <a:srgbClr val="212529"/>
-                </a:solidFill>
-                <a:latin typeface="+mn-ea"/>
-              </a:rPr>
-              <a:t>[</a:t>
-            </a:r>
-            <a:r>
-              <a:rPr lang="en-US" altLang="ko-KR" sz="2800" b="1" dirty="0" err="1">
-                <a:solidFill>
-                  <a:srgbClr val="212529"/>
-                </a:solidFill>
-                <a:latin typeface="+mn-ea"/>
-              </a:rPr>
-              <a:t>Javascript</a:t>
-            </a:r>
-            <a:r>
-              <a:rPr lang="en-US" altLang="ko-KR" sz="2800" b="1" dirty="0">
-                <a:solidFill>
-                  <a:srgbClr val="212529"/>
-                </a:solidFill>
-                <a:latin typeface="+mn-ea"/>
-              </a:rPr>
-              <a:t> DOM </a:t>
-            </a:r>
-            <a:r>
-              <a:rPr lang="ko-KR" altLang="en-US" sz="2800" b="1" dirty="0">
-                <a:solidFill>
-                  <a:srgbClr val="212529"/>
-                </a:solidFill>
-                <a:latin typeface="+mn-ea"/>
-              </a:rPr>
-              <a:t>실습</a:t>
-            </a:r>
-            <a:r>
-              <a:rPr lang="en-US" altLang="ko-KR" sz="2800" b="1" dirty="0">
-                <a:solidFill>
-                  <a:srgbClr val="212529"/>
-                </a:solidFill>
-                <a:latin typeface="+mn-ea"/>
-              </a:rPr>
-              <a:t>(1)]</a:t>
-            </a:r>
-            <a:r>
-              <a:rPr lang="en-US" altLang="ko-KR" sz="2800" dirty="0">
-                <a:solidFill>
-                  <a:srgbClr val="212529"/>
-                </a:solidFill>
-                <a:latin typeface="+mn-ea"/>
-              </a:rPr>
-              <a:t> </a:t>
-            </a:r>
-            <a:r>
-              <a:rPr lang="ko-KR" altLang="en-US" sz="2800" dirty="0">
-                <a:solidFill>
-                  <a:srgbClr val="212529"/>
-                </a:solidFill>
-                <a:latin typeface="+mn-ea"/>
-              </a:rPr>
-              <a:t>커리큘럼 클릭</a:t>
-            </a:r>
-            <a:endParaRPr lang="en-US" altLang="ko-KR" sz="2800" dirty="0">
-              <a:solidFill>
-                <a:srgbClr val="212529"/>
-              </a:solidFill>
-              <a:latin typeface="+mn-ea"/>
-            </a:endParaRPr>
-          </a:p>
-          <a:p>
-            <a:pPr lvl="1"/>
-            <a:r>
-              <a:rPr lang="ko-KR" altLang="en-US" sz="2800" b="1" dirty="0">
-                <a:solidFill>
-                  <a:srgbClr val="212529"/>
-                </a:solidFill>
-                <a:latin typeface="+mn-ea"/>
-              </a:rPr>
-              <a:t>➡ </a:t>
-            </a:r>
-            <a:r>
-              <a:rPr lang="en-US" altLang="ko-KR" sz="2800" b="1" dirty="0">
-                <a:solidFill>
-                  <a:schemeClr val="accent1"/>
-                </a:solidFill>
-                <a:latin typeface="+mn-ea"/>
-              </a:rPr>
-              <a:t>[</a:t>
-            </a:r>
-            <a:r>
-              <a:rPr lang="ko-KR" altLang="en-US" sz="2800" b="1" dirty="0" err="1">
-                <a:solidFill>
-                  <a:schemeClr val="accent1"/>
-                </a:solidFill>
-                <a:latin typeface="+mn-ea"/>
-              </a:rPr>
-              <a:t>실습문제</a:t>
-            </a:r>
-            <a:r>
-              <a:rPr lang="en-US" altLang="ko-KR" sz="2800" b="1" dirty="0">
-                <a:solidFill>
-                  <a:schemeClr val="accent1"/>
-                </a:solidFill>
-                <a:latin typeface="+mn-ea"/>
-              </a:rPr>
-              <a:t>3. </a:t>
-            </a:r>
-            <a:r>
-              <a:rPr lang="ko-KR" altLang="en-US" sz="2800" b="1" dirty="0">
-                <a:solidFill>
-                  <a:schemeClr val="accent1"/>
-                </a:solidFill>
-                <a:latin typeface="+mn-ea"/>
-              </a:rPr>
-              <a:t>아이스크림 베스트</a:t>
-            </a:r>
-            <a:r>
-              <a:rPr lang="en-US" altLang="ko-KR" sz="2800" b="1" dirty="0">
-                <a:solidFill>
-                  <a:schemeClr val="accent1"/>
-                </a:solidFill>
-                <a:latin typeface="+mn-ea"/>
-              </a:rPr>
-              <a:t>9]</a:t>
-            </a:r>
-            <a:r>
-              <a:rPr lang="en-US" altLang="ko-KR" sz="2800" dirty="0">
-                <a:solidFill>
-                  <a:schemeClr val="accent1"/>
-                </a:solidFill>
-                <a:latin typeface="+mn-ea"/>
-              </a:rPr>
-              <a:t> </a:t>
-            </a:r>
-            <a:r>
-              <a:rPr lang="ko-KR" altLang="en-US" sz="2800" dirty="0">
-                <a:solidFill>
-                  <a:srgbClr val="212529"/>
-                </a:solidFill>
-                <a:latin typeface="+mn-ea"/>
-              </a:rPr>
-              <a:t> 진행</a:t>
+            <a:r>
+              <a:rPr lang="en-US" altLang="ko-KR" b="0" dirty="0">
+                <a:solidFill>
+                  <a:srgbClr val="9CDCFE"/>
+                </a:solidFill>
+                <a:effectLst/>
+                <a:latin typeface="Consolas" panose="020B0609020204030204" pitchFamily="49" charset="0"/>
+              </a:rPr>
+              <a:t>console</a:t>
+            </a:r>
+            <a:r>
+              <a:rPr lang="en-US" altLang="ko-KR" b="0" dirty="0">
+                <a:solidFill>
+                  <a:srgbClr val="D4D4D4"/>
+                </a:solidFill>
+                <a:effectLst/>
+                <a:latin typeface="Consolas" panose="020B0609020204030204" pitchFamily="49" charset="0"/>
+              </a:rPr>
+              <a:t>.</a:t>
+            </a:r>
+            <a:r>
+              <a:rPr lang="en-US" altLang="ko-KR" b="0" dirty="0">
+                <a:solidFill>
+                  <a:srgbClr val="DCDCAA"/>
+                </a:solidFill>
+                <a:effectLst/>
+                <a:latin typeface="Consolas" panose="020B0609020204030204" pitchFamily="49" charset="0"/>
+              </a:rPr>
+              <a:t>log</a:t>
+            </a:r>
+            <a:r>
+              <a:rPr lang="en-US" altLang="ko-KR" b="0" dirty="0">
+                <a:solidFill>
+                  <a:srgbClr val="D4D4D4"/>
+                </a:solidFill>
+                <a:effectLst/>
+                <a:latin typeface="Consolas" panose="020B0609020204030204" pitchFamily="49" charset="0"/>
+              </a:rPr>
+              <a:t>(</a:t>
+            </a:r>
+            <a:r>
+              <a:rPr lang="en-US" altLang="ko-KR" b="0" dirty="0" err="1">
+                <a:solidFill>
+                  <a:srgbClr val="9CDCFE"/>
+                </a:solidFill>
+                <a:effectLst/>
+                <a:latin typeface="Consolas" panose="020B0609020204030204" pitchFamily="49" charset="0"/>
+              </a:rPr>
+              <a:t>boxEl</a:t>
+            </a:r>
+            <a:r>
+              <a:rPr lang="en-US" altLang="ko-KR" b="0" dirty="0">
+                <a:solidFill>
+                  <a:srgbClr val="D4D4D4"/>
+                </a:solidFill>
+                <a:effectLst/>
+                <a:latin typeface="Consolas" panose="020B0609020204030204" pitchFamily="49" charset="0"/>
+              </a:rPr>
+              <a:t>);</a:t>
+            </a:r>
+          </a:p>
+          <a:p>
+            <a:br>
+              <a:rPr lang="en-US" altLang="ko-KR" b="0" dirty="0">
+                <a:solidFill>
+                  <a:srgbClr val="D4D4D4"/>
+                </a:solidFill>
+                <a:effectLst/>
+                <a:latin typeface="Consolas" panose="020B0609020204030204" pitchFamily="49" charset="0"/>
+              </a:rPr>
+            </a:br>
+            <a:r>
+              <a:rPr lang="en-US" altLang="ko-KR" b="0" dirty="0" err="1">
+                <a:solidFill>
+                  <a:srgbClr val="9CDCFE"/>
+                </a:solidFill>
+                <a:effectLst/>
+                <a:latin typeface="Consolas" panose="020B0609020204030204" pitchFamily="49" charset="0"/>
+              </a:rPr>
+              <a:t>boxEl</a:t>
+            </a:r>
+            <a:r>
+              <a:rPr lang="en-US" altLang="ko-KR" b="0" dirty="0" err="1">
+                <a:solidFill>
+                  <a:srgbClr val="D4D4D4"/>
+                </a:solidFill>
+                <a:effectLst/>
+                <a:latin typeface="Consolas" panose="020B0609020204030204" pitchFamily="49" charset="0"/>
+              </a:rPr>
+              <a:t>.</a:t>
+            </a:r>
+            <a:r>
+              <a:rPr lang="en-US" altLang="ko-KR" b="0" dirty="0" err="1">
+                <a:solidFill>
+                  <a:srgbClr val="DCDCAA"/>
+                </a:solidFill>
+                <a:effectLst/>
+                <a:latin typeface="Consolas" panose="020B0609020204030204" pitchFamily="49" charset="0"/>
+              </a:rPr>
+              <a:t>addEventListener</a:t>
+            </a:r>
+            <a:r>
+              <a:rPr lang="en-US" altLang="ko-KR" b="0" dirty="0">
+                <a:solidFill>
+                  <a:srgbClr val="D4D4D4"/>
+                </a:solidFill>
+                <a:effectLst/>
+                <a:latin typeface="Consolas" panose="020B0609020204030204" pitchFamily="49" charset="0"/>
+              </a:rPr>
+              <a:t>(</a:t>
+            </a:r>
+            <a:r>
+              <a:rPr lang="en-US" altLang="ko-KR" b="0" dirty="0">
+                <a:solidFill>
+                  <a:srgbClr val="CE9178"/>
+                </a:solidFill>
+                <a:effectLst/>
+                <a:latin typeface="Consolas" panose="020B0609020204030204" pitchFamily="49" charset="0"/>
+              </a:rPr>
+              <a:t>"click"</a:t>
+            </a:r>
+            <a:r>
+              <a:rPr lang="en-US" altLang="ko-KR" b="0" dirty="0">
+                <a:solidFill>
+                  <a:srgbClr val="D4D4D4"/>
+                </a:solidFill>
+                <a:effectLst/>
+                <a:latin typeface="Consolas" panose="020B0609020204030204" pitchFamily="49" charset="0"/>
+              </a:rPr>
+              <a:t>, </a:t>
+            </a:r>
+            <a:r>
+              <a:rPr lang="en-US" altLang="ko-KR" b="0" dirty="0">
+                <a:solidFill>
+                  <a:srgbClr val="569CD6"/>
+                </a:solidFill>
+                <a:effectLst/>
+                <a:latin typeface="Consolas" panose="020B0609020204030204" pitchFamily="49" charset="0"/>
+              </a:rPr>
+              <a:t>function</a:t>
+            </a:r>
+            <a:r>
+              <a:rPr lang="en-US" altLang="ko-KR" b="0" dirty="0">
+                <a:solidFill>
+                  <a:srgbClr val="D4D4D4"/>
+                </a:solidFill>
+                <a:effectLst/>
+                <a:latin typeface="Consolas" panose="020B0609020204030204" pitchFamily="49" charset="0"/>
+              </a:rPr>
+              <a:t>() {</a:t>
+            </a:r>
+          </a:p>
+          <a:p>
+            <a:r>
+              <a:rPr lang="en-US" altLang="ko-KR" b="0" dirty="0">
+                <a:solidFill>
+                  <a:srgbClr val="D4D4D4"/>
+                </a:solidFill>
+                <a:effectLst/>
+                <a:latin typeface="Consolas" panose="020B0609020204030204" pitchFamily="49" charset="0"/>
+              </a:rPr>
+              <a:t>    </a:t>
+            </a:r>
+            <a:r>
+              <a:rPr lang="en-US" altLang="ko-KR" b="0" dirty="0">
+                <a:solidFill>
+                  <a:srgbClr val="DCDCAA"/>
+                </a:solidFill>
+                <a:effectLst/>
+                <a:latin typeface="Consolas" panose="020B0609020204030204" pitchFamily="49" charset="0"/>
+              </a:rPr>
+              <a:t>alert</a:t>
+            </a:r>
+            <a:r>
+              <a:rPr lang="en-US" altLang="ko-KR" b="0" dirty="0">
+                <a:solidFill>
+                  <a:srgbClr val="D4D4D4"/>
+                </a:solidFill>
+                <a:effectLst/>
+                <a:latin typeface="Consolas" panose="020B0609020204030204" pitchFamily="49" charset="0"/>
+              </a:rPr>
+              <a:t>(</a:t>
+            </a:r>
+            <a:r>
+              <a:rPr lang="en-US" altLang="ko-KR" b="0" dirty="0">
+                <a:solidFill>
+                  <a:srgbClr val="CE9178"/>
+                </a:solidFill>
+                <a:effectLst/>
+                <a:latin typeface="Consolas" panose="020B0609020204030204" pitchFamily="49" charset="0"/>
+              </a:rPr>
+              <a:t>"click!"</a:t>
+            </a:r>
+            <a:r>
+              <a:rPr lang="en-US" altLang="ko-KR" b="0" dirty="0">
+                <a:solidFill>
+                  <a:srgbClr val="D4D4D4"/>
+                </a:solidFill>
+                <a:effectLst/>
+                <a:latin typeface="Consolas" panose="020B0609020204030204" pitchFamily="49" charset="0"/>
+              </a:rPr>
+              <a:t>);</a:t>
+            </a:r>
+          </a:p>
+          <a:p>
+            <a:r>
+              <a:rPr lang="en-US" altLang="ko-KR" b="0" dirty="0">
+                <a:solidFill>
+                  <a:srgbClr val="D4D4D4"/>
+                </a:solidFill>
+                <a:effectLst/>
+                <a:latin typeface="Consolas" panose="020B0609020204030204" pitchFamily="49" charset="0"/>
+              </a:rPr>
+              <a:t>})</a:t>
+            </a:r>
+          </a:p>
+        </p:txBody>
+      </p:sp>
+      <p:sp>
+        <p:nvSpPr>
+          <p:cNvPr id="8" name="TextBox 7">
+            <a:extLst>
+              <a:ext uri="{FF2B5EF4-FFF2-40B4-BE49-F238E27FC236}">
+                <a16:creationId xmlns:a16="http://schemas.microsoft.com/office/drawing/2014/main" id="{0CFA8179-F830-703B-52B8-458B7490C17F}"/>
+              </a:ext>
+            </a:extLst>
+          </p:cNvPr>
+          <p:cNvSpPr txBox="1"/>
+          <p:nvPr/>
+        </p:nvSpPr>
+        <p:spPr>
+          <a:xfrm>
+            <a:off x="838200" y="5362390"/>
+            <a:ext cx="9852212" cy="923330"/>
+          </a:xfrm>
+          <a:prstGeom prst="rect">
+            <a:avLst/>
+          </a:prstGeom>
+          <a:solidFill>
+            <a:schemeClr val="tx1">
+              <a:lumMod val="85000"/>
+              <a:lumOff val="15000"/>
+            </a:schemeClr>
+          </a:solidFill>
+        </p:spPr>
+        <p:txBody>
+          <a:bodyPr wrap="square">
+            <a:spAutoFit/>
+          </a:bodyPr>
+          <a:lstStyle/>
+          <a:p>
+            <a:r>
+              <a:rPr lang="en-US" altLang="ko-KR" b="0" dirty="0" err="1">
+                <a:solidFill>
+                  <a:srgbClr val="9CDCFE"/>
+                </a:solidFill>
+                <a:effectLst/>
+                <a:latin typeface="Consolas" panose="020B0609020204030204" pitchFamily="49" charset="0"/>
+              </a:rPr>
+              <a:t>document</a:t>
+            </a:r>
+            <a:r>
+              <a:rPr lang="en-US" altLang="ko-KR" b="0" dirty="0" err="1">
+                <a:solidFill>
+                  <a:srgbClr val="D4D4D4"/>
+                </a:solidFill>
+                <a:effectLst/>
+                <a:latin typeface="Consolas" panose="020B0609020204030204" pitchFamily="49" charset="0"/>
+              </a:rPr>
+              <a:t>.</a:t>
+            </a:r>
+            <a:r>
+              <a:rPr lang="en-US" altLang="ko-KR" b="0" dirty="0" err="1">
+                <a:solidFill>
+                  <a:srgbClr val="DCDCAA"/>
+                </a:solidFill>
+                <a:effectLst/>
+                <a:latin typeface="Consolas" panose="020B0609020204030204" pitchFamily="49" charset="0"/>
+              </a:rPr>
+              <a:t>querySelector</a:t>
+            </a:r>
+            <a:r>
+              <a:rPr lang="en-US" altLang="ko-KR" b="0" dirty="0">
+                <a:solidFill>
+                  <a:srgbClr val="D4D4D4"/>
+                </a:solidFill>
+                <a:effectLst/>
+                <a:latin typeface="Consolas" panose="020B0609020204030204" pitchFamily="49" charset="0"/>
+              </a:rPr>
+              <a:t>(</a:t>
+            </a:r>
+            <a:r>
+              <a:rPr lang="en-US" altLang="ko-KR" b="0" dirty="0">
+                <a:solidFill>
+                  <a:srgbClr val="CE9178"/>
+                </a:solidFill>
+                <a:effectLst/>
+                <a:latin typeface="Consolas" panose="020B0609020204030204" pitchFamily="49" charset="0"/>
+              </a:rPr>
+              <a:t>".box"</a:t>
+            </a:r>
+            <a:r>
+              <a:rPr lang="en-US" altLang="ko-KR" b="0" dirty="0">
+                <a:solidFill>
+                  <a:srgbClr val="D4D4D4"/>
+                </a:solidFill>
+                <a:effectLst/>
+                <a:latin typeface="Consolas" panose="020B0609020204030204" pitchFamily="49" charset="0"/>
+              </a:rPr>
+              <a:t>).</a:t>
+            </a:r>
+            <a:r>
+              <a:rPr lang="en-US" altLang="ko-KR" b="0" dirty="0" err="1">
+                <a:solidFill>
+                  <a:srgbClr val="DCDCAA"/>
+                </a:solidFill>
+                <a:effectLst/>
+                <a:latin typeface="Consolas" panose="020B0609020204030204" pitchFamily="49" charset="0"/>
+              </a:rPr>
+              <a:t>addEventListener</a:t>
+            </a:r>
+            <a:r>
+              <a:rPr lang="en-US" altLang="ko-KR" b="0" dirty="0">
+                <a:solidFill>
+                  <a:srgbClr val="D4D4D4"/>
+                </a:solidFill>
+                <a:effectLst/>
+                <a:latin typeface="Consolas" panose="020B0609020204030204" pitchFamily="49" charset="0"/>
+              </a:rPr>
+              <a:t>(</a:t>
+            </a:r>
+            <a:r>
+              <a:rPr lang="en-US" altLang="ko-KR" b="0" dirty="0">
+                <a:solidFill>
+                  <a:srgbClr val="CE9178"/>
+                </a:solidFill>
+                <a:effectLst/>
+                <a:latin typeface="Consolas" panose="020B0609020204030204" pitchFamily="49" charset="0"/>
+              </a:rPr>
+              <a:t>"click"</a:t>
+            </a:r>
+            <a:r>
+              <a:rPr lang="en-US" altLang="ko-KR" b="0" dirty="0">
+                <a:solidFill>
+                  <a:srgbClr val="D4D4D4"/>
+                </a:solidFill>
+                <a:effectLst/>
+                <a:latin typeface="Consolas" panose="020B0609020204030204" pitchFamily="49" charset="0"/>
+              </a:rPr>
+              <a:t>, </a:t>
+            </a:r>
+            <a:r>
+              <a:rPr lang="en-US" altLang="ko-KR" b="0" dirty="0">
+                <a:solidFill>
+                  <a:srgbClr val="569CD6"/>
+                </a:solidFill>
+                <a:effectLst/>
+                <a:latin typeface="Consolas" panose="020B0609020204030204" pitchFamily="49" charset="0"/>
+              </a:rPr>
+              <a:t>function</a:t>
+            </a:r>
+            <a:r>
+              <a:rPr lang="en-US" altLang="ko-KR" b="0" dirty="0">
+                <a:solidFill>
+                  <a:srgbClr val="D4D4D4"/>
+                </a:solidFill>
+                <a:effectLst/>
+                <a:latin typeface="Consolas" panose="020B0609020204030204" pitchFamily="49" charset="0"/>
+              </a:rPr>
+              <a:t>() {</a:t>
+            </a:r>
+          </a:p>
+          <a:p>
+            <a:r>
+              <a:rPr lang="en-US" altLang="ko-KR" b="0" dirty="0">
+                <a:solidFill>
+                  <a:srgbClr val="D4D4D4"/>
+                </a:solidFill>
+                <a:effectLst/>
+                <a:latin typeface="Consolas" panose="020B0609020204030204" pitchFamily="49" charset="0"/>
+              </a:rPr>
+              <a:t>    </a:t>
+            </a:r>
+            <a:r>
+              <a:rPr lang="en-US" altLang="ko-KR" b="0" dirty="0">
+                <a:solidFill>
+                  <a:srgbClr val="DCDCAA"/>
+                </a:solidFill>
+                <a:effectLst/>
+                <a:latin typeface="Consolas" panose="020B0609020204030204" pitchFamily="49" charset="0"/>
+              </a:rPr>
+              <a:t>alert</a:t>
+            </a:r>
+            <a:r>
+              <a:rPr lang="en-US" altLang="ko-KR" b="0" dirty="0">
+                <a:solidFill>
+                  <a:srgbClr val="D4D4D4"/>
+                </a:solidFill>
+                <a:effectLst/>
+                <a:latin typeface="Consolas" panose="020B0609020204030204" pitchFamily="49" charset="0"/>
+              </a:rPr>
+              <a:t>(</a:t>
+            </a:r>
+            <a:r>
+              <a:rPr lang="en-US" altLang="ko-KR" b="0" dirty="0">
+                <a:solidFill>
+                  <a:srgbClr val="CE9178"/>
+                </a:solidFill>
+                <a:effectLst/>
+                <a:latin typeface="Consolas" panose="020B0609020204030204" pitchFamily="49" charset="0"/>
+              </a:rPr>
+              <a:t>"click"</a:t>
+            </a:r>
+            <a:r>
+              <a:rPr lang="en-US" altLang="ko-KR" b="0" dirty="0">
+                <a:solidFill>
+                  <a:srgbClr val="D4D4D4"/>
+                </a:solidFill>
+                <a:effectLst/>
+                <a:latin typeface="Consolas" panose="020B0609020204030204" pitchFamily="49" charset="0"/>
+              </a:rPr>
+              <a:t>);</a:t>
+            </a:r>
+          </a:p>
+          <a:p>
+            <a:r>
+              <a:rPr lang="en-US" altLang="ko-KR" b="0" dirty="0">
+                <a:solidFill>
+                  <a:srgbClr val="D4D4D4"/>
+                </a:solidFill>
+                <a:effectLst/>
+                <a:latin typeface="Consolas" panose="020B0609020204030204" pitchFamily="49" charset="0"/>
+              </a:rPr>
+              <a:t>})</a:t>
             </a:r>
           </a:p>
         </p:txBody>
@@ -30760,7 +30893,7 @@
     </p:spTree>
     <p:extLst>
       <p:ext uri="{BB962C8B-B14F-4D97-AF65-F5344CB8AC3E}">
-        <p14:creationId xmlns:p14="http://schemas.microsoft.com/office/powerpoint/2010/main" val="955611044"/>
+        <p14:creationId xmlns:p14="http://schemas.microsoft.com/office/powerpoint/2010/main" val="2313246021"/>
       </p:ext>
     </p:extLst>
   </p:cSld>
@@ -30789,12 +30922,18 @@
       </p:grpSpPr>
       <p:sp>
         <p:nvSpPr>
-          <p:cNvPr id="2" name="날짜 개체 틀 1"/>
+          <p:cNvPr id="2" name="제목 1">
+            <a:extLst>
+              <a:ext uri="{FF2B5EF4-FFF2-40B4-BE49-F238E27FC236}">
+                <a16:creationId xmlns:a16="http://schemas.microsoft.com/office/drawing/2014/main" id="{403FE426-FC8B-4845-9EDB-D82F8D6DA06C}"/>
+              </a:ext>
+            </a:extLst>
+          </p:cNvPr>
           <p:cNvSpPr>
             <a:spLocks noGrp="1"/>
           </p:cNvSpPr>
           <p:nvPr>
-            <p:ph type="dt" sz="half" idx="10"/>
+            <p:ph type="title"/>
           </p:nvPr>
         </p:nvSpPr>
         <p:spPr/>
@@ -30802,76 +30941,438 @@
           <a:bodyPr/>
           <a:lstStyle/>
           <a:p>
-            <a:fld id="{0E19CB95-6D28-40F1-9DA3-1BAC5D4B5B4F}" type="datetime6">
-              <a:rPr lang="ko-KR" altLang="en-US" smtClean="0"/>
-              <a:t>2024년 6월</a:t>
-            </a:fld>
-            <a:endParaRPr lang="ko-KR" altLang="en-US"/>
-          </a:p>
-        </p:txBody>
-      </p:sp>
-      <p:sp>
-        <p:nvSpPr>
-          <p:cNvPr id="3" name="슬라이드 번호 개체 틀 2"/>
-          <p:cNvSpPr>
-            <a:spLocks noGrp="1"/>
-          </p:cNvSpPr>
-          <p:nvPr>
-            <p:ph type="sldNum" sz="quarter" idx="12"/>
-          </p:nvPr>
-        </p:nvSpPr>
-        <p:spPr/>
-        <p:txBody>
-          <a:bodyPr/>
-          <a:lstStyle/>
-          <a:p>
-            <a:fld id="{083A2CE0-18CD-4102-B738-4ACFF9E68BA4}" type="slidenum">
-              <a:rPr lang="ko-KR" altLang="en-US" smtClean="0"/>
-              <a:t>51</a:t>
-            </a:fld>
-            <a:endParaRPr lang="ko-KR" altLang="en-US"/>
-          </a:p>
-        </p:txBody>
-      </p:sp>
-      <p:sp>
-        <p:nvSpPr>
-          <p:cNvPr id="4" name="제목 3"/>
-          <p:cNvSpPr>
-            <a:spLocks noGrp="1"/>
-          </p:cNvSpPr>
-          <p:nvPr>
-            <p:ph type="title"/>
-          </p:nvPr>
+            <a:pPr algn="ctr"/>
+            <a:r>
+              <a:rPr lang="en-US" altLang="ko-KR" dirty="0" err="1">
+                <a:solidFill>
+                  <a:srgbClr val="00B050"/>
+                </a:solidFill>
+                <a:ea typeface="Kim jung chul Gothic Bold" panose="020B0803000000000000" pitchFamily="50" charset="-127"/>
+              </a:rPr>
+              <a:t>addEventListener</a:t>
+            </a:r>
+            <a:r>
+              <a:rPr lang="en-US" altLang="ko-KR" dirty="0">
+                <a:ea typeface="Kim jung chul Gothic Bold" panose="020B0803000000000000" pitchFamily="50" charset="-127"/>
+              </a:rPr>
+              <a:t> </a:t>
+            </a:r>
+            <a:r>
+              <a:rPr lang="ko-KR" altLang="en-US" dirty="0">
+                <a:ea typeface="Kim jung chul Gothic Bold" panose="020B0803000000000000" pitchFamily="50" charset="-127"/>
+              </a:rPr>
+              <a:t>이벤트의 종류</a:t>
+            </a:r>
+          </a:p>
+        </p:txBody>
+      </p:sp>
+      <p:sp>
+        <p:nvSpPr>
+          <p:cNvPr id="6" name="내용 개체 틀 2">
+            <a:extLst>
+              <a:ext uri="{FF2B5EF4-FFF2-40B4-BE49-F238E27FC236}">
+                <a16:creationId xmlns:a16="http://schemas.microsoft.com/office/drawing/2014/main" id="{99921601-FACF-7B3E-2F7E-3C6CB9839A59}"/>
+              </a:ext>
+            </a:extLst>
+          </p:cNvPr>
+          <p:cNvSpPr txBox="1">
+            <a:spLocks/>
+          </p:cNvSpPr>
+          <p:nvPr/>
         </p:nvSpPr>
         <p:spPr>
           <a:xfrm>
-            <a:off x="838200" y="2766218"/>
-            <a:ext cx="10515600" cy="1325563"/>
+            <a:off x="588519" y="1383190"/>
+            <a:ext cx="10830017" cy="4869911"/>
           </a:xfrm>
+          <a:prstGeom prst="rect">
+            <a:avLst/>
+          </a:prstGeom>
         </p:spPr>
         <p:txBody>
-          <a:bodyPr/>
-          <a:lstStyle/>
-          <a:p>
-            <a:r>
-              <a:rPr lang="ko-KR" altLang="en-US" sz="7200" dirty="0"/>
-              <a:t>이벤트 </a:t>
-            </a:r>
-            <a:br>
-              <a:rPr lang="en-US" altLang="ko-KR" sz="7200" dirty="0"/>
-            </a:br>
-            <a:r>
-              <a:rPr lang="en-US" altLang="ko-KR" sz="7200" dirty="0" err="1"/>
-              <a:t>addEventListener</a:t>
-            </a:r>
-            <a:endParaRPr lang="ko-KR" altLang="en-US" sz="7200" dirty="0"/>
+          <a:bodyPr vert="horz" lIns="91440" tIns="45720" rIns="91440" bIns="45720" rtlCol="0">
+            <a:normAutofit fontScale="92500" lnSpcReduction="10000"/>
+          </a:bodyPr>
+          <a:lstStyle>
+            <a:lvl1pPr marL="228600" indent="-228600" algn="l" defTabSz="914400" rtl="0" eaLnBrk="1" latinLnBrk="1" hangingPunct="1">
+              <a:lnSpc>
+                <a:spcPct val="150000"/>
+              </a:lnSpc>
+              <a:spcBef>
+                <a:spcPts val="1000"/>
+              </a:spcBef>
+              <a:buFont typeface="Arial" panose="020B0604020202020204" pitchFamily="34" charset="0"/>
+              <a:buChar char="•"/>
+              <a:defRPr sz="2800" kern="1200">
+                <a:solidFill>
+                  <a:schemeClr val="tx1"/>
+                </a:solidFill>
+                <a:latin typeface="강한공군체 Medium" panose="020B0600000101010101" pitchFamily="50" charset="-127"/>
+                <a:ea typeface="강한공군체 Medium" panose="020B0600000101010101" pitchFamily="50" charset="-127"/>
+                <a:cs typeface="+mn-cs"/>
+              </a:defRPr>
+            </a:lvl1pPr>
+            <a:lvl2pPr marL="685800" indent="-228600" algn="l" defTabSz="914400" rtl="0" eaLnBrk="1" latinLnBrk="1" hangingPunct="1">
+              <a:lnSpc>
+                <a:spcPct val="150000"/>
+              </a:lnSpc>
+              <a:spcBef>
+                <a:spcPts val="500"/>
+              </a:spcBef>
+              <a:buFont typeface="Arial" panose="020B0604020202020204" pitchFamily="34" charset="0"/>
+              <a:buChar char="•"/>
+              <a:defRPr sz="2400" kern="1200">
+                <a:solidFill>
+                  <a:schemeClr val="tx1"/>
+                </a:solidFill>
+                <a:latin typeface="강한공군체 Medium" panose="020B0600000101010101" pitchFamily="50" charset="-127"/>
+                <a:ea typeface="강한공군체 Medium" panose="020B0600000101010101" pitchFamily="50" charset="-127"/>
+                <a:cs typeface="+mn-cs"/>
+              </a:defRPr>
+            </a:lvl2pPr>
+            <a:lvl3pPr marL="1143000" indent="-228600" algn="l" defTabSz="914400" rtl="0" eaLnBrk="1" latinLnBrk="1" hangingPunct="1">
+              <a:lnSpc>
+                <a:spcPct val="150000"/>
+              </a:lnSpc>
+              <a:spcBef>
+                <a:spcPts val="500"/>
+              </a:spcBef>
+              <a:buFont typeface="Arial" panose="020B0604020202020204" pitchFamily="34" charset="0"/>
+              <a:buChar char="•"/>
+              <a:defRPr sz="2000" kern="1200">
+                <a:solidFill>
+                  <a:schemeClr val="tx1"/>
+                </a:solidFill>
+                <a:latin typeface="강한공군체 Medium" panose="020B0600000101010101" pitchFamily="50" charset="-127"/>
+                <a:ea typeface="강한공군체 Medium" panose="020B0600000101010101" pitchFamily="50" charset="-127"/>
+                <a:cs typeface="+mn-cs"/>
+              </a:defRPr>
+            </a:lvl3pPr>
+            <a:lvl4pPr marL="1600200" indent="-228600" algn="l" defTabSz="914400" rtl="0" eaLnBrk="1" latinLnBrk="1" hangingPunct="1">
+              <a:lnSpc>
+                <a:spcPct val="150000"/>
+              </a:lnSpc>
+              <a:spcBef>
+                <a:spcPts val="500"/>
+              </a:spcBef>
+              <a:buFont typeface="Arial" panose="020B0604020202020204" pitchFamily="34" charset="0"/>
+              <a:buChar char="•"/>
+              <a:defRPr sz="1800" kern="1200">
+                <a:solidFill>
+                  <a:schemeClr val="tx1"/>
+                </a:solidFill>
+                <a:latin typeface="강한공군체 Medium" panose="020B0600000101010101" pitchFamily="50" charset="-127"/>
+                <a:ea typeface="강한공군체 Medium" panose="020B0600000101010101" pitchFamily="50" charset="-127"/>
+                <a:cs typeface="+mn-cs"/>
+              </a:defRPr>
+            </a:lvl4pPr>
+            <a:lvl5pPr marL="2057400" indent="-228600" algn="l" defTabSz="914400" rtl="0" eaLnBrk="1" latinLnBrk="1" hangingPunct="1">
+              <a:lnSpc>
+                <a:spcPct val="150000"/>
+              </a:lnSpc>
+              <a:spcBef>
+                <a:spcPts val="500"/>
+              </a:spcBef>
+              <a:buFont typeface="Arial" panose="020B0604020202020204" pitchFamily="34" charset="0"/>
+              <a:buChar char="•"/>
+              <a:defRPr sz="1800" kern="1200">
+                <a:solidFill>
+                  <a:schemeClr val="tx1"/>
+                </a:solidFill>
+                <a:latin typeface="강한공군체 Medium" panose="020B0600000101010101" pitchFamily="50" charset="-127"/>
+                <a:ea typeface="강한공군체 Medium" panose="020B0600000101010101" pitchFamily="50" charset="-127"/>
+                <a:cs typeface="+mn-cs"/>
+              </a:defRPr>
+            </a:lvl5pPr>
+            <a:lvl6pPr marL="2514600" indent="-228600" algn="l" defTabSz="914400" rtl="0" eaLnBrk="1" latinLnBrk="1" hangingPunct="1">
+              <a:lnSpc>
+                <a:spcPct val="90000"/>
+              </a:lnSpc>
+              <a:spcBef>
+                <a:spcPts val="500"/>
+              </a:spcBef>
+              <a:buFont typeface="Arial" panose="020B0604020202020204" pitchFamily="34" charset="0"/>
+              <a:buChar char="•"/>
+              <a:defRPr sz="1800" kern="1200">
+                <a:solidFill>
+                  <a:schemeClr val="tx1"/>
+                </a:solidFill>
+                <a:latin typeface="+mn-lt"/>
+                <a:ea typeface="+mn-ea"/>
+                <a:cs typeface="+mn-cs"/>
+              </a:defRPr>
+            </a:lvl6pPr>
+            <a:lvl7pPr marL="2971800" indent="-228600" algn="l" defTabSz="914400" rtl="0" eaLnBrk="1" latinLnBrk="1" hangingPunct="1">
+              <a:lnSpc>
+                <a:spcPct val="90000"/>
+              </a:lnSpc>
+              <a:spcBef>
+                <a:spcPts val="500"/>
+              </a:spcBef>
+              <a:buFont typeface="Arial" panose="020B0604020202020204" pitchFamily="34" charset="0"/>
+              <a:buChar char="•"/>
+              <a:defRPr sz="1800" kern="1200">
+                <a:solidFill>
+                  <a:schemeClr val="tx1"/>
+                </a:solidFill>
+                <a:latin typeface="+mn-lt"/>
+                <a:ea typeface="+mn-ea"/>
+                <a:cs typeface="+mn-cs"/>
+              </a:defRPr>
+            </a:lvl7pPr>
+            <a:lvl8pPr marL="3429000" indent="-228600" algn="l" defTabSz="914400" rtl="0" eaLnBrk="1" latinLnBrk="1" hangingPunct="1">
+              <a:lnSpc>
+                <a:spcPct val="90000"/>
+              </a:lnSpc>
+              <a:spcBef>
+                <a:spcPts val="500"/>
+              </a:spcBef>
+              <a:buFont typeface="Arial" panose="020B0604020202020204" pitchFamily="34" charset="0"/>
+              <a:buChar char="•"/>
+              <a:defRPr sz="1800" kern="1200">
+                <a:solidFill>
+                  <a:schemeClr val="tx1"/>
+                </a:solidFill>
+                <a:latin typeface="+mn-lt"/>
+                <a:ea typeface="+mn-ea"/>
+                <a:cs typeface="+mn-cs"/>
+              </a:defRPr>
+            </a:lvl8pPr>
+            <a:lvl9pPr marL="3886200" indent="-228600" algn="l" defTabSz="914400" rtl="0" eaLnBrk="1" latinLnBrk="1" hangingPunct="1">
+              <a:lnSpc>
+                <a:spcPct val="90000"/>
+              </a:lnSpc>
+              <a:spcBef>
+                <a:spcPts val="500"/>
+              </a:spcBef>
+              <a:buFont typeface="Arial" panose="020B0604020202020204" pitchFamily="34" charset="0"/>
+              <a:buChar char="•"/>
+              <a:defRPr sz="1800" kern="1200">
+                <a:solidFill>
+                  <a:schemeClr val="tx1"/>
+                </a:solidFill>
+                <a:latin typeface="+mn-lt"/>
+                <a:ea typeface="+mn-ea"/>
+                <a:cs typeface="+mn-cs"/>
+              </a:defRPr>
+            </a:lvl9pPr>
+          </a:lstStyle>
+          <a:p>
+            <a:r>
+              <a:rPr lang="en-US" altLang="ko-KR" dirty="0">
+                <a:latin typeface="+mn-lt"/>
+                <a:ea typeface="Kim jung chul Gothic Regular" panose="020B0503000000000000" pitchFamily="34" charset="-127"/>
+              </a:rPr>
+              <a:t>Click :  </a:t>
+            </a:r>
+            <a:r>
+              <a:rPr lang="ko-KR" altLang="en-US" dirty="0">
+                <a:latin typeface="+mn-lt"/>
+                <a:ea typeface="Kim jung chul Gothic Regular" panose="020B0503000000000000" pitchFamily="34" charset="-127"/>
+              </a:rPr>
+              <a:t>클릭</a:t>
+            </a:r>
+            <a:endParaRPr lang="en-US" altLang="ko-KR" dirty="0">
+              <a:latin typeface="+mn-lt"/>
+              <a:ea typeface="Kim jung chul Gothic Regular" panose="020B0503000000000000" pitchFamily="34" charset="-127"/>
+            </a:endParaRPr>
+          </a:p>
+          <a:p>
+            <a:r>
+              <a:rPr lang="en-US" altLang="ko-KR" dirty="0">
+                <a:latin typeface="+mn-lt"/>
+                <a:ea typeface="Kim jung chul Gothic Regular" panose="020B0503000000000000" pitchFamily="34" charset="-127"/>
+              </a:rPr>
+              <a:t>Mouse</a:t>
+            </a:r>
+            <a:r>
+              <a:rPr lang="ko-KR" altLang="en-US" dirty="0">
+                <a:latin typeface="+mn-lt"/>
+                <a:ea typeface="Kim jung chul Gothic Regular" panose="020B0503000000000000" pitchFamily="34" charset="-127"/>
+              </a:rPr>
+              <a:t> 계열</a:t>
+            </a:r>
+            <a:endParaRPr lang="en-US" altLang="ko-KR" dirty="0">
+              <a:latin typeface="+mn-lt"/>
+              <a:ea typeface="Kim jung chul Gothic Regular" panose="020B0503000000000000" pitchFamily="34" charset="-127"/>
+            </a:endParaRPr>
+          </a:p>
+          <a:p>
+            <a:pPr lvl="1"/>
+            <a:r>
+              <a:rPr lang="en-US" altLang="ko-KR" dirty="0">
+                <a:latin typeface="+mn-lt"/>
+                <a:ea typeface="Kim jung chul Gothic Regular" panose="020B0503000000000000" pitchFamily="34" charset="-127"/>
+              </a:rPr>
+              <a:t>Mouseover : </a:t>
+            </a:r>
+            <a:r>
+              <a:rPr lang="ko-KR" altLang="en-US" dirty="0">
+                <a:latin typeface="+mn-lt"/>
+                <a:ea typeface="Kim jung chul Gothic Regular" panose="020B0503000000000000" pitchFamily="34" charset="-127"/>
+              </a:rPr>
+              <a:t>요소에 커서를 올렸을 때</a:t>
+            </a:r>
+            <a:endParaRPr lang="en-US" altLang="ko-KR" dirty="0">
+              <a:latin typeface="+mn-lt"/>
+              <a:ea typeface="Kim jung chul Gothic Regular" panose="020B0503000000000000" pitchFamily="34" charset="-127"/>
+            </a:endParaRPr>
+          </a:p>
+          <a:p>
+            <a:pPr lvl="1"/>
+            <a:r>
+              <a:rPr lang="en-US" altLang="ko-KR" dirty="0" err="1">
+                <a:latin typeface="+mn-lt"/>
+                <a:ea typeface="Kim jung chul Gothic Regular" panose="020B0503000000000000" pitchFamily="34" charset="-127"/>
+              </a:rPr>
+              <a:t>Mouseout</a:t>
+            </a:r>
+            <a:r>
+              <a:rPr lang="ko-KR" altLang="en-US" dirty="0">
+                <a:latin typeface="+mn-lt"/>
+                <a:ea typeface="Kim jung chul Gothic Regular" panose="020B0503000000000000" pitchFamily="34" charset="-127"/>
+              </a:rPr>
+              <a:t> </a:t>
+            </a:r>
+            <a:r>
+              <a:rPr lang="en-US" altLang="ko-KR" dirty="0">
+                <a:latin typeface="+mn-lt"/>
+                <a:ea typeface="Kim jung chul Gothic Regular" panose="020B0503000000000000" pitchFamily="34" charset="-127"/>
+              </a:rPr>
+              <a:t>:</a:t>
+            </a:r>
+            <a:r>
+              <a:rPr lang="ko-KR" altLang="en-US" dirty="0">
+                <a:latin typeface="+mn-lt"/>
+                <a:ea typeface="Kim jung chul Gothic Regular" panose="020B0503000000000000" pitchFamily="34" charset="-127"/>
+              </a:rPr>
+              <a:t> 마우스가 요소를 벗어날 때</a:t>
+            </a:r>
+            <a:endParaRPr lang="en-US" altLang="ko-KR" dirty="0">
+              <a:latin typeface="+mn-lt"/>
+              <a:ea typeface="Kim jung chul Gothic Regular" panose="020B0503000000000000" pitchFamily="34" charset="-127"/>
+            </a:endParaRPr>
+          </a:p>
+          <a:p>
+            <a:pPr lvl="1"/>
+            <a:r>
+              <a:rPr lang="en-US" altLang="ko-KR" dirty="0" err="1">
+                <a:latin typeface="+mn-lt"/>
+                <a:ea typeface="Kim jung chul Gothic Regular" panose="020B0503000000000000" pitchFamily="34" charset="-127"/>
+              </a:rPr>
+              <a:t>Mousedown</a:t>
+            </a:r>
+            <a:r>
+              <a:rPr lang="en-US" altLang="ko-KR" dirty="0">
+                <a:latin typeface="+mn-lt"/>
+                <a:ea typeface="Kim jung chul Gothic Regular" panose="020B0503000000000000" pitchFamily="34" charset="-127"/>
+              </a:rPr>
+              <a:t> : </a:t>
+            </a:r>
+            <a:r>
+              <a:rPr lang="ko-KR" altLang="en-US" dirty="0">
+                <a:latin typeface="+mn-lt"/>
+                <a:ea typeface="Kim jung chul Gothic Regular" panose="020B0503000000000000" pitchFamily="34" charset="-127"/>
+              </a:rPr>
+              <a:t>마우스 버튼을 누르고 있는 상태</a:t>
+            </a:r>
+            <a:endParaRPr lang="en-US" altLang="ko-KR" dirty="0">
+              <a:latin typeface="+mn-lt"/>
+              <a:ea typeface="Kim jung chul Gothic Regular" panose="020B0503000000000000" pitchFamily="34" charset="-127"/>
+            </a:endParaRPr>
+          </a:p>
+          <a:p>
+            <a:pPr lvl="1"/>
+            <a:r>
+              <a:rPr lang="en-US" altLang="ko-KR" dirty="0" err="1">
+                <a:latin typeface="+mn-lt"/>
+                <a:ea typeface="Kim jung chul Gothic Regular" panose="020B0503000000000000" pitchFamily="34" charset="-127"/>
+              </a:rPr>
+              <a:t>Mouseup</a:t>
+            </a:r>
+            <a:r>
+              <a:rPr lang="en-US" altLang="ko-KR" dirty="0">
+                <a:latin typeface="+mn-lt"/>
+                <a:ea typeface="Kim jung chul Gothic Regular" panose="020B0503000000000000" pitchFamily="34" charset="-127"/>
+              </a:rPr>
+              <a:t> : </a:t>
+            </a:r>
+            <a:r>
+              <a:rPr lang="ko-KR" altLang="en-US" dirty="0">
+                <a:latin typeface="+mn-lt"/>
+                <a:ea typeface="Kim jung chul Gothic Regular" panose="020B0503000000000000" pitchFamily="34" charset="-127"/>
+              </a:rPr>
+              <a:t>마우스 버튼을 떼는 순간</a:t>
+            </a:r>
+            <a:endParaRPr lang="en-US" altLang="ko-KR" dirty="0">
+              <a:latin typeface="+mn-lt"/>
+              <a:ea typeface="Kim jung chul Gothic Regular" panose="020B0503000000000000" pitchFamily="34" charset="-127"/>
+            </a:endParaRPr>
+          </a:p>
+          <a:p>
+            <a:r>
+              <a:rPr lang="en-US" altLang="ko-KR" dirty="0">
+                <a:latin typeface="+mn-lt"/>
+                <a:ea typeface="Kim jung chul Gothic Regular" panose="020B0503000000000000" pitchFamily="34" charset="-127"/>
+              </a:rPr>
+              <a:t>Focus : </a:t>
+            </a:r>
+            <a:r>
+              <a:rPr lang="ko-KR" altLang="en-US" dirty="0">
+                <a:latin typeface="+mn-lt"/>
+                <a:ea typeface="Kim jung chul Gothic Regular" panose="020B0503000000000000" pitchFamily="34" charset="-127"/>
+              </a:rPr>
+              <a:t>포커스가 갔을 때</a:t>
+            </a:r>
+            <a:endParaRPr lang="en-US" altLang="ko-KR" dirty="0">
+              <a:latin typeface="+mn-lt"/>
+              <a:ea typeface="Kim jung chul Gothic Regular" panose="020B0503000000000000" pitchFamily="34" charset="-127"/>
+            </a:endParaRPr>
+          </a:p>
+          <a:p>
+            <a:r>
+              <a:rPr lang="en-US" altLang="ko-KR" dirty="0">
+                <a:latin typeface="+mn-lt"/>
+                <a:ea typeface="Kim jung chul Gothic Regular" panose="020B0503000000000000" pitchFamily="34" charset="-127"/>
+              </a:rPr>
+              <a:t>Blur : </a:t>
+            </a:r>
+            <a:r>
+              <a:rPr lang="ko-KR" altLang="en-US" dirty="0">
+                <a:latin typeface="+mn-lt"/>
+                <a:ea typeface="Kim jung chul Gothic Regular" panose="020B0503000000000000" pitchFamily="34" charset="-127"/>
+              </a:rPr>
+              <a:t>포커스가 벗어나는 순간</a:t>
+            </a:r>
+            <a:endParaRPr lang="en-US" altLang="ko-KR" dirty="0">
+              <a:latin typeface="+mn-lt"/>
+              <a:ea typeface="Kim jung chul Gothic Regular" panose="020B0503000000000000" pitchFamily="34" charset="-127"/>
+            </a:endParaRPr>
+          </a:p>
+          <a:p>
+            <a:endParaRPr lang="en-US" altLang="ko-KR" dirty="0">
+              <a:latin typeface="+mn-lt"/>
+              <a:ea typeface="Kim jung chul Gothic Regular" panose="020B0503000000000000" pitchFamily="34" charset="-127"/>
+            </a:endParaRPr>
+          </a:p>
+          <a:p>
+            <a:endParaRPr lang="en-US" altLang="ko-KR" dirty="0">
+              <a:latin typeface="+mn-lt"/>
+              <a:ea typeface="Kim jung chul Gothic Regular" panose="020B0503000000000000" pitchFamily="34" charset="-127"/>
+            </a:endParaRPr>
+          </a:p>
+          <a:p>
+            <a:endParaRPr lang="en-US" altLang="ko-KR" dirty="0">
+              <a:latin typeface="+mn-lt"/>
+              <a:ea typeface="Kim jung chul Gothic Regular" panose="020B0503000000000000" pitchFamily="34" charset="-127"/>
+            </a:endParaRPr>
           </a:p>
         </p:txBody>
       </p:sp>
     </p:spTree>
     <p:extLst>
       <p:ext uri="{BB962C8B-B14F-4D97-AF65-F5344CB8AC3E}">
-        <p14:creationId xmlns:p14="http://schemas.microsoft.com/office/powerpoint/2010/main" val="3399084010"/>
+        <p14:creationId xmlns:p14="http://schemas.microsoft.com/office/powerpoint/2010/main" val="513312892"/>
       </p:ext>
     </p:extLst>
   </p:cSld>
@@ -30921,24 +31422,6 @@
           <a:p>
             <a:pPr algn="ctr"/>
             <a:r>
-              <a:rPr lang="ko-KR" altLang="en-US" dirty="0">
-                <a:solidFill>
-                  <a:srgbClr val="00B050"/>
-                </a:solidFill>
-                <a:ea typeface="Kim jung chul Gothic Bold" panose="020B0803000000000000" pitchFamily="50" charset="-127"/>
-              </a:rPr>
-              <a:t>요소</a:t>
-            </a:r>
-            <a:r>
-              <a:rPr lang="en-US" altLang="ko-KR" dirty="0">
-                <a:solidFill>
-                  <a:srgbClr val="00B050"/>
-                </a:solidFill>
-                <a:ea typeface="Kim jung chul Gothic Bold" panose="020B0803000000000000" pitchFamily="50" charset="-127"/>
-              </a:rPr>
-              <a:t>.</a:t>
-            </a:r>
-            <a:r>
               <a:rPr lang="en-US" altLang="ko-KR" dirty="0" err="1">
                 <a:solidFill>
                   <a:srgbClr val="00B050"/>
@@ -30951,35 +31434,14 @@
               <a:rPr lang="en-US" altLang="ko-KR" dirty="0">
                 <a:ea typeface="Kim jung chul Gothic Bold" panose="020B0803000000000000" pitchFamily="50" charset="-127"/>
               </a:rPr>
-              <a:t>(</a:t>
+              <a:t> </a:t>
             </a:r>
             <a:r>
               <a:rPr lang="ko-KR" altLang="en-US" dirty="0">
                 <a:ea typeface="Kim jung chul Gothic Bold" panose="020B0803000000000000" pitchFamily="50" charset="-127"/>
               </a:rPr>
-              <a:t>이벤트</a:t>
-            </a:r>
-            <a:r>
-              <a:rPr lang="en-US" altLang="ko-KR" dirty="0">
-                <a:ea typeface="Kim jung chul Gothic Bold" panose="020B0803000000000000" pitchFamily="50" charset="-127"/>
-              </a:rPr>
-              <a:t>, </a:t>
-            </a:r>
-            <a:r>
-              <a:rPr lang="ko-KR" altLang="en-US" dirty="0">
-                <a:ea typeface="Kim jung chul Gothic Bold" panose="020B0803000000000000" pitchFamily="50" charset="-127"/>
-              </a:rPr>
-              <a:t>명령</a:t>
-            </a:r>
-            <a:r>
-              <a:rPr lang="en-US" altLang="ko-KR" dirty="0">
-                <a:ea typeface="Kim jung chul Gothic Bold" panose="020B0803000000000000" pitchFamily="50" charset="-127"/>
-              </a:rPr>
-              <a:t>)</a:t>
-            </a:r>
-            <a:endParaRPr lang="ko-KR" altLang="en-US" dirty="0">
-              <a:ea typeface="Kim jung chul Gothic Bold" panose="020B0803000000000000" pitchFamily="50" charset="-127"/>
-            </a:endParaRPr>
+              <a:t>이벤트의 종류</a:t>
+            </a:r>
           </a:p>
         </p:txBody>
       </p:sp>
@@ -30999,8 +31461,8 @@
         </p:nvSpPr>
         <p:spPr>
           <a:xfrm>
-            <a:off x="523783" y="1328391"/>
-            <a:ext cx="11177300" cy="5232208"/>
+            <a:off x="749144" y="1448474"/>
+            <a:ext cx="10693712" cy="4956462"/>
           </a:xfrm>
           <a:prstGeom prst="rect">
             <a:avLst/>
@@ -31008,7 +31470,7 @@
         </p:spPr>
         <p:txBody>
           <a:bodyPr vert="horz" lIns="91440" tIns="45720" rIns="91440" bIns="45720" rtlCol="0">
-            <a:normAutofit/>
+            <a:normAutofit fontScale="70000" lnSpcReduction="20000"/>
           </a:bodyPr>
           <a:lstStyle>
             <a:lvl1pPr marL="228600" indent="-228600" algn="l" defTabSz="914400" rtl="0" eaLnBrk="1" latinLnBrk="1" hangingPunct="1">
@@ -31176,25 +31638,18 @@
           </a:lstStyle>
           <a:p>
             <a:r>
+              <a:rPr lang="en-US" altLang="ko-KR" dirty="0">
+                <a:latin typeface="+mn-lt"/>
+                <a:ea typeface="Kim jung chul Gothic Regular" panose="020B0503000000000000" pitchFamily="34" charset="-127"/>
+              </a:rPr>
+              <a:t>Key </a:t>
+            </a:r>
+            <a:r>
               <a:rPr lang="ko-KR" altLang="en-US" dirty="0">
                 <a:latin typeface="+mn-lt"/>
                 <a:ea typeface="Kim jung chul Gothic Regular" panose="020B0503000000000000" pitchFamily="34" charset="-127"/>
               </a:rPr>
-              <a:t>선택 요소에 지정한 이벤트가 발생하면</a:t>
-            </a:r>
-            <a:r>
-              <a:rPr lang="en-US" altLang="ko-KR" dirty="0">
-                <a:latin typeface="+mn-lt"/>
-                <a:ea typeface="Kim jung chul Gothic Regular" panose="020B0503000000000000" pitchFamily="34" charset="-127"/>
-              </a:rPr>
-              <a:t>, </a:t>
-            </a:r>
-            <a:r>
-              <a:rPr lang="ko-KR" altLang="en-US" dirty="0">
-                <a:latin typeface="+mn-lt"/>
-                <a:ea typeface="Kim jung chul Gothic Regular" panose="020B0503000000000000" pitchFamily="34" charset="-127"/>
-              </a:rPr>
-              <a:t>약속 된 명령어를 실행시키는 메소드</a:t>
+              <a:t>계열</a:t>
             </a:r>
             <a:endParaRPr lang="en-US" altLang="ko-KR" dirty="0">
               <a:latin typeface="+mn-lt"/>
@@ -31202,599 +31657,272 @@
             </a:endParaRPr>
           </a:p>
           <a:p>
+            <a:pPr lvl="1"/>
+            <a:r>
+              <a:rPr lang="en-US" altLang="ko-KR" dirty="0">
+                <a:latin typeface="+mn-lt"/>
+                <a:ea typeface="Kim jung chul Gothic Regular" panose="020B0503000000000000" pitchFamily="34" charset="-127"/>
+              </a:rPr>
+              <a:t>Keypress : </a:t>
+            </a:r>
+            <a:r>
+              <a:rPr lang="ko-KR" altLang="en-US" dirty="0">
+                <a:latin typeface="+mn-lt"/>
+                <a:ea typeface="Kim jung chul Gothic Regular" panose="020B0503000000000000" pitchFamily="34" charset="-127"/>
+              </a:rPr>
+              <a:t>키를 누르는 순간 </a:t>
+            </a:r>
+            <a:r>
+              <a:rPr lang="en-US" altLang="ko-KR" dirty="0">
+                <a:latin typeface="+mn-lt"/>
+                <a:ea typeface="Kim jung chul Gothic Regular" panose="020B0503000000000000" pitchFamily="34" charset="-127"/>
+              </a:rPr>
+              <a:t>+ </a:t>
+            </a:r>
+            <a:r>
+              <a:rPr lang="ko-KR" altLang="en-US" dirty="0">
+                <a:latin typeface="+mn-lt"/>
+                <a:ea typeface="Kim jung chul Gothic Regular" panose="020B0503000000000000" pitchFamily="34" charset="-127"/>
+              </a:rPr>
+              <a:t>누르고 있는 동안 계속 발생</a:t>
+            </a:r>
             <a:endParaRPr lang="en-US" altLang="ko-KR" dirty="0">
               <a:latin typeface="+mn-lt"/>
               <a:ea typeface="Kim jung chul Gothic Regular" panose="020B0503000000000000" pitchFamily="34" charset="-127"/>
             </a:endParaRPr>
           </a:p>
-        </p:txBody>
-      </p:sp>
-      <p:sp>
-        <p:nvSpPr>
-          <p:cNvPr id="7" name="TextBox 6">
-            <a:extLst>
-              <a:ext uri="{FF2B5EF4-FFF2-40B4-BE49-F238E27FC236}">
-                <a16:creationId xmlns:a16="http://schemas.microsoft.com/office/drawing/2014/main" id="{8B2F8DB1-4A8C-5FD8-B306-66E48E333D7B}"/>
-              </a:ext>
-            </a:extLst>
-          </p:cNvPr>
-          <p:cNvSpPr txBox="1"/>
-          <p:nvPr/>
-        </p:nvSpPr>
-        <p:spPr>
-          <a:xfrm>
-            <a:off x="838200" y="2928832"/>
-            <a:ext cx="6943165" cy="2031325"/>
-          </a:xfrm>
-          <a:prstGeom prst="rect">
-            <a:avLst/>
-          </a:prstGeom>
-          <a:solidFill>
-            <a:schemeClr val="tx1">
-              <a:lumMod val="85000"/>
-              <a:lumOff val="15000"/>
-            </a:schemeClr>
-          </a:solidFill>
-        </p:spPr>
-        <p:txBody>
-          <a:bodyPr wrap="square">
-            <a:spAutoFit/>
-          </a:bodyPr>
-          <a:lstStyle/>
-          <a:p>
-            <a:r>
-              <a:rPr lang="en-US" altLang="ko-KR" b="0" dirty="0">
-                <a:solidFill>
-                  <a:srgbClr val="569CD6"/>
-                </a:solidFill>
-                <a:effectLst/>
-                <a:latin typeface="Consolas" panose="020B0609020204030204" pitchFamily="49" charset="0"/>
-              </a:rPr>
-              <a:t>let</a:t>
-            </a:r>
-            <a:r>
-              <a:rPr lang="en-US" altLang="ko-KR" b="0" dirty="0">
-                <a:solidFill>
-                  <a:srgbClr val="D4D4D4"/>
-                </a:solidFill>
-                <a:effectLst/>
-                <a:latin typeface="Consolas" panose="020B0609020204030204" pitchFamily="49" charset="0"/>
+          <a:p>
+            <a:pPr lvl="1"/>
+            <a:r>
+              <a:rPr lang="en-US" altLang="ko-KR" dirty="0" err="1">
+                <a:latin typeface="+mn-lt"/>
+                <a:ea typeface="Kim jung chul Gothic Regular" panose="020B0503000000000000" pitchFamily="34" charset="-127"/>
+              </a:rPr>
+              <a:t>Keydown</a:t>
+            </a:r>
+            <a:r>
+              <a:rPr lang="en-US" altLang="ko-KR" dirty="0">
+                <a:latin typeface="+mn-lt"/>
+                <a:ea typeface="Kim jung chul Gothic Regular" panose="020B0503000000000000" pitchFamily="34" charset="-127"/>
+              </a:rPr>
+              <a:t> : </a:t>
+            </a:r>
+            <a:r>
+              <a:rPr lang="ko-KR" altLang="en-US" dirty="0">
+                <a:latin typeface="+mn-lt"/>
+                <a:ea typeface="Kim jung chul Gothic Regular" panose="020B0503000000000000" pitchFamily="34" charset="-127"/>
+              </a:rPr>
+              <a:t>키를 누르는 순간에만 발생</a:t>
+            </a:r>
+            <a:endParaRPr lang="en-US" altLang="ko-KR" dirty="0">
+              <a:latin typeface="+mn-lt"/>
+              <a:ea typeface="Kim jung chul Gothic Regular" panose="020B0503000000000000" pitchFamily="34" charset="-127"/>
+            </a:endParaRPr>
+          </a:p>
+          <a:p>
+            <a:pPr lvl="1"/>
+            <a:r>
+              <a:rPr lang="en-US" altLang="ko-KR" dirty="0" err="1">
+                <a:latin typeface="+mn-lt"/>
+                <a:ea typeface="Kim jung chul Gothic Regular" panose="020B0503000000000000" pitchFamily="34" charset="-127"/>
+              </a:rPr>
+              <a:t>Keyup</a:t>
+            </a:r>
+            <a:r>
+              <a:rPr lang="en-US" altLang="ko-KR" dirty="0">
+                <a:latin typeface="+mn-lt"/>
+                <a:ea typeface="Kim jung chul Gothic Regular" panose="020B0503000000000000" pitchFamily="34" charset="-127"/>
+              </a:rPr>
+              <a:t> : </a:t>
+            </a:r>
+            <a:r>
+              <a:rPr lang="ko-KR" altLang="en-US" dirty="0">
+                <a:latin typeface="+mn-lt"/>
+                <a:ea typeface="Kim jung chul Gothic Regular" panose="020B0503000000000000" pitchFamily="34" charset="-127"/>
+              </a:rPr>
+              <a:t>키를 눌렀다가 떼는 순간</a:t>
+            </a:r>
+            <a:endParaRPr lang="en-US" altLang="ko-KR" dirty="0">
+              <a:latin typeface="+mn-lt"/>
+              <a:ea typeface="Kim jung chul Gothic Regular" panose="020B0503000000000000" pitchFamily="34" charset="-127"/>
+            </a:endParaRPr>
+          </a:p>
+          <a:p>
+            <a:r>
+              <a:rPr lang="en-US" altLang="ko-KR" dirty="0">
+                <a:latin typeface="+mn-lt"/>
+                <a:ea typeface="Kim jung chul Gothic Regular" panose="020B0503000000000000" pitchFamily="34" charset="-127"/>
+              </a:rPr>
+              <a:t>Load : </a:t>
+            </a:r>
+            <a:r>
+              <a:rPr lang="ko-KR" altLang="en-US" dirty="0">
+                <a:latin typeface="+mn-lt"/>
+                <a:ea typeface="Kim jung chul Gothic Regular" panose="020B0503000000000000" pitchFamily="34" charset="-127"/>
+              </a:rPr>
+              <a:t>웹페이지에 필요한 모든 파일</a:t>
+            </a:r>
+            <a:r>
+              <a:rPr lang="en-US" altLang="ko-KR" dirty="0">
+                <a:latin typeface="+mn-lt"/>
+                <a:ea typeface="Kim jung chul Gothic Regular" panose="020B0503000000000000" pitchFamily="34" charset="-127"/>
+              </a:rPr>
+              <a:t>(html, </a:t>
+            </a:r>
+            <a:r>
+              <a:rPr lang="en-US" altLang="ko-KR" dirty="0" err="1">
+                <a:latin typeface="+mn-lt"/>
+                <a:ea typeface="Kim jung chul Gothic Regular" panose="020B0503000000000000" pitchFamily="34" charset="-127"/>
+              </a:rPr>
+              <a:t>css</a:t>
+            </a:r>
+            <a:r>
+              <a:rPr lang="en-US" altLang="ko-KR" dirty="0">
+                <a:latin typeface="+mn-lt"/>
+                <a:ea typeface="Kim jung chul Gothic Regular" panose="020B0503000000000000" pitchFamily="34" charset="-127"/>
+              </a:rPr>
+              <a:t>, </a:t>
+            </a:r>
+            <a:r>
+              <a:rPr lang="en-US" altLang="ko-KR" dirty="0" err="1">
+                <a:latin typeface="+mn-lt"/>
+                <a:ea typeface="Kim jung chul Gothic Regular" panose="020B0503000000000000" pitchFamily="34" charset="-127"/>
+              </a:rPr>
+              <a:t>js</a:t>
+            </a:r>
+            <a:r>
+              <a:rPr lang="en-US" altLang="ko-KR" dirty="0">
+                <a:latin typeface="+mn-lt"/>
+                <a:ea typeface="Kim jung chul Gothic Regular" panose="020B0503000000000000" pitchFamily="34" charset="-127"/>
               </a:rPr>
               <a:t> </a:t>
             </a:r>
             <a:r>
-              <a:rPr lang="en-US" altLang="ko-KR" b="0" dirty="0" err="1">
-                <a:solidFill>
-                  <a:srgbClr val="9CDCFE"/>
-                </a:solidFill>
-                <a:effectLst/>
-                <a:latin typeface="Consolas" panose="020B0609020204030204" pitchFamily="49" charset="0"/>
-              </a:rPr>
-              <a:t>boxEl</a:t>
-            </a:r>
-            <a:r>
-              <a:rPr lang="en-US" altLang="ko-KR" b="0" dirty="0">
-                <a:solidFill>
-                  <a:srgbClr val="D4D4D4"/>
-                </a:solidFill>
-                <a:effectLst/>
-                <a:latin typeface="Consolas" panose="020B0609020204030204" pitchFamily="49" charset="0"/>
-              </a:rPr>
-              <a:t> = </a:t>
-            </a:r>
-            <a:r>
-              <a:rPr lang="en-US" altLang="ko-KR" b="0" dirty="0" err="1">
-                <a:solidFill>
-                  <a:srgbClr val="9CDCFE"/>
-                </a:solidFill>
-                <a:effectLst/>
-                <a:latin typeface="Consolas" panose="020B0609020204030204" pitchFamily="49" charset="0"/>
-              </a:rPr>
-              <a:t>document</a:t>
-            </a:r>
-            <a:r>
-              <a:rPr lang="en-US" altLang="ko-KR" b="0" dirty="0" err="1">
-                <a:solidFill>
-                  <a:srgbClr val="D4D4D4"/>
-                </a:solidFill>
-                <a:effectLst/>
-                <a:latin typeface="Consolas" panose="020B0609020204030204" pitchFamily="49" charset="0"/>
-              </a:rPr>
-              <a:t>.</a:t>
-            </a:r>
-            <a:r>
-              <a:rPr lang="en-US" altLang="ko-KR" b="0" dirty="0" err="1">
-                <a:solidFill>
-                  <a:srgbClr val="DCDCAA"/>
-                </a:solidFill>
-                <a:effectLst/>
-                <a:latin typeface="Consolas" panose="020B0609020204030204" pitchFamily="49" charset="0"/>
-              </a:rPr>
-              <a:t>querySelector</a:t>
-            </a:r>
-            <a:r>
-              <a:rPr lang="en-US" altLang="ko-KR" b="0" dirty="0">
-                <a:solidFill>
-                  <a:srgbClr val="D4D4D4"/>
-                </a:solidFill>
-                <a:effectLst/>
-                <a:latin typeface="Consolas" panose="020B0609020204030204" pitchFamily="49" charset="0"/>
-              </a:rPr>
-              <a:t>(</a:t>
-            </a:r>
-            <a:r>
-              <a:rPr lang="en-US" altLang="ko-KR" b="0" dirty="0">
-                <a:solidFill>
-                  <a:srgbClr val="CE9178"/>
-                </a:solidFill>
-                <a:effectLst/>
-                <a:latin typeface="Consolas" panose="020B0609020204030204" pitchFamily="49" charset="0"/>
-              </a:rPr>
-              <a:t>".box"</a:t>
-            </a:r>
-            <a:r>
-              <a:rPr lang="en-US" altLang="ko-KR" b="0" dirty="0">
-                <a:solidFill>
-                  <a:srgbClr val="D4D4D4"/>
-                </a:solidFill>
-                <a:effectLst/>
-                <a:latin typeface="Consolas" panose="020B0609020204030204" pitchFamily="49" charset="0"/>
-              </a:rPr>
-              <a:t>);</a:t>
-            </a:r>
-          </a:p>
-          <a:p>
-            <a:br>
-              <a:rPr lang="en-US" altLang="ko-KR" b="0" dirty="0">
-                <a:solidFill>
-                  <a:srgbClr val="D4D4D4"/>
-                </a:solidFill>
-                <a:effectLst/>
-                <a:latin typeface="Consolas" panose="020B0609020204030204" pitchFamily="49" charset="0"/>
-              </a:rPr>
-            </a:br>
-            <a:r>
-              <a:rPr lang="en-US" altLang="ko-KR" b="0" dirty="0">
-                <a:solidFill>
-                  <a:srgbClr val="9CDCFE"/>
-                </a:solidFill>
-                <a:effectLst/>
-                <a:latin typeface="Consolas" panose="020B0609020204030204" pitchFamily="49" charset="0"/>
-              </a:rPr>
-              <a:t>console</a:t>
-            </a:r>
-            <a:r>
-              <a:rPr lang="en-US" altLang="ko-KR" b="0" dirty="0">
-                <a:solidFill>
-                  <a:srgbClr val="D4D4D4"/>
-                </a:solidFill>
-                <a:effectLst/>
-                <a:latin typeface="Consolas" panose="020B0609020204030204" pitchFamily="49" charset="0"/>
-              </a:rPr>
-              <a:t>.</a:t>
-            </a:r>
-            <a:r>
-              <a:rPr lang="en-US" altLang="ko-KR" b="0" dirty="0">
-                <a:solidFill>
-                  <a:srgbClr val="DCDCAA"/>
-                </a:solidFill>
-                <a:effectLst/>
-                <a:latin typeface="Consolas" panose="020B0609020204030204" pitchFamily="49" charset="0"/>
-              </a:rPr>
-              <a:t>log</a:t>
-            </a:r>
-            <a:r>
-              <a:rPr lang="en-US" altLang="ko-KR" b="0" dirty="0">
-                <a:solidFill>
-                  <a:srgbClr val="D4D4D4"/>
-                </a:solidFill>
-                <a:effectLst/>
-                <a:latin typeface="Consolas" panose="020B0609020204030204" pitchFamily="49" charset="0"/>
-              </a:rPr>
-              <a:t>(</a:t>
-            </a:r>
-            <a:r>
-              <a:rPr lang="en-US" altLang="ko-KR" b="0" dirty="0" err="1">
-                <a:solidFill>
-                  <a:srgbClr val="9CDCFE"/>
-                </a:solidFill>
-                <a:effectLst/>
-                <a:latin typeface="Consolas" panose="020B0609020204030204" pitchFamily="49" charset="0"/>
-              </a:rPr>
-              <a:t>boxEl</a:t>
-            </a:r>
-            <a:r>
-              <a:rPr lang="en-US" altLang="ko-KR" b="0" dirty="0">
-                <a:solidFill>
-                  <a:srgbClr val="D4D4D4"/>
-                </a:solidFill>
-                <a:effectLst/>
-                <a:latin typeface="Consolas" panose="020B0609020204030204" pitchFamily="49" charset="0"/>
-              </a:rPr>
-              <a:t>);</a:t>
-            </a:r>
-          </a:p>
-          <a:p>
-            <a:br>
-              <a:rPr lang="en-US" altLang="ko-KR" b="0" dirty="0">
-                <a:solidFill>
-                  <a:srgbClr val="D4D4D4"/>
-                </a:solidFill>
-                <a:effectLst/>
-                <a:latin typeface="Consolas" panose="020B0609020204030204" pitchFamily="49" charset="0"/>
-              </a:rPr>
-            </a:br>
-            <a:r>
-              <a:rPr lang="en-US" altLang="ko-KR" b="0" dirty="0" err="1">
-                <a:solidFill>
-                  <a:srgbClr val="9CDCFE"/>
-                </a:solidFill>
-                <a:effectLst/>
-                <a:latin typeface="Consolas" panose="020B0609020204030204" pitchFamily="49" charset="0"/>
-              </a:rPr>
-              <a:t>boxEl</a:t>
-            </a:r>
-            <a:r>
-              <a:rPr lang="en-US" altLang="ko-KR" b="0" dirty="0" err="1">
-                <a:solidFill>
-                  <a:srgbClr val="D4D4D4"/>
-                </a:solidFill>
-                <a:effectLst/>
-                <a:latin typeface="Consolas" panose="020B0609020204030204" pitchFamily="49" charset="0"/>
-              </a:rPr>
-              <a:t>.</a:t>
-            </a:r>
-            <a:r>
-              <a:rPr lang="en-US" altLang="ko-KR" b="0" dirty="0" err="1">
-                <a:solidFill>
-                  <a:srgbClr val="DCDCAA"/>
-                </a:solidFill>
-                <a:effectLst/>
-                <a:latin typeface="Consolas" panose="020B0609020204030204" pitchFamily="49" charset="0"/>
-              </a:rPr>
-              <a:t>addEventListener</a:t>
-            </a:r>
-            <a:r>
-              <a:rPr lang="en-US" altLang="ko-KR" b="0" dirty="0">
-                <a:solidFill>
-                  <a:srgbClr val="D4D4D4"/>
-                </a:solidFill>
-                <a:effectLst/>
-                <a:latin typeface="Consolas" panose="020B0609020204030204" pitchFamily="49" charset="0"/>
-              </a:rPr>
-              <a:t>(</a:t>
-            </a:r>
-            <a:r>
-              <a:rPr lang="en-US" altLang="ko-KR" b="0" dirty="0">
-                <a:solidFill>
-                  <a:srgbClr val="CE9178"/>
-                </a:solidFill>
-                <a:effectLst/>
-                <a:latin typeface="Consolas" panose="020B0609020204030204" pitchFamily="49" charset="0"/>
-              </a:rPr>
-              <a:t>"click"</a:t>
-            </a:r>
-            <a:r>
-              <a:rPr lang="en-US" altLang="ko-KR" b="0" dirty="0">
-                <a:solidFill>
-                  <a:srgbClr val="D4D4D4"/>
-                </a:solidFill>
-                <a:effectLst/>
-                <a:latin typeface="Consolas" panose="020B0609020204030204" pitchFamily="49" charset="0"/>
+              <a:rPr lang="ko-KR" altLang="en-US" dirty="0">
+                <a:latin typeface="+mn-lt"/>
+                <a:ea typeface="Kim jung chul Gothic Regular" panose="020B0503000000000000" pitchFamily="34" charset="-127"/>
+              </a:rPr>
+              <a:t>등</a:t>
+            </a:r>
+            <a:r>
+              <a:rPr lang="en-US" altLang="ko-KR" dirty="0">
+                <a:latin typeface="+mn-lt"/>
+                <a:ea typeface="Kim jung chul Gothic Regular" panose="020B0503000000000000" pitchFamily="34" charset="-127"/>
+              </a:rPr>
+              <a:t>)</a:t>
+            </a:r>
+            <a:r>
+              <a:rPr lang="ko-KR" altLang="en-US" dirty="0">
+                <a:latin typeface="+mn-lt"/>
+                <a:ea typeface="Kim jung chul Gothic Regular" panose="020B0503000000000000" pitchFamily="34" charset="-127"/>
+              </a:rPr>
+              <a:t>의 다운로드가 완료 되었을 때</a:t>
+            </a:r>
+            <a:endParaRPr lang="en-US" altLang="ko-KR" dirty="0">
+              <a:latin typeface="+mn-lt"/>
+              <a:ea typeface="Kim jung chul Gothic Regular" panose="020B0503000000000000" pitchFamily="34" charset="-127"/>
+            </a:endParaRPr>
+          </a:p>
+          <a:p>
+            <a:r>
+              <a:rPr lang="en-US" altLang="ko-KR" dirty="0">
+                <a:latin typeface="+mn-lt"/>
+                <a:ea typeface="Kim jung chul Gothic Regular" panose="020B0503000000000000" pitchFamily="34" charset="-127"/>
+              </a:rPr>
+              <a:t>Resize : </a:t>
+            </a:r>
+            <a:r>
+              <a:rPr lang="ko-KR" altLang="en-US" dirty="0">
+                <a:latin typeface="+mn-lt"/>
+                <a:ea typeface="Kim jung chul Gothic Regular" panose="020B0503000000000000" pitchFamily="34" charset="-127"/>
+              </a:rPr>
+              <a:t>브라우저 창의 크기가 변경 될 때</a:t>
+            </a:r>
+            <a:endParaRPr lang="en-US" altLang="ko-KR" dirty="0">
+              <a:latin typeface="+mn-lt"/>
+              <a:ea typeface="Kim jung chul Gothic Regular" panose="020B0503000000000000" pitchFamily="34" charset="-127"/>
+            </a:endParaRPr>
+          </a:p>
+          <a:p>
+            <a:r>
+              <a:rPr lang="en-US" altLang="ko-KR" dirty="0">
+                <a:latin typeface="+mn-lt"/>
+                <a:ea typeface="Kim jung chul Gothic Regular" panose="020B0503000000000000" pitchFamily="34" charset="-127"/>
+              </a:rPr>
+              <a:t>Scroll : </a:t>
+            </a:r>
+            <a:r>
+              <a:rPr lang="ko-KR" altLang="en-US" dirty="0">
+                <a:latin typeface="+mn-lt"/>
+                <a:ea typeface="Kim jung chul Gothic Regular" panose="020B0503000000000000" pitchFamily="34" charset="-127"/>
+              </a:rPr>
+              <a:t>스크롤이 발생할 때</a:t>
+            </a:r>
+            <a:endParaRPr lang="en-US" altLang="ko-KR" dirty="0">
+              <a:latin typeface="+mn-lt"/>
+              <a:ea typeface="Kim jung chul Gothic Regular" panose="020B0503000000000000" pitchFamily="34" charset="-127"/>
+            </a:endParaRPr>
+          </a:p>
+          <a:p>
+            <a:r>
+              <a:rPr lang="en-US" altLang="ko-KR" dirty="0">
+                <a:latin typeface="+mn-lt"/>
+                <a:ea typeface="Kim jung chul Gothic Regular" panose="020B0503000000000000" pitchFamily="34" charset="-127"/>
+              </a:rPr>
+              <a:t>Unload : </a:t>
+            </a:r>
+            <a:r>
+              <a:rPr lang="ko-KR" altLang="en-US" dirty="0">
+                <a:latin typeface="+mn-lt"/>
+                <a:ea typeface="Kim jung chul Gothic Regular" panose="020B0503000000000000" pitchFamily="34" charset="-127"/>
+              </a:rPr>
+              <a:t>링크를 타고 이동하거나</a:t>
+            </a:r>
+            <a:r>
+              <a:rPr lang="en-US" altLang="ko-KR" dirty="0">
+                <a:latin typeface="+mn-lt"/>
+                <a:ea typeface="Kim jung chul Gothic Regular" panose="020B0503000000000000" pitchFamily="34" charset="-127"/>
               </a:rPr>
               <a:t>, </a:t>
             </a:r>
             <a:r>
-              <a:rPr lang="en-US" altLang="ko-KR" b="0" dirty="0">
-                <a:solidFill>
-                  <a:srgbClr val="569CD6"/>
-                </a:solidFill>
-                <a:effectLst/>
-                <a:latin typeface="Consolas" panose="020B0609020204030204" pitchFamily="49" charset="0"/>
-              </a:rPr>
-              <a:t>function</a:t>
-            </a:r>
-            <a:r>
-              <a:rPr lang="en-US" altLang="ko-KR" b="0" dirty="0">
-                <a:solidFill>
-                  <a:srgbClr val="D4D4D4"/>
-                </a:solidFill>
-                <a:effectLst/>
-                <a:latin typeface="Consolas" panose="020B0609020204030204" pitchFamily="49" charset="0"/>
-              </a:rPr>
-              <a:t>() {</a:t>
-            </a:r>
-          </a:p>
-          <a:p>
-            <a:r>
-              <a:rPr lang="en-US" altLang="ko-KR" b="0" dirty="0">
-                <a:solidFill>
-                  <a:srgbClr val="D4D4D4"/>
-                </a:solidFill>
-                <a:effectLst/>
-                <a:latin typeface="Consolas" panose="020B0609020204030204" pitchFamily="49" charset="0"/>
-              </a:rPr>
-              <a:t>    </a:t>
-            </a:r>
-            <a:r>
-              <a:rPr lang="en-US" altLang="ko-KR" b="0" dirty="0">
-                <a:solidFill>
-                  <a:srgbClr val="DCDCAA"/>
-                </a:solidFill>
-                <a:effectLst/>
-                <a:latin typeface="Consolas" panose="020B0609020204030204" pitchFamily="49" charset="0"/>
-              </a:rPr>
-              <a:t>alert</a:t>
-            </a:r>
-            <a:r>
-              <a:rPr lang="en-US" altLang="ko-KR" b="0" dirty="0">
-                <a:solidFill>
-                  <a:srgbClr val="D4D4D4"/>
-                </a:solidFill>
-                <a:effectLst/>
-                <a:latin typeface="Consolas" panose="020B0609020204030204" pitchFamily="49" charset="0"/>
-              </a:rPr>
-              <a:t>(</a:t>
-            </a:r>
-            <a:r>
-              <a:rPr lang="en-US" altLang="ko-KR" b="0" dirty="0">
-                <a:solidFill>
-                  <a:srgbClr val="CE9178"/>
-                </a:solidFill>
-                <a:effectLst/>
-                <a:latin typeface="Consolas" panose="020B0609020204030204" pitchFamily="49" charset="0"/>
-              </a:rPr>
-              <a:t>"click!"</a:t>
-            </a:r>
-            <a:r>
-              <a:rPr lang="en-US" altLang="ko-KR" b="0" dirty="0">
-                <a:solidFill>
-                  <a:srgbClr val="D4D4D4"/>
-                </a:solidFill>
-                <a:effectLst/>
-                <a:latin typeface="Consolas" panose="020B0609020204030204" pitchFamily="49" charset="0"/>
-              </a:rPr>
-              <a:t>);</a:t>
-            </a:r>
-          </a:p>
-          <a:p>
-            <a:r>
-              <a:rPr lang="en-US" altLang="ko-KR" b="0" dirty="0">
-                <a:solidFill>
-                  <a:srgbClr val="D4D4D4"/>
-                </a:solidFill>
-                <a:effectLst/>
-                <a:latin typeface="Consolas" panose="020B0609020204030204" pitchFamily="49" charset="0"/>
-              </a:rPr>
-              <a:t>})</a:t>
-            </a:r>
-          </a:p>
-        </p:txBody>
-      </p:sp>
-      <p:sp>
-        <p:nvSpPr>
-          <p:cNvPr id="8" name="TextBox 7">
-            <a:extLst>
-              <a:ext uri="{FF2B5EF4-FFF2-40B4-BE49-F238E27FC236}">
-                <a16:creationId xmlns:a16="http://schemas.microsoft.com/office/drawing/2014/main" id="{0CFA8179-F830-703B-52B8-458B7490C17F}"/>
-              </a:ext>
-            </a:extLst>
-          </p:cNvPr>
-          <p:cNvSpPr txBox="1"/>
-          <p:nvPr/>
-        </p:nvSpPr>
-        <p:spPr>
-          <a:xfrm>
-            <a:off x="838200" y="5362390"/>
-            <a:ext cx="9852212" cy="923330"/>
-          </a:xfrm>
-          <a:prstGeom prst="rect">
-            <a:avLst/>
-          </a:prstGeom>
-          <a:solidFill>
-            <a:schemeClr val="tx1">
-              <a:lumMod val="85000"/>
-              <a:lumOff val="15000"/>
-            </a:schemeClr>
-          </a:solidFill>
-        </p:spPr>
-        <p:txBody>
-          <a:bodyPr wrap="square">
-            <a:spAutoFit/>
-          </a:bodyPr>
-          <a:lstStyle/>
-          <a:p>
-            <a:r>
-              <a:rPr lang="en-US" altLang="ko-KR" b="0" dirty="0" err="1">
-                <a:solidFill>
-                  <a:srgbClr val="9CDCFE"/>
-                </a:solidFill>
-                <a:effectLst/>
-                <a:latin typeface="Consolas" panose="020B0609020204030204" pitchFamily="49" charset="0"/>
-              </a:rPr>
-              <a:t>document</a:t>
-            </a:r>
-            <a:r>
-              <a:rPr lang="en-US" altLang="ko-KR" b="0" dirty="0" err="1">
-                <a:solidFill>
-                  <a:srgbClr val="D4D4D4"/>
-                </a:solidFill>
-                <a:effectLst/>
-                <a:latin typeface="Consolas" panose="020B0609020204030204" pitchFamily="49" charset="0"/>
-              </a:rPr>
-              <a:t>.</a:t>
-            </a:r>
-            <a:r>
-              <a:rPr lang="en-US" altLang="ko-KR" b="0" dirty="0" err="1">
-                <a:solidFill>
-                  <a:srgbClr val="DCDCAA"/>
-                </a:solidFill>
-                <a:effectLst/>
-                <a:latin typeface="Consolas" panose="020B0609020204030204" pitchFamily="49" charset="0"/>
-              </a:rPr>
-              <a:t>querySelector</a:t>
-            </a:r>
-            <a:r>
-              <a:rPr lang="en-US" altLang="ko-KR" b="0" dirty="0">
-                <a:solidFill>
-                  <a:srgbClr val="D4D4D4"/>
-                </a:solidFill>
-                <a:effectLst/>
-                <a:latin typeface="Consolas" panose="020B0609020204030204" pitchFamily="49" charset="0"/>
-              </a:rPr>
-              <a:t>(</a:t>
-            </a:r>
-            <a:r>
-              <a:rPr lang="en-US" altLang="ko-KR" b="0" dirty="0">
-                <a:solidFill>
-                  <a:srgbClr val="CE9178"/>
-                </a:solidFill>
-                <a:effectLst/>
-                <a:latin typeface="Consolas" panose="020B0609020204030204" pitchFamily="49" charset="0"/>
-              </a:rPr>
-              <a:t>".box"</a:t>
-            </a:r>
-            <a:r>
-              <a:rPr lang="en-US" altLang="ko-KR" b="0" dirty="0">
-                <a:solidFill>
-                  <a:srgbClr val="D4D4D4"/>
-                </a:solidFill>
-                <a:effectLst/>
-                <a:latin typeface="Consolas" panose="020B0609020204030204" pitchFamily="49" charset="0"/>
-              </a:rPr>
-              <a:t>).</a:t>
-            </a:r>
-            <a:r>
-              <a:rPr lang="en-US" altLang="ko-KR" b="0" dirty="0" err="1">
-                <a:solidFill>
-                  <a:srgbClr val="DCDCAA"/>
-                </a:solidFill>
-                <a:effectLst/>
-                <a:latin typeface="Consolas" panose="020B0609020204030204" pitchFamily="49" charset="0"/>
-              </a:rPr>
-              <a:t>addEventListener</a:t>
-            </a:r>
-            <a:r>
-              <a:rPr lang="en-US" altLang="ko-KR" b="0" dirty="0">
-                <a:solidFill>
-                  <a:srgbClr val="D4D4D4"/>
-                </a:solidFill>
-                <a:effectLst/>
-                <a:latin typeface="Consolas" panose="020B0609020204030204" pitchFamily="49" charset="0"/>
-              </a:rPr>
-              <a:t>(</a:t>
-            </a:r>
-            <a:r>
-              <a:rPr lang="en-US" altLang="ko-KR" b="0" dirty="0">
-                <a:solidFill>
-                  <a:srgbClr val="CE9178"/>
-                </a:solidFill>
-                <a:effectLst/>
-                <a:latin typeface="Consolas" panose="020B0609020204030204" pitchFamily="49" charset="0"/>
-              </a:rPr>
-              <a:t>"click"</a:t>
-            </a:r>
-            <a:r>
-              <a:rPr lang="en-US" altLang="ko-KR" b="0" dirty="0">
-                <a:solidFill>
-                  <a:srgbClr val="D4D4D4"/>
-                </a:solidFill>
-                <a:effectLst/>
-                <a:latin typeface="Consolas" panose="020B0609020204030204" pitchFamily="49" charset="0"/>
-              </a:rPr>
-              <a:t>, </a:t>
-            </a:r>
-            <a:r>
-              <a:rPr lang="en-US" altLang="ko-KR" b="0" dirty="0">
-                <a:solidFill>
-                  <a:srgbClr val="569CD6"/>
-                </a:solidFill>
-                <a:effectLst/>
-                <a:latin typeface="Consolas" panose="020B0609020204030204" pitchFamily="49" charset="0"/>
-              </a:rPr>
-              <a:t>function</a:t>
-            </a:r>
-            <a:r>
-              <a:rPr lang="en-US" altLang="ko-KR" b="0" dirty="0">
-                <a:solidFill>
-                  <a:srgbClr val="D4D4D4"/>
-                </a:solidFill>
-                <a:effectLst/>
-                <a:latin typeface="Consolas" panose="020B0609020204030204" pitchFamily="49" charset="0"/>
-              </a:rPr>
-              <a:t>() {</a:t>
-            </a:r>
-          </a:p>
-          <a:p>
-            <a:r>
-              <a:rPr lang="en-US" altLang="ko-KR" b="0" dirty="0">
-                <a:solidFill>
-                  <a:srgbClr val="D4D4D4"/>
-                </a:solidFill>
-                <a:effectLst/>
-                <a:latin typeface="Consolas" panose="020B0609020204030204" pitchFamily="49" charset="0"/>
-              </a:rPr>
-              <a:t>    </a:t>
-            </a:r>
-            <a:r>
-              <a:rPr lang="en-US" altLang="ko-KR" b="0" dirty="0">
-                <a:solidFill>
-                  <a:srgbClr val="DCDCAA"/>
-                </a:solidFill>
-                <a:effectLst/>
-                <a:latin typeface="Consolas" panose="020B0609020204030204" pitchFamily="49" charset="0"/>
-              </a:rPr>
-              <a:t>alert</a:t>
-            </a:r>
-            <a:r>
-              <a:rPr lang="en-US" altLang="ko-KR" b="0" dirty="0">
-                <a:solidFill>
-                  <a:srgbClr val="D4D4D4"/>
-                </a:solidFill>
-                <a:effectLst/>
-                <a:latin typeface="Consolas" panose="020B0609020204030204" pitchFamily="49" charset="0"/>
-              </a:rPr>
-              <a:t>(</a:t>
-            </a:r>
-            <a:r>
-              <a:rPr lang="en-US" altLang="ko-KR" b="0" dirty="0">
-                <a:solidFill>
-                  <a:srgbClr val="CE9178"/>
-                </a:solidFill>
-                <a:effectLst/>
-                <a:latin typeface="Consolas" panose="020B0609020204030204" pitchFamily="49" charset="0"/>
-              </a:rPr>
-              <a:t>"click"</a:t>
-            </a:r>
-            <a:r>
-              <a:rPr lang="en-US" altLang="ko-KR" b="0" dirty="0">
-                <a:solidFill>
-                  <a:srgbClr val="D4D4D4"/>
-                </a:solidFill>
-                <a:effectLst/>
-                <a:latin typeface="Consolas" panose="020B0609020204030204" pitchFamily="49" charset="0"/>
-              </a:rPr>
-              <a:t>);</a:t>
-            </a:r>
-          </a:p>
-          <a:p>
-            <a:r>
-              <a:rPr lang="en-US" altLang="ko-KR" b="0" dirty="0">
-                <a:solidFill>
-                  <a:srgbClr val="D4D4D4"/>
-                </a:solidFill>
-                <a:effectLst/>
-                <a:latin typeface="Consolas" panose="020B0609020204030204" pitchFamily="49" charset="0"/>
-              </a:rPr>
-              <a:t>})</a:t>
-            </a:r>
+              <a:rPr lang="ko-KR" altLang="en-US" dirty="0">
+                <a:latin typeface="+mn-lt"/>
+                <a:ea typeface="Kim jung chul Gothic Regular" panose="020B0503000000000000" pitchFamily="34" charset="-127"/>
+              </a:rPr>
+              <a:t>브라우저를 닫을 때</a:t>
+            </a:r>
+            <a:endParaRPr lang="en-US" altLang="ko-KR" dirty="0">
+              <a:latin typeface="+mn-lt"/>
+              <a:ea typeface="Kim jung chul Gothic Regular" panose="020B0503000000000000" pitchFamily="34" charset="-127"/>
+            </a:endParaRPr>
+          </a:p>
+          <a:p>
+            <a:r>
+              <a:rPr lang="en-US" altLang="ko-KR" dirty="0">
+                <a:latin typeface="+mn-lt"/>
+                <a:ea typeface="Kim jung chul Gothic Regular" panose="020B0503000000000000" pitchFamily="34" charset="-127"/>
+              </a:rPr>
+              <a:t>Change : </a:t>
+            </a:r>
+            <a:r>
+              <a:rPr lang="ko-KR" altLang="en-US" dirty="0">
+                <a:latin typeface="+mn-lt"/>
+                <a:ea typeface="Kim jung chul Gothic Regular" panose="020B0503000000000000" pitchFamily="34" charset="-127"/>
+              </a:rPr>
+              <a:t>폼 필드의 상태가 변경 되었을 때</a:t>
+            </a:r>
+            <a:endParaRPr lang="en-US" altLang="ko-KR" dirty="0">
+              <a:latin typeface="+mn-lt"/>
+              <a:ea typeface="Kim jung chul Gothic Regular" panose="020B0503000000000000" pitchFamily="34" charset="-127"/>
+            </a:endParaRPr>
           </a:p>
         </p:txBody>
       </p:sp>
     </p:spTree>
     <p:extLst>
       <p:ext uri="{BB962C8B-B14F-4D97-AF65-F5344CB8AC3E}">
-        <p14:creationId xmlns:p14="http://schemas.microsoft.com/office/powerpoint/2010/main" val="2313246021"/>
+        <p14:creationId xmlns:p14="http://schemas.microsoft.com/office/powerpoint/2010/main" val="1759448051"/>
       </p:ext>
     </p:extLst>
   </p:cSld>
@@ -31823,10 +31951,109 @@
       </p:grpSpPr>
       <p:sp>
         <p:nvSpPr>
+          <p:cNvPr id="13" name="내용 개체 틀 2">
+            <a:extLst>
+              <a:ext uri="{FF2B5EF4-FFF2-40B4-BE49-F238E27FC236}">
+                <a16:creationId xmlns:a16="http://schemas.microsoft.com/office/drawing/2014/main" id="{847FD532-7F61-A001-537F-B970BD821AF3}"/>
+              </a:ext>
+            </a:extLst>
+          </p:cNvPr>
+          <p:cNvSpPr>
+            <a:spLocks noGrp="1"/>
+          </p:cNvSpPr>
+          <p:nvPr>
+            <p:ph idx="1"/>
+          </p:nvPr>
+        </p:nvSpPr>
+        <p:spPr>
+          <a:xfrm>
+            <a:off x="510988" y="1328391"/>
+            <a:ext cx="11260802" cy="5328442"/>
+          </a:xfrm>
+        </p:spPr>
+        <p:txBody>
+          <a:bodyPr>
+            <a:normAutofit/>
+          </a:bodyPr>
+          <a:lstStyle/>
+          <a:p>
+            <a:endParaRPr lang="en-US" altLang="ko-KR" dirty="0"/>
+          </a:p>
+          <a:p>
+            <a:pPr marL="0" indent="0">
+              <a:buNone/>
+            </a:pPr>
+            <a:endParaRPr lang="en-US" altLang="ko-KR" dirty="0"/>
+          </a:p>
+          <a:p>
+            <a:endParaRPr lang="en-US" altLang="ko-KR" dirty="0"/>
+          </a:p>
+        </p:txBody>
+      </p:sp>
+      <p:sp>
+        <p:nvSpPr>
+          <p:cNvPr id="4" name="날짜 개체 틀 3">
+            <a:extLst>
+              <a:ext uri="{FF2B5EF4-FFF2-40B4-BE49-F238E27FC236}">
+                <a16:creationId xmlns:a16="http://schemas.microsoft.com/office/drawing/2014/main" id="{A695DDE5-0A39-A366-4CFE-A283911999CD}"/>
+              </a:ext>
+            </a:extLst>
+          </p:cNvPr>
+          <p:cNvSpPr>
+            <a:spLocks noGrp="1"/>
+          </p:cNvSpPr>
+          <p:nvPr>
+            <p:ph type="dt" sz="half" idx="10"/>
+          </p:nvPr>
+        </p:nvSpPr>
+        <p:spPr/>
+        <p:txBody>
+          <a:bodyPr/>
+          <a:lstStyle/>
+          <a:p>
+            <a:fld id="{0F78D9C4-20C1-4B15-A116-16DC77AD9A1E}" type="datetime1">
+              <a:rPr lang="ko-KR" altLang="en-US" smtClean="0"/>
+              <a:t>2024-06-05</a:t>
+            </a:fld>
+            <a:endParaRPr lang="ko-KR" altLang="en-US"/>
+          </a:p>
+        </p:txBody>
+      </p:sp>
+      <p:sp>
+        <p:nvSpPr>
+          <p:cNvPr id="5" name="슬라이드 번호 개체 틀 4">
+            <a:extLst>
+              <a:ext uri="{FF2B5EF4-FFF2-40B4-BE49-F238E27FC236}">
+                <a16:creationId xmlns:a16="http://schemas.microsoft.com/office/drawing/2014/main" id="{5E040F43-60A7-C50D-1F5B-F984054F2D7C}"/>
+              </a:ext>
+            </a:extLst>
+          </p:cNvPr>
+          <p:cNvSpPr>
+            <a:spLocks noGrp="1"/>
+          </p:cNvSpPr>
+          <p:nvPr>
+            <p:ph type="sldNum" sz="quarter" idx="12"/>
+          </p:nvPr>
+        </p:nvSpPr>
+        <p:spPr/>
+        <p:txBody>
+          <a:bodyPr/>
+          <a:lstStyle/>
+          <a:p>
+            <a:fld id="{083A2CE0-18CD-4102-B738-4ACFF9E68BA4}" type="slidenum">
+              <a:rPr lang="ko-KR" altLang="en-US" smtClean="0"/>
+              <a:t>53</a:t>
+            </a:fld>
+            <a:endParaRPr lang="ko-KR" altLang="en-US"/>
+          </a:p>
+        </p:txBody>
+      </p:sp>
+      <p:sp>
+        <p:nvSpPr>
           <p:cNvPr id="2" name="제목 1">
             <a:extLst>
               <a:ext uri="{FF2B5EF4-FFF2-40B4-BE49-F238E27FC236}">
-                <a16:creationId xmlns:a16="http://schemas.microsoft.com/office/drawing/2014/main" id="{403FE426-FC8B-4845-9EDB-D82F8D6DA06C}"/>
+                <a16:creationId xmlns:a16="http://schemas.microsoft.com/office/drawing/2014/main" id="{5FAC57F5-99D7-9C46-B6C1-D16224151FE9}"/>
               </a:ext>
             </a:extLst>
           </p:cNvPr>
@@ -31842,37 +32069,39 @@
           <a:bodyPr/>
           <a:lstStyle/>
           <a:p>
-            <a:pPr algn="ctr"/>
-            <a:r>
-              <a:rPr lang="en-US" altLang="ko-KR" dirty="0" err="1">
-                <a:solidFill>
-                  <a:srgbClr val="00B050"/>
-                </a:solidFill>
-                <a:ea typeface="Kim jung chul Gothic Bold" panose="020B0803000000000000" pitchFamily="50" charset="-127"/>
-              </a:rPr>
-              <a:t>addEventListener</a:t>
+            <a:r>
+              <a:rPr lang="ko-KR" altLang="en-US" dirty="0">
+                <a:solidFill>
+                  <a:srgbClr val="6EC173"/>
+                </a:solidFill>
+              </a:rPr>
+              <a:t>실습</a:t>
             </a:r>
             <a:r>
               <a:rPr lang="en-US" altLang="ko-KR" dirty="0">
-                <a:ea typeface="Kim jung chul Gothic Bold" panose="020B0803000000000000" pitchFamily="50" charset="-127"/>
-              </a:rPr>
+                <a:solidFill>
+                  <a:srgbClr val="6EC173"/>
+                </a:solidFill>
+              </a:rPr>
+              <a:t>.  </a:t>
+            </a:r>
+            <a:r>
+              <a:rPr lang="en-US" altLang="ko-KR" dirty="0"/>
               <a:t> </a:t>
             </a:r>
             <a:r>
-              <a:rPr lang="ko-KR" altLang="en-US" dirty="0">
-                <a:ea typeface="Kim jung chul Gothic Bold" panose="020B0803000000000000" pitchFamily="50" charset="-127"/>
-              </a:rPr>
-              <a:t>이벤트의 종류</a:t>
-            </a:r>
-          </a:p>
-        </p:txBody>
-      </p:sp>
-      <p:sp>
-        <p:nvSpPr>
-          <p:cNvPr id="6" name="내용 개체 틀 2">
+              <a:rPr lang="ko-KR" altLang="en-US" dirty="0"/>
+              <a:t>이벤트 다루기</a:t>
+            </a:r>
+          </a:p>
+        </p:txBody>
+      </p:sp>
+      <p:sp>
+        <p:nvSpPr>
+          <p:cNvPr id="6" name="내용 개체 틀 1">
             <a:extLst>
               <a:ext uri="{FF2B5EF4-FFF2-40B4-BE49-F238E27FC236}">
-                <a16:creationId xmlns:a16="http://schemas.microsoft.com/office/drawing/2014/main" id="{99921601-FACF-7B3E-2F7E-3C6CB9839A59}"/>
+                <a16:creationId xmlns:a16="http://schemas.microsoft.com/office/drawing/2014/main" id="{70C2BA37-BE91-39C4-AC08-0E8A1052E2F7}"/>
               </a:ext>
             </a:extLst>
           </p:cNvPr>
@@ -31883,8 +32112,8 @@
         </p:nvSpPr>
         <p:spPr>
           <a:xfrm>
-            <a:off x="588519" y="1383190"/>
-            <a:ext cx="10830017" cy="4869911"/>
+            <a:off x="838200" y="1825625"/>
+            <a:ext cx="10515600" cy="4351338"/>
           </a:xfrm>
           <a:prstGeom prst="rect">
             <a:avLst/>
@@ -31892,12 +32121,12 @@
         </p:spPr>
         <p:txBody>
           <a:bodyPr vert="horz" lIns="91440" tIns="45720" rIns="91440" bIns="45720" rtlCol="0">
-            <a:normAutofit fontScale="92500" lnSpcReduction="10000"/>
+            <a:normAutofit/>
           </a:bodyPr>
           <a:lstStyle>
             <a:lvl1pPr marL="228600" indent="-228600" algn="l" defTabSz="914400" rtl="0" eaLnBrk="1" latinLnBrk="1" hangingPunct="1">
               <a:lnSpc>
-                <a:spcPct val="150000"/>
+                <a:spcPct val="90000"/>
               </a:lnSpc>
               <a:spcBef>
                 <a:spcPts val="1000"/>
@@ -31908,14 +32137,14 @@
                 <a:solidFill>
                   <a:schemeClr val="tx1"/>
                 </a:solidFill>
-                <a:latin typeface="강한공군체 Medium" panose="020B0600000101010101" pitchFamily="50" charset="-127"/>
-                <a:ea typeface="강한공군체 Medium" panose="020B0600000101010101" pitchFamily="50" charset="-127"/>
+                <a:latin typeface="+mn-lt"/>
+                <a:ea typeface="+mn-ea"/>
                 <a:cs typeface="+mn-cs"/>
               </a:defRPr>
             </a:lvl1pPr>
             <a:lvl2pPr marL="685800" indent="-228600" algn="l" defTabSz="914400" rtl="0" eaLnBrk="1" latinLnBrk="1" hangingPunct="1">
               <a:lnSpc>
-                <a:spcPct val="150000"/>
+                <a:spcPct val="90000"/>
               </a:lnSpc>
               <a:spcBef>
                 <a:spcPts val="500"/>
@@ -31926,14 +32155,14 @@
                 <a:solidFill>
                   <a:schemeClr val="tx1"/>
                 </a:solidFill>
-                <a:latin typeface="강한공군체 Medium" panose="020B0600000101010101" pitchFamily="50" charset="-127"/>
-                <a:ea typeface="강한공군체 Medium" panose="020B0600000101010101" pitchFamily="50" charset="-127"/>
+                <a:latin typeface="+mn-lt"/>
+                <a:ea typeface="+mn-ea"/>
                 <a:cs typeface="+mn-cs"/>
               </a:defRPr>
             </a:lvl2pPr>
             <a:lvl3pPr marL="1143000" indent="-228600" algn="l" defTabSz="914400" rtl="0" eaLnBrk="1" latinLnBrk="1" hangingPunct="1">
               <a:lnSpc>
-                <a:spcPct val="150000"/>
+                <a:spcPct val="90000"/>
               </a:lnSpc>
               <a:spcBef>
                 <a:spcPts val="500"/>
@@ -31944,14 +32173,14 @@
                 <a:solidFill>
                   <a:schemeClr val="tx1"/>
                 </a:solidFill>
-                <a:latin typeface="강한공군체 Medium" panose="020B0600000101010101" pitchFamily="50" charset="-127"/>
-                <a:ea typeface="강한공군체 Medium" panose="020B0600000101010101" pitchFamily="50" charset="-127"/>
+                <a:latin typeface="+mn-lt"/>
+                <a:ea typeface="+mn-ea"/>
                 <a:cs typeface="+mn-cs"/>
               </a:defRPr>
             </a:lvl3pPr>
             <a:lvl4pPr marL="1600200" indent="-228600" algn="l" defTabSz="914400" rtl="0" eaLnBrk="1" latinLnBrk="1" hangingPunct="1">
               <a:lnSpc>
-                <a:spcPct val="150000"/>
+                <a:spcPct val="90000"/>
               </a:lnSpc>
               <a:spcBef>
                 <a:spcPts val="500"/>
@@ -31962,14 +32191,14 @@
                 <a:solidFill>
                   <a:schemeClr val="tx1"/>
                 </a:solidFill>
-                <a:latin typeface="강한공군체 Medium" panose="020B0600000101010101" pitchFamily="50" charset="-127"/>
-                <a:ea typeface="강한공군체 Medium" panose="020B0600000101010101" pitchFamily="50" charset="-127"/>
+                <a:latin typeface="+mn-lt"/>
+                <a:ea typeface="+mn-ea"/>
                 <a:cs typeface="+mn-cs"/>
               </a:defRPr>
             </a:lvl4pPr>
             <a:lvl5pPr marL="2057400" indent="-228600" algn="l" defTabSz="914400" rtl="0" eaLnBrk="1" latinLnBrk="1" hangingPunct="1">
               <a:lnSpc>
-                <a:spcPct val="150000"/>
+                <a:spcPct val="90000"/>
               </a:lnSpc>
               <a:spcBef>
                 <a:spcPts val="500"/>
@@ -31980,8 +32209,8 @@
                 <a:solidFill>
                   <a:schemeClr val="tx1"/>
                 </a:solidFill>
-                <a:latin typeface="강한공군체 Medium" panose="020B0600000101010101" pitchFamily="50" charset="-127"/>
-                <a:ea typeface="강한공군체 Medium" panose="020B0600000101010101" pitchFamily="50" charset="-127"/>
+                <a:latin typeface="+mn-lt"/>
+                <a:ea typeface="+mn-ea"/>
                 <a:cs typeface="+mn-cs"/>
               </a:defRPr>
             </a:lvl5pPr>
@@ -32059,221 +32288,270 @@
             </a:lvl9pPr>
           </a:lstStyle>
           <a:p>
-            <a:r>
+            <a:pPr marL="457200" lvl="1" indent="0">
+              <a:buFont typeface="Arial" panose="020B0604020202020204" pitchFamily="34" charset="0"/>
+              <a:buNone/>
+            </a:pPr>
+            <a:endParaRPr lang="en-US" altLang="ko-KR" dirty="0">
+              <a:solidFill>
+                <a:srgbClr val="212529"/>
+              </a:solidFill>
+              <a:latin typeface="+mn-ea"/>
+            </a:endParaRPr>
+          </a:p>
+          <a:p>
+            <a:pPr marL="457200" lvl="1" indent="0">
+              <a:buFont typeface="Arial" panose="020B0604020202020204" pitchFamily="34" charset="0"/>
+              <a:buNone/>
+            </a:pPr>
+            <a:endParaRPr lang="en-US" altLang="ko-KR" dirty="0">
+              <a:solidFill>
+                <a:srgbClr val="212529"/>
+              </a:solidFill>
+              <a:latin typeface="+mn-ea"/>
+            </a:endParaRPr>
+          </a:p>
+          <a:p>
+            <a:r>
+              <a:rPr lang="en-US" altLang="ko-KR" b="1" dirty="0">
+                <a:solidFill>
+                  <a:srgbClr val="212529"/>
+                </a:solidFill>
+                <a:latin typeface="+mn-ea"/>
+              </a:rPr>
+              <a:t>[</a:t>
+            </a:r>
+            <a:r>
+              <a:rPr lang="ko-KR" altLang="en-US" b="1" dirty="0" err="1">
+                <a:solidFill>
+                  <a:srgbClr val="212529"/>
+                </a:solidFill>
+                <a:latin typeface="+mn-ea"/>
+              </a:rPr>
+              <a:t>코딩온</a:t>
+            </a:r>
+            <a:r>
+              <a:rPr lang="en-US" altLang="ko-KR" b="1" dirty="0">
+                <a:solidFill>
+                  <a:srgbClr val="212529"/>
+                </a:solidFill>
+                <a:latin typeface="+mn-ea"/>
+              </a:rPr>
+              <a:t>] HTML, CSS, JS </a:t>
+            </a:r>
+            <a:r>
+              <a:rPr lang="ko-KR" altLang="en-US" b="1" dirty="0">
+                <a:solidFill>
+                  <a:srgbClr val="212529"/>
+                </a:solidFill>
+                <a:latin typeface="+mn-ea"/>
+              </a:rPr>
+              <a:t>실습</a:t>
+            </a:r>
+            <a:r>
+              <a:rPr lang="en-US" altLang="ko-KR" b="1" dirty="0">
+                <a:solidFill>
+                  <a:srgbClr val="212529"/>
+                </a:solidFill>
+                <a:latin typeface="+mn-ea"/>
+              </a:rPr>
+              <a:t> </a:t>
+            </a:r>
+            <a:r>
+              <a:rPr lang="ko-KR" altLang="en-US" dirty="0">
+                <a:solidFill>
+                  <a:srgbClr val="212529"/>
+                </a:solidFill>
+                <a:latin typeface="+mn-ea"/>
+              </a:rPr>
+              <a:t>강의 클릭</a:t>
+            </a:r>
+            <a:br>
               <a:rPr lang="en-US" altLang="ko-KR" dirty="0">
-                <a:latin typeface="+mn-lt"/>
-                <a:ea typeface="Kim jung chul Gothic Regular" panose="020B0503000000000000" pitchFamily="34" charset="-127"/>
-              </a:rPr>
-              <a:t>Click :  </a:t>
-            </a:r>
-            <a:r>
-              <a:rPr lang="ko-KR" altLang="en-US" dirty="0">
-                <a:latin typeface="+mn-lt"/>
-                <a:ea typeface="Kim jung chul Gothic Regular" panose="020B0503000000000000" pitchFamily="34" charset="-127"/>
-              </a:rPr>
-              <a:t>클릭</a:t>
-            </a:r>
+                <a:solidFill>
+                  <a:srgbClr val="212529"/>
+                </a:solidFill>
+                <a:latin typeface="+mn-ea"/>
+              </a:rPr>
+            </a:br>
             <a:endParaRPr lang="en-US" altLang="ko-KR" dirty="0">
-              <a:latin typeface="+mn-lt"/>
-              <a:ea typeface="Kim jung chul Gothic Regular" panose="020B0503000000000000" pitchFamily="34" charset="-127"/>
+              <a:solidFill>
+                <a:srgbClr val="212529"/>
+              </a:solidFill>
+              <a:latin typeface="+mn-ea"/>
             </a:endParaRPr>
           </a:p>
           <a:p>
-            <a:r>
-              <a:rPr lang="en-US" altLang="ko-KR" dirty="0">
-                <a:latin typeface="+mn-lt"/>
-                <a:ea typeface="Kim jung chul Gothic Regular" panose="020B0503000000000000" pitchFamily="34" charset="-127"/>
-              </a:rPr>
-              <a:t>Mouse</a:t>
-            </a:r>
-            <a:r>
-              <a:rPr lang="ko-KR" altLang="en-US" dirty="0">
-                <a:latin typeface="+mn-lt"/>
-                <a:ea typeface="Kim jung chul Gothic Regular" panose="020B0503000000000000" pitchFamily="34" charset="-127"/>
-              </a:rPr>
-              <a:t> 계열</a:t>
-            </a:r>
-            <a:endParaRPr lang="en-US" altLang="ko-KR" dirty="0">
-              <a:latin typeface="+mn-lt"/>
-              <a:ea typeface="Kim jung chul Gothic Regular" panose="020B0503000000000000" pitchFamily="34" charset="-127"/>
+            <a:pPr lvl="1"/>
+            <a:r>
+              <a:rPr lang="ko-KR" altLang="en-US" sz="2800" b="1" dirty="0">
+                <a:solidFill>
+                  <a:srgbClr val="212529"/>
+                </a:solidFill>
+                <a:latin typeface="+mn-ea"/>
+              </a:rPr>
+              <a:t>➡ </a:t>
+            </a:r>
+            <a:r>
+              <a:rPr lang="en-US" altLang="ko-KR" sz="2800" b="1" dirty="0">
+                <a:solidFill>
+                  <a:srgbClr val="212529"/>
+                </a:solidFill>
+                <a:latin typeface="+mn-ea"/>
+              </a:rPr>
+              <a:t>[</a:t>
+            </a:r>
+            <a:r>
+              <a:rPr lang="en-US" altLang="ko-KR" sz="2800" b="1" dirty="0" err="1">
+                <a:solidFill>
+                  <a:srgbClr val="212529"/>
+                </a:solidFill>
+                <a:latin typeface="+mn-ea"/>
+              </a:rPr>
+              <a:t>Javascript</a:t>
+            </a:r>
+            <a:r>
+              <a:rPr lang="en-US" altLang="ko-KR" sz="2800" b="1" dirty="0">
+                <a:solidFill>
+                  <a:srgbClr val="212529"/>
+                </a:solidFill>
+                <a:latin typeface="+mn-ea"/>
+              </a:rPr>
+              <a:t> DOM </a:t>
+            </a:r>
+            <a:r>
+              <a:rPr lang="ko-KR" altLang="en-US" sz="2800" b="1" dirty="0">
+                <a:solidFill>
+                  <a:srgbClr val="212529"/>
+                </a:solidFill>
+                <a:latin typeface="+mn-ea"/>
+              </a:rPr>
+              <a:t>실습</a:t>
+            </a:r>
+            <a:r>
+              <a:rPr lang="en-US" altLang="ko-KR" sz="2800" b="1" dirty="0">
+                <a:solidFill>
+                  <a:srgbClr val="212529"/>
+                </a:solidFill>
+                <a:latin typeface="+mn-ea"/>
+              </a:rPr>
+              <a:t>(2)]</a:t>
+            </a:r>
+            <a:r>
+              <a:rPr lang="en-US" altLang="ko-KR" sz="2800" dirty="0">
+                <a:solidFill>
+                  <a:srgbClr val="212529"/>
+                </a:solidFill>
+                <a:latin typeface="+mn-ea"/>
+              </a:rPr>
+              <a:t> </a:t>
+            </a:r>
+            <a:r>
+              <a:rPr lang="ko-KR" altLang="en-US" sz="2800" dirty="0">
+                <a:solidFill>
+                  <a:srgbClr val="212529"/>
+                </a:solidFill>
+                <a:latin typeface="+mn-ea"/>
+              </a:rPr>
+              <a:t>커리큘럼 클릭</a:t>
+            </a:r>
+            <a:endParaRPr lang="en-US" altLang="ko-KR" sz="2800" dirty="0">
+              <a:solidFill>
+                <a:srgbClr val="212529"/>
+              </a:solidFill>
+              <a:latin typeface="+mn-ea"/>
             </a:endParaRPr>
           </a:p>
           <a:p>
             <a:pPr lvl="1"/>
             <a:r>
-              <a:rPr lang="en-US" altLang="ko-KR" dirty="0">
-                <a:latin typeface="+mn-lt"/>
-                <a:ea typeface="Kim jung chul Gothic Regular" panose="020B0503000000000000" pitchFamily="34" charset="-127"/>
-              </a:rPr>
-              <a:t>Mouseover : </a:t>
-            </a:r>
-            <a:r>
-              <a:rPr lang="ko-KR" altLang="en-US" dirty="0">
-                <a:latin typeface="+mn-lt"/>
-                <a:ea typeface="Kim jung chul Gothic Regular" panose="020B0503000000000000" pitchFamily="34" charset="-127"/>
-              </a:rPr>
-              <a:t>요소에 커서를 올렸을 때</a:t>
-            </a:r>
-            <a:endParaRPr lang="en-US" altLang="ko-KR" dirty="0">
-              <a:latin typeface="+mn-lt"/>
-              <a:ea typeface="Kim jung chul Gothic Regular" panose="020B0503000000000000" pitchFamily="34" charset="-127"/>
-            </a:endParaRPr>
-          </a:p>
-          <a:p>
-            <a:pPr lvl="1"/>
-            <a:r>
-              <a:rPr lang="en-US" altLang="ko-KR" dirty="0" err="1">
-                <a:latin typeface="+mn-lt"/>
-                <a:ea typeface="Kim jung chul Gothic Regular" panose="020B0503000000000000" pitchFamily="34" charset="-127"/>
-              </a:rPr>
-              <a:t>Mouseout</a:t>
-            </a:r>
-            <a:r>
-              <a:rPr lang="ko-KR" altLang="en-US" dirty="0">
-                <a:latin typeface="+mn-lt"/>
-                <a:ea typeface="Kim jung chul Gothic Regular" panose="020B0503000000000000" pitchFamily="34" charset="-127"/>
+              <a:rPr lang="ko-KR" altLang="en-US" sz="2800" b="1" dirty="0">
+                <a:solidFill>
+                  <a:srgbClr val="212529"/>
+                </a:solidFill>
+                <a:latin typeface="+mn-ea"/>
+              </a:rPr>
+              <a:t>➡ </a:t>
+            </a:r>
+            <a:r>
+              <a:rPr lang="en-US" altLang="ko-KR" sz="2800" b="1" dirty="0">
+                <a:solidFill>
+                  <a:schemeClr val="accent1"/>
+                </a:solidFill>
+                <a:latin typeface="+mn-ea"/>
+              </a:rPr>
+              <a:t>[</a:t>
+            </a:r>
+            <a:r>
+              <a:rPr lang="ko-KR" altLang="en-US" sz="2800" b="1" dirty="0" err="1">
+                <a:solidFill>
+                  <a:schemeClr val="accent1"/>
+                </a:solidFill>
+                <a:latin typeface="+mn-ea"/>
+              </a:rPr>
+              <a:t>실습문제</a:t>
+            </a:r>
+            <a:r>
+              <a:rPr lang="en-US" altLang="ko-KR" sz="2800" b="1" dirty="0">
+                <a:solidFill>
+                  <a:schemeClr val="accent1"/>
+                </a:solidFill>
+                <a:latin typeface="+mn-ea"/>
+              </a:rPr>
+              <a:t>1. </a:t>
+            </a:r>
+            <a:r>
+              <a:rPr lang="ko-KR" altLang="en-US" sz="2800" b="1" dirty="0">
+                <a:solidFill>
+                  <a:schemeClr val="accent1"/>
+                </a:solidFill>
+                <a:latin typeface="+mn-ea"/>
+              </a:rPr>
+              <a:t>랜덤 색상 </a:t>
+            </a:r>
+            <a:r>
+              <a:rPr lang="ko-KR" altLang="en-US" sz="2800" b="1" dirty="0" err="1">
+                <a:solidFill>
+                  <a:schemeClr val="accent1"/>
+                </a:solidFill>
+                <a:latin typeface="+mn-ea"/>
+              </a:rPr>
+              <a:t>생성기</a:t>
+            </a:r>
+            <a:r>
+              <a:rPr lang="en-US" altLang="ko-KR" sz="2800" b="1" dirty="0">
+                <a:solidFill>
+                  <a:schemeClr val="accent1"/>
+                </a:solidFill>
+                <a:latin typeface="+mn-ea"/>
+              </a:rPr>
+              <a:t>]</a:t>
+            </a:r>
+            <a:r>
+              <a:rPr lang="en-US" altLang="ko-KR" sz="2800" dirty="0">
+                <a:solidFill>
+                  <a:schemeClr val="accent1"/>
+                </a:solidFill>
+                <a:latin typeface="+mn-ea"/>
               </a:rPr>
               <a:t> </a:t>
             </a:r>
             <a:r>
-              <a:rPr lang="en-US" altLang="ko-KR" dirty="0">
-                <a:latin typeface="+mn-lt"/>
-                <a:ea typeface="Kim jung chul Gothic Regular" panose="020B0503000000000000" pitchFamily="34" charset="-127"/>
-              </a:rPr>
-              <a:t>:</a:t>
-            </a:r>
-            <a:r>
-              <a:rPr lang="ko-KR" altLang="en-US" dirty="0">
-                <a:latin typeface="+mn-lt"/>
-                <a:ea typeface="Kim jung chul Gothic Regular" panose="020B0503000000000000" pitchFamily="34" charset="-127"/>
-              </a:rPr>
-              <a:t> 마우스가 요소를 벗어날 때</a:t>
-            </a:r>
-            <a:endParaRPr lang="en-US" altLang="ko-KR" dirty="0">
-              <a:latin typeface="+mn-lt"/>
-              <a:ea typeface="Kim jung chul Gothic Regular" panose="020B0503000000000000" pitchFamily="34" charset="-127"/>
-            </a:endParaRPr>
-          </a:p>
-          <a:p>
-            <a:pPr lvl="1"/>
-            <a:r>
-              <a:rPr lang="en-US" altLang="ko-KR" dirty="0" err="1">
-                <a:latin typeface="+mn-lt"/>
-                <a:ea typeface="Kim jung chul Gothic Regular" panose="020B0503000000000000" pitchFamily="34" charset="-127"/>
-              </a:rPr>
-              <a:t>Mousedown</a:t>
-            </a:r>
-            <a:r>
-              <a:rPr lang="en-US" altLang="ko-KR" dirty="0">
-                <a:latin typeface="+mn-lt"/>
-                <a:ea typeface="Kim jung chul Gothic Regular" panose="020B0503000000000000" pitchFamily="34" charset="-127"/>
-              </a:rPr>
-              <a:t> : </a:t>
-            </a:r>
-            <a:r>
-              <a:rPr lang="ko-KR" altLang="en-US" dirty="0">
-                <a:latin typeface="+mn-lt"/>
-                <a:ea typeface="Kim jung chul Gothic Regular" panose="020B0503000000000000" pitchFamily="34" charset="-127"/>
-              </a:rPr>
-              <a:t>마우스 버튼을 누르고 있는 상태</a:t>
-            </a:r>
-            <a:endParaRPr lang="en-US" altLang="ko-KR" dirty="0">
-              <a:latin typeface="+mn-lt"/>
-              <a:ea typeface="Kim jung chul Gothic Regular" panose="020B0503000000000000" pitchFamily="34" charset="-127"/>
-            </a:endParaRPr>
-          </a:p>
-          <a:p>
-            <a:pPr lvl="1"/>
-            <a:r>
-              <a:rPr lang="en-US" altLang="ko-KR" dirty="0" err="1">
-                <a:latin typeface="+mn-lt"/>
-                <a:ea typeface="Kim jung chul Gothic Regular" panose="020B0503000000000000" pitchFamily="34" charset="-127"/>
-              </a:rPr>
-              <a:t>Mouseup</a:t>
-            </a:r>
-            <a:r>
-              <a:rPr lang="en-US" altLang="ko-KR" dirty="0">
-                <a:latin typeface="+mn-lt"/>
-                <a:ea typeface="Kim jung chul Gothic Regular" panose="020B0503000000000000" pitchFamily="34" charset="-127"/>
-              </a:rPr>
-              <a:t> : </a:t>
-            </a:r>
-            <a:r>
-              <a:rPr lang="ko-KR" altLang="en-US" dirty="0">
-                <a:latin typeface="+mn-lt"/>
-                <a:ea typeface="Kim jung chul Gothic Regular" panose="020B0503000000000000" pitchFamily="34" charset="-127"/>
-              </a:rPr>
-              <a:t>마우스 버튼을 떼는 순간</a:t>
-            </a:r>
-            <a:endParaRPr lang="en-US" altLang="ko-KR" dirty="0">
-              <a:latin typeface="+mn-lt"/>
-              <a:ea typeface="Kim jung chul Gothic Regular" panose="020B0503000000000000" pitchFamily="34" charset="-127"/>
-            </a:endParaRPr>
-          </a:p>
-          <a:p>
-            <a:r>
-              <a:rPr lang="en-US" altLang="ko-KR" dirty="0">
-                <a:latin typeface="+mn-lt"/>
-                <a:ea typeface="Kim jung chul Gothic Regular" panose="020B0503000000000000" pitchFamily="34" charset="-127"/>
-              </a:rPr>
-              <a:t>Focus : </a:t>
-            </a:r>
-            <a:r>
-              <a:rPr lang="ko-KR" altLang="en-US" dirty="0">
-                <a:latin typeface="+mn-lt"/>
-                <a:ea typeface="Kim jung chul Gothic Regular" panose="020B0503000000000000" pitchFamily="34" charset="-127"/>
-              </a:rPr>
-              <a:t>포커스가 갔을 때</a:t>
-            </a:r>
-            <a:endParaRPr lang="en-US" altLang="ko-KR" dirty="0">
-              <a:latin typeface="+mn-lt"/>
-              <a:ea typeface="Kim jung chul Gothic Regular" panose="020B0503000000000000" pitchFamily="34" charset="-127"/>
-            </a:endParaRPr>
-          </a:p>
-          <a:p>
-            <a:r>
-              <a:rPr lang="en-US" altLang="ko-KR" dirty="0">
-                <a:latin typeface="+mn-lt"/>
-                <a:ea typeface="Kim jung chul Gothic Regular" panose="020B0503000000000000" pitchFamily="34" charset="-127"/>
-              </a:rPr>
-              <a:t>Blur : </a:t>
-            </a:r>
-            <a:r>
-              <a:rPr lang="ko-KR" altLang="en-US" dirty="0">
-                <a:latin typeface="+mn-lt"/>
-                <a:ea typeface="Kim jung chul Gothic Regular" panose="020B0503000000000000" pitchFamily="34" charset="-127"/>
-              </a:rPr>
-              <a:t>포커스가 벗어나는 순간</a:t>
-            </a:r>
-            <a:endParaRPr lang="en-US" altLang="ko-KR" dirty="0">
-              <a:latin typeface="+mn-lt"/>
-              <a:ea typeface="Kim jung chul Gothic Regular" panose="020B0503000000000000" pitchFamily="34" charset="-127"/>
-            </a:endParaRPr>
-          </a:p>
-          <a:p>
-            <a:endParaRPr lang="en-US" altLang="ko-KR" dirty="0">
-              <a:latin typeface="+mn-lt"/>
-              <a:ea typeface="Kim jung chul Gothic Regular" panose="020B0503000000000000" pitchFamily="34" charset="-127"/>
-            </a:endParaRPr>
-          </a:p>
-          <a:p>
-            <a:endParaRPr lang="en-US" altLang="ko-KR" dirty="0">
-              <a:latin typeface="+mn-lt"/>
-              <a:ea typeface="Kim jung chul Gothic Regular" panose="020B0503000000000000" pitchFamily="34" charset="-127"/>
-            </a:endParaRPr>
-          </a:p>
-          <a:p>
-            <a:endParaRPr lang="en-US" altLang="ko-KR" dirty="0">
-              <a:latin typeface="+mn-lt"/>
-              <a:ea typeface="Kim jung chul Gothic Regular" panose="020B0503000000000000" pitchFamily="34" charset="-127"/>
-            </a:endParaRPr>
+              <a:rPr lang="ko-KR" altLang="en-US" sz="2800" dirty="0">
+                <a:solidFill>
+                  <a:srgbClr val="212529"/>
+                </a:solidFill>
+                <a:latin typeface="+mn-ea"/>
+              </a:rPr>
+              <a:t> 진행</a:t>
+            </a:r>
           </a:p>
         </p:txBody>
       </p:sp>
     </p:spTree>
     <p:extLst>
       <p:ext uri="{BB962C8B-B14F-4D97-AF65-F5344CB8AC3E}">
-        <p14:creationId xmlns:p14="http://schemas.microsoft.com/office/powerpoint/2010/main" val="513312892"/>
+        <p14:creationId xmlns:p14="http://schemas.microsoft.com/office/powerpoint/2010/main" val="924632194"/>
       </p:ext>
     </p:extLst>
   </p:cSld>
@@ -32302,10 +32580,109 @@
       </p:grpSpPr>
       <p:sp>
         <p:nvSpPr>
+          <p:cNvPr id="13" name="내용 개체 틀 2">
+            <a:extLst>
+              <a:ext uri="{FF2B5EF4-FFF2-40B4-BE49-F238E27FC236}">
+                <a16:creationId xmlns:a16="http://schemas.microsoft.com/office/drawing/2014/main" id="{847FD532-7F61-A001-537F-B970BD821AF3}"/>
+              </a:ext>
+            </a:extLst>
+          </p:cNvPr>
+          <p:cNvSpPr>
+            <a:spLocks noGrp="1"/>
+          </p:cNvSpPr>
+          <p:nvPr>
+            <p:ph idx="1"/>
+          </p:nvPr>
+        </p:nvSpPr>
+        <p:spPr>
+          <a:xfrm>
+            <a:off x="510988" y="1328391"/>
+            <a:ext cx="11260802" cy="5328442"/>
+          </a:xfrm>
+        </p:spPr>
+        <p:txBody>
+          <a:bodyPr>
+            <a:normAutofit/>
+          </a:bodyPr>
+          <a:lstStyle/>
+          <a:p>
+            <a:endParaRPr lang="en-US" altLang="ko-KR" dirty="0"/>
+          </a:p>
+          <a:p>
+            <a:pPr marL="0" indent="0">
+              <a:buNone/>
+            </a:pPr>
+            <a:endParaRPr lang="en-US" altLang="ko-KR" dirty="0"/>
+          </a:p>
+          <a:p>
+            <a:endParaRPr lang="en-US" altLang="ko-KR" dirty="0"/>
+          </a:p>
+        </p:txBody>
+      </p:sp>
+      <p:sp>
+        <p:nvSpPr>
+          <p:cNvPr id="4" name="날짜 개체 틀 3">
+            <a:extLst>
+              <a:ext uri="{FF2B5EF4-FFF2-40B4-BE49-F238E27FC236}">
+                <a16:creationId xmlns:a16="http://schemas.microsoft.com/office/drawing/2014/main" id="{A695DDE5-0A39-A366-4CFE-A283911999CD}"/>
+              </a:ext>
+            </a:extLst>
+          </p:cNvPr>
+          <p:cNvSpPr>
+            <a:spLocks noGrp="1"/>
+          </p:cNvSpPr>
+          <p:nvPr>
+            <p:ph type="dt" sz="half" idx="10"/>
+          </p:nvPr>
+        </p:nvSpPr>
+        <p:spPr/>
+        <p:txBody>
+          <a:bodyPr/>
+          <a:lstStyle/>
+          <a:p>
+            <a:fld id="{0F78D9C4-20C1-4B15-A116-16DC77AD9A1E}" type="datetime1">
+              <a:rPr lang="ko-KR" altLang="en-US" smtClean="0"/>
+              <a:t>2024-06-05</a:t>
+            </a:fld>
+            <a:endParaRPr lang="ko-KR" altLang="en-US"/>
+          </a:p>
+        </p:txBody>
+      </p:sp>
+      <p:sp>
+        <p:nvSpPr>
+          <p:cNvPr id="5" name="슬라이드 번호 개체 틀 4">
+            <a:extLst>
+              <a:ext uri="{FF2B5EF4-FFF2-40B4-BE49-F238E27FC236}">
+                <a16:creationId xmlns:a16="http://schemas.microsoft.com/office/drawing/2014/main" id="{5E040F43-60A7-C50D-1F5B-F984054F2D7C}"/>
+              </a:ext>
+            </a:extLst>
+          </p:cNvPr>
+          <p:cNvSpPr>
+            <a:spLocks noGrp="1"/>
+          </p:cNvSpPr>
+          <p:nvPr>
+            <p:ph type="sldNum" sz="quarter" idx="12"/>
+          </p:nvPr>
+        </p:nvSpPr>
+        <p:spPr/>
+        <p:txBody>
+          <a:bodyPr/>
+          <a:lstStyle/>
+          <a:p>
+            <a:fld id="{083A2CE0-18CD-4102-B738-4ACFF9E68BA4}" type="slidenum">
+              <a:rPr lang="ko-KR" altLang="en-US" smtClean="0"/>
+              <a:t>54</a:t>
+            </a:fld>
+            <a:endParaRPr lang="ko-KR" altLang="en-US"/>
+          </a:p>
+        </p:txBody>
+      </p:sp>
+      <p:sp>
+        <p:nvSpPr>
           <p:cNvPr id="2" name="제목 1">
             <a:extLst>
               <a:ext uri="{FF2B5EF4-FFF2-40B4-BE49-F238E27FC236}">
-                <a16:creationId xmlns:a16="http://schemas.microsoft.com/office/drawing/2014/main" id="{403FE426-FC8B-4845-9EDB-D82F8D6DA06C}"/>
+                <a16:creationId xmlns:a16="http://schemas.microsoft.com/office/drawing/2014/main" id="{5FAC57F5-99D7-9C46-B6C1-D16224151FE9}"/>
               </a:ext>
             </a:extLst>
           </p:cNvPr>
@@ -32321,37 +32698,44 @@
           <a:bodyPr/>
           <a:lstStyle/>
           <a:p>
-            <a:pPr algn="ctr"/>
-            <a:r>
-              <a:rPr lang="en-US" altLang="ko-KR" dirty="0" err="1">
-                <a:solidFill>
-                  <a:srgbClr val="00B050"/>
-                </a:solidFill>
-                <a:ea typeface="Kim jung chul Gothic Bold" panose="020B0803000000000000" pitchFamily="50" charset="-127"/>
-              </a:rPr>
-              <a:t>addEventListener</a:t>
+            <a:r>
+              <a:rPr lang="ko-KR" altLang="en-US" dirty="0">
+                <a:solidFill>
+                  <a:srgbClr val="6EC173"/>
+                </a:solidFill>
+              </a:rPr>
+              <a:t>실습</a:t>
             </a:r>
             <a:r>
               <a:rPr lang="en-US" altLang="ko-KR" dirty="0">
-                <a:ea typeface="Kim jung chul Gothic Bold" panose="020B0803000000000000" pitchFamily="50" charset="-127"/>
-              </a:rPr>
+                <a:solidFill>
+                  <a:srgbClr val="6EC173"/>
+                </a:solidFill>
+              </a:rPr>
+              <a:t>.  </a:t>
+            </a:r>
+            <a:r>
+              <a:rPr lang="en-US" altLang="ko-KR" dirty="0"/>
               <a:t> </a:t>
             </a:r>
             <a:r>
-              <a:rPr lang="ko-KR" altLang="en-US" dirty="0">
-                <a:ea typeface="Kim jung chul Gothic Bold" panose="020B0803000000000000" pitchFamily="50" charset="-127"/>
-              </a:rPr>
-              <a:t>이벤트의 종류</a:t>
-            </a:r>
-          </a:p>
-        </p:txBody>
-      </p:sp>
-      <p:sp>
-        <p:nvSpPr>
-          <p:cNvPr id="6" name="내용 개체 틀 2">
+              <a:rPr lang="ko-KR" altLang="en-US" dirty="0"/>
+              <a:t>이벤트 다루기</a:t>
+            </a:r>
+            <a:r>
+              <a:rPr lang="en-US" altLang="ko-KR" dirty="0"/>
+              <a:t>(2)</a:t>
+            </a:r>
+            <a:endParaRPr lang="ko-KR" altLang="en-US" dirty="0"/>
+          </a:p>
+        </p:txBody>
+      </p:sp>
+      <p:sp>
+        <p:nvSpPr>
+          <p:cNvPr id="6" name="내용 개체 틀 1">
             <a:extLst>
               <a:ext uri="{FF2B5EF4-FFF2-40B4-BE49-F238E27FC236}">
-                <a16:creationId xmlns:a16="http://schemas.microsoft.com/office/drawing/2014/main" id="{99921601-FACF-7B3E-2F7E-3C6CB9839A59}"/>
+                <a16:creationId xmlns:a16="http://schemas.microsoft.com/office/drawing/2014/main" id="{70C2BA37-BE91-39C4-AC08-0E8A1052E2F7}"/>
               </a:ext>
             </a:extLst>
           </p:cNvPr>
@@ -32362,8 +32746,8 @@
         </p:nvSpPr>
         <p:spPr>
           <a:xfrm>
-            <a:off x="749144" y="1448474"/>
-            <a:ext cx="10693712" cy="4956462"/>
+            <a:off x="838200" y="1825625"/>
+            <a:ext cx="10515600" cy="4351338"/>
           </a:xfrm>
           <a:prstGeom prst="rect">
             <a:avLst/>
@@ -32371,12 +32755,12 @@
         </p:spPr>
         <p:txBody>
           <a:bodyPr vert="horz" lIns="91440" tIns="45720" rIns="91440" bIns="45720" rtlCol="0">
-            <a:normAutofit fontScale="70000" lnSpcReduction="20000"/>
+            <a:normAutofit/>
           </a:bodyPr>
           <a:lstStyle>
             <a:lvl1pPr marL="228600" indent="-228600" algn="l" defTabSz="914400" rtl="0" eaLnBrk="1" latinLnBrk="1" hangingPunct="1">
               <a:lnSpc>
-                <a:spcPct val="150000"/>
+                <a:spcPct val="90000"/>
               </a:lnSpc>
               <a:spcBef>
                 <a:spcPts val="1000"/>
@@ -32387,14 +32771,14 @@
                 <a:solidFill>
                   <a:schemeClr val="tx1"/>
                 </a:solidFill>
-                <a:latin typeface="강한공군체 Medium" panose="020B0600000101010101" pitchFamily="50" charset="-127"/>
-                <a:ea typeface="강한공군체 Medium" panose="020B0600000101010101" pitchFamily="50" charset="-127"/>
+                <a:latin typeface="+mn-lt"/>
+                <a:ea typeface="+mn-ea"/>
                 <a:cs typeface="+mn-cs"/>
               </a:defRPr>
             </a:lvl1pPr>
             <a:lvl2pPr marL="685800" indent="-228600" algn="l" defTabSz="914400" rtl="0" eaLnBrk="1" latinLnBrk="1" hangingPunct="1">
               <a:lnSpc>
-                <a:spcPct val="150000"/>
+                <a:spcPct val="90000"/>
               </a:lnSpc>
               <a:spcBef>
                 <a:spcPts val="500"/>
@@ -32405,14 +32789,14 @@
                 <a:solidFill>
                   <a:schemeClr val="tx1"/>
                 </a:solidFill>
-                <a:latin typeface="강한공군체 Medium" panose="020B0600000101010101" pitchFamily="50" charset="-127"/>
-                <a:ea typeface="강한공군체 Medium" panose="020B0600000101010101" pitchFamily="50" charset="-127"/>
+                <a:latin typeface="+mn-lt"/>
+                <a:ea typeface="+mn-ea"/>
                 <a:cs typeface="+mn-cs"/>
               </a:defRPr>
             </a:lvl2pPr>
             <a:lvl3pPr marL="1143000" indent="-228600" algn="l" defTabSz="914400" rtl="0" eaLnBrk="1" latinLnBrk="1" hangingPunct="1">
               <a:lnSpc>
-                <a:spcPct val="150000"/>
+                <a:spcPct val="90000"/>
               </a:lnSpc>
               <a:spcBef>
                 <a:spcPts val="500"/>
@@ -32423,14 +32807,14 @@
                 <a:solidFill>
                   <a:schemeClr val="tx1"/>
                 </a:solidFill>
-                <a:latin typeface="강한공군체 Medium" panose="020B0600000101010101" pitchFamily="50" charset="-127"/>
-                <a:ea typeface="강한공군체 Medium" panose="020B0600000101010101" pitchFamily="50" charset="-127"/>
+                <a:latin typeface="+mn-lt"/>
+                <a:ea typeface="+mn-ea"/>
                 <a:cs typeface="+mn-cs"/>
               </a:defRPr>
             </a:lvl3pPr>
             <a:lvl4pPr marL="1600200" indent="-228600" algn="l" defTabSz="914400" rtl="0" eaLnBrk="1" latinLnBrk="1" hangingPunct="1">
               <a:lnSpc>
-                <a:spcPct val="150000"/>
+                <a:spcPct val="90000"/>
               </a:lnSpc>
               <a:spcBef>
                 <a:spcPts val="500"/>
@@ -32441,14 +32825,14 @@
                 <a:solidFill>
                   <a:schemeClr val="tx1"/>
                 </a:solidFill>
-                <a:latin typeface="강한공군체 Medium" panose="020B0600000101010101" pitchFamily="50" charset="-127"/>
-                <a:ea typeface="강한공군체 Medium" panose="020B0600000101010101" pitchFamily="50" charset="-127"/>
+                <a:latin typeface="+mn-lt"/>
+                <a:ea typeface="+mn-ea"/>
                 <a:cs typeface="+mn-cs"/>
               </a:defRPr>
             </a:lvl4pPr>
             <a:lvl5pPr marL="2057400" indent="-228600" algn="l" defTabSz="914400" rtl="0" eaLnBrk="1" latinLnBrk="1" hangingPunct="1">
               <a:lnSpc>
-                <a:spcPct val="150000"/>
+                <a:spcPct val="90000"/>
               </a:lnSpc>
               <a:spcBef>
                 <a:spcPts val="500"/>
@@ -32459,8 +32843,8 @@
                 <a:solidFill>
                   <a:schemeClr val="tx1"/>
                 </a:solidFill>
-                <a:latin typeface="강한공군체 Medium" panose="020B0600000101010101" pitchFamily="50" charset="-127"/>
-                <a:ea typeface="강한공군체 Medium" panose="020B0600000101010101" pitchFamily="50" charset="-127"/>
+                <a:latin typeface="+mn-lt"/>
+                <a:ea typeface="+mn-ea"/>
                 <a:cs typeface="+mn-cs"/>
               </a:defRPr>
             </a:lvl5pPr>
@@ -32538,292 +32922,261 @@
             </a:lvl9pPr>
           </a:lstStyle>
           <a:p>
-            <a:r>
+            <a:pPr marL="457200" lvl="1" indent="0">
+              <a:buFont typeface="Arial" panose="020B0604020202020204" pitchFamily="34" charset="0"/>
+              <a:buNone/>
+            </a:pPr>
+            <a:endParaRPr lang="en-US" altLang="ko-KR" dirty="0">
+              <a:solidFill>
+                <a:srgbClr val="212529"/>
+              </a:solidFill>
+              <a:latin typeface="+mn-ea"/>
+            </a:endParaRPr>
+          </a:p>
+          <a:p>
+            <a:pPr marL="457200" lvl="1" indent="0">
+              <a:buFont typeface="Arial" panose="020B0604020202020204" pitchFamily="34" charset="0"/>
+              <a:buNone/>
+            </a:pPr>
+            <a:endParaRPr lang="en-US" altLang="ko-KR" dirty="0">
+              <a:solidFill>
+                <a:srgbClr val="212529"/>
+              </a:solidFill>
+              <a:latin typeface="+mn-ea"/>
+            </a:endParaRPr>
+          </a:p>
+          <a:p>
+            <a:r>
+              <a:rPr lang="en-US" altLang="ko-KR" b="1" dirty="0">
+                <a:solidFill>
+                  <a:srgbClr val="212529"/>
+                </a:solidFill>
+                <a:latin typeface="+mn-ea"/>
+              </a:rPr>
+              <a:t>[</a:t>
+            </a:r>
+            <a:r>
+              <a:rPr lang="ko-KR" altLang="en-US" b="1" dirty="0" err="1">
+                <a:solidFill>
+                  <a:srgbClr val="212529"/>
+                </a:solidFill>
+                <a:latin typeface="+mn-ea"/>
+              </a:rPr>
+              <a:t>코딩온</a:t>
+            </a:r>
+            <a:r>
+              <a:rPr lang="en-US" altLang="ko-KR" b="1" dirty="0">
+                <a:solidFill>
+                  <a:srgbClr val="212529"/>
+                </a:solidFill>
+                <a:latin typeface="+mn-ea"/>
+              </a:rPr>
+              <a:t>] HTML, CSS, JS </a:t>
+            </a:r>
+            <a:r>
+              <a:rPr lang="ko-KR" altLang="en-US" b="1" dirty="0">
+                <a:solidFill>
+                  <a:srgbClr val="212529"/>
+                </a:solidFill>
+                <a:latin typeface="+mn-ea"/>
+              </a:rPr>
+              <a:t>실습</a:t>
+            </a:r>
+            <a:r>
+              <a:rPr lang="en-US" altLang="ko-KR" b="1" dirty="0">
+                <a:solidFill>
+                  <a:srgbClr val="212529"/>
+                </a:solidFill>
+                <a:latin typeface="+mn-ea"/>
+              </a:rPr>
+              <a:t> </a:t>
+            </a:r>
+            <a:r>
+              <a:rPr lang="ko-KR" altLang="en-US" dirty="0">
+                <a:solidFill>
+                  <a:srgbClr val="212529"/>
+                </a:solidFill>
+                <a:latin typeface="+mn-ea"/>
+              </a:rPr>
+              <a:t>강의 클릭</a:t>
+            </a:r>
+            <a:br>
               <a:rPr lang="en-US" altLang="ko-KR" dirty="0">
-                <a:latin typeface="+mn-lt"/>
-                <a:ea typeface="Kim jung chul Gothic Regular" panose="020B0503000000000000" pitchFamily="34" charset="-127"/>
-              </a:rPr>
-              <a:t>Key </a:t>
-            </a:r>
-            <a:r>
-              <a:rPr lang="ko-KR" altLang="en-US" dirty="0">
-                <a:latin typeface="+mn-lt"/>
-                <a:ea typeface="Kim jung chul Gothic Regular" panose="020B0503000000000000" pitchFamily="34" charset="-127"/>
-              </a:rPr>
-              <a:t>계열</a:t>
-            </a:r>
+                <a:solidFill>
+                  <a:srgbClr val="212529"/>
+                </a:solidFill>
+                <a:latin typeface="+mn-ea"/>
+              </a:rPr>
+            </a:br>
             <a:endParaRPr lang="en-US" altLang="ko-KR" dirty="0">
-              <a:latin typeface="+mn-lt"/>
-              <a:ea typeface="Kim jung chul Gothic Regular" panose="020B0503000000000000" pitchFamily="34" charset="-127"/>
+              <a:solidFill>
+                <a:srgbClr val="212529"/>
+              </a:solidFill>
+              <a:latin typeface="+mn-ea"/>
             </a:endParaRPr>
           </a:p>
           <a:p>
             <a:pPr lvl="1"/>
             <a:r>
-              <a:rPr lang="en-US" altLang="ko-KR" dirty="0">
-                <a:latin typeface="+mn-lt"/>
-                <a:ea typeface="Kim jung chul Gothic Regular" panose="020B0503000000000000" pitchFamily="34" charset="-127"/>
-              </a:rPr>
-              <a:t>Keypress : </a:t>
-            </a:r>
-            <a:r>
-              <a:rPr lang="ko-KR" altLang="en-US" dirty="0">
-                <a:latin typeface="+mn-lt"/>
-                <a:ea typeface="Kim jung chul Gothic Regular" panose="020B0503000000000000" pitchFamily="34" charset="-127"/>
-              </a:rPr>
-              <a:t>키를 누르는 순간 </a:t>
-            </a:r>
-            <a:r>
-              <a:rPr lang="en-US" altLang="ko-KR" dirty="0">
-                <a:latin typeface="+mn-lt"/>
-                <a:ea typeface="Kim jung chul Gothic Regular" panose="020B0503000000000000" pitchFamily="34" charset="-127"/>
-              </a:rPr>
-              <a:t>+ </a:t>
-            </a:r>
-            <a:r>
-              <a:rPr lang="ko-KR" altLang="en-US" dirty="0">
-                <a:latin typeface="+mn-lt"/>
-                <a:ea typeface="Kim jung chul Gothic Regular" panose="020B0503000000000000" pitchFamily="34" charset="-127"/>
-              </a:rPr>
-              <a:t>누르고 있는 동안 계속 발생</a:t>
-            </a:r>
-            <a:endParaRPr lang="en-US" altLang="ko-KR" dirty="0">
-              <a:latin typeface="+mn-lt"/>
-              <a:ea typeface="Kim jung chul Gothic Regular" panose="020B0503000000000000" pitchFamily="34" charset="-127"/>
+              <a:rPr lang="ko-KR" altLang="en-US" sz="2800" b="1" dirty="0">
+                <a:solidFill>
+                  <a:srgbClr val="212529"/>
+                </a:solidFill>
+                <a:latin typeface="+mn-ea"/>
+              </a:rPr>
+              <a:t>➡ </a:t>
+            </a:r>
+            <a:r>
+              <a:rPr lang="en-US" altLang="ko-KR" sz="2800" b="1" dirty="0">
+                <a:solidFill>
+                  <a:srgbClr val="212529"/>
+                </a:solidFill>
+                <a:latin typeface="+mn-ea"/>
+              </a:rPr>
+              <a:t>[</a:t>
+            </a:r>
+            <a:r>
+              <a:rPr lang="en-US" altLang="ko-KR" sz="2800" b="1" dirty="0" err="1">
+                <a:solidFill>
+                  <a:srgbClr val="212529"/>
+                </a:solidFill>
+                <a:latin typeface="+mn-ea"/>
+              </a:rPr>
+              <a:t>Javascript</a:t>
+            </a:r>
+            <a:r>
+              <a:rPr lang="en-US" altLang="ko-KR" sz="2800" b="1" dirty="0">
+                <a:solidFill>
+                  <a:srgbClr val="212529"/>
+                </a:solidFill>
+                <a:latin typeface="+mn-ea"/>
+              </a:rPr>
+              <a:t> DOM </a:t>
+            </a:r>
+            <a:r>
+              <a:rPr lang="ko-KR" altLang="en-US" sz="2800" b="1" dirty="0">
+                <a:solidFill>
+                  <a:srgbClr val="212529"/>
+                </a:solidFill>
+                <a:latin typeface="+mn-ea"/>
+              </a:rPr>
+              <a:t>실습</a:t>
+            </a:r>
+            <a:r>
+              <a:rPr lang="en-US" altLang="ko-KR" sz="2800" b="1" dirty="0">
+                <a:solidFill>
+                  <a:srgbClr val="212529"/>
+                </a:solidFill>
+                <a:latin typeface="+mn-ea"/>
+              </a:rPr>
+              <a:t>(2)]</a:t>
+            </a:r>
+            <a:r>
+              <a:rPr lang="en-US" altLang="ko-KR" sz="2800" dirty="0">
+                <a:solidFill>
+                  <a:srgbClr val="212529"/>
+                </a:solidFill>
+                <a:latin typeface="+mn-ea"/>
+              </a:rPr>
+              <a:t> </a:t>
+            </a:r>
+            <a:r>
+              <a:rPr lang="ko-KR" altLang="en-US" sz="2800" dirty="0">
+                <a:solidFill>
+                  <a:srgbClr val="212529"/>
+                </a:solidFill>
+                <a:latin typeface="+mn-ea"/>
+              </a:rPr>
+              <a:t>커리큘럼 클릭</a:t>
+            </a:r>
+            <a:endParaRPr lang="en-US" altLang="ko-KR" sz="2800" dirty="0">
+              <a:solidFill>
+                <a:srgbClr val="212529"/>
+              </a:solidFill>
+              <a:latin typeface="+mn-ea"/>
             </a:endParaRPr>
           </a:p>
           <a:p>
             <a:pPr lvl="1"/>
             <a:r>
-              <a:rPr lang="en-US" altLang="ko-KR" dirty="0" err="1">
-                <a:latin typeface="+mn-lt"/>
-                <a:ea typeface="Kim jung chul Gothic Regular" panose="020B0503000000000000" pitchFamily="34" charset="-127"/>
-              </a:rPr>
-              <a:t>Keydown</a:t>
-            </a:r>
-            <a:r>
-              <a:rPr lang="en-US" altLang="ko-KR" dirty="0">
-                <a:latin typeface="+mn-lt"/>
-                <a:ea typeface="Kim jung chul Gothic Regular" panose="020B0503000000000000" pitchFamily="34" charset="-127"/>
-              </a:rPr>
-              <a:t> : </a:t>
-            </a:r>
-            <a:r>
-              <a:rPr lang="ko-KR" altLang="en-US" dirty="0">
-                <a:latin typeface="+mn-lt"/>
-                <a:ea typeface="Kim jung chul Gothic Regular" panose="020B0503000000000000" pitchFamily="34" charset="-127"/>
-              </a:rPr>
-              <a:t>키를 누르는 순간에만 발생</a:t>
-            </a:r>
-            <a:endParaRPr lang="en-US" altLang="ko-KR" dirty="0">
-              <a:latin typeface="+mn-lt"/>
-              <a:ea typeface="Kim jung chul Gothic Regular" panose="020B0503000000000000" pitchFamily="34" charset="-127"/>
-            </a:endParaRPr>
-          </a:p>
-          <a:p>
-            <a:pPr lvl="1"/>
-            <a:r>
-              <a:rPr lang="en-US" altLang="ko-KR" dirty="0" err="1">
-                <a:latin typeface="+mn-lt"/>
-                <a:ea typeface="Kim jung chul Gothic Regular" panose="020B0503000000000000" pitchFamily="34" charset="-127"/>
-              </a:rPr>
-              <a:t>Keyup</a:t>
-            </a:r>
-            <a:r>
-              <a:rPr lang="en-US" altLang="ko-KR" dirty="0">
-                <a:latin typeface="+mn-lt"/>
-                <a:ea typeface="Kim jung chul Gothic Regular" panose="020B0503000000000000" pitchFamily="34" charset="-127"/>
-              </a:rPr>
-              <a:t> : </a:t>
-            </a:r>
-            <a:r>
-              <a:rPr lang="ko-KR" altLang="en-US" dirty="0">
-                <a:latin typeface="+mn-lt"/>
-                <a:ea typeface="Kim jung chul Gothic Regular" panose="020B0503000000000000" pitchFamily="34" charset="-127"/>
-              </a:rPr>
-              <a:t>키를 눌렀다가 떼는 순간</a:t>
-            </a:r>
-            <a:endParaRPr lang="en-US" altLang="ko-KR" dirty="0">
-              <a:latin typeface="+mn-lt"/>
-              <a:ea typeface="Kim jung chul Gothic Regular" panose="020B0503000000000000" pitchFamily="34" charset="-127"/>
-            </a:endParaRPr>
-          </a:p>
-          <a:p>
-            <a:r>
-              <a:rPr lang="en-US" altLang="ko-KR" dirty="0">
-                <a:latin typeface="+mn-lt"/>
-                <a:ea typeface="Kim jung chul Gothic Regular" panose="020B0503000000000000" pitchFamily="34" charset="-127"/>
-              </a:rPr>
-              <a:t>Load : </a:t>
-            </a:r>
-            <a:r>
-              <a:rPr lang="ko-KR" altLang="en-US" dirty="0">
-                <a:latin typeface="+mn-lt"/>
-                <a:ea typeface="Kim jung chul Gothic Regular" panose="020B0503000000000000" pitchFamily="34" charset="-127"/>
-              </a:rPr>
-              <a:t>웹페이지에 필요한 모든 파일</a:t>
-            </a:r>
-            <a:r>
-              <a:rPr lang="en-US" altLang="ko-KR" dirty="0">
-                <a:latin typeface="+mn-lt"/>
-                <a:ea typeface="Kim jung chul Gothic Regular" panose="020B0503000000000000" pitchFamily="34" charset="-127"/>
-              </a:rPr>
-              <a:t>(html, </a:t>
-            </a:r>
-            <a:r>
-              <a:rPr lang="en-US" altLang="ko-KR" dirty="0" err="1">
-                <a:latin typeface="+mn-lt"/>
-                <a:ea typeface="Kim jung chul Gothic Regular" panose="020B0503000000000000" pitchFamily="34" charset="-127"/>
-              </a:rPr>
-              <a:t>css</a:t>
-            </a:r>
-            <a:r>
-              <a:rPr lang="en-US" altLang="ko-KR" dirty="0">
-                <a:latin typeface="+mn-lt"/>
-                <a:ea typeface="Kim jung chul Gothic Regular" panose="020B0503000000000000" pitchFamily="34" charset="-127"/>
-              </a:rPr>
-              <a:t>, </a:t>
-            </a:r>
-            <a:r>
-              <a:rPr lang="en-US" altLang="ko-KR" dirty="0" err="1">
-                <a:latin typeface="+mn-lt"/>
-                <a:ea typeface="Kim jung chul Gothic Regular" panose="020B0503000000000000" pitchFamily="34" charset="-127"/>
-              </a:rPr>
-              <a:t>js</a:t>
-            </a:r>
-            <a:r>
-              <a:rPr lang="en-US" altLang="ko-KR" dirty="0">
-                <a:latin typeface="+mn-lt"/>
-                <a:ea typeface="Kim jung chul Gothic Regular" panose="020B0503000000000000" pitchFamily="34" charset="-127"/>
+              <a:rPr lang="ko-KR" altLang="en-US" sz="2800" b="1" dirty="0">
+                <a:solidFill>
+                  <a:srgbClr val="212529"/>
+                </a:solidFill>
+                <a:latin typeface="+mn-ea"/>
+              </a:rPr>
+              <a:t>➡ </a:t>
+            </a:r>
+            <a:r>
+              <a:rPr lang="en-US" altLang="ko-KR" sz="2800" b="1" dirty="0">
+                <a:solidFill>
+                  <a:schemeClr val="accent1"/>
+                </a:solidFill>
+                <a:latin typeface="+mn-ea"/>
+              </a:rPr>
+              <a:t>[</a:t>
+            </a:r>
+            <a:r>
+              <a:rPr lang="ko-KR" altLang="en-US" sz="2800" b="1" dirty="0" err="1">
+                <a:solidFill>
+                  <a:schemeClr val="accent1"/>
+                </a:solidFill>
+                <a:latin typeface="+mn-ea"/>
+              </a:rPr>
+              <a:t>실습문제</a:t>
+            </a:r>
+            <a:r>
+              <a:rPr lang="en-US" altLang="ko-KR" sz="2800" b="1" dirty="0">
+                <a:solidFill>
+                  <a:schemeClr val="accent1"/>
+                </a:solidFill>
+                <a:latin typeface="+mn-ea"/>
+              </a:rPr>
+              <a:t>2. </a:t>
+            </a:r>
+            <a:r>
+              <a:rPr lang="ko-KR" altLang="en-US" sz="2800" b="1" dirty="0">
+                <a:solidFill>
+                  <a:schemeClr val="accent1"/>
+                </a:solidFill>
+                <a:latin typeface="+mn-ea"/>
+              </a:rPr>
+              <a:t>댓글 등록하기</a:t>
+            </a:r>
+            <a:r>
+              <a:rPr lang="en-US" altLang="ko-KR" sz="2800" b="1" dirty="0">
+                <a:solidFill>
+                  <a:schemeClr val="accent1"/>
+                </a:solidFill>
+                <a:latin typeface="+mn-ea"/>
+              </a:rPr>
+              <a:t>]</a:t>
+            </a:r>
+            <a:r>
+              <a:rPr lang="en-US" altLang="ko-KR" sz="2800" dirty="0">
+                <a:solidFill>
+                  <a:schemeClr val="accent1"/>
+                </a:solidFill>
+                <a:latin typeface="+mn-ea"/>
               </a:rPr>
               <a:t> </a:t>
             </a:r>
             <a:r>
-              <a:rPr lang="ko-KR" altLang="en-US" dirty="0">
-                <a:latin typeface="+mn-lt"/>
-                <a:ea typeface="Kim jung chul Gothic Regular" panose="020B0503000000000000" pitchFamily="34" charset="-127"/>
-              </a:rPr>
-              <a:t>등</a:t>
-            </a:r>
-            <a:r>
-              <a:rPr lang="en-US" altLang="ko-KR" dirty="0">
-                <a:latin typeface="+mn-lt"/>
-                <a:ea typeface="Kim jung chul Gothic Regular" panose="020B0503000000000000" pitchFamily="34" charset="-127"/>
-              </a:rPr>
-              <a:t>)</a:t>
-            </a:r>
-            <a:r>
-              <a:rPr lang="ko-KR" altLang="en-US" dirty="0">
-                <a:latin typeface="+mn-lt"/>
-                <a:ea typeface="Kim jung chul Gothic Regular" panose="020B0503000000000000" pitchFamily="34" charset="-127"/>
-              </a:rPr>
-              <a:t>의 다운로드가 완료 되었을 때</a:t>
-            </a:r>
-            <a:endParaRPr lang="en-US" altLang="ko-KR" dirty="0">
-              <a:latin typeface="+mn-lt"/>
-              <a:ea typeface="Kim jung chul Gothic Regular" panose="020B0503000000000000" pitchFamily="34" charset="-127"/>
-            </a:endParaRPr>
-          </a:p>
-          <a:p>
-            <a:r>
-              <a:rPr lang="en-US" altLang="ko-KR" dirty="0">
-                <a:latin typeface="+mn-lt"/>
-                <a:ea typeface="Kim jung chul Gothic Regular" panose="020B0503000000000000" pitchFamily="34" charset="-127"/>
-              </a:rPr>
-              <a:t>Resize : </a:t>
-            </a:r>
-            <a:r>
-              <a:rPr lang="ko-KR" altLang="en-US" dirty="0">
-                <a:latin typeface="+mn-lt"/>
-                <a:ea typeface="Kim jung chul Gothic Regular" panose="020B0503000000000000" pitchFamily="34" charset="-127"/>
-              </a:rPr>
-              <a:t>브라우저 창의 크기가 변경 될 때</a:t>
-            </a:r>
-            <a:endParaRPr lang="en-US" altLang="ko-KR" dirty="0">
-              <a:latin typeface="+mn-lt"/>
-              <a:ea typeface="Kim jung chul Gothic Regular" panose="020B0503000000000000" pitchFamily="34" charset="-127"/>
-            </a:endParaRPr>
-          </a:p>
-          <a:p>
-            <a:r>
-              <a:rPr lang="en-US" altLang="ko-KR" dirty="0">
-                <a:latin typeface="+mn-lt"/>
-                <a:ea typeface="Kim jung chul Gothic Regular" panose="020B0503000000000000" pitchFamily="34" charset="-127"/>
-              </a:rPr>
-              <a:t>Scroll : </a:t>
-            </a:r>
-            <a:r>
-              <a:rPr lang="ko-KR" altLang="en-US" dirty="0">
-                <a:latin typeface="+mn-lt"/>
-                <a:ea typeface="Kim jung chul Gothic Regular" panose="020B0503000000000000" pitchFamily="34" charset="-127"/>
-              </a:rPr>
-              <a:t>스크롤이 발생할 때</a:t>
-            </a:r>
-            <a:endParaRPr lang="en-US" altLang="ko-KR" dirty="0">
-              <a:latin typeface="+mn-lt"/>
-              <a:ea typeface="Kim jung chul Gothic Regular" panose="020B0503000000000000" pitchFamily="34" charset="-127"/>
-            </a:endParaRPr>
-          </a:p>
-          <a:p>
-            <a:r>
-              <a:rPr lang="en-US" altLang="ko-KR" dirty="0">
-                <a:latin typeface="+mn-lt"/>
-                <a:ea typeface="Kim jung chul Gothic Regular" panose="020B0503000000000000" pitchFamily="34" charset="-127"/>
-              </a:rPr>
-              <a:t>Unload : </a:t>
-            </a:r>
-            <a:r>
-              <a:rPr lang="ko-KR" altLang="en-US" dirty="0">
-                <a:latin typeface="+mn-lt"/>
-                <a:ea typeface="Kim jung chul Gothic Regular" panose="020B0503000000000000" pitchFamily="34" charset="-127"/>
-              </a:rPr>
-              <a:t>링크를 타고 이동하거나</a:t>
-            </a:r>
-            <a:r>
-              <a:rPr lang="en-US" altLang="ko-KR" dirty="0">
-                <a:latin typeface="+mn-lt"/>
-                <a:ea typeface="Kim jung chul Gothic Regular" panose="020B0503000000000000" pitchFamily="34" charset="-127"/>
-              </a:rPr>
-              <a:t>, </a:t>
-            </a:r>
-            <a:r>
-              <a:rPr lang="ko-KR" altLang="en-US" dirty="0">
-                <a:latin typeface="+mn-lt"/>
-                <a:ea typeface="Kim jung chul Gothic Regular" panose="020B0503000000000000" pitchFamily="34" charset="-127"/>
-              </a:rPr>
-              <a:t>브라우저를 닫을 때</a:t>
-            </a:r>
-            <a:endParaRPr lang="en-US" altLang="ko-KR" dirty="0">
-              <a:latin typeface="+mn-lt"/>
-              <a:ea typeface="Kim jung chul Gothic Regular" panose="020B0503000000000000" pitchFamily="34" charset="-127"/>
-            </a:endParaRPr>
-          </a:p>
-          <a:p>
-            <a:r>
-              <a:rPr lang="en-US" altLang="ko-KR" dirty="0">
-                <a:latin typeface="+mn-lt"/>
-                <a:ea typeface="Kim jung chul Gothic Regular" panose="020B0503000000000000" pitchFamily="34" charset="-127"/>
-              </a:rPr>
-              <a:t>Change : </a:t>
-            </a:r>
-            <a:r>
-              <a:rPr lang="ko-KR" altLang="en-US" dirty="0">
-                <a:latin typeface="+mn-lt"/>
-                <a:ea typeface="Kim jung chul Gothic Regular" panose="020B0503000000000000" pitchFamily="34" charset="-127"/>
-              </a:rPr>
-              <a:t>폼 필드의 상태가 변경 되었을 때</a:t>
-            </a:r>
-            <a:endParaRPr lang="en-US" altLang="ko-KR" dirty="0">
-              <a:latin typeface="+mn-lt"/>
-              <a:ea typeface="Kim jung chul Gothic Regular" panose="020B0503000000000000" pitchFamily="34" charset="-127"/>
-            </a:endParaRPr>
+              <a:rPr lang="ko-KR" altLang="en-US" sz="2800" dirty="0">
+                <a:solidFill>
+                  <a:srgbClr val="212529"/>
+                </a:solidFill>
+                <a:latin typeface="+mn-ea"/>
+              </a:rPr>
+              <a:t> 진행</a:t>
+            </a:r>
           </a:p>
         </p:txBody>
       </p:sp>
     </p:spTree>
     <p:extLst>
       <p:ext uri="{BB962C8B-B14F-4D97-AF65-F5344CB8AC3E}">
-        <p14:creationId xmlns:p14="http://schemas.microsoft.com/office/powerpoint/2010/main" val="1759448051"/>
+        <p14:creationId xmlns:p14="http://schemas.microsoft.com/office/powerpoint/2010/main" val="848524128"/>
       </p:ext>
     </p:extLst>
   </p:cSld>
@@ -32914,7 +33267,7 @@
           <a:p>
             <a:fld id="{0F78D9C4-20C1-4B15-A116-16DC77AD9A1E}" type="datetime1">
               <a:rPr lang="ko-KR" altLang="en-US" smtClean="0"/>
-              <a:t>2024-06-03</a:t>
+              <a:t>2024-06-05</a:t>
             </a:fld>
             <a:endParaRPr lang="ko-KR" altLang="en-US"/>
           </a:p>
@@ -32994,6 +33347,11 @@
               <a:rPr lang="ko-KR" altLang="en-US" dirty="0"/>
               <a:t>이벤트 다루기</a:t>
             </a:r>
+            <a:r>
+              <a:rPr lang="en-US" altLang="ko-KR" dirty="0"/>
+              <a:t>(3)</a:t>
+            </a:r>
+            <a:endParaRPr lang="ko-KR" altLang="en-US" dirty="0"/>
           </a:p>
         </p:txBody>
       </p:sp>
@@ -33399,7 +33757,7 @@
                 </a:solidFill>
                 <a:latin typeface="+mn-ea"/>
               </a:rPr>
-              <a:t>1. </a:t>
+              <a:t>3. </a:t>
             </a:r>
             <a:r>
               <a:rPr lang="ko-KR" altLang="en-US" sz="2800" b="1" dirty="0">
@@ -33408,16 +33766,7 @@
                 </a:solidFill>
                 <a:latin typeface="+mn-ea"/>
               </a:rPr>
-              <a:t>랜덤 색상 </a:t>
-            </a:r>
-            <a:r>
-              <a:rPr lang="ko-KR" altLang="en-US" sz="2800" b="1" dirty="0" err="1">
-                <a:solidFill>
-                  <a:schemeClr val="accent1"/>
-                </a:solidFill>
-                <a:latin typeface="+mn-ea"/>
-              </a:rPr>
-              <a:t>생성기</a:t>
+              <a:t>계산기 만들기</a:t>
             </a:r>
             <a:r>
               <a:rPr lang="en-US" altLang="ko-KR" sz="2800" b="1" dirty="0">
@@ -33452,7 +33801,7 @@
     </p:spTree>
     <p:extLst>
       <p:ext uri="{BB962C8B-B14F-4D97-AF65-F5344CB8AC3E}">
-        <p14:creationId xmlns:p14="http://schemas.microsoft.com/office/powerpoint/2010/main" val="924632194"/>
+        <p14:creationId xmlns:p14="http://schemas.microsoft.com/office/powerpoint/2010/main" val="2078636391"/>
       </p:ext>
     </p:extLst>
   </p:cSld>
@@ -33543,7 +33892,7 @@
           <a:p>
             <a:fld id="{0F78D9C4-20C1-4B15-A116-16DC77AD9A1E}" type="datetime1">
               <a:rPr lang="ko-KR" altLang="en-US" smtClean="0"/>
-              <a:t>2024-06-03</a:t>
+              <a:t>2024-06-05</a:t>
             </a:fld>
             <a:endParaRPr lang="ko-KR" altLang="en-US"/>
           </a:p>
@@ -33573,1256 +33922,6 @@
             <a:fld id="{083A2CE0-18CD-4102-B738-4ACFF9E68BA4}" type="slidenum">
               <a:rPr lang="ko-KR" altLang="en-US" smtClean="0"/>
               <a:t>56</a:t>
-            </a:fld>
-            <a:endParaRPr lang="ko-KR" altLang="en-US"/>
-          </a:p>
-        </p:txBody>
-      </p:sp>
-      <p:sp>
-        <p:nvSpPr>
-          <p:cNvPr id="2" name="제목 1">
-            <a:extLst>
-              <a:ext uri="{FF2B5EF4-FFF2-40B4-BE49-F238E27FC236}">
-                <a16:creationId xmlns:a16="http://schemas.microsoft.com/office/drawing/2014/main" id="{5FAC57F5-99D7-9C46-B6C1-D16224151FE9}"/>
-              </a:ext>
-            </a:extLst>
-          </p:cNvPr>
-          <p:cNvSpPr>
-            <a:spLocks noGrp="1"/>
-          </p:cNvSpPr>
-          <p:nvPr>
-            <p:ph type="title"/>
-          </p:nvPr>
-        </p:nvSpPr>
-        <p:spPr/>
-        <p:txBody>
-          <a:bodyPr/>
-          <a:lstStyle/>
-          <a:p>
-            <a:r>
-              <a:rPr lang="ko-KR" altLang="en-US" dirty="0">
-                <a:solidFill>
-                  <a:srgbClr val="6EC173"/>
-                </a:solidFill>
-              </a:rPr>
-              <a:t>실습</a:t>
-            </a:r>
-            <a:r>
-              <a:rPr lang="en-US" altLang="ko-KR" dirty="0">
-                <a:solidFill>
-                  <a:srgbClr val="6EC173"/>
-                </a:solidFill>
-              </a:rPr>
-              <a:t>.  </a:t>
-            </a:r>
-            <a:r>
-              <a:rPr lang="en-US" altLang="ko-KR" dirty="0"/>
-              <a:t> </a:t>
-            </a:r>
-            <a:r>
-              <a:rPr lang="ko-KR" altLang="en-US" dirty="0"/>
-              <a:t>이벤트 다루기</a:t>
-            </a:r>
-            <a:r>
-              <a:rPr lang="en-US" altLang="ko-KR" dirty="0"/>
-              <a:t>(2)</a:t>
-            </a:r>
-            <a:endParaRPr lang="ko-KR" altLang="en-US" dirty="0"/>
-          </a:p>
-        </p:txBody>
-      </p:sp>
-      <p:sp>
-        <p:nvSpPr>
-          <p:cNvPr id="6" name="내용 개체 틀 1">
-            <a:extLst>
-              <a:ext uri="{FF2B5EF4-FFF2-40B4-BE49-F238E27FC236}">
-                <a16:creationId xmlns:a16="http://schemas.microsoft.com/office/drawing/2014/main" id="{70C2BA37-BE91-39C4-AC08-0E8A1052E2F7}"/>
-              </a:ext>
-            </a:extLst>
-          </p:cNvPr>
-          <p:cNvSpPr txBox="1">
-            <a:spLocks/>
-          </p:cNvSpPr>
-          <p:nvPr/>
-        </p:nvSpPr>
-        <p:spPr>
-          <a:xfrm>
-            <a:off x="838200" y="1825625"/>
-            <a:ext cx="10515600" cy="4351338"/>
-          </a:xfrm>
-          <a:prstGeom prst="rect">
-            <a:avLst/>
-          </a:prstGeom>
-        </p:spPr>
-        <p:txBody>
-          <a:bodyPr vert="horz" lIns="91440" tIns="45720" rIns="91440" bIns="45720" rtlCol="0">
-            <a:normAutofit/>
-          </a:bodyPr>
-          <a:lstStyle>
-            <a:lvl1pPr marL="228600" indent="-228600" algn="l" defTabSz="914400" rtl="0" eaLnBrk="1" latinLnBrk="1" hangingPunct="1">
-              <a:lnSpc>
-                <a:spcPct val="90000"/>
-              </a:lnSpc>
-              <a:spcBef>
-                <a:spcPts val="1000"/>
-              </a:spcBef>
-              <a:buFont typeface="Arial" panose="020B0604020202020204" pitchFamily="34" charset="0"/>
-              <a:buChar char="•"/>
-              <a:defRPr sz="2800" kern="1200">
-                <a:solidFill>
-                  <a:schemeClr val="tx1"/>
-                </a:solidFill>
-                <a:latin typeface="+mn-lt"/>
-                <a:ea typeface="+mn-ea"/>
-                <a:cs typeface="+mn-cs"/>
-              </a:defRPr>
-            </a:lvl1pPr>
-            <a:lvl2pPr marL="685800" indent="-228600" algn="l" defTabSz="914400" rtl="0" eaLnBrk="1" latinLnBrk="1" hangingPunct="1">
-              <a:lnSpc>
-                <a:spcPct val="90000"/>
-              </a:lnSpc>
-              <a:spcBef>
-                <a:spcPts val="500"/>
-              </a:spcBef>
-              <a:buFont typeface="Arial" panose="020B0604020202020204" pitchFamily="34" charset="0"/>
-              <a:buChar char="•"/>
-              <a:defRPr sz="2400" kern="1200">
-                <a:solidFill>
-                  <a:schemeClr val="tx1"/>
-                </a:solidFill>
-                <a:latin typeface="+mn-lt"/>
-                <a:ea typeface="+mn-ea"/>
-                <a:cs typeface="+mn-cs"/>
-              </a:defRPr>
-            </a:lvl2pPr>
-            <a:lvl3pPr marL="1143000" indent="-228600" algn="l" defTabSz="914400" rtl="0" eaLnBrk="1" latinLnBrk="1" hangingPunct="1">
-              <a:lnSpc>
-                <a:spcPct val="90000"/>
-              </a:lnSpc>
-              <a:spcBef>
-                <a:spcPts val="500"/>
-              </a:spcBef>
-              <a:buFont typeface="Arial" panose="020B0604020202020204" pitchFamily="34" charset="0"/>
-              <a:buChar char="•"/>
-              <a:defRPr sz="2000" kern="1200">
-                <a:solidFill>
-                  <a:schemeClr val="tx1"/>
-                </a:solidFill>
-                <a:latin typeface="+mn-lt"/>
-                <a:ea typeface="+mn-ea"/>
-                <a:cs typeface="+mn-cs"/>
-              </a:defRPr>
-            </a:lvl3pPr>
-            <a:lvl4pPr marL="1600200" indent="-228600" algn="l" defTabSz="914400" rtl="0" eaLnBrk="1" latinLnBrk="1" hangingPunct="1">
-              <a:lnSpc>
-                <a:spcPct val="90000"/>
-              </a:lnSpc>
-              <a:spcBef>
-                <a:spcPts val="500"/>
-              </a:spcBef>
-              <a:buFont typeface="Arial" panose="020B0604020202020204" pitchFamily="34" charset="0"/>
-              <a:buChar char="•"/>
-              <a:defRPr sz="1800" kern="1200">
-                <a:solidFill>
-                  <a:schemeClr val="tx1"/>
-                </a:solidFill>
-                <a:latin typeface="+mn-lt"/>
-                <a:ea typeface="+mn-ea"/>
-                <a:cs typeface="+mn-cs"/>
-              </a:defRPr>
-            </a:lvl4pPr>
-            <a:lvl5pPr marL="2057400" indent="-228600" algn="l" defTabSz="914400" rtl="0" eaLnBrk="1" latinLnBrk="1" hangingPunct="1">
-              <a:lnSpc>
-                <a:spcPct val="90000"/>
-              </a:lnSpc>
-              <a:spcBef>
-                <a:spcPts val="500"/>
-              </a:spcBef>
-              <a:buFont typeface="Arial" panose="020B0604020202020204" pitchFamily="34" charset="0"/>
-              <a:buChar char="•"/>
-              <a:defRPr sz="1800" kern="1200">
-                <a:solidFill>
-                  <a:schemeClr val="tx1"/>
-                </a:solidFill>
-                <a:latin typeface="+mn-lt"/>
-                <a:ea typeface="+mn-ea"/>
-                <a:cs typeface="+mn-cs"/>
-              </a:defRPr>
-            </a:lvl5pPr>
-            <a:lvl6pPr marL="2514600" indent="-228600" algn="l" defTabSz="914400" rtl="0" eaLnBrk="1" latinLnBrk="1" hangingPunct="1">
-              <a:lnSpc>
-                <a:spcPct val="90000"/>
-              </a:lnSpc>
-              <a:spcBef>
-                <a:spcPts val="500"/>
-              </a:spcBef>
-              <a:buFont typeface="Arial" panose="020B0604020202020204" pitchFamily="34" charset="0"/>
-              <a:buChar char="•"/>
-              <a:defRPr sz="1800" kern="1200">
-                <a:solidFill>
-                  <a:schemeClr val="tx1"/>
-                </a:solidFill>
-                <a:latin typeface="+mn-lt"/>
-                <a:ea typeface="+mn-ea"/>
-                <a:cs typeface="+mn-cs"/>
-              </a:defRPr>
-            </a:lvl6pPr>
-            <a:lvl7pPr marL="2971800" indent="-228600" algn="l" defTabSz="914400" rtl="0" eaLnBrk="1" latinLnBrk="1" hangingPunct="1">
-              <a:lnSpc>
-                <a:spcPct val="90000"/>
-              </a:lnSpc>
-              <a:spcBef>
-                <a:spcPts val="500"/>
-              </a:spcBef>
-              <a:buFont typeface="Arial" panose="020B0604020202020204" pitchFamily="34" charset="0"/>
-              <a:buChar char="•"/>
-              <a:defRPr sz="1800" kern="1200">
-                <a:solidFill>
-                  <a:schemeClr val="tx1"/>
-                </a:solidFill>
-                <a:latin typeface="+mn-lt"/>
-                <a:ea typeface="+mn-ea"/>
-                <a:cs typeface="+mn-cs"/>
-              </a:defRPr>
-            </a:lvl7pPr>
-            <a:lvl8pPr marL="3429000" indent="-228600" algn="l" defTabSz="914400" rtl="0" eaLnBrk="1" latinLnBrk="1" hangingPunct="1">
-              <a:lnSpc>
-                <a:spcPct val="90000"/>
-              </a:lnSpc>
-              <a:spcBef>
-                <a:spcPts val="500"/>
-              </a:spcBef>
-              <a:buFont typeface="Arial" panose="020B0604020202020204" pitchFamily="34" charset="0"/>
-              <a:buChar char="•"/>
-              <a:defRPr sz="1800" kern="1200">
-                <a:solidFill>
-                  <a:schemeClr val="tx1"/>
-                </a:solidFill>
-                <a:latin typeface="+mn-lt"/>
-                <a:ea typeface="+mn-ea"/>
-                <a:cs typeface="+mn-cs"/>
-              </a:defRPr>
-            </a:lvl8pPr>
-            <a:lvl9pPr marL="3886200" indent="-228600" algn="l" defTabSz="914400" rtl="0" eaLnBrk="1" latinLnBrk="1" hangingPunct="1">
-              <a:lnSpc>
-                <a:spcPct val="90000"/>
-              </a:lnSpc>
-              <a:spcBef>
-                <a:spcPts val="500"/>
-              </a:spcBef>
-              <a:buFont typeface="Arial" panose="020B0604020202020204" pitchFamily="34" charset="0"/>
-              <a:buChar char="•"/>
-              <a:defRPr sz="1800" kern="1200">
-                <a:solidFill>
-                  <a:schemeClr val="tx1"/>
-                </a:solidFill>
-                <a:latin typeface="+mn-lt"/>
-                <a:ea typeface="+mn-ea"/>
-                <a:cs typeface="+mn-cs"/>
-              </a:defRPr>
-            </a:lvl9pPr>
-          </a:lstStyle>
-          <a:p>
-            <a:pPr marL="457200" lvl="1" indent="0">
-              <a:buFont typeface="Arial" panose="020B0604020202020204" pitchFamily="34" charset="0"/>
-              <a:buNone/>
-            </a:pPr>
-            <a:endParaRPr lang="en-US" altLang="ko-KR" dirty="0">
-              <a:solidFill>
-                <a:srgbClr val="212529"/>
-              </a:solidFill>
-              <a:latin typeface="+mn-ea"/>
-            </a:endParaRPr>
-          </a:p>
-          <a:p>
-            <a:pPr marL="457200" lvl="1" indent="0">
-              <a:buFont typeface="Arial" panose="020B0604020202020204" pitchFamily="34" charset="0"/>
-              <a:buNone/>
-            </a:pPr>
-            <a:endParaRPr lang="en-US" altLang="ko-KR" dirty="0">
-              <a:solidFill>
-                <a:srgbClr val="212529"/>
-              </a:solidFill>
-              <a:latin typeface="+mn-ea"/>
-            </a:endParaRPr>
-          </a:p>
-          <a:p>
-            <a:r>
-              <a:rPr lang="en-US" altLang="ko-KR" b="1" dirty="0">
-                <a:solidFill>
-                  <a:srgbClr val="212529"/>
-                </a:solidFill>
-                <a:latin typeface="+mn-ea"/>
-              </a:rPr>
-              <a:t>[</a:t>
-            </a:r>
-            <a:r>
-              <a:rPr lang="ko-KR" altLang="en-US" b="1" dirty="0" err="1">
-                <a:solidFill>
-                  <a:srgbClr val="212529"/>
-                </a:solidFill>
-                <a:latin typeface="+mn-ea"/>
-              </a:rPr>
-              <a:t>코딩온</a:t>
-            </a:r>
-            <a:r>
-              <a:rPr lang="en-US" altLang="ko-KR" b="1" dirty="0">
-                <a:solidFill>
-                  <a:srgbClr val="212529"/>
-                </a:solidFill>
-                <a:latin typeface="+mn-ea"/>
-              </a:rPr>
-              <a:t>] HTML, CSS, JS </a:t>
-            </a:r>
-            <a:r>
-              <a:rPr lang="ko-KR" altLang="en-US" b="1" dirty="0">
-                <a:solidFill>
-                  <a:srgbClr val="212529"/>
-                </a:solidFill>
-                <a:latin typeface="+mn-ea"/>
-              </a:rPr>
-              <a:t>실습</a:t>
-            </a:r>
-            <a:r>
-              <a:rPr lang="en-US" altLang="ko-KR" b="1" dirty="0">
-                <a:solidFill>
-                  <a:srgbClr val="212529"/>
-                </a:solidFill>
-                <a:latin typeface="+mn-ea"/>
-              </a:rPr>
-              <a:t> </a:t>
-            </a:r>
-            <a:r>
-              <a:rPr lang="ko-KR" altLang="en-US" dirty="0">
-                <a:solidFill>
-                  <a:srgbClr val="212529"/>
-                </a:solidFill>
-                <a:latin typeface="+mn-ea"/>
-              </a:rPr>
-              <a:t>강의 클릭</a:t>
-            </a:r>
-            <a:br>
-              <a:rPr lang="en-US" altLang="ko-KR" dirty="0">
-                <a:solidFill>
-                  <a:srgbClr val="212529"/>
-                </a:solidFill>
-                <a:latin typeface="+mn-ea"/>
-              </a:rPr>
-            </a:br>
-            <a:endParaRPr lang="en-US" altLang="ko-KR" dirty="0">
-              <a:solidFill>
-                <a:srgbClr val="212529"/>
-              </a:solidFill>
-              <a:latin typeface="+mn-ea"/>
-            </a:endParaRPr>
-          </a:p>
-          <a:p>
-            <a:pPr lvl="1"/>
-            <a:r>
-              <a:rPr lang="ko-KR" altLang="en-US" sz="2800" b="1" dirty="0">
-                <a:solidFill>
-                  <a:srgbClr val="212529"/>
-                </a:solidFill>
-                <a:latin typeface="+mn-ea"/>
-              </a:rPr>
-              <a:t>➡ </a:t>
-            </a:r>
-            <a:r>
-              <a:rPr lang="en-US" altLang="ko-KR" sz="2800" b="1" dirty="0">
-                <a:solidFill>
-                  <a:srgbClr val="212529"/>
-                </a:solidFill>
-                <a:latin typeface="+mn-ea"/>
-              </a:rPr>
-              <a:t>[</a:t>
-            </a:r>
-            <a:r>
-              <a:rPr lang="en-US" altLang="ko-KR" sz="2800" b="1" dirty="0" err="1">
-                <a:solidFill>
-                  <a:srgbClr val="212529"/>
-                </a:solidFill>
-                <a:latin typeface="+mn-ea"/>
-              </a:rPr>
-              <a:t>Javascript</a:t>
-            </a:r>
-            <a:r>
-              <a:rPr lang="en-US" altLang="ko-KR" sz="2800" b="1" dirty="0">
-                <a:solidFill>
-                  <a:srgbClr val="212529"/>
-                </a:solidFill>
-                <a:latin typeface="+mn-ea"/>
-              </a:rPr>
-              <a:t> DOM </a:t>
-            </a:r>
-            <a:r>
-              <a:rPr lang="ko-KR" altLang="en-US" sz="2800" b="1" dirty="0">
-                <a:solidFill>
-                  <a:srgbClr val="212529"/>
-                </a:solidFill>
-                <a:latin typeface="+mn-ea"/>
-              </a:rPr>
-              <a:t>실습</a:t>
-            </a:r>
-            <a:r>
-              <a:rPr lang="en-US" altLang="ko-KR" sz="2800" b="1" dirty="0">
-                <a:solidFill>
-                  <a:srgbClr val="212529"/>
-                </a:solidFill>
-                <a:latin typeface="+mn-ea"/>
-              </a:rPr>
-              <a:t>(2)]</a:t>
-            </a:r>
-            <a:r>
-              <a:rPr lang="en-US" altLang="ko-KR" sz="2800" dirty="0">
-                <a:solidFill>
-                  <a:srgbClr val="212529"/>
-                </a:solidFill>
-                <a:latin typeface="+mn-ea"/>
-              </a:rPr>
-              <a:t> </a:t>
-            </a:r>
-            <a:r>
-              <a:rPr lang="ko-KR" altLang="en-US" sz="2800" dirty="0">
-                <a:solidFill>
-                  <a:srgbClr val="212529"/>
-                </a:solidFill>
-                <a:latin typeface="+mn-ea"/>
-              </a:rPr>
-              <a:t>커리큘럼 클릭</a:t>
-            </a:r>
-            <a:endParaRPr lang="en-US" altLang="ko-KR" sz="2800" dirty="0">
-              <a:solidFill>
-                <a:srgbClr val="212529"/>
-              </a:solidFill>
-              <a:latin typeface="+mn-ea"/>
-            </a:endParaRPr>
-          </a:p>
-          <a:p>
-            <a:pPr lvl="1"/>
-            <a:r>
-              <a:rPr lang="ko-KR" altLang="en-US" sz="2800" b="1" dirty="0">
-                <a:solidFill>
-                  <a:srgbClr val="212529"/>
-                </a:solidFill>
-                <a:latin typeface="+mn-ea"/>
-              </a:rPr>
-              <a:t>➡ </a:t>
-            </a:r>
-            <a:r>
-              <a:rPr lang="en-US" altLang="ko-KR" sz="2800" b="1" dirty="0">
-                <a:solidFill>
-                  <a:schemeClr val="accent1"/>
-                </a:solidFill>
-                <a:latin typeface="+mn-ea"/>
-              </a:rPr>
-              <a:t>[</a:t>
-            </a:r>
-            <a:r>
-              <a:rPr lang="ko-KR" altLang="en-US" sz="2800" b="1" dirty="0" err="1">
-                <a:solidFill>
-                  <a:schemeClr val="accent1"/>
-                </a:solidFill>
-                <a:latin typeface="+mn-ea"/>
-              </a:rPr>
-              <a:t>실습문제</a:t>
-            </a:r>
-            <a:r>
-              <a:rPr lang="en-US" altLang="ko-KR" sz="2800" b="1" dirty="0">
-                <a:solidFill>
-                  <a:schemeClr val="accent1"/>
-                </a:solidFill>
-                <a:latin typeface="+mn-ea"/>
-              </a:rPr>
-              <a:t>2. </a:t>
-            </a:r>
-            <a:r>
-              <a:rPr lang="ko-KR" altLang="en-US" sz="2800" b="1" dirty="0">
-                <a:solidFill>
-                  <a:schemeClr val="accent1"/>
-                </a:solidFill>
-                <a:latin typeface="+mn-ea"/>
-              </a:rPr>
-              <a:t>댓글 등록하기</a:t>
-            </a:r>
-            <a:r>
-              <a:rPr lang="en-US" altLang="ko-KR" sz="2800" b="1" dirty="0">
-                <a:solidFill>
-                  <a:schemeClr val="accent1"/>
-                </a:solidFill>
-                <a:latin typeface="+mn-ea"/>
-              </a:rPr>
-              <a:t>]</a:t>
-            </a:r>
-            <a:r>
-              <a:rPr lang="en-US" altLang="ko-KR" sz="2800" dirty="0">
-                <a:solidFill>
-                  <a:schemeClr val="accent1"/>
-                </a:solidFill>
-                <a:latin typeface="+mn-ea"/>
-              </a:rPr>
-              <a:t> </a:t>
-            </a:r>
-            <a:r>
-              <a:rPr lang="ko-KR" altLang="en-US" sz="2800" dirty="0">
-                <a:solidFill>
-                  <a:srgbClr val="212529"/>
-                </a:solidFill>
-                <a:latin typeface="+mn-ea"/>
-              </a:rPr>
-              <a:t> 진행</a:t>
-            </a:r>
-          </a:p>
-        </p:txBody>
-      </p:sp>
-    </p:spTree>
-    <p:extLst>
-      <p:ext uri="{BB962C8B-B14F-4D97-AF65-F5344CB8AC3E}">
-        <p14:creationId xmlns:p14="http://schemas.microsoft.com/office/powerpoint/2010/main" val="848524128"/>
-      </p:ext>
-    </p:extLst>
-  </p:cSld>
-  <p:clrMapOvr>
-    <a:masterClrMapping/>
-  </p:clrMapOvr>
-</p:sld>
-</file>
-
-<file path=ppt/slides/slide57.xml><?xml version="1.0" encoding="utf-8"?>
-<p:sld xmlns:a="http://schemas.openxmlformats.org/drawingml/2006/main" xmlns:r="http://schemas.openxmlformats.org/officeDocument/2006/relationships" xmlns:p="http://schemas.openxmlformats.org/presentationml/2006/main">
-  <p:cSld>
-    <p:spTree>
-      <p:nvGrpSpPr>
-        <p:cNvPr id="1" name=""/>
-        <p:cNvGrpSpPr/>
-        <p:nvPr/>
-      </p:nvGrpSpPr>
-      <p:grpSpPr>
-        <a:xfrm>
-          <a:off x="0" y="0"/>
-          <a:ext cx="0" cy="0"/>
-          <a:chOff x="0" y="0"/>
-          <a:chExt cx="0" cy="0"/>
-        </a:xfrm>
-      </p:grpSpPr>
-      <p:sp>
-        <p:nvSpPr>
-          <p:cNvPr id="13" name="내용 개체 틀 2">
-            <a:extLst>
-              <a:ext uri="{FF2B5EF4-FFF2-40B4-BE49-F238E27FC236}">
-                <a16:creationId xmlns:a16="http://schemas.microsoft.com/office/drawing/2014/main" id="{847FD532-7F61-A001-537F-B970BD821AF3}"/>
-              </a:ext>
-            </a:extLst>
-          </p:cNvPr>
-          <p:cNvSpPr>
-            <a:spLocks noGrp="1"/>
-          </p:cNvSpPr>
-          <p:nvPr>
-            <p:ph idx="1"/>
-          </p:nvPr>
-        </p:nvSpPr>
-        <p:spPr>
-          <a:xfrm>
-            <a:off x="510988" y="1328391"/>
-            <a:ext cx="11260802" cy="5328442"/>
-          </a:xfrm>
-        </p:spPr>
-        <p:txBody>
-          <a:bodyPr>
-            <a:normAutofit/>
-          </a:bodyPr>
-          <a:lstStyle/>
-          <a:p>
-            <a:endParaRPr lang="en-US" altLang="ko-KR" dirty="0"/>
-          </a:p>
-          <a:p>
-            <a:pPr marL="0" indent="0">
-              <a:buNone/>
-            </a:pPr>
-            <a:endParaRPr lang="en-US" altLang="ko-KR" dirty="0"/>
-          </a:p>
-          <a:p>
-            <a:endParaRPr lang="en-US" altLang="ko-KR" dirty="0"/>
-          </a:p>
-        </p:txBody>
-      </p:sp>
-      <p:sp>
-        <p:nvSpPr>
-          <p:cNvPr id="4" name="날짜 개체 틀 3">
-            <a:extLst>
-              <a:ext uri="{FF2B5EF4-FFF2-40B4-BE49-F238E27FC236}">
-                <a16:creationId xmlns:a16="http://schemas.microsoft.com/office/drawing/2014/main" id="{A695DDE5-0A39-A366-4CFE-A283911999CD}"/>
-              </a:ext>
-            </a:extLst>
-          </p:cNvPr>
-          <p:cNvSpPr>
-            <a:spLocks noGrp="1"/>
-          </p:cNvSpPr>
-          <p:nvPr>
-            <p:ph type="dt" sz="half" idx="10"/>
-          </p:nvPr>
-        </p:nvSpPr>
-        <p:spPr/>
-        <p:txBody>
-          <a:bodyPr/>
-          <a:lstStyle/>
-          <a:p>
-            <a:fld id="{0F78D9C4-20C1-4B15-A116-16DC77AD9A1E}" type="datetime1">
-              <a:rPr lang="ko-KR" altLang="en-US" smtClean="0"/>
-              <a:t>2024-06-03</a:t>
-            </a:fld>
-            <a:endParaRPr lang="ko-KR" altLang="en-US"/>
-          </a:p>
-        </p:txBody>
-      </p:sp>
-      <p:sp>
-        <p:nvSpPr>
-          <p:cNvPr id="5" name="슬라이드 번호 개체 틀 4">
-            <a:extLst>
-              <a:ext uri="{FF2B5EF4-FFF2-40B4-BE49-F238E27FC236}">
-                <a16:creationId xmlns:a16="http://schemas.microsoft.com/office/drawing/2014/main" id="{5E040F43-60A7-C50D-1F5B-F984054F2D7C}"/>
-              </a:ext>
-            </a:extLst>
-          </p:cNvPr>
-          <p:cNvSpPr>
-            <a:spLocks noGrp="1"/>
-          </p:cNvSpPr>
-          <p:nvPr>
-            <p:ph type="sldNum" sz="quarter" idx="12"/>
-          </p:nvPr>
-        </p:nvSpPr>
-        <p:spPr/>
-        <p:txBody>
-          <a:bodyPr/>
-          <a:lstStyle/>
-          <a:p>
-            <a:fld id="{083A2CE0-18CD-4102-B738-4ACFF9E68BA4}" type="slidenum">
-              <a:rPr lang="ko-KR" altLang="en-US" smtClean="0"/>
-              <a:t>57</a:t>
-            </a:fld>
-            <a:endParaRPr lang="ko-KR" altLang="en-US"/>
-          </a:p>
-        </p:txBody>
-      </p:sp>
-      <p:sp>
-        <p:nvSpPr>
-          <p:cNvPr id="2" name="제목 1">
-            <a:extLst>
-              <a:ext uri="{FF2B5EF4-FFF2-40B4-BE49-F238E27FC236}">
-                <a16:creationId xmlns:a16="http://schemas.microsoft.com/office/drawing/2014/main" id="{5FAC57F5-99D7-9C46-B6C1-D16224151FE9}"/>
-              </a:ext>
-            </a:extLst>
-          </p:cNvPr>
-          <p:cNvSpPr>
-            <a:spLocks noGrp="1"/>
-          </p:cNvSpPr>
-          <p:nvPr>
-            <p:ph type="title"/>
-          </p:nvPr>
-        </p:nvSpPr>
-        <p:spPr/>
-        <p:txBody>
-          <a:bodyPr/>
-          <a:lstStyle/>
-          <a:p>
-            <a:r>
-              <a:rPr lang="ko-KR" altLang="en-US" dirty="0">
-                <a:solidFill>
-                  <a:srgbClr val="6EC173"/>
-                </a:solidFill>
-              </a:rPr>
-              <a:t>실습</a:t>
-            </a:r>
-            <a:r>
-              <a:rPr lang="en-US" altLang="ko-KR" dirty="0">
-                <a:solidFill>
-                  <a:srgbClr val="6EC173"/>
-                </a:solidFill>
-              </a:rPr>
-              <a:t>.  </a:t>
-            </a:r>
-            <a:r>
-              <a:rPr lang="en-US" altLang="ko-KR" dirty="0"/>
-              <a:t> </a:t>
-            </a:r>
-            <a:r>
-              <a:rPr lang="ko-KR" altLang="en-US" dirty="0"/>
-              <a:t>이벤트 다루기</a:t>
-            </a:r>
-            <a:r>
-              <a:rPr lang="en-US" altLang="ko-KR" dirty="0"/>
-              <a:t>(3)</a:t>
-            </a:r>
-            <a:endParaRPr lang="ko-KR" altLang="en-US" dirty="0"/>
-          </a:p>
-        </p:txBody>
-      </p:sp>
-      <p:sp>
-        <p:nvSpPr>
-          <p:cNvPr id="6" name="내용 개체 틀 1">
-            <a:extLst>
-              <a:ext uri="{FF2B5EF4-FFF2-40B4-BE49-F238E27FC236}">
-                <a16:creationId xmlns:a16="http://schemas.microsoft.com/office/drawing/2014/main" id="{70C2BA37-BE91-39C4-AC08-0E8A1052E2F7}"/>
-              </a:ext>
-            </a:extLst>
-          </p:cNvPr>
-          <p:cNvSpPr txBox="1">
-            <a:spLocks/>
-          </p:cNvSpPr>
-          <p:nvPr/>
-        </p:nvSpPr>
-        <p:spPr>
-          <a:xfrm>
-            <a:off x="838200" y="1825625"/>
-            <a:ext cx="10515600" cy="4351338"/>
-          </a:xfrm>
-          <a:prstGeom prst="rect">
-            <a:avLst/>
-          </a:prstGeom>
-        </p:spPr>
-        <p:txBody>
-          <a:bodyPr vert="horz" lIns="91440" tIns="45720" rIns="91440" bIns="45720" rtlCol="0">
-            <a:normAutofit/>
-          </a:bodyPr>
-          <a:lstStyle>
-            <a:lvl1pPr marL="228600" indent="-228600" algn="l" defTabSz="914400" rtl="0" eaLnBrk="1" latinLnBrk="1" hangingPunct="1">
-              <a:lnSpc>
-                <a:spcPct val="90000"/>
-              </a:lnSpc>
-              <a:spcBef>
-                <a:spcPts val="1000"/>
-              </a:spcBef>
-              <a:buFont typeface="Arial" panose="020B0604020202020204" pitchFamily="34" charset="0"/>
-              <a:buChar char="•"/>
-              <a:defRPr sz="2800" kern="1200">
-                <a:solidFill>
-                  <a:schemeClr val="tx1"/>
-                </a:solidFill>
-                <a:latin typeface="+mn-lt"/>
-                <a:ea typeface="+mn-ea"/>
-                <a:cs typeface="+mn-cs"/>
-              </a:defRPr>
-            </a:lvl1pPr>
-            <a:lvl2pPr marL="685800" indent="-228600" algn="l" defTabSz="914400" rtl="0" eaLnBrk="1" latinLnBrk="1" hangingPunct="1">
-              <a:lnSpc>
-                <a:spcPct val="90000"/>
-              </a:lnSpc>
-              <a:spcBef>
-                <a:spcPts val="500"/>
-              </a:spcBef>
-              <a:buFont typeface="Arial" panose="020B0604020202020204" pitchFamily="34" charset="0"/>
-              <a:buChar char="•"/>
-              <a:defRPr sz="2400" kern="1200">
-                <a:solidFill>
-                  <a:schemeClr val="tx1"/>
-                </a:solidFill>
-                <a:latin typeface="+mn-lt"/>
-                <a:ea typeface="+mn-ea"/>
-                <a:cs typeface="+mn-cs"/>
-              </a:defRPr>
-            </a:lvl2pPr>
-            <a:lvl3pPr marL="1143000" indent="-228600" algn="l" defTabSz="914400" rtl="0" eaLnBrk="1" latinLnBrk="1" hangingPunct="1">
-              <a:lnSpc>
-                <a:spcPct val="90000"/>
-              </a:lnSpc>
-              <a:spcBef>
-                <a:spcPts val="500"/>
-              </a:spcBef>
-              <a:buFont typeface="Arial" panose="020B0604020202020204" pitchFamily="34" charset="0"/>
-              <a:buChar char="•"/>
-              <a:defRPr sz="2000" kern="1200">
-                <a:solidFill>
-                  <a:schemeClr val="tx1"/>
-                </a:solidFill>
-                <a:latin typeface="+mn-lt"/>
-                <a:ea typeface="+mn-ea"/>
-                <a:cs typeface="+mn-cs"/>
-              </a:defRPr>
-            </a:lvl3pPr>
-            <a:lvl4pPr marL="1600200" indent="-228600" algn="l" defTabSz="914400" rtl="0" eaLnBrk="1" latinLnBrk="1" hangingPunct="1">
-              <a:lnSpc>
-                <a:spcPct val="90000"/>
-              </a:lnSpc>
-              <a:spcBef>
-                <a:spcPts val="500"/>
-              </a:spcBef>
-              <a:buFont typeface="Arial" panose="020B0604020202020204" pitchFamily="34" charset="0"/>
-              <a:buChar char="•"/>
-              <a:defRPr sz="1800" kern="1200">
-                <a:solidFill>
-                  <a:schemeClr val="tx1"/>
-                </a:solidFill>
-                <a:latin typeface="+mn-lt"/>
-                <a:ea typeface="+mn-ea"/>
-                <a:cs typeface="+mn-cs"/>
-              </a:defRPr>
-            </a:lvl4pPr>
-            <a:lvl5pPr marL="2057400" indent="-228600" algn="l" defTabSz="914400" rtl="0" eaLnBrk="1" latinLnBrk="1" hangingPunct="1">
-              <a:lnSpc>
-                <a:spcPct val="90000"/>
-              </a:lnSpc>
-              <a:spcBef>
-                <a:spcPts val="500"/>
-              </a:spcBef>
-              <a:buFont typeface="Arial" panose="020B0604020202020204" pitchFamily="34" charset="0"/>
-              <a:buChar char="•"/>
-              <a:defRPr sz="1800" kern="1200">
-                <a:solidFill>
-                  <a:schemeClr val="tx1"/>
-                </a:solidFill>
-                <a:latin typeface="+mn-lt"/>
-                <a:ea typeface="+mn-ea"/>
-                <a:cs typeface="+mn-cs"/>
-              </a:defRPr>
-            </a:lvl5pPr>
-            <a:lvl6pPr marL="2514600" indent="-228600" algn="l" defTabSz="914400" rtl="0" eaLnBrk="1" latinLnBrk="1" hangingPunct="1">
-              <a:lnSpc>
-                <a:spcPct val="90000"/>
-              </a:lnSpc>
-              <a:spcBef>
-                <a:spcPts val="500"/>
-              </a:spcBef>
-              <a:buFont typeface="Arial" panose="020B0604020202020204" pitchFamily="34" charset="0"/>
-              <a:buChar char="•"/>
-              <a:defRPr sz="1800" kern="1200">
-                <a:solidFill>
-                  <a:schemeClr val="tx1"/>
-                </a:solidFill>
-                <a:latin typeface="+mn-lt"/>
-                <a:ea typeface="+mn-ea"/>
-                <a:cs typeface="+mn-cs"/>
-              </a:defRPr>
-            </a:lvl6pPr>
-            <a:lvl7pPr marL="2971800" indent="-228600" algn="l" defTabSz="914400" rtl="0" eaLnBrk="1" latinLnBrk="1" hangingPunct="1">
-              <a:lnSpc>
-                <a:spcPct val="90000"/>
-              </a:lnSpc>
-              <a:spcBef>
-                <a:spcPts val="500"/>
-              </a:spcBef>
-              <a:buFont typeface="Arial" panose="020B0604020202020204" pitchFamily="34" charset="0"/>
-              <a:buChar char="•"/>
-              <a:defRPr sz="1800" kern="1200">
-                <a:solidFill>
-                  <a:schemeClr val="tx1"/>
-                </a:solidFill>
-                <a:latin typeface="+mn-lt"/>
-                <a:ea typeface="+mn-ea"/>
-                <a:cs typeface="+mn-cs"/>
-              </a:defRPr>
-            </a:lvl7pPr>
-            <a:lvl8pPr marL="3429000" indent="-228600" algn="l" defTabSz="914400" rtl="0" eaLnBrk="1" latinLnBrk="1" hangingPunct="1">
-              <a:lnSpc>
-                <a:spcPct val="90000"/>
-              </a:lnSpc>
-              <a:spcBef>
-                <a:spcPts val="500"/>
-              </a:spcBef>
-              <a:buFont typeface="Arial" panose="020B0604020202020204" pitchFamily="34" charset="0"/>
-              <a:buChar char="•"/>
-              <a:defRPr sz="1800" kern="1200">
-                <a:solidFill>
-                  <a:schemeClr val="tx1"/>
-                </a:solidFill>
-                <a:latin typeface="+mn-lt"/>
-                <a:ea typeface="+mn-ea"/>
-                <a:cs typeface="+mn-cs"/>
-              </a:defRPr>
-            </a:lvl8pPr>
-            <a:lvl9pPr marL="3886200" indent="-228600" algn="l" defTabSz="914400" rtl="0" eaLnBrk="1" latinLnBrk="1" hangingPunct="1">
-              <a:lnSpc>
-                <a:spcPct val="90000"/>
-              </a:lnSpc>
-              <a:spcBef>
-                <a:spcPts val="500"/>
-              </a:spcBef>
-              <a:buFont typeface="Arial" panose="020B0604020202020204" pitchFamily="34" charset="0"/>
-              <a:buChar char="•"/>
-              <a:defRPr sz="1800" kern="1200">
-                <a:solidFill>
-                  <a:schemeClr val="tx1"/>
-                </a:solidFill>
-                <a:latin typeface="+mn-lt"/>
-                <a:ea typeface="+mn-ea"/>
-                <a:cs typeface="+mn-cs"/>
-              </a:defRPr>
-            </a:lvl9pPr>
-          </a:lstStyle>
-          <a:p>
-            <a:pPr marL="457200" lvl="1" indent="0">
-              <a:buFont typeface="Arial" panose="020B0604020202020204" pitchFamily="34" charset="0"/>
-              <a:buNone/>
-            </a:pPr>
-            <a:endParaRPr lang="en-US" altLang="ko-KR" dirty="0">
-              <a:solidFill>
-                <a:srgbClr val="212529"/>
-              </a:solidFill>
-              <a:latin typeface="+mn-ea"/>
-            </a:endParaRPr>
-          </a:p>
-          <a:p>
-            <a:pPr marL="457200" lvl="1" indent="0">
-              <a:buFont typeface="Arial" panose="020B0604020202020204" pitchFamily="34" charset="0"/>
-              <a:buNone/>
-            </a:pPr>
-            <a:endParaRPr lang="en-US" altLang="ko-KR" dirty="0">
-              <a:solidFill>
-                <a:srgbClr val="212529"/>
-              </a:solidFill>
-              <a:latin typeface="+mn-ea"/>
-            </a:endParaRPr>
-          </a:p>
-          <a:p>
-            <a:r>
-              <a:rPr lang="en-US" altLang="ko-KR" b="1" dirty="0">
-                <a:solidFill>
-                  <a:srgbClr val="212529"/>
-                </a:solidFill>
-                <a:latin typeface="+mn-ea"/>
-              </a:rPr>
-              <a:t>[</a:t>
-            </a:r>
-            <a:r>
-              <a:rPr lang="ko-KR" altLang="en-US" b="1" dirty="0" err="1">
-                <a:solidFill>
-                  <a:srgbClr val="212529"/>
-                </a:solidFill>
-                <a:latin typeface="+mn-ea"/>
-              </a:rPr>
-              <a:t>코딩온</a:t>
-            </a:r>
-            <a:r>
-              <a:rPr lang="en-US" altLang="ko-KR" b="1" dirty="0">
-                <a:solidFill>
-                  <a:srgbClr val="212529"/>
-                </a:solidFill>
-                <a:latin typeface="+mn-ea"/>
-              </a:rPr>
-              <a:t>] HTML, CSS, JS </a:t>
-            </a:r>
-            <a:r>
-              <a:rPr lang="ko-KR" altLang="en-US" b="1" dirty="0">
-                <a:solidFill>
-                  <a:srgbClr val="212529"/>
-                </a:solidFill>
-                <a:latin typeface="+mn-ea"/>
-              </a:rPr>
-              <a:t>실습</a:t>
-            </a:r>
-            <a:r>
-              <a:rPr lang="en-US" altLang="ko-KR" b="1" dirty="0">
-                <a:solidFill>
-                  <a:srgbClr val="212529"/>
-                </a:solidFill>
-                <a:latin typeface="+mn-ea"/>
-              </a:rPr>
-              <a:t> </a:t>
-            </a:r>
-            <a:r>
-              <a:rPr lang="ko-KR" altLang="en-US" dirty="0">
-                <a:solidFill>
-                  <a:srgbClr val="212529"/>
-                </a:solidFill>
-                <a:latin typeface="+mn-ea"/>
-              </a:rPr>
-              <a:t>강의 클릭</a:t>
-            </a:r>
-            <a:br>
-              <a:rPr lang="en-US" altLang="ko-KR" dirty="0">
-                <a:solidFill>
-                  <a:srgbClr val="212529"/>
-                </a:solidFill>
-                <a:latin typeface="+mn-ea"/>
-              </a:rPr>
-            </a:br>
-            <a:endParaRPr lang="en-US" altLang="ko-KR" dirty="0">
-              <a:solidFill>
-                <a:srgbClr val="212529"/>
-              </a:solidFill>
-              <a:latin typeface="+mn-ea"/>
-            </a:endParaRPr>
-          </a:p>
-          <a:p>
-            <a:pPr lvl="1"/>
-            <a:r>
-              <a:rPr lang="ko-KR" altLang="en-US" sz="2800" b="1" dirty="0">
-                <a:solidFill>
-                  <a:srgbClr val="212529"/>
-                </a:solidFill>
-                <a:latin typeface="+mn-ea"/>
-              </a:rPr>
-              <a:t>➡ </a:t>
-            </a:r>
-            <a:r>
-              <a:rPr lang="en-US" altLang="ko-KR" sz="2800" b="1" dirty="0">
-                <a:solidFill>
-                  <a:srgbClr val="212529"/>
-                </a:solidFill>
-                <a:latin typeface="+mn-ea"/>
-              </a:rPr>
-              <a:t>[</a:t>
-            </a:r>
-            <a:r>
-              <a:rPr lang="en-US" altLang="ko-KR" sz="2800" b="1" dirty="0" err="1">
-                <a:solidFill>
-                  <a:srgbClr val="212529"/>
-                </a:solidFill>
-                <a:latin typeface="+mn-ea"/>
-              </a:rPr>
-              <a:t>Javascript</a:t>
-            </a:r>
-            <a:r>
-              <a:rPr lang="en-US" altLang="ko-KR" sz="2800" b="1" dirty="0">
-                <a:solidFill>
-                  <a:srgbClr val="212529"/>
-                </a:solidFill>
-                <a:latin typeface="+mn-ea"/>
-              </a:rPr>
-              <a:t> DOM </a:t>
-            </a:r>
-            <a:r>
-              <a:rPr lang="ko-KR" altLang="en-US" sz="2800" b="1" dirty="0">
-                <a:solidFill>
-                  <a:srgbClr val="212529"/>
-                </a:solidFill>
-                <a:latin typeface="+mn-ea"/>
-              </a:rPr>
-              <a:t>실습</a:t>
-            </a:r>
-            <a:r>
-              <a:rPr lang="en-US" altLang="ko-KR" sz="2800" b="1" dirty="0">
-                <a:solidFill>
-                  <a:srgbClr val="212529"/>
-                </a:solidFill>
-                <a:latin typeface="+mn-ea"/>
-              </a:rPr>
-              <a:t>(2)]</a:t>
-            </a:r>
-            <a:r>
-              <a:rPr lang="en-US" altLang="ko-KR" sz="2800" dirty="0">
-                <a:solidFill>
-                  <a:srgbClr val="212529"/>
-                </a:solidFill>
-                <a:latin typeface="+mn-ea"/>
-              </a:rPr>
-              <a:t> </a:t>
-            </a:r>
-            <a:r>
-              <a:rPr lang="ko-KR" altLang="en-US" sz="2800" dirty="0">
-                <a:solidFill>
-                  <a:srgbClr val="212529"/>
-                </a:solidFill>
-                <a:latin typeface="+mn-ea"/>
-              </a:rPr>
-              <a:t>커리큘럼 클릭</a:t>
-            </a:r>
-            <a:endParaRPr lang="en-US" altLang="ko-KR" sz="2800" dirty="0">
-              <a:solidFill>
-                <a:srgbClr val="212529"/>
-              </a:solidFill>
-              <a:latin typeface="+mn-ea"/>
-            </a:endParaRPr>
-          </a:p>
-          <a:p>
-            <a:pPr lvl="1"/>
-            <a:r>
-              <a:rPr lang="ko-KR" altLang="en-US" sz="2800" b="1" dirty="0">
-                <a:solidFill>
-                  <a:srgbClr val="212529"/>
-                </a:solidFill>
-                <a:latin typeface="+mn-ea"/>
-              </a:rPr>
-              <a:t>➡ </a:t>
-            </a:r>
-            <a:r>
-              <a:rPr lang="en-US" altLang="ko-KR" sz="2800" b="1" dirty="0">
-                <a:solidFill>
-                  <a:schemeClr val="accent1"/>
-                </a:solidFill>
-                <a:latin typeface="+mn-ea"/>
-              </a:rPr>
-              <a:t>[</a:t>
-            </a:r>
-            <a:r>
-              <a:rPr lang="ko-KR" altLang="en-US" sz="2800" b="1" dirty="0" err="1">
-                <a:solidFill>
-                  <a:schemeClr val="accent1"/>
-                </a:solidFill>
-                <a:latin typeface="+mn-ea"/>
-              </a:rPr>
-              <a:t>실습문제</a:t>
-            </a:r>
-            <a:r>
-              <a:rPr lang="en-US" altLang="ko-KR" sz="2800" b="1" dirty="0">
-                <a:solidFill>
-                  <a:schemeClr val="accent1"/>
-                </a:solidFill>
-                <a:latin typeface="+mn-ea"/>
-              </a:rPr>
-              <a:t>3. </a:t>
-            </a:r>
-            <a:r>
-              <a:rPr lang="ko-KR" altLang="en-US" sz="2800" b="1" dirty="0">
-                <a:solidFill>
-                  <a:schemeClr val="accent1"/>
-                </a:solidFill>
-                <a:latin typeface="+mn-ea"/>
-              </a:rPr>
-              <a:t>계산기 만들기</a:t>
-            </a:r>
-            <a:r>
-              <a:rPr lang="en-US" altLang="ko-KR" sz="2800" b="1" dirty="0">
-                <a:solidFill>
-                  <a:schemeClr val="accent1"/>
-                </a:solidFill>
-                <a:latin typeface="+mn-ea"/>
-              </a:rPr>
-              <a:t>]</a:t>
-            </a:r>
-            <a:r>
-              <a:rPr lang="en-US" altLang="ko-KR" sz="2800" dirty="0">
-                <a:solidFill>
-                  <a:schemeClr val="accent1"/>
-                </a:solidFill>
-                <a:latin typeface="+mn-ea"/>
-              </a:rPr>
-              <a:t> </a:t>
-            </a:r>
-            <a:r>
-              <a:rPr lang="ko-KR" altLang="en-US" sz="2800" dirty="0">
-                <a:solidFill>
-                  <a:srgbClr val="212529"/>
-                </a:solidFill>
-                <a:latin typeface="+mn-ea"/>
-              </a:rPr>
-              <a:t> 진행</a:t>
-            </a:r>
-          </a:p>
-        </p:txBody>
-      </p:sp>
-    </p:spTree>
-    <p:extLst>
-      <p:ext uri="{BB962C8B-B14F-4D97-AF65-F5344CB8AC3E}">
-        <p14:creationId xmlns:p14="http://schemas.microsoft.com/office/powerpoint/2010/main" val="2078636391"/>
-      </p:ext>
-    </p:extLst>
-  </p:cSld>
-  <p:clrMapOvr>
-    <a:masterClrMapping/>
-  </p:clrMapOvr>
-</p:sld>
-</file>
-
-<file path=ppt/slides/slide58.xml><?xml version="1.0" encoding="utf-8"?>
-<p:sld xmlns:a="http://schemas.openxmlformats.org/drawingml/2006/main" xmlns:r="http://schemas.openxmlformats.org/officeDocument/2006/relationships" xmlns:p="http://schemas.openxmlformats.org/presentationml/2006/main">
-  <p:cSld>
-    <p:spTree>
-      <p:nvGrpSpPr>
-        <p:cNvPr id="1" name=""/>
-        <p:cNvGrpSpPr/>
-        <p:nvPr/>
-      </p:nvGrpSpPr>
-      <p:grpSpPr>
-        <a:xfrm>
-          <a:off x="0" y="0"/>
-          <a:ext cx="0" cy="0"/>
-          <a:chOff x="0" y="0"/>
-          <a:chExt cx="0" cy="0"/>
-        </a:xfrm>
-      </p:grpSpPr>
-      <p:sp>
-        <p:nvSpPr>
-          <p:cNvPr id="13" name="내용 개체 틀 2">
-            <a:extLst>
-              <a:ext uri="{FF2B5EF4-FFF2-40B4-BE49-F238E27FC236}">
-                <a16:creationId xmlns:a16="http://schemas.microsoft.com/office/drawing/2014/main" id="{847FD532-7F61-A001-537F-B970BD821AF3}"/>
-              </a:ext>
-            </a:extLst>
-          </p:cNvPr>
-          <p:cNvSpPr>
-            <a:spLocks noGrp="1"/>
-          </p:cNvSpPr>
-          <p:nvPr>
-            <p:ph idx="1"/>
-          </p:nvPr>
-        </p:nvSpPr>
-        <p:spPr>
-          <a:xfrm>
-            <a:off x="510988" y="1328391"/>
-            <a:ext cx="11260802" cy="5328442"/>
-          </a:xfrm>
-        </p:spPr>
-        <p:txBody>
-          <a:bodyPr>
-            <a:normAutofit/>
-          </a:bodyPr>
-          <a:lstStyle/>
-          <a:p>
-            <a:endParaRPr lang="en-US" altLang="ko-KR" dirty="0"/>
-          </a:p>
-          <a:p>
-            <a:pPr marL="0" indent="0">
-              <a:buNone/>
-            </a:pPr>
-            <a:endParaRPr lang="en-US" altLang="ko-KR" dirty="0"/>
-          </a:p>
-          <a:p>
-            <a:endParaRPr lang="en-US" altLang="ko-KR" dirty="0"/>
-          </a:p>
-        </p:txBody>
-      </p:sp>
-      <p:sp>
-        <p:nvSpPr>
-          <p:cNvPr id="4" name="날짜 개체 틀 3">
-            <a:extLst>
-              <a:ext uri="{FF2B5EF4-FFF2-40B4-BE49-F238E27FC236}">
-                <a16:creationId xmlns:a16="http://schemas.microsoft.com/office/drawing/2014/main" id="{A695DDE5-0A39-A366-4CFE-A283911999CD}"/>
-              </a:ext>
-            </a:extLst>
-          </p:cNvPr>
-          <p:cNvSpPr>
-            <a:spLocks noGrp="1"/>
-          </p:cNvSpPr>
-          <p:nvPr>
-            <p:ph type="dt" sz="half" idx="10"/>
-          </p:nvPr>
-        </p:nvSpPr>
-        <p:spPr/>
-        <p:txBody>
-          <a:bodyPr/>
-          <a:lstStyle/>
-          <a:p>
-            <a:fld id="{0F78D9C4-20C1-4B15-A116-16DC77AD9A1E}" type="datetime1">
-              <a:rPr lang="ko-KR" altLang="en-US" smtClean="0"/>
-              <a:t>2024-06-03</a:t>
-            </a:fld>
-            <a:endParaRPr lang="ko-KR" altLang="en-US"/>
-          </a:p>
-        </p:txBody>
-      </p:sp>
-      <p:sp>
-        <p:nvSpPr>
-          <p:cNvPr id="5" name="슬라이드 번호 개체 틀 4">
-            <a:extLst>
-              <a:ext uri="{FF2B5EF4-FFF2-40B4-BE49-F238E27FC236}">
-                <a16:creationId xmlns:a16="http://schemas.microsoft.com/office/drawing/2014/main" id="{5E040F43-60A7-C50D-1F5B-F984054F2D7C}"/>
-              </a:ext>
-            </a:extLst>
-          </p:cNvPr>
-          <p:cNvSpPr>
-            <a:spLocks noGrp="1"/>
-          </p:cNvSpPr>
-          <p:nvPr>
-            <p:ph type="sldNum" sz="quarter" idx="12"/>
-          </p:nvPr>
-        </p:nvSpPr>
-        <p:spPr/>
-        <p:txBody>
-          <a:bodyPr/>
-          <a:lstStyle/>
-          <a:p>
-            <a:fld id="{083A2CE0-18CD-4102-B738-4ACFF9E68BA4}" type="slidenum">
-              <a:rPr lang="ko-KR" altLang="en-US" smtClean="0"/>
-              <a:t>58</a:t>
             </a:fld>
             <a:endParaRPr lang="ko-KR" altLang="en-US"/>
           </a:p>

--- a/material/[SeSAC_YDP_6] 04_5_Javascript_표준객체,DOM.pptx
+++ b/material/[SeSAC_YDP_6] 04_5_Javascript_표준객체,DOM.pptx
@@ -255,7 +255,7 @@
           <a:p>
             <a:fld id="{2EF3F159-7250-4DD4-91C2-13B35D56E1AF}" type="datetimeFigureOut">
               <a:rPr lang="ko-KR" altLang="en-US" smtClean="0"/>
-              <a:t>2024-06-05</a:t>
+              <a:t>2024-06-10</a:t>
             </a:fld>
             <a:endParaRPr lang="ko-KR" altLang="en-US"/>
           </a:p>
@@ -13086,9 +13086,158 @@
           <a:chExt cx="0" cy="0"/>
         </a:xfrm>
       </p:grpSpPr>
+      <p:sp>
+        <p:nvSpPr>
+          <p:cNvPr id="8" name="내용 개체 틀 2">
+            <a:extLst>
+              <a:ext uri="{FF2B5EF4-FFF2-40B4-BE49-F238E27FC236}">
+                <a16:creationId xmlns:a16="http://schemas.microsoft.com/office/drawing/2014/main" id="{1D6B0722-9480-BB35-73CF-93B49F6C5FF8}"/>
+              </a:ext>
+            </a:extLst>
+          </p:cNvPr>
+          <p:cNvSpPr>
+            <a:spLocks noGrp="1"/>
+          </p:cNvSpPr>
+          <p:nvPr>
+            <p:ph idx="1"/>
+          </p:nvPr>
+        </p:nvSpPr>
+        <p:spPr>
+          <a:xfrm>
+            <a:off x="5921829" y="2411698"/>
+            <a:ext cx="4203700" cy="721058"/>
+          </a:xfrm>
+        </p:spPr>
+        <p:txBody>
+          <a:bodyPr/>
+          <a:lstStyle/>
+          <a:p>
+            <a:pPr marL="0" indent="0">
+              <a:buNone/>
+            </a:pPr>
+            <a:r>
+              <a:rPr lang="ko-KR" altLang="en-US" dirty="0"/>
+              <a:t>키</a:t>
+            </a:r>
+            <a:r>
+              <a:rPr lang="en-US" altLang="ko-KR" dirty="0"/>
+              <a:t>-</a:t>
+            </a:r>
+            <a:r>
+              <a:rPr lang="ko-KR" altLang="en-US" dirty="0"/>
+              <a:t>값 형태로 저장</a:t>
+            </a:r>
+          </a:p>
+        </p:txBody>
+      </p:sp>
+      <p:sp>
+        <p:nvSpPr>
+          <p:cNvPr id="4" name="날짜 개체 틀 3">
+            <a:extLst>
+              <a:ext uri="{FF2B5EF4-FFF2-40B4-BE49-F238E27FC236}">
+                <a16:creationId xmlns:a16="http://schemas.microsoft.com/office/drawing/2014/main" id="{B2744276-5C6F-AD8B-9F61-9B2A520D86A2}"/>
+              </a:ext>
+            </a:extLst>
+          </p:cNvPr>
+          <p:cNvSpPr>
+            <a:spLocks noGrp="1"/>
+          </p:cNvSpPr>
+          <p:nvPr>
+            <p:ph type="dt" sz="half" idx="10"/>
+          </p:nvPr>
+        </p:nvSpPr>
+        <p:spPr/>
+        <p:txBody>
+          <a:bodyPr/>
+          <a:lstStyle/>
+          <a:p>
+            <a:fld id="{9D0404D9-6A52-4A99-9101-80BD6AA53C94}" type="datetime6">
+              <a:rPr lang="ko-KR" altLang="en-US" smtClean="0"/>
+              <a:t>2024년 6월</a:t>
+            </a:fld>
+            <a:endParaRPr lang="ko-KR" altLang="en-US"/>
+          </a:p>
+        </p:txBody>
+      </p:sp>
+      <p:sp>
+        <p:nvSpPr>
+          <p:cNvPr id="5" name="슬라이드 번호 개체 틀 4">
+            <a:extLst>
+              <a:ext uri="{FF2B5EF4-FFF2-40B4-BE49-F238E27FC236}">
+                <a16:creationId xmlns:a16="http://schemas.microsoft.com/office/drawing/2014/main" id="{E12E7352-FB36-4681-B691-48A912BACDBE}"/>
+              </a:ext>
+            </a:extLst>
+          </p:cNvPr>
+          <p:cNvSpPr>
+            <a:spLocks noGrp="1"/>
+          </p:cNvSpPr>
+          <p:nvPr>
+            <p:ph type="sldNum" sz="quarter" idx="12"/>
+          </p:nvPr>
+        </p:nvSpPr>
+        <p:spPr/>
+        <p:txBody>
+          <a:bodyPr/>
+          <a:lstStyle/>
+          <a:p>
+            <a:fld id="{083A2CE0-18CD-4102-B738-4ACFF9E68BA4}" type="slidenum">
+              <a:rPr lang="ko-KR" altLang="en-US" smtClean="0"/>
+              <a:t>12</a:t>
+            </a:fld>
+            <a:endParaRPr lang="ko-KR" altLang="en-US"/>
+          </a:p>
+        </p:txBody>
+      </p:sp>
+      <p:sp>
+        <p:nvSpPr>
+          <p:cNvPr id="2" name="제목 1">
+            <a:extLst>
+              <a:ext uri="{FF2B5EF4-FFF2-40B4-BE49-F238E27FC236}">
+                <a16:creationId xmlns:a16="http://schemas.microsoft.com/office/drawing/2014/main" id="{4AB12D32-4144-5D6A-1E9C-7EB121AB397A}"/>
+              </a:ext>
+            </a:extLst>
+          </p:cNvPr>
+          <p:cNvSpPr>
+            <a:spLocks noGrp="1"/>
+          </p:cNvSpPr>
+          <p:nvPr>
+            <p:ph type="title"/>
+          </p:nvPr>
+        </p:nvSpPr>
+        <p:spPr/>
+        <p:txBody>
+          <a:bodyPr/>
+          <a:lstStyle/>
+          <a:p>
+            <a:r>
+              <a:rPr lang="en-US" altLang="ko-KR" dirty="0"/>
+              <a:t>Object</a:t>
+            </a:r>
+            <a:r>
+              <a:rPr lang="ko-KR" altLang="en-US" dirty="0"/>
+              <a:t> 자료형 </a:t>
+            </a:r>
+            <a:r>
+              <a:rPr lang="en-US" altLang="ko-KR" dirty="0"/>
+              <a:t>- </a:t>
+            </a:r>
+            <a:r>
+              <a:rPr lang="ko-KR" altLang="en-US" dirty="0" err="1"/>
+              <a:t>딕셔너리</a:t>
+            </a:r>
+            <a:endParaRPr lang="ko-KR" altLang="en-US" dirty="0"/>
+          </a:p>
+        </p:txBody>
+      </p:sp>
       <p:pic>
         <p:nvPicPr>
-          <p:cNvPr id="3" name="그림 2"/>
+          <p:cNvPr id="7" name="그림 6">
+            <a:extLst>
+              <a:ext uri="{FF2B5EF4-FFF2-40B4-BE49-F238E27FC236}">
+                <a16:creationId xmlns:a16="http://schemas.microsoft.com/office/drawing/2014/main" id="{F97B2092-7319-43BF-4B4D-0C4C6153717F}"/>
+              </a:ext>
+            </a:extLst>
+          </p:cNvPr>
           <p:cNvPicPr>
             <a:picLocks noChangeAspect="1"/>
           </p:cNvPicPr>
@@ -13102,157 +13251,14 @@
         </p:blipFill>
         <p:spPr>
           <a:xfrm>
-            <a:off x="1684412" y="1790700"/>
-            <a:ext cx="8340576" cy="3416300"/>
+            <a:off x="1158648" y="1758043"/>
+            <a:ext cx="4853140" cy="3549311"/>
           </a:xfrm>
           <a:prstGeom prst="rect">
             <a:avLst/>
           </a:prstGeom>
         </p:spPr>
       </p:pic>
-      <p:sp>
-        <p:nvSpPr>
-          <p:cNvPr id="8" name="내용 개체 틀 2">
-            <a:extLst>
-              <a:ext uri="{FF2B5EF4-FFF2-40B4-BE49-F238E27FC236}">
-                <a16:creationId xmlns:a16="http://schemas.microsoft.com/office/drawing/2014/main" id="{1D6B0722-9480-BB35-73CF-93B49F6C5FF8}"/>
-              </a:ext>
-            </a:extLst>
-          </p:cNvPr>
-          <p:cNvSpPr>
-            <a:spLocks noGrp="1"/>
-          </p:cNvSpPr>
-          <p:nvPr>
-            <p:ph idx="1"/>
-          </p:nvPr>
-        </p:nvSpPr>
-        <p:spPr>
-          <a:xfrm>
-            <a:off x="5562600" y="2477398"/>
-            <a:ext cx="4203700" cy="721058"/>
-          </a:xfrm>
-        </p:spPr>
-        <p:txBody>
-          <a:bodyPr/>
-          <a:lstStyle/>
-          <a:p>
-            <a:pPr marL="0" indent="0">
-              <a:buNone/>
-            </a:pPr>
-            <a:r>
-              <a:rPr lang="ko-KR" altLang="en-US" dirty="0"/>
-              <a:t>키</a:t>
-            </a:r>
-            <a:r>
-              <a:rPr lang="en-US" altLang="ko-KR" dirty="0"/>
-              <a:t>-</a:t>
-            </a:r>
-            <a:r>
-              <a:rPr lang="ko-KR" altLang="en-US" dirty="0"/>
-              <a:t>값 형태로 저장</a:t>
-            </a:r>
-          </a:p>
-        </p:txBody>
-      </p:sp>
-      <p:sp>
-        <p:nvSpPr>
-          <p:cNvPr id="4" name="날짜 개체 틀 3">
-            <a:extLst>
-              <a:ext uri="{FF2B5EF4-FFF2-40B4-BE49-F238E27FC236}">
-                <a16:creationId xmlns:a16="http://schemas.microsoft.com/office/drawing/2014/main" id="{B2744276-5C6F-AD8B-9F61-9B2A520D86A2}"/>
-              </a:ext>
-            </a:extLst>
-          </p:cNvPr>
-          <p:cNvSpPr>
-            <a:spLocks noGrp="1"/>
-          </p:cNvSpPr>
-          <p:nvPr>
-            <p:ph type="dt" sz="half" idx="10"/>
-          </p:nvPr>
-        </p:nvSpPr>
-        <p:spPr/>
-        <p:txBody>
-          <a:bodyPr/>
-          <a:lstStyle/>
-          <a:p>
-            <a:fld id="{9D0404D9-6A52-4A99-9101-80BD6AA53C94}" type="datetime6">
-              <a:rPr lang="ko-KR" altLang="en-US" smtClean="0"/>
-              <a:t>2024년 6월</a:t>
-            </a:fld>
-            <a:endParaRPr lang="ko-KR" altLang="en-US"/>
-          </a:p>
-        </p:txBody>
-      </p:sp>
-      <p:sp>
-        <p:nvSpPr>
-          <p:cNvPr id="5" name="슬라이드 번호 개체 틀 4">
-            <a:extLst>
-              <a:ext uri="{FF2B5EF4-FFF2-40B4-BE49-F238E27FC236}">
-                <a16:creationId xmlns:a16="http://schemas.microsoft.com/office/drawing/2014/main" id="{E12E7352-FB36-4681-B691-48A912BACDBE}"/>
-              </a:ext>
-            </a:extLst>
-          </p:cNvPr>
-          <p:cNvSpPr>
-            <a:spLocks noGrp="1"/>
-          </p:cNvSpPr>
-          <p:nvPr>
-            <p:ph type="sldNum" sz="quarter" idx="12"/>
-          </p:nvPr>
-        </p:nvSpPr>
-        <p:spPr/>
-        <p:txBody>
-          <a:bodyPr/>
-          <a:lstStyle/>
-          <a:p>
-            <a:fld id="{083A2CE0-18CD-4102-B738-4ACFF9E68BA4}" type="slidenum">
-              <a:rPr lang="ko-KR" altLang="en-US" smtClean="0"/>
-              <a:t>12</a:t>
-            </a:fld>
-            <a:endParaRPr lang="ko-KR" altLang="en-US"/>
-          </a:p>
-        </p:txBody>
-      </p:sp>
-      <p:sp>
-        <p:nvSpPr>
-          <p:cNvPr id="2" name="제목 1">
-            <a:extLst>
-              <a:ext uri="{FF2B5EF4-FFF2-40B4-BE49-F238E27FC236}">
-                <a16:creationId xmlns:a16="http://schemas.microsoft.com/office/drawing/2014/main" id="{4AB12D32-4144-5D6A-1E9C-7EB121AB397A}"/>
-              </a:ext>
-            </a:extLst>
-          </p:cNvPr>
-          <p:cNvSpPr>
-            <a:spLocks noGrp="1"/>
-          </p:cNvSpPr>
-          <p:nvPr>
-            <p:ph type="title"/>
-          </p:nvPr>
-        </p:nvSpPr>
-        <p:spPr/>
-        <p:txBody>
-          <a:bodyPr/>
-          <a:lstStyle/>
-          <a:p>
-            <a:r>
-              <a:rPr lang="en-US" altLang="ko-KR" dirty="0"/>
-              <a:t>Object</a:t>
-            </a:r>
-            <a:r>
-              <a:rPr lang="ko-KR" altLang="en-US" dirty="0"/>
-              <a:t> 자료형 </a:t>
-            </a:r>
-            <a:r>
-              <a:rPr lang="en-US" altLang="ko-KR" dirty="0"/>
-              <a:t>- </a:t>
-            </a:r>
-            <a:r>
-              <a:rPr lang="ko-KR" altLang="en-US" dirty="0" err="1"/>
-              <a:t>딕셔너리</a:t>
-            </a:r>
-            <a:endParaRPr lang="ko-KR" altLang="en-US" dirty="0"/>
-          </a:p>
-        </p:txBody>
-      </p:sp>
     </p:spTree>
     <p:extLst>
       <p:ext uri="{BB962C8B-B14F-4D97-AF65-F5344CB8AC3E}">
@@ -15188,7 +15194,7 @@
           <a:p>
             <a:fld id="{0F78D9C4-20C1-4B15-A116-16DC77AD9A1E}" type="datetime1">
               <a:rPr lang="ko-KR" altLang="en-US" smtClean="0"/>
-              <a:t>2024-06-05</a:t>
+              <a:t>2024-06-10</a:t>
             </a:fld>
             <a:endParaRPr lang="ko-KR" altLang="en-US"/>
           </a:p>
@@ -15948,7 +15954,7 @@
           <a:p>
             <a:fld id="{0F78D9C4-20C1-4B15-A116-16DC77AD9A1E}" type="datetime1">
               <a:rPr lang="ko-KR" altLang="en-US" smtClean="0"/>
-              <a:t>2024-06-05</a:t>
+              <a:t>2024-06-10</a:t>
             </a:fld>
             <a:endParaRPr lang="ko-KR" altLang="en-US"/>
           </a:p>
@@ -25258,7 +25264,7 @@
           <a:p>
             <a:fld id="{0F78D9C4-20C1-4B15-A116-16DC77AD9A1E}" type="datetime1">
               <a:rPr lang="ko-KR" altLang="en-US" smtClean="0"/>
-              <a:t>2024-06-05</a:t>
+              <a:t>2024-06-10</a:t>
             </a:fld>
             <a:endParaRPr lang="ko-KR" altLang="en-US"/>
           </a:p>
@@ -25878,7 +25884,7 @@
           <a:p>
             <a:fld id="{0F78D9C4-20C1-4B15-A116-16DC77AD9A1E}" type="datetime1">
               <a:rPr lang="ko-KR" altLang="en-US" smtClean="0"/>
-              <a:t>2024-06-05</a:t>
+              <a:t>2024-06-10</a:t>
             </a:fld>
             <a:endParaRPr lang="ko-KR" altLang="en-US"/>
           </a:p>
@@ -29029,7 +29035,7 @@
           <a:p>
             <a:fld id="{0F78D9C4-20C1-4B15-A116-16DC77AD9A1E}" type="datetime1">
               <a:rPr lang="ko-KR" altLang="en-US" smtClean="0"/>
-              <a:t>2024-06-05</a:t>
+              <a:t>2024-06-10</a:t>
             </a:fld>
             <a:endParaRPr lang="ko-KR" altLang="en-US"/>
           </a:p>
@@ -32013,7 +32019,7 @@
           <a:p>
             <a:fld id="{0F78D9C4-20C1-4B15-A116-16DC77AD9A1E}" type="datetime1">
               <a:rPr lang="ko-KR" altLang="en-US" smtClean="0"/>
-              <a:t>2024-06-05</a:t>
+              <a:t>2024-06-10</a:t>
             </a:fld>
             <a:endParaRPr lang="ko-KR" altLang="en-US"/>
           </a:p>
@@ -32642,7 +32648,7 @@
           <a:p>
             <a:fld id="{0F78D9C4-20C1-4B15-A116-16DC77AD9A1E}" type="datetime1">
               <a:rPr lang="ko-KR" altLang="en-US" smtClean="0"/>
-              <a:t>2024-06-05</a:t>
+              <a:t>2024-06-10</a:t>
             </a:fld>
             <a:endParaRPr lang="ko-KR" altLang="en-US"/>
           </a:p>
@@ -33267,7 +33273,7 @@
           <a:p>
             <a:fld id="{0F78D9C4-20C1-4B15-A116-16DC77AD9A1E}" type="datetime1">
               <a:rPr lang="ko-KR" altLang="en-US" smtClean="0"/>
-              <a:t>2024-06-05</a:t>
+              <a:t>2024-06-10</a:t>
             </a:fld>
             <a:endParaRPr lang="ko-KR" altLang="en-US"/>
           </a:p>
@@ -33892,7 +33898,7 @@
           <a:p>
             <a:fld id="{0F78D9C4-20C1-4B15-A116-16DC77AD9A1E}" type="datetime1">
               <a:rPr lang="ko-KR" altLang="en-US" smtClean="0"/>
-              <a:t>2024-06-05</a:t>
+              <a:t>2024-06-10</a:t>
             </a:fld>
             <a:endParaRPr lang="ko-KR" altLang="en-US"/>
           </a:p>

--- a/material/[SeSAC_YDP_6] 04_5_Javascript_표준객체,DOM.pptx
+++ b/material/[SeSAC_YDP_6] 04_5_Javascript_표준객체,DOM.pptx
@@ -255,7 +255,7 @@
           <a:p>
             <a:fld id="{2EF3F159-7250-4DD4-91C2-13B35D56E1AF}" type="datetimeFigureOut">
               <a:rPr lang="ko-KR" altLang="en-US" smtClean="0"/>
-              <a:t>2024-06-10</a:t>
+              <a:t>2024-06-05</a:t>
             </a:fld>
             <a:endParaRPr lang="ko-KR" altLang="en-US"/>
           </a:p>
@@ -13086,158 +13086,9 @@
           <a:chExt cx="0" cy="0"/>
         </a:xfrm>
       </p:grpSpPr>
-      <p:sp>
-        <p:nvSpPr>
-          <p:cNvPr id="8" name="내용 개체 틀 2">
-            <a:extLst>
-              <a:ext uri="{FF2B5EF4-FFF2-40B4-BE49-F238E27FC236}">
-                <a16:creationId xmlns:a16="http://schemas.microsoft.com/office/drawing/2014/main" id="{1D6B0722-9480-BB35-73CF-93B49F6C5FF8}"/>
-              </a:ext>
-            </a:extLst>
-          </p:cNvPr>
-          <p:cNvSpPr>
-            <a:spLocks noGrp="1"/>
-          </p:cNvSpPr>
-          <p:nvPr>
-            <p:ph idx="1"/>
-          </p:nvPr>
-        </p:nvSpPr>
-        <p:spPr>
-          <a:xfrm>
-            <a:off x="5921829" y="2411698"/>
-            <a:ext cx="4203700" cy="721058"/>
-          </a:xfrm>
-        </p:spPr>
-        <p:txBody>
-          <a:bodyPr/>
-          <a:lstStyle/>
-          <a:p>
-            <a:pPr marL="0" indent="0">
-              <a:buNone/>
-            </a:pPr>
-            <a:r>
-              <a:rPr lang="ko-KR" altLang="en-US" dirty="0"/>
-              <a:t>키</a:t>
-            </a:r>
-            <a:r>
-              <a:rPr lang="en-US" altLang="ko-KR" dirty="0"/>
-              <a:t>-</a:t>
-            </a:r>
-            <a:r>
-              <a:rPr lang="ko-KR" altLang="en-US" dirty="0"/>
-              <a:t>값 형태로 저장</a:t>
-            </a:r>
-          </a:p>
-        </p:txBody>
-      </p:sp>
-      <p:sp>
-        <p:nvSpPr>
-          <p:cNvPr id="4" name="날짜 개체 틀 3">
-            <a:extLst>
-              <a:ext uri="{FF2B5EF4-FFF2-40B4-BE49-F238E27FC236}">
-                <a16:creationId xmlns:a16="http://schemas.microsoft.com/office/drawing/2014/main" id="{B2744276-5C6F-AD8B-9F61-9B2A520D86A2}"/>
-              </a:ext>
-            </a:extLst>
-          </p:cNvPr>
-          <p:cNvSpPr>
-            <a:spLocks noGrp="1"/>
-          </p:cNvSpPr>
-          <p:nvPr>
-            <p:ph type="dt" sz="half" idx="10"/>
-          </p:nvPr>
-        </p:nvSpPr>
-        <p:spPr/>
-        <p:txBody>
-          <a:bodyPr/>
-          <a:lstStyle/>
-          <a:p>
-            <a:fld id="{9D0404D9-6A52-4A99-9101-80BD6AA53C94}" type="datetime6">
-              <a:rPr lang="ko-KR" altLang="en-US" smtClean="0"/>
-              <a:t>2024년 6월</a:t>
-            </a:fld>
-            <a:endParaRPr lang="ko-KR" altLang="en-US"/>
-          </a:p>
-        </p:txBody>
-      </p:sp>
-      <p:sp>
-        <p:nvSpPr>
-          <p:cNvPr id="5" name="슬라이드 번호 개체 틀 4">
-            <a:extLst>
-              <a:ext uri="{FF2B5EF4-FFF2-40B4-BE49-F238E27FC236}">
-                <a16:creationId xmlns:a16="http://schemas.microsoft.com/office/drawing/2014/main" id="{E12E7352-FB36-4681-B691-48A912BACDBE}"/>
-              </a:ext>
-            </a:extLst>
-          </p:cNvPr>
-          <p:cNvSpPr>
-            <a:spLocks noGrp="1"/>
-          </p:cNvSpPr>
-          <p:nvPr>
-            <p:ph type="sldNum" sz="quarter" idx="12"/>
-          </p:nvPr>
-        </p:nvSpPr>
-        <p:spPr/>
-        <p:txBody>
-          <a:bodyPr/>
-          <a:lstStyle/>
-          <a:p>
-            <a:fld id="{083A2CE0-18CD-4102-B738-4ACFF9E68BA4}" type="slidenum">
-              <a:rPr lang="ko-KR" altLang="en-US" smtClean="0"/>
-              <a:t>12</a:t>
-            </a:fld>
-            <a:endParaRPr lang="ko-KR" altLang="en-US"/>
-          </a:p>
-        </p:txBody>
-      </p:sp>
-      <p:sp>
-        <p:nvSpPr>
-          <p:cNvPr id="2" name="제목 1">
-            <a:extLst>
-              <a:ext uri="{FF2B5EF4-FFF2-40B4-BE49-F238E27FC236}">
-                <a16:creationId xmlns:a16="http://schemas.microsoft.com/office/drawing/2014/main" id="{4AB12D32-4144-5D6A-1E9C-7EB121AB397A}"/>
-              </a:ext>
-            </a:extLst>
-          </p:cNvPr>
-          <p:cNvSpPr>
-            <a:spLocks noGrp="1"/>
-          </p:cNvSpPr>
-          <p:nvPr>
-            <p:ph type="title"/>
-          </p:nvPr>
-        </p:nvSpPr>
-        <p:spPr/>
-        <p:txBody>
-          <a:bodyPr/>
-          <a:lstStyle/>
-          <a:p>
-            <a:r>
-              <a:rPr lang="en-US" altLang="ko-KR" dirty="0"/>
-              <a:t>Object</a:t>
-            </a:r>
-            <a:r>
-              <a:rPr lang="ko-KR" altLang="en-US" dirty="0"/>
-              <a:t> 자료형 </a:t>
-            </a:r>
-            <a:r>
-              <a:rPr lang="en-US" altLang="ko-KR" dirty="0"/>
-              <a:t>- </a:t>
-            </a:r>
-            <a:r>
-              <a:rPr lang="ko-KR" altLang="en-US" dirty="0" err="1"/>
-              <a:t>딕셔너리</a:t>
-            </a:r>
-            <a:endParaRPr lang="ko-KR" altLang="en-US" dirty="0"/>
-          </a:p>
-        </p:txBody>
-      </p:sp>
       <p:pic>
         <p:nvPicPr>
-          <p:cNvPr id="7" name="그림 6">
-            <a:extLst>
-              <a:ext uri="{FF2B5EF4-FFF2-40B4-BE49-F238E27FC236}">
-                <a16:creationId xmlns:a16="http://schemas.microsoft.com/office/drawing/2014/main" id="{F97B2092-7319-43BF-4B4D-0C4C6153717F}"/>
-              </a:ext>
-            </a:extLst>
-          </p:cNvPr>
+          <p:cNvPr id="3" name="그림 2"/>
           <p:cNvPicPr>
             <a:picLocks noChangeAspect="1"/>
           </p:cNvPicPr>
@@ -13251,14 +13102,157 @@
         </p:blipFill>
         <p:spPr>
           <a:xfrm>
-            <a:off x="1158648" y="1758043"/>
-            <a:ext cx="4853140" cy="3549311"/>
+            <a:off x="1684412" y="1790700"/>
+            <a:ext cx="8340576" cy="3416300"/>
           </a:xfrm>
           <a:prstGeom prst="rect">
             <a:avLst/>
           </a:prstGeom>
         </p:spPr>
       </p:pic>
+      <p:sp>
+        <p:nvSpPr>
+          <p:cNvPr id="8" name="내용 개체 틀 2">
+            <a:extLst>
+              <a:ext uri="{FF2B5EF4-FFF2-40B4-BE49-F238E27FC236}">
+                <a16:creationId xmlns:a16="http://schemas.microsoft.com/office/drawing/2014/main" id="{1D6B0722-9480-BB35-73CF-93B49F6C5FF8}"/>
+              </a:ext>
+            </a:extLst>
+          </p:cNvPr>
+          <p:cNvSpPr>
+            <a:spLocks noGrp="1"/>
+          </p:cNvSpPr>
+          <p:nvPr>
+            <p:ph idx="1"/>
+          </p:nvPr>
+        </p:nvSpPr>
+        <p:spPr>
+          <a:xfrm>
+            <a:off x="5562600" y="2477398"/>
+            <a:ext cx="4203700" cy="721058"/>
+          </a:xfrm>
+        </p:spPr>
+        <p:txBody>
+          <a:bodyPr/>
+          <a:lstStyle/>
+          <a:p>
+            <a:pPr marL="0" indent="0">
+              <a:buNone/>
+            </a:pPr>
+            <a:r>
+              <a:rPr lang="ko-KR" altLang="en-US" dirty="0"/>
+              <a:t>키</a:t>
+            </a:r>
+            <a:r>
+              <a:rPr lang="en-US" altLang="ko-KR" dirty="0"/>
+              <a:t>-</a:t>
+            </a:r>
+            <a:r>
+              <a:rPr lang="ko-KR" altLang="en-US" dirty="0"/>
+              <a:t>값 형태로 저장</a:t>
+            </a:r>
+          </a:p>
+        </p:txBody>
+      </p:sp>
+      <p:sp>
+        <p:nvSpPr>
+          <p:cNvPr id="4" name="날짜 개체 틀 3">
+            <a:extLst>
+              <a:ext uri="{FF2B5EF4-FFF2-40B4-BE49-F238E27FC236}">
+                <a16:creationId xmlns:a16="http://schemas.microsoft.com/office/drawing/2014/main" id="{B2744276-5C6F-AD8B-9F61-9B2A520D86A2}"/>
+              </a:ext>
+            </a:extLst>
+          </p:cNvPr>
+          <p:cNvSpPr>
+            <a:spLocks noGrp="1"/>
+          </p:cNvSpPr>
+          <p:nvPr>
+            <p:ph type="dt" sz="half" idx="10"/>
+          </p:nvPr>
+        </p:nvSpPr>
+        <p:spPr/>
+        <p:txBody>
+          <a:bodyPr/>
+          <a:lstStyle/>
+          <a:p>
+            <a:fld id="{9D0404D9-6A52-4A99-9101-80BD6AA53C94}" type="datetime6">
+              <a:rPr lang="ko-KR" altLang="en-US" smtClean="0"/>
+              <a:t>2024년 6월</a:t>
+            </a:fld>
+            <a:endParaRPr lang="ko-KR" altLang="en-US"/>
+          </a:p>
+        </p:txBody>
+      </p:sp>
+      <p:sp>
+        <p:nvSpPr>
+          <p:cNvPr id="5" name="슬라이드 번호 개체 틀 4">
+            <a:extLst>
+              <a:ext uri="{FF2B5EF4-FFF2-40B4-BE49-F238E27FC236}">
+                <a16:creationId xmlns:a16="http://schemas.microsoft.com/office/drawing/2014/main" id="{E12E7352-FB36-4681-B691-48A912BACDBE}"/>
+              </a:ext>
+            </a:extLst>
+          </p:cNvPr>
+          <p:cNvSpPr>
+            <a:spLocks noGrp="1"/>
+          </p:cNvSpPr>
+          <p:nvPr>
+            <p:ph type="sldNum" sz="quarter" idx="12"/>
+          </p:nvPr>
+        </p:nvSpPr>
+        <p:spPr/>
+        <p:txBody>
+          <a:bodyPr/>
+          <a:lstStyle/>
+          <a:p>
+            <a:fld id="{083A2CE0-18CD-4102-B738-4ACFF9E68BA4}" type="slidenum">
+              <a:rPr lang="ko-KR" altLang="en-US" smtClean="0"/>
+              <a:t>12</a:t>
+            </a:fld>
+            <a:endParaRPr lang="ko-KR" altLang="en-US"/>
+          </a:p>
+        </p:txBody>
+      </p:sp>
+      <p:sp>
+        <p:nvSpPr>
+          <p:cNvPr id="2" name="제목 1">
+            <a:extLst>
+              <a:ext uri="{FF2B5EF4-FFF2-40B4-BE49-F238E27FC236}">
+                <a16:creationId xmlns:a16="http://schemas.microsoft.com/office/drawing/2014/main" id="{4AB12D32-4144-5D6A-1E9C-7EB121AB397A}"/>
+              </a:ext>
+            </a:extLst>
+          </p:cNvPr>
+          <p:cNvSpPr>
+            <a:spLocks noGrp="1"/>
+          </p:cNvSpPr>
+          <p:nvPr>
+            <p:ph type="title"/>
+          </p:nvPr>
+        </p:nvSpPr>
+        <p:spPr/>
+        <p:txBody>
+          <a:bodyPr/>
+          <a:lstStyle/>
+          <a:p>
+            <a:r>
+              <a:rPr lang="en-US" altLang="ko-KR" dirty="0"/>
+              <a:t>Object</a:t>
+            </a:r>
+            <a:r>
+              <a:rPr lang="ko-KR" altLang="en-US" dirty="0"/>
+              <a:t> 자료형 </a:t>
+            </a:r>
+            <a:r>
+              <a:rPr lang="en-US" altLang="ko-KR" dirty="0"/>
+              <a:t>- </a:t>
+            </a:r>
+            <a:r>
+              <a:rPr lang="ko-KR" altLang="en-US" dirty="0" err="1"/>
+              <a:t>딕셔너리</a:t>
+            </a:r>
+            <a:endParaRPr lang="ko-KR" altLang="en-US" dirty="0"/>
+          </a:p>
+        </p:txBody>
+      </p:sp>
     </p:spTree>
     <p:extLst>
       <p:ext uri="{BB962C8B-B14F-4D97-AF65-F5344CB8AC3E}">
@@ -15194,7 +15188,7 @@
           <a:p>
             <a:fld id="{0F78D9C4-20C1-4B15-A116-16DC77AD9A1E}" type="datetime1">
               <a:rPr lang="ko-KR" altLang="en-US" smtClean="0"/>
-              <a:t>2024-06-10</a:t>
+              <a:t>2024-06-05</a:t>
             </a:fld>
             <a:endParaRPr lang="ko-KR" altLang="en-US"/>
           </a:p>
@@ -15954,7 +15948,7 @@
           <a:p>
             <a:fld id="{0F78D9C4-20C1-4B15-A116-16DC77AD9A1E}" type="datetime1">
               <a:rPr lang="ko-KR" altLang="en-US" smtClean="0"/>
-              <a:t>2024-06-10</a:t>
+              <a:t>2024-06-05</a:t>
             </a:fld>
             <a:endParaRPr lang="ko-KR" altLang="en-US"/>
           </a:p>
@@ -25264,7 +25258,7 @@
           <a:p>
             <a:fld id="{0F78D9C4-20C1-4B15-A116-16DC77AD9A1E}" type="datetime1">
               <a:rPr lang="ko-KR" altLang="en-US" smtClean="0"/>
-              <a:t>2024-06-10</a:t>
+              <a:t>2024-06-05</a:t>
             </a:fld>
             <a:endParaRPr lang="ko-KR" altLang="en-US"/>
           </a:p>
@@ -25884,7 +25878,7 @@
           <a:p>
             <a:fld id="{0F78D9C4-20C1-4B15-A116-16DC77AD9A1E}" type="datetime1">
               <a:rPr lang="ko-KR" altLang="en-US" smtClean="0"/>
-              <a:t>2024-06-10</a:t>
+              <a:t>2024-06-05</a:t>
             </a:fld>
             <a:endParaRPr lang="ko-KR" altLang="en-US"/>
           </a:p>
@@ -29035,7 +29029,7 @@
           <a:p>
             <a:fld id="{0F78D9C4-20C1-4B15-A116-16DC77AD9A1E}" type="datetime1">
               <a:rPr lang="ko-KR" altLang="en-US" smtClean="0"/>
-              <a:t>2024-06-10</a:t>
+              <a:t>2024-06-05</a:t>
             </a:fld>
             <a:endParaRPr lang="ko-KR" altLang="en-US"/>
           </a:p>
@@ -32019,7 +32013,7 @@
           <a:p>
             <a:fld id="{0F78D9C4-20C1-4B15-A116-16DC77AD9A1E}" type="datetime1">
               <a:rPr lang="ko-KR" altLang="en-US" smtClean="0"/>
-              <a:t>2024-06-10</a:t>
+              <a:t>2024-06-05</a:t>
             </a:fld>
             <a:endParaRPr lang="ko-KR" altLang="en-US"/>
           </a:p>
@@ -32648,7 +32642,7 @@
           <a:p>
             <a:fld id="{0F78D9C4-20C1-4B15-A116-16DC77AD9A1E}" type="datetime1">
               <a:rPr lang="ko-KR" altLang="en-US" smtClean="0"/>
-              <a:t>2024-06-10</a:t>
+              <a:t>2024-06-05</a:t>
             </a:fld>
             <a:endParaRPr lang="ko-KR" altLang="en-US"/>
           </a:p>
@@ -33273,7 +33267,7 @@
           <a:p>
             <a:fld id="{0F78D9C4-20C1-4B15-A116-16DC77AD9A1E}" type="datetime1">
               <a:rPr lang="ko-KR" altLang="en-US" smtClean="0"/>
-              <a:t>2024-06-10</a:t>
+              <a:t>2024-06-05</a:t>
             </a:fld>
             <a:endParaRPr lang="ko-KR" altLang="en-US"/>
           </a:p>
@@ -33898,7 +33892,7 @@
           <a:p>
             <a:fld id="{0F78D9C4-20C1-4B15-A116-16DC77AD9A1E}" type="datetime1">
               <a:rPr lang="ko-KR" altLang="en-US" smtClean="0"/>
-              <a:t>2024-06-10</a:t>
+              <a:t>2024-06-05</a:t>
             </a:fld>
             <a:endParaRPr lang="ko-KR" altLang="en-US"/>
           </a:p>

--- a/material/[SeSAC_YDP_6] 04_5_Javascript_표준객체,DOM.pptx
+++ b/material/[SeSAC_YDP_6] 04_5_Javascript_표준객체,DOM.pptx
@@ -255,7 +255,7 @@
           <a:p>
             <a:fld id="{2EF3F159-7250-4DD4-91C2-13B35D56E1AF}" type="datetimeFigureOut">
               <a:rPr lang="ko-KR" altLang="en-US" smtClean="0"/>
-              <a:t>2024-06-05</a:t>
+              <a:t>2024-06-18</a:t>
             </a:fld>
             <a:endParaRPr lang="ko-KR" altLang="en-US"/>
           </a:p>
@@ -12426,16 +12426,14 @@
           <a:p>
             <a:r>
               <a:rPr lang="en-US" altLang="ko-KR" dirty="0" err="1"/>
-              <a:t>SeSAC</a:t>
-            </a:r>
-            <a:r>
-              <a:rPr lang="en-US" altLang="ko-KR" dirty="0"/>
-              <a:t> x </a:t>
-            </a:r>
-            <a:r>
-              <a:rPr lang="en-US" altLang="ko-KR" dirty="0" err="1"/>
-              <a:t>CODINGOn</a:t>
-            </a:r>
+              <a:t>CodingOn</a:t>
+            </a:r>
+            <a:endParaRPr lang="ko-KR" altLang="en-US"/>
+          </a:p>
+          <a:p>
+            <a:endParaRPr lang="ko-KR" altLang="en-US" dirty="0"/>
+          </a:p>
+          <a:p>
             <a:endParaRPr lang="ko-KR" altLang="en-US" dirty="0"/>
           </a:p>
         </p:txBody>
@@ -15188,7 +15186,7 @@
           <a:p>
             <a:fld id="{0F78D9C4-20C1-4B15-A116-16DC77AD9A1E}" type="datetime1">
               <a:rPr lang="ko-KR" altLang="en-US" smtClean="0"/>
-              <a:t>2024-06-05</a:t>
+              <a:t>2024-06-18</a:t>
             </a:fld>
             <a:endParaRPr lang="ko-KR" altLang="en-US"/>
           </a:p>
@@ -15948,7 +15946,7 @@
           <a:p>
             <a:fld id="{0F78D9C4-20C1-4B15-A116-16DC77AD9A1E}" type="datetime1">
               <a:rPr lang="ko-KR" altLang="en-US" smtClean="0"/>
-              <a:t>2024-06-05</a:t>
+              <a:t>2024-06-18</a:t>
             </a:fld>
             <a:endParaRPr lang="ko-KR" altLang="en-US"/>
           </a:p>
@@ -25258,7 +25256,7 @@
           <a:p>
             <a:fld id="{0F78D9C4-20C1-4B15-A116-16DC77AD9A1E}" type="datetime1">
               <a:rPr lang="ko-KR" altLang="en-US" smtClean="0"/>
-              <a:t>2024-06-05</a:t>
+              <a:t>2024-06-18</a:t>
             </a:fld>
             <a:endParaRPr lang="ko-KR" altLang="en-US"/>
           </a:p>
@@ -25878,7 +25876,7 @@
           <a:p>
             <a:fld id="{0F78D9C4-20C1-4B15-A116-16DC77AD9A1E}" type="datetime1">
               <a:rPr lang="ko-KR" altLang="en-US" smtClean="0"/>
-              <a:t>2024-06-05</a:t>
+              <a:t>2024-06-18</a:t>
             </a:fld>
             <a:endParaRPr lang="ko-KR" altLang="en-US"/>
           </a:p>
@@ -29029,7 +29027,7 @@
           <a:p>
             <a:fld id="{0F78D9C4-20C1-4B15-A116-16DC77AD9A1E}" type="datetime1">
               <a:rPr lang="ko-KR" altLang="en-US" smtClean="0"/>
-              <a:t>2024-06-05</a:t>
+              <a:t>2024-06-18</a:t>
             </a:fld>
             <a:endParaRPr lang="ko-KR" altLang="en-US"/>
           </a:p>
@@ -32013,7 +32011,7 @@
           <a:p>
             <a:fld id="{0F78D9C4-20C1-4B15-A116-16DC77AD9A1E}" type="datetime1">
               <a:rPr lang="ko-KR" altLang="en-US" smtClean="0"/>
-              <a:t>2024-06-05</a:t>
+              <a:t>2024-06-18</a:t>
             </a:fld>
             <a:endParaRPr lang="ko-KR" altLang="en-US"/>
           </a:p>
@@ -32642,7 +32640,7 @@
           <a:p>
             <a:fld id="{0F78D9C4-20C1-4B15-A116-16DC77AD9A1E}" type="datetime1">
               <a:rPr lang="ko-KR" altLang="en-US" smtClean="0"/>
-              <a:t>2024-06-05</a:t>
+              <a:t>2024-06-18</a:t>
             </a:fld>
             <a:endParaRPr lang="ko-KR" altLang="en-US"/>
           </a:p>
@@ -33267,7 +33265,7 @@
           <a:p>
             <a:fld id="{0F78D9C4-20C1-4B15-A116-16DC77AD9A1E}" type="datetime1">
               <a:rPr lang="ko-KR" altLang="en-US" smtClean="0"/>
-              <a:t>2024-06-05</a:t>
+              <a:t>2024-06-18</a:t>
             </a:fld>
             <a:endParaRPr lang="ko-KR" altLang="en-US"/>
           </a:p>
@@ -33892,7 +33890,7 @@
           <a:p>
             <a:fld id="{0F78D9C4-20C1-4B15-A116-16DC77AD9A1E}" type="datetime1">
               <a:rPr lang="ko-KR" altLang="en-US" smtClean="0"/>
-              <a:t>2024-06-05</a:t>
+              <a:t>2024-06-18</a:t>
             </a:fld>
             <a:endParaRPr lang="ko-KR" altLang="en-US"/>
           </a:p>
